--- a/output/Module02_V12_Updated.pptx
+++ b/output/Module02_V12_Updated.pptx
@@ -8,15 +8,15 @@
     <p:sldId id="256" r:id="rId7"/>
     <p:sldId id="257" r:id="rId8"/>
     <p:sldId id="258" r:id="rId9"/>
-    <p:sldId id="267" r:id="rId18"/>
-    <p:sldId id="265" r:id="rId16"/>
     <p:sldId id="259" r:id="rId10"/>
     <p:sldId id="266" r:id="rId17"/>
     <p:sldId id="260" r:id="rId11"/>
-    <p:sldId id="264" r:id="rId15"/>
     <p:sldId id="261" r:id="rId12"/>
+    <p:sldId id="267" r:id="rId18"/>
     <p:sldId id="262" r:id="rId13"/>
     <p:sldId id="263" r:id="rId14"/>
+    <p:sldId id="264" r:id="rId15"/>
+    <p:sldId id="265" r:id="rId16"/>
   </p:sldIdLst>
   <p:sldSz cx="12191695" cy="6858000" type="screen4x3"/>
   <p:notesSz cx="6858000" cy="9144000"/>
@@ -3115,8 +3115,43 @@
         </p:nvSpPr>
         <p:spPr>
           <a:xfrm>
-            <a:off x="822960" y="1280160"/>
-            <a:ext cx="10515600" cy="731520"/>
+            <a:off x="822960" y="1097280"/>
+            <a:ext cx="10515600" cy="640080"/>
+          </a:xfrm>
+          <a:prstGeom prst="rect">
+            <a:avLst/>
+          </a:prstGeom>
+          <a:noFill/>
+        </p:spPr>
+        <p:txBody>
+          <a:bodyPr wrap="square">
+            <a:spAutoFit/>
+          </a:bodyPr>
+          <a:lstStyle/>
+          <a:p>
+            <a:pPr algn="l" rtl="0"/>
+            <a:r>
+              <a:rPr sz="2800" b="1">
+                <a:solidFill>
+                  <a:srgbClr val="1F4E79"/>
+                </a:solidFill>
+                <a:latin typeface="Calibri"/>
+              </a:rPr>
+              <a:t>Module 02  |  V12</a:t>
+            </a:r>
+          </a:p>
+        </p:txBody>
+      </p:sp>
+      <p:sp>
+        <p:nvSpPr>
+          <p:cNvPr id="3" name="TextBox 2"/>
+          <p:cNvSpPr txBox="1"/>
+          <p:nvPr/>
+        </p:nvSpPr>
+        <p:spPr>
+          <a:xfrm>
+            <a:off x="822960" y="1920240"/>
+            <a:ext cx="10515600" cy="1097280"/>
           </a:xfrm>
           <a:prstGeom prst="rect">
             <a:avLst/>
@@ -3131,27 +3166,62 @@
           <a:p>
             <a:pPr algn="r" rtl="1"/>
             <a:r>
-              <a:rPr sz="3400" b="1">
-                <a:solidFill>
-                  <a:srgbClr val="1F4E79"/>
+              <a:rPr sz="4400" b="1">
+                <a:solidFill>
+                  <a:srgbClr val="1F3B5C"/>
+                </a:solidFill>
+                <a:latin typeface="Arial"/>
+              </a:rPr>
+              <a:t>أساسيات MLOps + تمهيد للمختبر</a:t>
+            </a:r>
+          </a:p>
+        </p:txBody>
+      </p:sp>
+      <p:sp>
+        <p:nvSpPr>
+          <p:cNvPr id="4" name="TextBox 3"/>
+          <p:cNvSpPr txBox="1"/>
+          <p:nvPr/>
+        </p:nvSpPr>
+        <p:spPr>
+          <a:xfrm>
+            <a:off x="822960" y="3200400"/>
+            <a:ext cx="10515600" cy="914400"/>
+          </a:xfrm>
+          <a:prstGeom prst="rect">
+            <a:avLst/>
+          </a:prstGeom>
+          <a:noFill/>
+        </p:spPr>
+        <p:txBody>
+          <a:bodyPr wrap="square">
+            <a:spAutoFit/>
+          </a:bodyPr>
+          <a:lstStyle/>
+          <a:p>
+            <a:pPr algn="l" rtl="0"/>
+            <a:r>
+              <a:rPr sz="3000" b="0">
+                <a:solidFill>
+                  <a:srgbClr val="333333"/>
                 </a:solidFill>
                 <a:latin typeface="Calibri"/>
               </a:rPr>
-              <a:t>V12</a:t>
-            </a:r>
-          </a:p>
-        </p:txBody>
-      </p:sp>
-      <p:sp>
-        <p:nvSpPr>
-          <p:cNvPr id="3" name="TextBox 2"/>
-          <p:cNvSpPr txBox="1"/>
-          <p:nvPr/>
-        </p:nvSpPr>
-        <p:spPr>
-          <a:xfrm>
-            <a:off x="822960" y="2194560"/>
-            <a:ext cx="10515600" cy="1097280"/>
+              <a:t>MLOps Fundamentals + Lab Prelude</a:t>
+            </a:r>
+          </a:p>
+        </p:txBody>
+      </p:sp>
+      <p:sp>
+        <p:nvSpPr>
+          <p:cNvPr id="5" name="TextBox 4"/>
+          <p:cNvSpPr txBox="1"/>
+          <p:nvPr/>
+        </p:nvSpPr>
+        <p:spPr>
+          <a:xfrm>
+            <a:off x="822960" y="4937760"/>
+            <a:ext cx="10515600" cy="548640"/>
           </a:xfrm>
           <a:prstGeom prst="rect">
             <a:avLst/>
@@ -3166,62 +3236,132 @@
           <a:p>
             <a:pPr algn="r" rtl="1"/>
             <a:r>
-              <a:rPr sz="4800" b="1">
-                <a:solidFill>
-                  <a:srgbClr val="1F3B5C"/>
+              <a:rPr sz="1800" b="0">
+                <a:solidFill>
+                  <a:srgbClr val="666666"/>
+                </a:solidFill>
+                <a:latin typeface="Arial"/>
+              </a:rPr>
+              <a:t>Module 02 — Data &amp; AI Engineering Track  |  الوحدة الثانية</a:t>
+            </a:r>
+          </a:p>
+        </p:txBody>
+      </p:sp>
+      <p:sp>
+        <p:nvSpPr>
+          <p:cNvPr id="6" name="TextBox 5"/>
+          <p:cNvSpPr txBox="1"/>
+          <p:nvPr/>
+        </p:nvSpPr>
+        <p:spPr>
+          <a:xfrm>
+            <a:off x="822960" y="5486400"/>
+            <a:ext cx="10515600" cy="457200"/>
+          </a:xfrm>
+          <a:prstGeom prst="rect">
+            <a:avLst/>
+          </a:prstGeom>
+          <a:noFill/>
+        </p:spPr>
+        <p:txBody>
+          <a:bodyPr wrap="square">
+            <a:spAutoFit/>
+          </a:bodyPr>
+          <a:lstStyle/>
+          <a:p>
+            <a:pPr algn="l" rtl="0"/>
+            <a:r>
+              <a:rPr sz="1400" b="0">
+                <a:solidFill>
+                  <a:srgbClr val="666666"/>
                 </a:solidFill>
                 <a:latin typeface="Calibri"/>
               </a:rPr>
-              <a:t>أساسيات MLOps + تمهيد للمختبر</a:t>
-            </a:r>
-          </a:p>
-        </p:txBody>
-      </p:sp>
-      <p:sp>
-        <p:nvSpPr>
-          <p:cNvPr id="4" name="TextBox 3"/>
-          <p:cNvSpPr txBox="1"/>
-          <p:nvPr/>
-        </p:nvSpPr>
-        <p:spPr>
-          <a:xfrm>
-            <a:off x="822960" y="3566160"/>
-            <a:ext cx="10515600" cy="914400"/>
-          </a:xfrm>
-          <a:prstGeom prst="rect">
-            <a:avLst/>
-          </a:prstGeom>
-          <a:noFill/>
-        </p:spPr>
-        <p:txBody>
-          <a:bodyPr wrap="square">
-            <a:spAutoFit/>
-          </a:bodyPr>
-          <a:lstStyle/>
-          <a:p>
-            <a:pPr algn="r" rtl="0"/>
-            <a:r>
-              <a:rPr sz="3400" b="0">
-                <a:solidFill>
-                  <a:srgbClr val="333333"/>
+              <a:t>Light theme  |  Bilingual AR/EN  |  Ready to present</a:t>
+            </a:r>
+          </a:p>
+        </p:txBody>
+      </p:sp>
+      <p:sp>
+        <p:nvSpPr>
+          <p:cNvPr id="7" name="TextBox 6"/>
+          <p:cNvSpPr txBox="1"/>
+          <p:nvPr/>
+        </p:nvSpPr>
+        <p:spPr>
+          <a:xfrm>
+            <a:off x="640080" y="6400800"/>
+            <a:ext cx="8686800" cy="320040"/>
+          </a:xfrm>
+          <a:prstGeom prst="rect">
+            <a:avLst/>
+          </a:prstGeom>
+          <a:noFill/>
+        </p:spPr>
+        <p:txBody>
+          <a:bodyPr wrap="square">
+            <a:spAutoFit/>
+          </a:bodyPr>
+          <a:lstStyle/>
+          <a:p>
+            <a:pPr algn="r" rtl="1"/>
+            <a:r>
+              <a:rPr sz="1000" b="0">
+                <a:solidFill>
+                  <a:srgbClr val="666666"/>
+                </a:solidFill>
+                <a:latin typeface="Arial"/>
+              </a:rPr>
+              <a:t>Module 02 — Data &amp; AI Engineering Track  |  الوحدة الثانية</a:t>
+            </a:r>
+          </a:p>
+        </p:txBody>
+      </p:sp>
+      <p:sp>
+        <p:nvSpPr>
+          <p:cNvPr id="8" name="TextBox 7"/>
+          <p:cNvSpPr txBox="1"/>
+          <p:nvPr/>
+        </p:nvSpPr>
+        <p:spPr>
+          <a:xfrm>
+            <a:off x="9601200" y="6400800"/>
+            <a:ext cx="1920240" cy="320040"/>
+          </a:xfrm>
+          <a:prstGeom prst="rect">
+            <a:avLst/>
+          </a:prstGeom>
+          <a:noFill/>
+        </p:spPr>
+        <p:txBody>
+          <a:bodyPr wrap="square">
+            <a:spAutoFit/>
+          </a:bodyPr>
+          <a:lstStyle/>
+          <a:p>
+            <a:pPr algn="l" rtl="0"/>
+            <a:r>
+              <a:rPr sz="1000" b="0">
+                <a:solidFill>
+                  <a:srgbClr val="666666"/>
                 </a:solidFill>
                 <a:latin typeface="Calibri"/>
               </a:rPr>
-              <a:t>MLOps Fundamentals + Lab Prelude</a:t>
-            </a:r>
-          </a:p>
-        </p:txBody>
-      </p:sp>
-      <p:sp>
-        <p:nvSpPr>
-          <p:cNvPr id="5" name="TextBox 4"/>
-          <p:cNvSpPr txBox="1"/>
-          <p:nvPr/>
-        </p:nvSpPr>
-        <p:spPr>
-          <a:xfrm>
-            <a:off x="822960" y="5120640"/>
-            <a:ext cx="10515600" cy="548640"/>
+              <a:t>V12  •  1/13</a:t>
+            </a:r>
+          </a:p>
+        </p:txBody>
+      </p:sp>
+      <p:sp>
+        <p:nvSpPr>
+          <p:cNvPr id="9" name="TextBox 8"/>
+          <p:cNvSpPr txBox="1"/>
+          <p:nvPr/>
+        </p:nvSpPr>
+        <p:spPr>
+          <a:xfrm>
+            <a:off x="640080" y="6400800"/>
+            <a:ext cx="8686800" cy="320040"/>
           </a:xfrm>
           <a:prstGeom prst="rect">
             <a:avLst/>
@@ -3236,13 +3376,118 @@
           <a:p>
             <a:pPr algn="r" rtl="1"/>
             <a:r>
-              <a:rPr sz="1800" b="0">
+              <a:rPr sz="1000" b="0">
+                <a:solidFill>
+                  <a:srgbClr val="666666"/>
+                </a:solidFill>
+                <a:latin typeface="Arial"/>
+              </a:rPr>
+              <a:t>Module 02 — Data &amp; AI Engineering Track  |  الوحدة الثانية</a:t>
+            </a:r>
+          </a:p>
+        </p:txBody>
+      </p:sp>
+      <p:sp>
+        <p:nvSpPr>
+          <p:cNvPr id="10" name="TextBox 9"/>
+          <p:cNvSpPr txBox="1"/>
+          <p:nvPr/>
+        </p:nvSpPr>
+        <p:spPr>
+          <a:xfrm>
+            <a:off x="9601200" y="6400800"/>
+            <a:ext cx="1920240" cy="320040"/>
+          </a:xfrm>
+          <a:prstGeom prst="rect">
+            <a:avLst/>
+          </a:prstGeom>
+          <a:noFill/>
+        </p:spPr>
+        <p:txBody>
+          <a:bodyPr wrap="square">
+            <a:spAutoFit/>
+          </a:bodyPr>
+          <a:lstStyle/>
+          <a:p>
+            <a:pPr algn="l" rtl="0"/>
+            <a:r>
+              <a:rPr sz="1000" b="0">
                 <a:solidFill>
                   <a:srgbClr val="666666"/>
                 </a:solidFill>
                 <a:latin typeface="Calibri"/>
               </a:rPr>
+              <a:t>12_  •  1/12</a:t>
+            </a:r>
+          </a:p>
+        </p:txBody>
+      </p:sp>
+      <p:sp>
+        <p:nvSpPr>
+          <p:cNvPr id="11" name="TextBox 10"/>
+          <p:cNvSpPr txBox="1"/>
+          <p:nvPr/>
+        </p:nvSpPr>
+        <p:spPr>
+          <a:xfrm>
+            <a:off x="640080" y="6400800"/>
+            <a:ext cx="8686800" cy="320040"/>
+          </a:xfrm>
+          <a:prstGeom prst="rect">
+            <a:avLst/>
+          </a:prstGeom>
+          <a:noFill/>
+        </p:spPr>
+        <p:txBody>
+          <a:bodyPr wrap="square">
+            <a:spAutoFit/>
+          </a:bodyPr>
+          <a:lstStyle/>
+          <a:p>
+            <a:pPr algn="r" rtl="1"/>
+            <a:r>
+              <a:rPr sz="1000" b="0">
+                <a:solidFill>
+                  <a:srgbClr val="666666"/>
+                </a:solidFill>
+                <a:latin typeface="Arial"/>
+              </a:rPr>
               <a:t>Module 02 — Data &amp; AI Engineering Track  |  الوحدة الثانية</a:t>
+            </a:r>
+          </a:p>
+        </p:txBody>
+      </p:sp>
+      <p:sp>
+        <p:nvSpPr>
+          <p:cNvPr id="12" name="TextBox 11"/>
+          <p:cNvSpPr txBox="1"/>
+          <p:nvPr/>
+        </p:nvSpPr>
+        <p:spPr>
+          <a:xfrm>
+            <a:off x="9601200" y="6400800"/>
+            <a:ext cx="1920240" cy="320040"/>
+          </a:xfrm>
+          <a:prstGeom prst="rect">
+            <a:avLst/>
+          </a:prstGeom>
+          <a:noFill/>
+        </p:spPr>
+        <p:txBody>
+          <a:bodyPr wrap="square">
+            <a:spAutoFit/>
+          </a:bodyPr>
+          <a:lstStyle/>
+          <a:p>
+            <a:pPr algn="l" rtl="0"/>
+            <a:r>
+              <a:rPr sz="1000" b="0">
+                <a:solidFill>
+                  <a:srgbClr val="666666"/>
+                </a:solidFill>
+                <a:latin typeface="Calibri"/>
+              </a:rPr>
+              <a:t>12_  •  1/12</a:t>
             </a:r>
           </a:p>
         </p:txBody>
@@ -3347,9 +3592,9 @@
                 <a:solidFill>
                   <a:srgbClr val="1F3B5C"/>
                 </a:solidFill>
-                <a:latin typeface="Calibri"/>
-              </a:rPr>
-              <a:t>للاستزادة / Further Reading</a:t>
+                <a:latin typeface="Arial"/>
+              </a:rPr>
+              <a:t>اختبار قصير / Quick Quiz</a:t>
             </a:r>
           </a:p>
         </p:txBody>
@@ -3377,6 +3622,9 @@
           <a:lstStyle/>
           <a:p>
             <a:pPr algn="r" rtl="1">
+              <a:spcBef>
+                <a:spcPts val="200"/>
+              </a:spcBef>
               <a:spcAft>
                 <a:spcPts val="1000"/>
               </a:spcAft>
@@ -3386,29 +3634,35 @@
                 <a:solidFill>
                   <a:srgbClr val="333333"/>
                 </a:solidFill>
-                <a:latin typeface="Calibri"/>
-              </a:rPr>
-              <a:t>• توثيق MLflow وDVC.</a:t>
-            </a:r>
-          </a:p>
-          <a:p>
-            <a:pPr algn="r" rtl="0">
+                <a:latin typeface="Arial"/>
+              </a:rPr>
+              <a:t>• 1. فرّق بين AI Agent وAgentic AI.</a:t>
+            </a:r>
+          </a:p>
+          <a:p>
+            <a:pPr algn="l" rtl="0">
+              <a:spcBef>
+                <a:spcPts val="200"/>
+              </a:spcBef>
               <a:spcAft>
                 <a:spcPts val="1000"/>
               </a:spcAft>
             </a:pPr>
             <a:r>
-              <a:rPr sz="2000">
+              <a:rPr sz="1700">
                 <a:solidFill>
                   <a:srgbClr val="666666"/>
                 </a:solidFill>
                 <a:latin typeface="Calibri"/>
               </a:rPr>
-              <a:t>   MLflow and DVC docs.</a:t>
+              <a:t>• Differentiate an AI agent from agentic AI.</a:t>
             </a:r>
           </a:p>
           <a:p>
             <a:pPr algn="r" rtl="1">
+              <a:spcBef>
+                <a:spcPts val="200"/>
+              </a:spcBef>
               <a:spcAft>
                 <a:spcPts val="1000"/>
               </a:spcAft>
@@ -3418,25 +3672,276 @@
                 <a:solidFill>
                   <a:srgbClr val="333333"/>
                 </a:solidFill>
-                <a:latin typeface="Calibri"/>
-              </a:rPr>
-              <a:t>• دليل تجهيز البيئة للمختبر L03.</a:t>
-            </a:r>
-          </a:p>
-          <a:p>
-            <a:pPr algn="r" rtl="0">
+                <a:latin typeface="Arial"/>
+              </a:rPr>
+              <a:t>• 2. ما أرخص: تضمين أم توليد؟</a:t>
+            </a:r>
+          </a:p>
+          <a:p>
+            <a:pPr algn="l" rtl="0">
+              <a:spcBef>
+                <a:spcPts val="200"/>
+              </a:spcBef>
               <a:spcAft>
                 <a:spcPts val="1000"/>
               </a:spcAft>
             </a:pPr>
             <a:r>
+              <a:rPr sz="1700">
+                <a:solidFill>
+                  <a:srgbClr val="666666"/>
+                </a:solidFill>
+                <a:latin typeface="Calibri"/>
+              </a:rPr>
+              <a:t>• Which is cheaper: embedding or generation?</a:t>
+            </a:r>
+          </a:p>
+          <a:p>
+            <a:pPr algn="r" rtl="1">
+              <a:spcBef>
+                <a:spcPts val="200"/>
+              </a:spcBef>
+              <a:spcAft>
+                <a:spcPts val="1000"/>
+              </a:spcAft>
+            </a:pPr>
+            <a:r>
               <a:rPr sz="2000">
                 <a:solidFill>
+                  <a:srgbClr val="333333"/>
+                </a:solidFill>
+                <a:latin typeface="Arial"/>
+              </a:rPr>
+              <a:t>• 3. ما أدوات تتبع التجارب وإصدارات البيانات؟</a:t>
+            </a:r>
+          </a:p>
+          <a:p>
+            <a:pPr algn="l" rtl="0">
+              <a:spcBef>
+                <a:spcPts val="200"/>
+              </a:spcBef>
+              <a:spcAft>
+                <a:spcPts val="1000"/>
+              </a:spcAft>
+            </a:pPr>
+            <a:r>
+              <a:rPr sz="1700">
+                <a:solidFill>
                   <a:srgbClr val="666666"/>
                 </a:solidFill>
                 <a:latin typeface="Calibri"/>
               </a:rPr>
-              <a:t>   L03 Environment Setup Guide.</a:t>
+              <a:t>• Which tools track experiments and version data?</a:t>
+            </a:r>
+          </a:p>
+        </p:txBody>
+      </p:sp>
+      <p:sp>
+        <p:nvSpPr>
+          <p:cNvPr id="5" name="TextBox 4"/>
+          <p:cNvSpPr txBox="1"/>
+          <p:nvPr/>
+        </p:nvSpPr>
+        <p:spPr>
+          <a:xfrm>
+            <a:off x="640080" y="6400800"/>
+            <a:ext cx="8686800" cy="320040"/>
+          </a:xfrm>
+          <a:prstGeom prst="rect">
+            <a:avLst/>
+          </a:prstGeom>
+          <a:noFill/>
+        </p:spPr>
+        <p:txBody>
+          <a:bodyPr wrap="square">
+            <a:spAutoFit/>
+          </a:bodyPr>
+          <a:lstStyle/>
+          <a:p>
+            <a:pPr algn="r" rtl="1"/>
+            <a:r>
+              <a:rPr sz="1000" b="0">
+                <a:solidFill>
+                  <a:srgbClr val="666666"/>
+                </a:solidFill>
+                <a:latin typeface="Arial"/>
+              </a:rPr>
+              <a:t>Module 02 — Data &amp; AI Engineering Track  |  الوحدة الثانية</a:t>
+            </a:r>
+          </a:p>
+        </p:txBody>
+      </p:sp>
+      <p:sp>
+        <p:nvSpPr>
+          <p:cNvPr id="6" name="TextBox 5"/>
+          <p:cNvSpPr txBox="1"/>
+          <p:nvPr/>
+        </p:nvSpPr>
+        <p:spPr>
+          <a:xfrm>
+            <a:off x="9601200" y="6400800"/>
+            <a:ext cx="1920240" cy="320040"/>
+          </a:xfrm>
+          <a:prstGeom prst="rect">
+            <a:avLst/>
+          </a:prstGeom>
+          <a:noFill/>
+        </p:spPr>
+        <p:txBody>
+          <a:bodyPr wrap="square">
+            <a:spAutoFit/>
+          </a:bodyPr>
+          <a:lstStyle/>
+          <a:p>
+            <a:pPr algn="l" rtl="0"/>
+            <a:r>
+              <a:rPr sz="1000" b="0">
+                <a:solidFill>
+                  <a:srgbClr val="666666"/>
+                </a:solidFill>
+                <a:latin typeface="Calibri"/>
+              </a:rPr>
+              <a:t>V12  •  8/13</a:t>
+            </a:r>
+          </a:p>
+        </p:txBody>
+      </p:sp>
+      <p:sp>
+        <p:nvSpPr>
+          <p:cNvPr id="7" name="TextBox 6"/>
+          <p:cNvSpPr txBox="1"/>
+          <p:nvPr/>
+        </p:nvSpPr>
+        <p:spPr>
+          <a:xfrm>
+            <a:off x="640080" y="6400800"/>
+            <a:ext cx="8686800" cy="320040"/>
+          </a:xfrm>
+          <a:prstGeom prst="rect">
+            <a:avLst/>
+          </a:prstGeom>
+          <a:noFill/>
+        </p:spPr>
+        <p:txBody>
+          <a:bodyPr wrap="square">
+            <a:spAutoFit/>
+          </a:bodyPr>
+          <a:lstStyle/>
+          <a:p>
+            <a:pPr algn="r" rtl="1"/>
+            <a:r>
+              <a:rPr sz="1000" b="0">
+                <a:solidFill>
+                  <a:srgbClr val="666666"/>
+                </a:solidFill>
+                <a:latin typeface="Arial"/>
+              </a:rPr>
+              <a:t>Module 02 — Data &amp; AI Engineering Track  |  الوحدة الثانية</a:t>
+            </a:r>
+          </a:p>
+        </p:txBody>
+      </p:sp>
+      <p:sp>
+        <p:nvSpPr>
+          <p:cNvPr id="8" name="TextBox 7"/>
+          <p:cNvSpPr txBox="1"/>
+          <p:nvPr/>
+        </p:nvSpPr>
+        <p:spPr>
+          <a:xfrm>
+            <a:off x="9601200" y="6400800"/>
+            <a:ext cx="1920240" cy="320040"/>
+          </a:xfrm>
+          <a:prstGeom prst="rect">
+            <a:avLst/>
+          </a:prstGeom>
+          <a:noFill/>
+        </p:spPr>
+        <p:txBody>
+          <a:bodyPr wrap="square">
+            <a:spAutoFit/>
+          </a:bodyPr>
+          <a:lstStyle/>
+          <a:p>
+            <a:pPr algn="l" rtl="0"/>
+            <a:r>
+              <a:rPr sz="1000" b="0">
+                <a:solidFill>
+                  <a:srgbClr val="666666"/>
+                </a:solidFill>
+                <a:latin typeface="Calibri"/>
+              </a:rPr>
+              <a:t>12_  •  10/12</a:t>
+            </a:r>
+          </a:p>
+        </p:txBody>
+      </p:sp>
+      <p:sp>
+        <p:nvSpPr>
+          <p:cNvPr id="9" name="TextBox 8"/>
+          <p:cNvSpPr txBox="1"/>
+          <p:nvPr/>
+        </p:nvSpPr>
+        <p:spPr>
+          <a:xfrm>
+            <a:off x="640080" y="6400800"/>
+            <a:ext cx="8686800" cy="320040"/>
+          </a:xfrm>
+          <a:prstGeom prst="rect">
+            <a:avLst/>
+          </a:prstGeom>
+          <a:noFill/>
+        </p:spPr>
+        <p:txBody>
+          <a:bodyPr wrap="square">
+            <a:spAutoFit/>
+          </a:bodyPr>
+          <a:lstStyle/>
+          <a:p>
+            <a:pPr algn="r" rtl="1"/>
+            <a:r>
+              <a:rPr sz="1000" b="0">
+                <a:solidFill>
+                  <a:srgbClr val="666666"/>
+                </a:solidFill>
+                <a:latin typeface="Arial"/>
+              </a:rPr>
+              <a:t>Module 02 — Data &amp; AI Engineering Track  |  الوحدة الثانية</a:t>
+            </a:r>
+          </a:p>
+        </p:txBody>
+      </p:sp>
+      <p:sp>
+        <p:nvSpPr>
+          <p:cNvPr id="10" name="TextBox 9"/>
+          <p:cNvSpPr txBox="1"/>
+          <p:nvPr/>
+        </p:nvSpPr>
+        <p:spPr>
+          <a:xfrm>
+            <a:off x="9601200" y="6400800"/>
+            <a:ext cx="1920240" cy="320040"/>
+          </a:xfrm>
+          <a:prstGeom prst="rect">
+            <a:avLst/>
+          </a:prstGeom>
+          <a:noFill/>
+        </p:spPr>
+        <p:txBody>
+          <a:bodyPr wrap="square">
+            <a:spAutoFit/>
+          </a:bodyPr>
+          <a:lstStyle/>
+          <a:p>
+            <a:pPr algn="l" rtl="0"/>
+            <a:r>
+              <a:rPr sz="1000" b="0">
+                <a:solidFill>
+                  <a:srgbClr val="666666"/>
+                </a:solidFill>
+                <a:latin typeface="Calibri"/>
+              </a:rPr>
+              <a:t>12_  •  10/12</a:t>
             </a:r>
           </a:p>
         </p:txBody>
@@ -3469,57 +3974,22 @@
       <p:grpSpPr/>
       <p:sp>
         <p:nvSpPr>
-          <p:cNvPr id="2" name="TextBox 1"/>
-          <p:cNvSpPr txBox="1"/>
-          <p:nvPr/>
-        </p:nvSpPr>
-        <p:spPr>
-          <a:xfrm>
-            <a:off x="640080" y="137160"/>
-            <a:ext cx="10972800" cy="640080"/>
-          </a:xfrm>
-          <a:prstGeom prst="rect">
-            <a:avLst/>
-          </a:prstGeom>
-          <a:noFill/>
-        </p:spPr>
-        <p:txBody>
-          <a:bodyPr wrap="none">
-            <a:spAutoFit/>
-          </a:bodyPr>
-          <a:lstStyle/>
-          <a:p>
-            <a:pPr algn="r" rtl="1"/>
-            <a:r>
-              <a:rPr sz="3000" b="1">
-                <a:solidFill>
-                  <a:srgbClr val="1F3B5C"/>
-                </a:solidFill>
-                <a:latin typeface="Calibri"/>
-              </a:rPr>
-              <a:t>التكلفة عمليًا: التضمين مقابل التوليد / Cost: Embedding vs Generation</a:t>
-            </a:r>
-          </a:p>
-        </p:txBody>
-      </p:sp>
-      <p:sp>
-        <p:nvSpPr>
-          <p:cNvPr id="3" name="Rounded Rectangle 2"/>
+          <p:cNvPr id="2" name="Rectangle 1"/>
           <p:cNvSpPr/>
           <p:nvPr/>
         </p:nvSpPr>
         <p:spPr>
           <a:xfrm>
-            <a:off x="1828800" y="3840480"/>
-            <a:ext cx="2194560" cy="1463040"/>
-          </a:xfrm>
-          <a:prstGeom prst="roundRect">
+            <a:off x="0" y="0"/>
+            <a:ext cx="12191695" cy="1005840"/>
+          </a:xfrm>
+          <a:prstGeom prst="rect">
             <a:avLst/>
           </a:prstGeom>
           <a:solidFill>
-            <a:srgbClr val="E2EFDA"/>
+            <a:srgbClr val="FFFFFF"/>
           </a:solidFill>
-          <a:ln w="12700">
+          <a:ln w="25400">
             <a:solidFill>
               <a:srgbClr val="1F4E79"/>
             </a:solidFill>
@@ -3541,205 +4011,391 @@
           </a:fontRef>
         </p:style>
         <p:txBody>
-          <a:bodyPr rtlCol="0" anchor="ctr" wrap="square"/>
-          <a:lstStyle/>
-          <a:p>
-            <a:pPr algn="ctr" rtl="1"/>
-            <a:r>
-              <a:rPr sz="1800" b="1">
+          <a:bodyPr rtlCol="0" anchor="ctr"/>
+          <a:lstStyle/>
+          <a:p>
+            <a:pPr algn="ctr"/>
+          </a:p>
+        </p:txBody>
+      </p:sp>
+      <p:sp>
+        <p:nvSpPr>
+          <p:cNvPr id="3" name="TextBox 2"/>
+          <p:cNvSpPr txBox="1"/>
+          <p:nvPr/>
+        </p:nvSpPr>
+        <p:spPr>
+          <a:xfrm>
+            <a:off x="640080" y="182880"/>
+            <a:ext cx="10972800" cy="640080"/>
+          </a:xfrm>
+          <a:prstGeom prst="rect">
+            <a:avLst/>
+          </a:prstGeom>
+          <a:noFill/>
+        </p:spPr>
+        <p:txBody>
+          <a:bodyPr wrap="square">
+            <a:spAutoFit/>
+          </a:bodyPr>
+          <a:lstStyle/>
+          <a:p>
+            <a:pPr algn="r" rtl="1"/>
+            <a:r>
+              <a:rPr sz="3200" b="1">
+                <a:solidFill>
+                  <a:srgbClr val="1F3B5C"/>
+                </a:solidFill>
+                <a:latin typeface="Arial"/>
+              </a:rPr>
+              <a:t>إجابات الاختبار / Quiz Answers</a:t>
+            </a:r>
+          </a:p>
+        </p:txBody>
+      </p:sp>
+      <p:sp>
+        <p:nvSpPr>
+          <p:cNvPr id="4" name="TextBox 3"/>
+          <p:cNvSpPr txBox="1"/>
+          <p:nvPr/>
+        </p:nvSpPr>
+        <p:spPr>
+          <a:xfrm>
+            <a:off x="640080" y="1280160"/>
+            <a:ext cx="10972800" cy="5212080"/>
+          </a:xfrm>
+          <a:prstGeom prst="rect">
+            <a:avLst/>
+          </a:prstGeom>
+          <a:noFill/>
+        </p:spPr>
+        <p:txBody>
+          <a:bodyPr wrap="square">
+            <a:spAutoFit/>
+          </a:bodyPr>
+          <a:lstStyle/>
+          <a:p>
+            <a:pPr algn="r" rtl="1">
+              <a:spcBef>
+                <a:spcPts val="200"/>
+              </a:spcBef>
+              <a:spcAft>
+                <a:spcPts val="1000"/>
+              </a:spcAft>
+            </a:pPr>
+            <a:r>
+              <a:rPr sz="1800">
                 <a:solidFill>
                   <a:srgbClr val="333333"/>
                 </a:solidFill>
+                <a:latin typeface="Arial"/>
+              </a:rPr>
+              <a:t>• 1. الوكيل يستجيب ويستدعي أدوات؛ الوكيلي يخطط ذاتيًا وينفذ خطوات متعددة ويتكيف.</a:t>
+            </a:r>
+          </a:p>
+          <a:p>
+            <a:pPr algn="l" rtl="0">
+              <a:spcBef>
+                <a:spcPts val="200"/>
+              </a:spcBef>
+              <a:spcAft>
+                <a:spcPts val="1000"/>
+              </a:spcAft>
+            </a:pPr>
+            <a:r>
+              <a:rPr sz="1500">
+                <a:solidFill>
+                  <a:srgbClr val="666666"/>
+                </a:solidFill>
                 <a:latin typeface="Calibri"/>
               </a:rPr>
-              <a:t>التضمين 1x</a:t>
-            </a:r>
-          </a:p>
-          <a:p>
-            <a:pPr algn="ctr" rtl="0"/>
-            <a:r>
-              <a:rPr sz="1200">
+              <a:t>• An agent responds and calls tools; agentic AI self-plans multi-step execution.</a:t>
+            </a:r>
+          </a:p>
+          <a:p>
+            <a:pPr algn="r" rtl="1">
+              <a:spcBef>
+                <a:spcPts val="200"/>
+              </a:spcBef>
+              <a:spcAft>
+                <a:spcPts val="1000"/>
+              </a:spcAft>
+            </a:pPr>
+            <a:r>
+              <a:rPr sz="1800">
+                <a:solidFill>
+                  <a:srgbClr val="333333"/>
+                </a:solidFill>
+                <a:latin typeface="Arial"/>
+              </a:rPr>
+              <a:t>• 2. التضمين — أقل بتكلفة مرتبة كاملة.</a:t>
+            </a:r>
+          </a:p>
+          <a:p>
+            <a:pPr algn="l" rtl="0">
+              <a:spcBef>
+                <a:spcPts val="200"/>
+              </a:spcBef>
+              <a:spcAft>
+                <a:spcPts val="1000"/>
+              </a:spcAft>
+            </a:pPr>
+            <a:r>
+              <a:rPr sz="1500">
                 <a:solidFill>
                   <a:srgbClr val="666666"/>
                 </a:solidFill>
                 <a:latin typeface="Calibri"/>
               </a:rPr>
-              <a:t>Embedding — cheap</a:t>
-            </a:r>
-          </a:p>
-        </p:txBody>
-      </p:sp>
-      <p:sp>
-        <p:nvSpPr>
-          <p:cNvPr id="4" name="Rounded Rectangle 3"/>
-          <p:cNvSpPr/>
-          <p:nvPr/>
-        </p:nvSpPr>
-        <p:spPr>
-          <a:xfrm>
-            <a:off x="4754880" y="1554480"/>
-            <a:ext cx="2194560" cy="3749039"/>
-          </a:xfrm>
-          <a:prstGeom prst="roundRect">
-            <a:avLst/>
-          </a:prstGeom>
-          <a:solidFill>
-            <a:srgbClr val="FDE9D9"/>
-          </a:solidFill>
-          <a:ln w="12700">
-            <a:solidFill>
-              <a:srgbClr val="1F4E79"/>
-            </a:solidFill>
-          </a:ln>
-          <a:effectLst/>
-        </p:spPr>
-        <p:style>
-          <a:lnRef idx="1">
-            <a:schemeClr val="accent1"/>
-          </a:lnRef>
-          <a:fillRef idx="3">
-            <a:schemeClr val="accent1"/>
-          </a:fillRef>
-          <a:effectRef idx="2">
-            <a:schemeClr val="accent1"/>
-          </a:effectRef>
-          <a:fontRef idx="minor">
-            <a:schemeClr val="lt1"/>
-          </a:fontRef>
-        </p:style>
-        <p:txBody>
-          <a:bodyPr rtlCol="0" anchor="ctr" wrap="square"/>
-          <a:lstStyle/>
-          <a:p>
-            <a:pPr algn="ctr" rtl="1"/>
-            <a:r>
-              <a:rPr sz="1800" b="1">
+              <a:t>• Embedding — roughly an order of magnitude cheaper.</a:t>
+            </a:r>
+          </a:p>
+          <a:p>
+            <a:pPr algn="r" rtl="1">
+              <a:spcBef>
+                <a:spcPts val="200"/>
+              </a:spcBef>
+              <a:spcAft>
+                <a:spcPts val="1000"/>
+              </a:spcAft>
+            </a:pPr>
+            <a:r>
+              <a:rPr sz="1800">
                 <a:solidFill>
                   <a:srgbClr val="333333"/>
                 </a:solidFill>
+                <a:latin typeface="Arial"/>
+              </a:rPr>
+              <a:t>• 3. MLflow للتتبع وDVC لإصدارات البيانات.</a:t>
+            </a:r>
+          </a:p>
+          <a:p>
+            <a:pPr algn="l" rtl="0">
+              <a:spcBef>
+                <a:spcPts val="200"/>
+              </a:spcBef>
+              <a:spcAft>
+                <a:spcPts val="1000"/>
+              </a:spcAft>
+            </a:pPr>
+            <a:r>
+              <a:rPr sz="1500">
+                <a:solidFill>
+                  <a:srgbClr val="666666"/>
+                </a:solidFill>
                 <a:latin typeface="Calibri"/>
               </a:rPr>
-              <a:t>التوليد ~10x</a:t>
-            </a:r>
-          </a:p>
-          <a:p>
-            <a:pPr algn="ctr" rtl="0"/>
-            <a:r>
-              <a:rPr sz="1200">
+              <a:t>• MLflow for tracking, DVC for data versioning.</a:t>
+            </a:r>
+          </a:p>
+        </p:txBody>
+      </p:sp>
+      <p:sp>
+        <p:nvSpPr>
+          <p:cNvPr id="5" name="TextBox 4"/>
+          <p:cNvSpPr txBox="1"/>
+          <p:nvPr/>
+        </p:nvSpPr>
+        <p:spPr>
+          <a:xfrm>
+            <a:off x="640080" y="6400800"/>
+            <a:ext cx="8686800" cy="320040"/>
+          </a:xfrm>
+          <a:prstGeom prst="rect">
+            <a:avLst/>
+          </a:prstGeom>
+          <a:noFill/>
+        </p:spPr>
+        <p:txBody>
+          <a:bodyPr wrap="square">
+            <a:spAutoFit/>
+          </a:bodyPr>
+          <a:lstStyle/>
+          <a:p>
+            <a:pPr algn="r" rtl="1"/>
+            <a:r>
+              <a:rPr sz="1000" b="0">
+                <a:solidFill>
+                  <a:srgbClr val="666666"/>
+                </a:solidFill>
+                <a:latin typeface="Arial"/>
+              </a:rPr>
+              <a:t>Module 02 — Data &amp; AI Engineering Track  |  الوحدة الثانية</a:t>
+            </a:r>
+          </a:p>
+        </p:txBody>
+      </p:sp>
+      <p:sp>
+        <p:nvSpPr>
+          <p:cNvPr id="6" name="TextBox 5"/>
+          <p:cNvSpPr txBox="1"/>
+          <p:nvPr/>
+        </p:nvSpPr>
+        <p:spPr>
+          <a:xfrm>
+            <a:off x="9601200" y="6400800"/>
+            <a:ext cx="1920240" cy="320040"/>
+          </a:xfrm>
+          <a:prstGeom prst="rect">
+            <a:avLst/>
+          </a:prstGeom>
+          <a:noFill/>
+        </p:spPr>
+        <p:txBody>
+          <a:bodyPr wrap="square">
+            <a:spAutoFit/>
+          </a:bodyPr>
+          <a:lstStyle/>
+          <a:p>
+            <a:pPr algn="l" rtl="0"/>
+            <a:r>
+              <a:rPr sz="1000" b="0">
                 <a:solidFill>
                   <a:srgbClr val="666666"/>
                 </a:solidFill>
                 <a:latin typeface="Calibri"/>
               </a:rPr>
-              <a:t>Generation — costly</a:t>
-            </a:r>
-          </a:p>
-        </p:txBody>
-      </p:sp>
-      <p:sp>
-        <p:nvSpPr>
-          <p:cNvPr id="5" name="Rounded Rectangle 4"/>
-          <p:cNvSpPr/>
-          <p:nvPr/>
-        </p:nvSpPr>
-        <p:spPr>
-          <a:xfrm>
-            <a:off x="7863840" y="3108960"/>
-            <a:ext cx="2651760" cy="2194560"/>
-          </a:xfrm>
-          <a:prstGeom prst="roundRect">
-            <a:avLst/>
-          </a:prstGeom>
-          <a:solidFill>
-            <a:srgbClr val="DCE6F1"/>
-          </a:solidFill>
-          <a:ln w="12700">
-            <a:solidFill>
-              <a:srgbClr val="1F4E79"/>
-            </a:solidFill>
-          </a:ln>
-          <a:effectLst/>
-        </p:spPr>
-        <p:style>
-          <a:lnRef idx="1">
-            <a:schemeClr val="accent1"/>
-          </a:lnRef>
-          <a:fillRef idx="3">
-            <a:schemeClr val="accent1"/>
-          </a:fillRef>
-          <a:effectRef idx="2">
-            <a:schemeClr val="accent1"/>
-          </a:effectRef>
-          <a:fontRef idx="minor">
-            <a:schemeClr val="lt1"/>
-          </a:fontRef>
-        </p:style>
-        <p:txBody>
-          <a:bodyPr rtlCol="0" anchor="ctr" wrap="square"/>
-          <a:lstStyle/>
-          <a:p>
-            <a:pPr algn="ctr" rtl="1"/>
-            <a:r>
-              <a:rPr sz="1500" b="1">
-                <a:solidFill>
-                  <a:srgbClr val="333333"/>
+              <a:t>V12  •  9/13</a:t>
+            </a:r>
+          </a:p>
+        </p:txBody>
+      </p:sp>
+      <p:sp>
+        <p:nvSpPr>
+          <p:cNvPr id="7" name="TextBox 6"/>
+          <p:cNvSpPr txBox="1"/>
+          <p:nvPr/>
+        </p:nvSpPr>
+        <p:spPr>
+          <a:xfrm>
+            <a:off x="640080" y="6400800"/>
+            <a:ext cx="8686800" cy="320040"/>
+          </a:xfrm>
+          <a:prstGeom prst="rect">
+            <a:avLst/>
+          </a:prstGeom>
+          <a:noFill/>
+        </p:spPr>
+        <p:txBody>
+          <a:bodyPr wrap="square">
+            <a:spAutoFit/>
+          </a:bodyPr>
+          <a:lstStyle/>
+          <a:p>
+            <a:pPr algn="r" rtl="1"/>
+            <a:r>
+              <a:rPr sz="1000" b="0">
+                <a:solidFill>
+                  <a:srgbClr val="666666"/>
+                </a:solidFill>
+                <a:latin typeface="Arial"/>
+              </a:rPr>
+              <a:t>Module 02 — Data &amp; AI Engineering Track  |  الوحدة الثانية</a:t>
+            </a:r>
+          </a:p>
+        </p:txBody>
+      </p:sp>
+      <p:sp>
+        <p:nvSpPr>
+          <p:cNvPr id="8" name="TextBox 7"/>
+          <p:cNvSpPr txBox="1"/>
+          <p:nvPr/>
+        </p:nvSpPr>
+        <p:spPr>
+          <a:xfrm>
+            <a:off x="9601200" y="6400800"/>
+            <a:ext cx="1920240" cy="320040"/>
+          </a:xfrm>
+          <a:prstGeom prst="rect">
+            <a:avLst/>
+          </a:prstGeom>
+          <a:noFill/>
+        </p:spPr>
+        <p:txBody>
+          <a:bodyPr wrap="square">
+            <a:spAutoFit/>
+          </a:bodyPr>
+          <a:lstStyle/>
+          <a:p>
+            <a:pPr algn="l" rtl="0"/>
+            <a:r>
+              <a:rPr sz="1000" b="0">
+                <a:solidFill>
+                  <a:srgbClr val="666666"/>
                 </a:solidFill>
                 <a:latin typeface="Calibri"/>
               </a:rPr>
-              <a:t>الحل: تخزين مؤقت + توجيه</a:t>
-            </a:r>
-          </a:p>
-          <a:p>
-            <a:pPr algn="ctr" rtl="0"/>
-            <a:r>
-              <a:rPr sz="1200">
+              <a:t>12_  •  11/12</a:t>
+            </a:r>
+          </a:p>
+        </p:txBody>
+      </p:sp>
+      <p:sp>
+        <p:nvSpPr>
+          <p:cNvPr id="9" name="TextBox 8"/>
+          <p:cNvSpPr txBox="1"/>
+          <p:nvPr/>
+        </p:nvSpPr>
+        <p:spPr>
+          <a:xfrm>
+            <a:off x="640080" y="6400800"/>
+            <a:ext cx="8686800" cy="320040"/>
+          </a:xfrm>
+          <a:prstGeom prst="rect">
+            <a:avLst/>
+          </a:prstGeom>
+          <a:noFill/>
+        </p:spPr>
+        <p:txBody>
+          <a:bodyPr wrap="square">
+            <a:spAutoFit/>
+          </a:bodyPr>
+          <a:lstStyle/>
+          <a:p>
+            <a:pPr algn="r" rtl="1"/>
+            <a:r>
+              <a:rPr sz="1000" b="0">
+                <a:solidFill>
+                  <a:srgbClr val="666666"/>
+                </a:solidFill>
+                <a:latin typeface="Arial"/>
+              </a:rPr>
+              <a:t>Module 02 — Data &amp; AI Engineering Track  |  الوحدة الثانية</a:t>
+            </a:r>
+          </a:p>
+        </p:txBody>
+      </p:sp>
+      <p:sp>
+        <p:nvSpPr>
+          <p:cNvPr id="10" name="TextBox 9"/>
+          <p:cNvSpPr txBox="1"/>
+          <p:nvPr/>
+        </p:nvSpPr>
+        <p:spPr>
+          <a:xfrm>
+            <a:off x="9601200" y="6400800"/>
+            <a:ext cx="1920240" cy="320040"/>
+          </a:xfrm>
+          <a:prstGeom prst="rect">
+            <a:avLst/>
+          </a:prstGeom>
+          <a:noFill/>
+        </p:spPr>
+        <p:txBody>
+          <a:bodyPr wrap="square">
+            <a:spAutoFit/>
+          </a:bodyPr>
+          <a:lstStyle/>
+          <a:p>
+            <a:pPr algn="l" rtl="0"/>
+            <a:r>
+              <a:rPr sz="1000" b="0">
                 <a:solidFill>
                   <a:srgbClr val="666666"/>
                 </a:solidFill>
                 <a:latin typeface="Calibri"/>
               </a:rPr>
-              <a:t>Fix: caching + routing</a:t>
-            </a:r>
-          </a:p>
-        </p:txBody>
-      </p:sp>
-      <p:sp>
-        <p:nvSpPr>
-          <p:cNvPr id="6" name="TextBox 5"/>
-          <p:cNvSpPr txBox="1"/>
-          <p:nvPr/>
-        </p:nvSpPr>
-        <p:spPr>
-          <a:xfrm>
-            <a:off x="640080" y="6126480"/>
-            <a:ext cx="10972800" cy="548640"/>
-          </a:xfrm>
-          <a:prstGeom prst="rect">
-            <a:avLst/>
-          </a:prstGeom>
-          <a:noFill/>
-        </p:spPr>
-        <p:txBody>
-          <a:bodyPr wrap="square">
-            <a:spAutoFit/>
-          </a:bodyPr>
-          <a:lstStyle/>
-          <a:p>
-            <a:pPr algn="r" rtl="1"/>
-            <a:r>
-              <a:rPr sz="1400">
-                <a:solidFill>
-                  <a:srgbClr val="666666"/>
-                </a:solidFill>
-                <a:latin typeface="Calibri"/>
-              </a:rPr>
-              <a:t>قاعدة FinOps: قِس التكلفة لكل طلب قبل التوسع.</a:t>
-            </a:r>
-          </a:p>
-          <a:p>
-            <a:pPr algn="r" rtl="0"/>
-            <a:r>
-              <a:t>FinOps rule: measure per-request cost before scaling.</a:t>
+              <a:t>12_  •  11/12</a:t>
             </a:r>
           </a:p>
         </p:txBody>
@@ -3772,57 +4428,22 @@
       <p:grpSpPr/>
       <p:sp>
         <p:nvSpPr>
-          <p:cNvPr id="2" name="TextBox 1"/>
-          <p:cNvSpPr txBox="1"/>
-          <p:nvPr/>
-        </p:nvSpPr>
-        <p:spPr>
-          <a:xfrm>
-            <a:off x="640080" y="137160"/>
-            <a:ext cx="10972800" cy="640080"/>
-          </a:xfrm>
-          <a:prstGeom prst="rect">
-            <a:avLst/>
-          </a:prstGeom>
-          <a:noFill/>
-        </p:spPr>
-        <p:txBody>
-          <a:bodyPr wrap="none">
-            <a:spAutoFit/>
-          </a:bodyPr>
-          <a:lstStyle/>
-          <a:p>
-            <a:pPr algn="r" rtl="1"/>
-            <a:r>
-              <a:rPr sz="3000" b="1">
-                <a:solidFill>
-                  <a:srgbClr val="1F3B5C"/>
-                </a:solidFill>
-                <a:latin typeface="Calibri"/>
-              </a:rPr>
-              <a:t>من LLM إلى الأنظمة الوكيلة / From LLM to Agentic AI</a:t>
-            </a:r>
-          </a:p>
-        </p:txBody>
-      </p:sp>
-      <p:sp>
-        <p:nvSpPr>
-          <p:cNvPr id="3" name="Rounded Rectangle 2"/>
+          <p:cNvPr id="2" name="Rectangle 1"/>
           <p:cNvSpPr/>
           <p:nvPr/>
         </p:nvSpPr>
         <p:spPr>
           <a:xfrm>
-            <a:off x="640080" y="1645920"/>
-            <a:ext cx="2377440" cy="914400"/>
-          </a:xfrm>
-          <a:prstGeom prst="roundRect">
+            <a:off x="0" y="0"/>
+            <a:ext cx="12191695" cy="1005840"/>
+          </a:xfrm>
+          <a:prstGeom prst="rect">
             <a:avLst/>
           </a:prstGeom>
           <a:solidFill>
-            <a:srgbClr val="EDEDED"/>
+            <a:srgbClr val="FFFFFF"/>
           </a:solidFill>
-          <a:ln w="12700">
+          <a:ln w="25400">
             <a:solidFill>
               <a:srgbClr val="1F4E79"/>
             </a:solidFill>
@@ -3844,624 +4465,353 @@
           </a:fontRef>
         </p:style>
         <p:txBody>
-          <a:bodyPr rtlCol="0" anchor="ctr" wrap="square"/>
-          <a:lstStyle/>
-          <a:p>
-            <a:pPr algn="ctr" rtl="1"/>
-            <a:r>
-              <a:rPr sz="1800" b="1">
+          <a:bodyPr rtlCol="0" anchor="ctr"/>
+          <a:lstStyle/>
+          <a:p>
+            <a:pPr algn="ctr"/>
+          </a:p>
+        </p:txBody>
+      </p:sp>
+      <p:sp>
+        <p:nvSpPr>
+          <p:cNvPr id="3" name="TextBox 2"/>
+          <p:cNvSpPr txBox="1"/>
+          <p:nvPr/>
+        </p:nvSpPr>
+        <p:spPr>
+          <a:xfrm>
+            <a:off x="640080" y="182880"/>
+            <a:ext cx="10972800" cy="640080"/>
+          </a:xfrm>
+          <a:prstGeom prst="rect">
+            <a:avLst/>
+          </a:prstGeom>
+          <a:noFill/>
+        </p:spPr>
+        <p:txBody>
+          <a:bodyPr wrap="square">
+            <a:spAutoFit/>
+          </a:bodyPr>
+          <a:lstStyle/>
+          <a:p>
+            <a:pPr algn="r" rtl="1"/>
+            <a:r>
+              <a:rPr sz="3200" b="1">
+                <a:solidFill>
+                  <a:srgbClr val="1F3B5C"/>
+                </a:solidFill>
+                <a:latin typeface="Arial"/>
+              </a:rPr>
+              <a:t>للاستزادة / Further Reading</a:t>
+            </a:r>
+          </a:p>
+        </p:txBody>
+      </p:sp>
+      <p:sp>
+        <p:nvSpPr>
+          <p:cNvPr id="4" name="TextBox 3"/>
+          <p:cNvSpPr txBox="1"/>
+          <p:nvPr/>
+        </p:nvSpPr>
+        <p:spPr>
+          <a:xfrm>
+            <a:off x="640080" y="1280160"/>
+            <a:ext cx="10972800" cy="5212080"/>
+          </a:xfrm>
+          <a:prstGeom prst="rect">
+            <a:avLst/>
+          </a:prstGeom>
+          <a:noFill/>
+        </p:spPr>
+        <p:txBody>
+          <a:bodyPr wrap="square">
+            <a:spAutoFit/>
+          </a:bodyPr>
+          <a:lstStyle/>
+          <a:p>
+            <a:pPr algn="r" rtl="1">
+              <a:spcBef>
+                <a:spcPts val="200"/>
+              </a:spcBef>
+              <a:spcAft>
+                <a:spcPts val="1000"/>
+              </a:spcAft>
+            </a:pPr>
+            <a:r>
+              <a:rPr sz="2000">
                 <a:solidFill>
                   <a:srgbClr val="333333"/>
                 </a:solidFill>
+                <a:latin typeface="Arial"/>
+              </a:rPr>
+              <a:t>• توثيق MLflow وDVC.</a:t>
+            </a:r>
+          </a:p>
+          <a:p>
+            <a:pPr algn="l" rtl="0">
+              <a:spcBef>
+                <a:spcPts val="200"/>
+              </a:spcBef>
+              <a:spcAft>
+                <a:spcPts val="1000"/>
+              </a:spcAft>
+            </a:pPr>
+            <a:r>
+              <a:rPr sz="1700">
+                <a:solidFill>
+                  <a:srgbClr val="666666"/>
+                </a:solidFill>
                 <a:latin typeface="Calibri"/>
               </a:rPr>
-              <a:t>LLM</a:t>
-            </a:r>
-          </a:p>
-        </p:txBody>
-      </p:sp>
-      <p:sp>
-        <p:nvSpPr>
-          <p:cNvPr id="4" name="Rounded Rectangle 3"/>
-          <p:cNvSpPr/>
-          <p:nvPr/>
-        </p:nvSpPr>
-        <p:spPr>
-          <a:xfrm>
-            <a:off x="640080" y="2743200"/>
-            <a:ext cx="2377440" cy="1463040"/>
-          </a:xfrm>
-          <a:prstGeom prst="roundRect">
-            <a:avLst/>
-          </a:prstGeom>
-          <a:solidFill>
-            <a:srgbClr val="EDEDED"/>
-          </a:solidFill>
-          <a:ln w="12700">
-            <a:solidFill>
-              <a:srgbClr val="1F4E79"/>
-            </a:solidFill>
-          </a:ln>
-          <a:effectLst/>
-        </p:spPr>
-        <p:style>
-          <a:lnRef idx="1">
-            <a:schemeClr val="accent1"/>
-          </a:lnRef>
-          <a:fillRef idx="3">
-            <a:schemeClr val="accent1"/>
-          </a:fillRef>
-          <a:effectRef idx="2">
-            <a:schemeClr val="accent1"/>
-          </a:effectRef>
-          <a:fontRef idx="minor">
-            <a:schemeClr val="lt1"/>
-          </a:fontRef>
-        </p:style>
-        <p:txBody>
-          <a:bodyPr rtlCol="0" anchor="ctr" wrap="square"/>
-          <a:lstStyle/>
-          <a:p>
-            <a:pPr algn="ctr" rtl="1"/>
-            <a:r>
-              <a:rPr sz="1300" b="1">
+              <a:t>• MLflow and DVC docs.</a:t>
+            </a:r>
+          </a:p>
+          <a:p>
+            <a:pPr algn="r" rtl="1">
+              <a:spcBef>
+                <a:spcPts val="200"/>
+              </a:spcBef>
+              <a:spcAft>
+                <a:spcPts val="1000"/>
+              </a:spcAft>
+            </a:pPr>
+            <a:r>
+              <a:rPr sz="2000">
                 <a:solidFill>
                   <a:srgbClr val="333333"/>
                 </a:solidFill>
+                <a:latin typeface="Arial"/>
+              </a:rPr>
+              <a:t>• دليل تجهيز البيئة للمختبر L03.</a:t>
+            </a:r>
+          </a:p>
+          <a:p>
+            <a:pPr algn="l" rtl="0">
+              <a:spcBef>
+                <a:spcPts val="200"/>
+              </a:spcBef>
+              <a:spcAft>
+                <a:spcPts val="1000"/>
+              </a:spcAft>
+            </a:pPr>
+            <a:r>
+              <a:rPr sz="1700">
+                <a:solidFill>
+                  <a:srgbClr val="666666"/>
+                </a:solidFill>
                 <a:latin typeface="Calibri"/>
               </a:rPr>
-              <a:t>تنبؤ بالرموز التالية</a:t>
-            </a:r>
-          </a:p>
-          <a:p>
-            <a:pPr algn="ctr" rtl="0"/>
-            <a:r>
-              <a:rPr sz="1100">
+              <a:t>• L03 Environment Setup Guide.</a:t>
+            </a:r>
+          </a:p>
+        </p:txBody>
+      </p:sp>
+      <p:sp>
+        <p:nvSpPr>
+          <p:cNvPr id="5" name="TextBox 4"/>
+          <p:cNvSpPr txBox="1"/>
+          <p:nvPr/>
+        </p:nvSpPr>
+        <p:spPr>
+          <a:xfrm>
+            <a:off x="640080" y="6400800"/>
+            <a:ext cx="8686800" cy="320040"/>
+          </a:xfrm>
+          <a:prstGeom prst="rect">
+            <a:avLst/>
+          </a:prstGeom>
+          <a:noFill/>
+        </p:spPr>
+        <p:txBody>
+          <a:bodyPr wrap="square">
+            <a:spAutoFit/>
+          </a:bodyPr>
+          <a:lstStyle/>
+          <a:p>
+            <a:pPr algn="r" rtl="1"/>
+            <a:r>
+              <a:rPr sz="1000" b="0">
+                <a:solidFill>
+                  <a:srgbClr val="666666"/>
+                </a:solidFill>
+                <a:latin typeface="Arial"/>
+              </a:rPr>
+              <a:t>Module 02 — Data &amp; AI Engineering Track  |  الوحدة الثانية</a:t>
+            </a:r>
+          </a:p>
+        </p:txBody>
+      </p:sp>
+      <p:sp>
+        <p:nvSpPr>
+          <p:cNvPr id="6" name="TextBox 5"/>
+          <p:cNvSpPr txBox="1"/>
+          <p:nvPr/>
+        </p:nvSpPr>
+        <p:spPr>
+          <a:xfrm>
+            <a:off x="9601200" y="6400800"/>
+            <a:ext cx="1920240" cy="320040"/>
+          </a:xfrm>
+          <a:prstGeom prst="rect">
+            <a:avLst/>
+          </a:prstGeom>
+          <a:noFill/>
+        </p:spPr>
+        <p:txBody>
+          <a:bodyPr wrap="square">
+            <a:spAutoFit/>
+          </a:bodyPr>
+          <a:lstStyle/>
+          <a:p>
+            <a:pPr algn="l" rtl="0"/>
+            <a:r>
+              <a:rPr sz="1000" b="0">
                 <a:solidFill>
                   <a:srgbClr val="666666"/>
                 </a:solidFill>
                 <a:latin typeface="Calibri"/>
               </a:rPr>
-              <a:t>Predicts next tokens</a:t>
-            </a:r>
-          </a:p>
-        </p:txBody>
-      </p:sp>
-      <p:sp>
-        <p:nvSpPr>
-          <p:cNvPr id="5" name="Right Arrow 4"/>
-          <p:cNvSpPr/>
-          <p:nvPr/>
-        </p:nvSpPr>
-        <p:spPr>
-          <a:xfrm>
-            <a:off x="3072384" y="1965960"/>
-            <a:ext cx="347472" cy="274320"/>
-          </a:xfrm>
-          <a:prstGeom prst="rightArrow">
-            <a:avLst/>
-          </a:prstGeom>
-          <a:solidFill>
-            <a:srgbClr val="1F4E79"/>
-          </a:solidFill>
-          <a:ln>
-            <a:noFill/>
-          </a:ln>
-          <a:effectLst/>
-        </p:spPr>
-        <p:style>
-          <a:lnRef idx="1">
-            <a:schemeClr val="accent1"/>
-          </a:lnRef>
-          <a:fillRef idx="3">
-            <a:schemeClr val="accent1"/>
-          </a:fillRef>
-          <a:effectRef idx="2">
-            <a:schemeClr val="accent1"/>
-          </a:effectRef>
-          <a:fontRef idx="minor">
-            <a:schemeClr val="lt1"/>
-          </a:fontRef>
-        </p:style>
-        <p:txBody>
-          <a:bodyPr rtlCol="0" anchor="ctr"/>
-          <a:lstStyle/>
-          <a:p>
-            <a:pPr algn="ctr"/>
-          </a:p>
-        </p:txBody>
-      </p:sp>
-      <p:sp>
-        <p:nvSpPr>
-          <p:cNvPr id="6" name="Rounded Rectangle 5"/>
-          <p:cNvSpPr/>
-          <p:nvPr/>
-        </p:nvSpPr>
-        <p:spPr>
-          <a:xfrm>
-            <a:off x="3474720" y="1645920"/>
-            <a:ext cx="2377440" cy="914400"/>
-          </a:xfrm>
-          <a:prstGeom prst="roundRect">
-            <a:avLst/>
-          </a:prstGeom>
-          <a:solidFill>
-            <a:srgbClr val="DCE6F1"/>
-          </a:solidFill>
-          <a:ln w="12700">
-            <a:solidFill>
-              <a:srgbClr val="1F4E79"/>
-            </a:solidFill>
-          </a:ln>
-          <a:effectLst/>
-        </p:spPr>
-        <p:style>
-          <a:lnRef idx="1">
-            <a:schemeClr val="accent1"/>
-          </a:lnRef>
-          <a:fillRef idx="3">
-            <a:schemeClr val="accent1"/>
-          </a:fillRef>
-          <a:effectRef idx="2">
-            <a:schemeClr val="accent1"/>
-          </a:effectRef>
-          <a:fontRef idx="minor">
-            <a:schemeClr val="lt1"/>
-          </a:fontRef>
-        </p:style>
-        <p:txBody>
-          <a:bodyPr rtlCol="0" anchor="ctr" wrap="square"/>
-          <a:lstStyle/>
-          <a:p>
-            <a:pPr algn="ctr" rtl="1"/>
-            <a:r>
-              <a:rPr sz="1800" b="1">
-                <a:solidFill>
-                  <a:srgbClr val="333333"/>
+              <a:t>V12  •  10/13</a:t>
+            </a:r>
+          </a:p>
+        </p:txBody>
+      </p:sp>
+      <p:sp>
+        <p:nvSpPr>
+          <p:cNvPr id="7" name="TextBox 6"/>
+          <p:cNvSpPr txBox="1"/>
+          <p:nvPr/>
+        </p:nvSpPr>
+        <p:spPr>
+          <a:xfrm>
+            <a:off x="640080" y="6400800"/>
+            <a:ext cx="8686800" cy="320040"/>
+          </a:xfrm>
+          <a:prstGeom prst="rect">
+            <a:avLst/>
+          </a:prstGeom>
+          <a:noFill/>
+        </p:spPr>
+        <p:txBody>
+          <a:bodyPr wrap="square">
+            <a:spAutoFit/>
+          </a:bodyPr>
+          <a:lstStyle/>
+          <a:p>
+            <a:pPr algn="r" rtl="1"/>
+            <a:r>
+              <a:rPr sz="1000" b="0">
+                <a:solidFill>
+                  <a:srgbClr val="666666"/>
+                </a:solidFill>
+                <a:latin typeface="Arial"/>
+              </a:rPr>
+              <a:t>Module 02 — Data &amp; AI Engineering Track  |  الوحدة الثانية</a:t>
+            </a:r>
+          </a:p>
+        </p:txBody>
+      </p:sp>
+      <p:sp>
+        <p:nvSpPr>
+          <p:cNvPr id="8" name="TextBox 7"/>
+          <p:cNvSpPr txBox="1"/>
+          <p:nvPr/>
+        </p:nvSpPr>
+        <p:spPr>
+          <a:xfrm>
+            <a:off x="9601200" y="6400800"/>
+            <a:ext cx="1920240" cy="320040"/>
+          </a:xfrm>
+          <a:prstGeom prst="rect">
+            <a:avLst/>
+          </a:prstGeom>
+          <a:noFill/>
+        </p:spPr>
+        <p:txBody>
+          <a:bodyPr wrap="square">
+            <a:spAutoFit/>
+          </a:bodyPr>
+          <a:lstStyle/>
+          <a:p>
+            <a:pPr algn="l" rtl="0"/>
+            <a:r>
+              <a:rPr sz="1000" b="0">
+                <a:solidFill>
+                  <a:srgbClr val="666666"/>
                 </a:solidFill>
                 <a:latin typeface="Calibri"/>
               </a:rPr>
-              <a:t>الذكاء التوليدي</a:t>
-            </a:r>
-          </a:p>
-        </p:txBody>
-      </p:sp>
-      <p:sp>
-        <p:nvSpPr>
-          <p:cNvPr id="7" name="Rounded Rectangle 6"/>
-          <p:cNvSpPr/>
-          <p:nvPr/>
-        </p:nvSpPr>
-        <p:spPr>
-          <a:xfrm>
-            <a:off x="3474720" y="2743200"/>
-            <a:ext cx="2377440" cy="1463040"/>
-          </a:xfrm>
-          <a:prstGeom prst="roundRect">
-            <a:avLst/>
-          </a:prstGeom>
-          <a:solidFill>
-            <a:srgbClr val="EDEDED"/>
-          </a:solidFill>
-          <a:ln w="12700">
-            <a:solidFill>
-              <a:srgbClr val="1F4E79"/>
-            </a:solidFill>
-          </a:ln>
-          <a:effectLst/>
-        </p:spPr>
-        <p:style>
-          <a:lnRef idx="1">
-            <a:schemeClr val="accent1"/>
-          </a:lnRef>
-          <a:fillRef idx="3">
-            <a:schemeClr val="accent1"/>
-          </a:fillRef>
-          <a:effectRef idx="2">
-            <a:schemeClr val="accent1"/>
-          </a:effectRef>
-          <a:fontRef idx="minor">
-            <a:schemeClr val="lt1"/>
-          </a:fontRef>
-        </p:style>
-        <p:txBody>
-          <a:bodyPr rtlCol="0" anchor="ctr" wrap="square"/>
-          <a:lstStyle/>
-          <a:p>
-            <a:pPr algn="ctr" rtl="1"/>
-            <a:r>
-              <a:rPr sz="1300" b="1">
-                <a:solidFill>
-                  <a:srgbClr val="333333"/>
+              <a:t>12_  •  12/12</a:t>
+            </a:r>
+          </a:p>
+        </p:txBody>
+      </p:sp>
+      <p:sp>
+        <p:nvSpPr>
+          <p:cNvPr id="9" name="TextBox 8"/>
+          <p:cNvSpPr txBox="1"/>
+          <p:nvPr/>
+        </p:nvSpPr>
+        <p:spPr>
+          <a:xfrm>
+            <a:off x="640080" y="6400800"/>
+            <a:ext cx="8686800" cy="320040"/>
+          </a:xfrm>
+          <a:prstGeom prst="rect">
+            <a:avLst/>
+          </a:prstGeom>
+          <a:noFill/>
+        </p:spPr>
+        <p:txBody>
+          <a:bodyPr wrap="square">
+            <a:spAutoFit/>
+          </a:bodyPr>
+          <a:lstStyle/>
+          <a:p>
+            <a:pPr algn="r" rtl="1"/>
+            <a:r>
+              <a:rPr sz="1000" b="0">
+                <a:solidFill>
+                  <a:srgbClr val="666666"/>
+                </a:solidFill>
+                <a:latin typeface="Arial"/>
+              </a:rPr>
+              <a:t>Module 02 — Data &amp; AI Engineering Track  |  الوحدة الثانية</a:t>
+            </a:r>
+          </a:p>
+        </p:txBody>
+      </p:sp>
+      <p:sp>
+        <p:nvSpPr>
+          <p:cNvPr id="10" name="TextBox 9"/>
+          <p:cNvSpPr txBox="1"/>
+          <p:nvPr/>
+        </p:nvSpPr>
+        <p:spPr>
+          <a:xfrm>
+            <a:off x="9601200" y="6400800"/>
+            <a:ext cx="1920240" cy="320040"/>
+          </a:xfrm>
+          <a:prstGeom prst="rect">
+            <a:avLst/>
+          </a:prstGeom>
+          <a:noFill/>
+        </p:spPr>
+        <p:txBody>
+          <a:bodyPr wrap="square">
+            <a:spAutoFit/>
+          </a:bodyPr>
+          <a:lstStyle/>
+          <a:p>
+            <a:pPr algn="l" rtl="0"/>
+            <a:r>
+              <a:rPr sz="1000" b="0">
+                <a:solidFill>
+                  <a:srgbClr val="666666"/>
                 </a:solidFill>
                 <a:latin typeface="Calibri"/>
               </a:rPr>
-              <a:t>يولّد محتوى جديدًا</a:t>
-            </a:r>
-          </a:p>
-          <a:p>
-            <a:pPr algn="ctr" rtl="0"/>
-            <a:r>
-              <a:rPr sz="1100">
-                <a:solidFill>
-                  <a:srgbClr val="666666"/>
-                </a:solidFill>
-                <a:latin typeface="Calibri"/>
-              </a:rPr>
-              <a:t>Generates new content</a:t>
-            </a:r>
-          </a:p>
-        </p:txBody>
-      </p:sp>
-      <p:sp>
-        <p:nvSpPr>
-          <p:cNvPr id="8" name="Right Arrow 7"/>
-          <p:cNvSpPr/>
-          <p:nvPr/>
-        </p:nvSpPr>
-        <p:spPr>
-          <a:xfrm>
-            <a:off x="5907024" y="1965960"/>
-            <a:ext cx="347472" cy="274320"/>
-          </a:xfrm>
-          <a:prstGeom prst="rightArrow">
-            <a:avLst/>
-          </a:prstGeom>
-          <a:solidFill>
-            <a:srgbClr val="1F4E79"/>
-          </a:solidFill>
-          <a:ln>
-            <a:noFill/>
-          </a:ln>
-          <a:effectLst/>
-        </p:spPr>
-        <p:style>
-          <a:lnRef idx="1">
-            <a:schemeClr val="accent1"/>
-          </a:lnRef>
-          <a:fillRef idx="3">
-            <a:schemeClr val="accent1"/>
-          </a:fillRef>
-          <a:effectRef idx="2">
-            <a:schemeClr val="accent1"/>
-          </a:effectRef>
-          <a:fontRef idx="minor">
-            <a:schemeClr val="lt1"/>
-          </a:fontRef>
-        </p:style>
-        <p:txBody>
-          <a:bodyPr rtlCol="0" anchor="ctr"/>
-          <a:lstStyle/>
-          <a:p>
-            <a:pPr algn="ctr"/>
-          </a:p>
-        </p:txBody>
-      </p:sp>
-      <p:sp>
-        <p:nvSpPr>
-          <p:cNvPr id="9" name="Rounded Rectangle 8"/>
-          <p:cNvSpPr/>
-          <p:nvPr/>
-        </p:nvSpPr>
-        <p:spPr>
-          <a:xfrm>
-            <a:off x="6309360" y="1645920"/>
-            <a:ext cx="2377440" cy="914400"/>
-          </a:xfrm>
-          <a:prstGeom prst="roundRect">
-            <a:avLst/>
-          </a:prstGeom>
-          <a:solidFill>
-            <a:srgbClr val="FDE9D9"/>
-          </a:solidFill>
-          <a:ln w="12700">
-            <a:solidFill>
-              <a:srgbClr val="1F4E79"/>
-            </a:solidFill>
-          </a:ln>
-          <a:effectLst/>
-        </p:spPr>
-        <p:style>
-          <a:lnRef idx="1">
-            <a:schemeClr val="accent1"/>
-          </a:lnRef>
-          <a:fillRef idx="3">
-            <a:schemeClr val="accent1"/>
-          </a:fillRef>
-          <a:effectRef idx="2">
-            <a:schemeClr val="accent1"/>
-          </a:effectRef>
-          <a:fontRef idx="minor">
-            <a:schemeClr val="lt1"/>
-          </a:fontRef>
-        </p:style>
-        <p:txBody>
-          <a:bodyPr rtlCol="0" anchor="ctr" wrap="square"/>
-          <a:lstStyle/>
-          <a:p>
-            <a:pPr algn="ctr" rtl="1"/>
-            <a:r>
-              <a:rPr sz="1800" b="1">
-                <a:solidFill>
-                  <a:srgbClr val="333333"/>
-                </a:solidFill>
-                <a:latin typeface="Calibri"/>
-              </a:rPr>
-              <a:t>الوكلاء Agents</a:t>
-            </a:r>
-          </a:p>
-        </p:txBody>
-      </p:sp>
-      <p:sp>
-        <p:nvSpPr>
-          <p:cNvPr id="10" name="Rounded Rectangle 9"/>
-          <p:cNvSpPr/>
-          <p:nvPr/>
-        </p:nvSpPr>
-        <p:spPr>
-          <a:xfrm>
-            <a:off x="6309360" y="2743200"/>
-            <a:ext cx="2377440" cy="1463040"/>
-          </a:xfrm>
-          <a:prstGeom prst="roundRect">
-            <a:avLst/>
-          </a:prstGeom>
-          <a:solidFill>
-            <a:srgbClr val="EDEDED"/>
-          </a:solidFill>
-          <a:ln w="12700">
-            <a:solidFill>
-              <a:srgbClr val="1F4E79"/>
-            </a:solidFill>
-          </a:ln>
-          <a:effectLst/>
-        </p:spPr>
-        <p:style>
-          <a:lnRef idx="1">
-            <a:schemeClr val="accent1"/>
-          </a:lnRef>
-          <a:fillRef idx="3">
-            <a:schemeClr val="accent1"/>
-          </a:fillRef>
-          <a:effectRef idx="2">
-            <a:schemeClr val="accent1"/>
-          </a:effectRef>
-          <a:fontRef idx="minor">
-            <a:schemeClr val="lt1"/>
-          </a:fontRef>
-        </p:style>
-        <p:txBody>
-          <a:bodyPr rtlCol="0" anchor="ctr" wrap="square"/>
-          <a:lstStyle/>
-          <a:p>
-            <a:pPr algn="ctr" rtl="1"/>
-            <a:r>
-              <a:rPr sz="1300" b="1">
-                <a:solidFill>
-                  <a:srgbClr val="333333"/>
-                </a:solidFill>
-                <a:latin typeface="Calibri"/>
-              </a:rPr>
-              <a:t>نية + استدعاء أدوات</a:t>
-            </a:r>
-          </a:p>
-          <a:p>
-            <a:pPr algn="ctr" rtl="0"/>
-            <a:r>
-              <a:rPr sz="1100">
-                <a:solidFill>
-                  <a:srgbClr val="666666"/>
-                </a:solidFill>
-                <a:latin typeface="Calibri"/>
-              </a:rPr>
-              <a:t>Intent + tool calls</a:t>
-            </a:r>
-          </a:p>
-        </p:txBody>
-      </p:sp>
-      <p:sp>
-        <p:nvSpPr>
-          <p:cNvPr id="11" name="Right Arrow 10"/>
-          <p:cNvSpPr/>
-          <p:nvPr/>
-        </p:nvSpPr>
-        <p:spPr>
-          <a:xfrm>
-            <a:off x="8741664" y="1965960"/>
-            <a:ext cx="347472" cy="274320"/>
-          </a:xfrm>
-          <a:prstGeom prst="rightArrow">
-            <a:avLst/>
-          </a:prstGeom>
-          <a:solidFill>
-            <a:srgbClr val="1F4E79"/>
-          </a:solidFill>
-          <a:ln>
-            <a:noFill/>
-          </a:ln>
-          <a:effectLst/>
-        </p:spPr>
-        <p:style>
-          <a:lnRef idx="1">
-            <a:schemeClr val="accent1"/>
-          </a:lnRef>
-          <a:fillRef idx="3">
-            <a:schemeClr val="accent1"/>
-          </a:fillRef>
-          <a:effectRef idx="2">
-            <a:schemeClr val="accent1"/>
-          </a:effectRef>
-          <a:fontRef idx="minor">
-            <a:schemeClr val="lt1"/>
-          </a:fontRef>
-        </p:style>
-        <p:txBody>
-          <a:bodyPr rtlCol="0" anchor="ctr"/>
-          <a:lstStyle/>
-          <a:p>
-            <a:pPr algn="ctr"/>
-          </a:p>
-        </p:txBody>
-      </p:sp>
-      <p:sp>
-        <p:nvSpPr>
-          <p:cNvPr id="12" name="Rounded Rectangle 11"/>
-          <p:cNvSpPr/>
-          <p:nvPr/>
-        </p:nvSpPr>
-        <p:spPr>
-          <a:xfrm>
-            <a:off x="9144000" y="1645920"/>
-            <a:ext cx="2377440" cy="914400"/>
-          </a:xfrm>
-          <a:prstGeom prst="roundRect">
-            <a:avLst/>
-          </a:prstGeom>
-          <a:solidFill>
-            <a:srgbClr val="E2EFDA"/>
-          </a:solidFill>
-          <a:ln w="12700">
-            <a:solidFill>
-              <a:srgbClr val="1F4E79"/>
-            </a:solidFill>
-          </a:ln>
-          <a:effectLst/>
-        </p:spPr>
-        <p:style>
-          <a:lnRef idx="1">
-            <a:schemeClr val="accent1"/>
-          </a:lnRef>
-          <a:fillRef idx="3">
-            <a:schemeClr val="accent1"/>
-          </a:fillRef>
-          <a:effectRef idx="2">
-            <a:schemeClr val="accent1"/>
-          </a:effectRef>
-          <a:fontRef idx="minor">
-            <a:schemeClr val="lt1"/>
-          </a:fontRef>
-        </p:style>
-        <p:txBody>
-          <a:bodyPr rtlCol="0" anchor="ctr" wrap="square"/>
-          <a:lstStyle/>
-          <a:p>
-            <a:pPr algn="ctr" rtl="1"/>
-            <a:r>
-              <a:rPr sz="1800" b="1">
-                <a:solidFill>
-                  <a:srgbClr val="333333"/>
-                </a:solidFill>
-                <a:latin typeface="Calibri"/>
-              </a:rPr>
-              <a:t>الأنظمة الوكيلة</a:t>
-            </a:r>
-          </a:p>
-        </p:txBody>
-      </p:sp>
-      <p:sp>
-        <p:nvSpPr>
-          <p:cNvPr id="13" name="Rounded Rectangle 12"/>
-          <p:cNvSpPr/>
-          <p:nvPr/>
-        </p:nvSpPr>
-        <p:spPr>
-          <a:xfrm>
-            <a:off x="9144000" y="2743200"/>
-            <a:ext cx="2377440" cy="1463040"/>
-          </a:xfrm>
-          <a:prstGeom prst="roundRect">
-            <a:avLst/>
-          </a:prstGeom>
-          <a:solidFill>
-            <a:srgbClr val="EDEDED"/>
-          </a:solidFill>
-          <a:ln w="12700">
-            <a:solidFill>
-              <a:srgbClr val="1F4E79"/>
-            </a:solidFill>
-          </a:ln>
-          <a:effectLst/>
-        </p:spPr>
-        <p:style>
-          <a:lnRef idx="1">
-            <a:schemeClr val="accent1"/>
-          </a:lnRef>
-          <a:fillRef idx="3">
-            <a:schemeClr val="accent1"/>
-          </a:fillRef>
-          <a:effectRef idx="2">
-            <a:schemeClr val="accent1"/>
-          </a:effectRef>
-          <a:fontRef idx="minor">
-            <a:schemeClr val="lt1"/>
-          </a:fontRef>
-        </p:style>
-        <p:txBody>
-          <a:bodyPr rtlCol="0" anchor="ctr" wrap="square"/>
-          <a:lstStyle/>
-          <a:p>
-            <a:pPr algn="ctr" rtl="1"/>
-            <a:r>
-              <a:rPr sz="1300" b="1">
-                <a:solidFill>
-                  <a:srgbClr val="333333"/>
-                </a:solidFill>
-                <a:latin typeface="Calibri"/>
-              </a:rPr>
-              <a:t>تخطيط وتنفيذ متعدد الخطوات</a:t>
-            </a:r>
-          </a:p>
-          <a:p>
-            <a:pPr algn="ctr" rtl="0"/>
-            <a:r>
-              <a:rPr sz="1100">
-                <a:solidFill>
-                  <a:srgbClr val="666666"/>
-                </a:solidFill>
-                <a:latin typeface="Calibri"/>
-              </a:rPr>
-              <a:t>Multi-step planning</a:t>
-            </a:r>
-          </a:p>
-        </p:txBody>
-      </p:sp>
-      <p:sp>
-        <p:nvSpPr>
-          <p:cNvPr id="14" name="TextBox 13"/>
-          <p:cNvSpPr txBox="1"/>
-          <p:nvPr/>
-        </p:nvSpPr>
-        <p:spPr>
-          <a:xfrm>
-            <a:off x="640080" y="6126480"/>
-            <a:ext cx="10972800" cy="548640"/>
-          </a:xfrm>
-          <a:prstGeom prst="rect">
-            <a:avLst/>
-          </a:prstGeom>
-          <a:noFill/>
-        </p:spPr>
-        <p:txBody>
-          <a:bodyPr wrap="square">
-            <a:spAutoFit/>
-          </a:bodyPr>
-          <a:lstStyle/>
-          <a:p>
-            <a:pPr algn="r" rtl="1"/>
-            <a:r>
-              <a:rPr sz="1400">
-                <a:solidFill>
-                  <a:srgbClr val="666666"/>
-                </a:solidFill>
-                <a:latin typeface="Calibri"/>
-              </a:rPr>
-              <a:t>Agentic RAG = بحث متجهي + جلب عبر الواجهات بذاكرة متجددة وتحقق قبل التسليم.</a:t>
-            </a:r>
-          </a:p>
-          <a:p>
-            <a:pPr algn="r" rtl="0"/>
-            <a:r>
-              <a:t>Agentic RAG = vector search + API fetching with refreshed memory and verification.</a:t>
+              <a:t>12_  •  12/12</a:t>
             </a:r>
           </a:p>
         </p:txBody>
@@ -4566,9 +4916,9 @@
                 <a:solidFill>
                   <a:srgbClr val="1F3B5C"/>
                 </a:solidFill>
-                <a:latin typeface="Calibri"/>
-              </a:rPr>
-              <a:t>MLOps والأدوات / MLOps &amp; Tools</a:t>
+                <a:latin typeface="Arial"/>
+              </a:rPr>
+              <a:t>أجندة العرض / Agenda</a:t>
             </a:r>
           </a:p>
         </p:txBody>
@@ -4596,34 +4946,345 @@
           <a:lstStyle/>
           <a:p>
             <a:pPr algn="r" rtl="1">
+              <a:spcBef>
+                <a:spcPts val="200"/>
+              </a:spcBef>
               <a:spcAft>
                 <a:spcPts val="1000"/>
               </a:spcAft>
             </a:pPr>
             <a:r>
-              <a:rPr sz="1900">
+              <a:rPr sz="1600">
                 <a:solidFill>
                   <a:srgbClr val="333333"/>
                 </a:solidFill>
-                <a:latin typeface="Calibri"/>
-              </a:rPr>
-              <a:t>• MLflow لتتبع التجارب والنماذج، Kubeflow لأتمتة الخطوط، DVC لإصدارات البيانات.</a:t>
-            </a:r>
-          </a:p>
-          <a:p>
-            <a:pPr algn="r" rtl="0">
+                <a:latin typeface="Arial"/>
+              </a:rPr>
+              <a:t>• V12 — أساسيات MLOps + تمهيد للمختبر</a:t>
+            </a:r>
+          </a:p>
+          <a:p>
+            <a:pPr algn="l" rtl="0">
+              <a:spcBef>
+                <a:spcPts val="200"/>
+              </a:spcBef>
               <a:spcAft>
                 <a:spcPts val="1000"/>
               </a:spcAft>
             </a:pPr>
             <a:r>
-              <a:rPr sz="1900">
+              <a:rPr sz="1300">
                 <a:solidFill>
                   <a:srgbClr val="666666"/>
                 </a:solidFill>
                 <a:latin typeface="Calibri"/>
               </a:rPr>
-              <a:t>   MLflow for tracking, Kubeflow for pipeline automation, DVC for data versioning.</a:t>
+              <a:t>• V12 — MLOps Fundamentals + Lab Prelude</a:t>
+            </a:r>
+          </a:p>
+          <a:p>
+            <a:pPr algn="r" rtl="1">
+              <a:spcBef>
+                <a:spcPts val="200"/>
+              </a:spcBef>
+              <a:spcAft>
+                <a:spcPts val="1000"/>
+              </a:spcAft>
+            </a:pPr>
+            <a:r>
+              <a:rPr sz="1600">
+                <a:solidFill>
+                  <a:srgbClr val="333333"/>
+                </a:solidFill>
+                <a:latin typeface="Arial"/>
+              </a:rPr>
+              <a:t>• MLOps والأدوات / MLOps &amp; Tools</a:t>
+            </a:r>
+          </a:p>
+          <a:p>
+            <a:pPr algn="r" rtl="1">
+              <a:spcBef>
+                <a:spcPts val="200"/>
+              </a:spcBef>
+              <a:spcAft>
+                <a:spcPts val="1000"/>
+              </a:spcAft>
+            </a:pPr>
+            <a:r>
+              <a:rPr sz="1600">
+                <a:solidFill>
+                  <a:srgbClr val="333333"/>
+                </a:solidFill>
+                <a:latin typeface="Arial"/>
+              </a:rPr>
+              <a:t>• تمييز المفاهيم / Concept Distinctions</a:t>
+            </a:r>
+          </a:p>
+          <a:p>
+            <a:pPr algn="r" rtl="1">
+              <a:spcBef>
+                <a:spcPts val="200"/>
+              </a:spcBef>
+              <a:spcAft>
+                <a:spcPts val="1000"/>
+              </a:spcAft>
+            </a:pPr>
+            <a:r>
+              <a:rPr sz="1600">
+                <a:solidFill>
+                  <a:srgbClr val="333333"/>
+                </a:solidFill>
+                <a:latin typeface="Arial"/>
+              </a:rPr>
+              <a:t>• RAG الوكيلي / Agentic RAG</a:t>
+            </a:r>
+          </a:p>
+          <a:p>
+            <a:pPr algn="r" rtl="1">
+              <a:spcBef>
+                <a:spcPts val="200"/>
+              </a:spcBef>
+              <a:spcAft>
+                <a:spcPts val="1000"/>
+              </a:spcAft>
+            </a:pPr>
+            <a:r>
+              <a:rPr sz="1600">
+                <a:solidFill>
+                  <a:srgbClr val="333333"/>
+                </a:solidFill>
+                <a:latin typeface="Arial"/>
+              </a:rPr>
+              <a:t>• التكلفة والأداء عمليًا / Practical Cost &amp; Performance</a:t>
+            </a:r>
+          </a:p>
+          <a:p>
+            <a:pPr algn="r" rtl="1">
+              <a:spcBef>
+                <a:spcPts val="200"/>
+              </a:spcBef>
+              <a:spcAft>
+                <a:spcPts val="1000"/>
+              </a:spcAft>
+            </a:pPr>
+            <a:r>
+              <a:rPr sz="1600">
+                <a:solidFill>
+                  <a:srgbClr val="333333"/>
+                </a:solidFill>
+                <a:latin typeface="Arial"/>
+              </a:rPr>
+              <a:t>• تمهيد للمختبر L03 / Lab Prelude</a:t>
+            </a:r>
+          </a:p>
+        </p:txBody>
+      </p:sp>
+      <p:sp>
+        <p:nvSpPr>
+          <p:cNvPr id="5" name="TextBox 4"/>
+          <p:cNvSpPr txBox="1"/>
+          <p:nvPr/>
+        </p:nvSpPr>
+        <p:spPr>
+          <a:xfrm>
+            <a:off x="640080" y="6400800"/>
+            <a:ext cx="8686800" cy="320040"/>
+          </a:xfrm>
+          <a:prstGeom prst="rect">
+            <a:avLst/>
+          </a:prstGeom>
+          <a:noFill/>
+        </p:spPr>
+        <p:txBody>
+          <a:bodyPr wrap="square">
+            <a:spAutoFit/>
+          </a:bodyPr>
+          <a:lstStyle/>
+          <a:p>
+            <a:pPr algn="r" rtl="1"/>
+            <a:r>
+              <a:rPr sz="1000" b="0">
+                <a:solidFill>
+                  <a:srgbClr val="666666"/>
+                </a:solidFill>
+                <a:latin typeface="Arial"/>
+              </a:rPr>
+              <a:t>Module 02 — Data &amp; AI Engineering Track  |  الوحدة الثانية</a:t>
+            </a:r>
+          </a:p>
+        </p:txBody>
+      </p:sp>
+      <p:sp>
+        <p:nvSpPr>
+          <p:cNvPr id="6" name="TextBox 5"/>
+          <p:cNvSpPr txBox="1"/>
+          <p:nvPr/>
+        </p:nvSpPr>
+        <p:spPr>
+          <a:xfrm>
+            <a:off x="9601200" y="6400800"/>
+            <a:ext cx="1920240" cy="320040"/>
+          </a:xfrm>
+          <a:prstGeom prst="rect">
+            <a:avLst/>
+          </a:prstGeom>
+          <a:noFill/>
+        </p:spPr>
+        <p:txBody>
+          <a:bodyPr wrap="square">
+            <a:spAutoFit/>
+          </a:bodyPr>
+          <a:lstStyle/>
+          <a:p>
+            <a:pPr algn="l" rtl="0"/>
+            <a:r>
+              <a:rPr sz="1000" b="0">
+                <a:solidFill>
+                  <a:srgbClr val="666666"/>
+                </a:solidFill>
+                <a:latin typeface="Calibri"/>
+              </a:rPr>
+              <a:t>V12  •  2/13</a:t>
+            </a:r>
+          </a:p>
+        </p:txBody>
+      </p:sp>
+      <p:sp>
+        <p:nvSpPr>
+          <p:cNvPr id="7" name="TextBox 6"/>
+          <p:cNvSpPr txBox="1"/>
+          <p:nvPr/>
+        </p:nvSpPr>
+        <p:spPr>
+          <a:xfrm>
+            <a:off x="640080" y="6400800"/>
+            <a:ext cx="8686800" cy="320040"/>
+          </a:xfrm>
+          <a:prstGeom prst="rect">
+            <a:avLst/>
+          </a:prstGeom>
+          <a:noFill/>
+        </p:spPr>
+        <p:txBody>
+          <a:bodyPr wrap="square">
+            <a:spAutoFit/>
+          </a:bodyPr>
+          <a:lstStyle/>
+          <a:p>
+            <a:pPr algn="r" rtl="1"/>
+            <a:r>
+              <a:rPr sz="1000" b="0">
+                <a:solidFill>
+                  <a:srgbClr val="666666"/>
+                </a:solidFill>
+                <a:latin typeface="Arial"/>
+              </a:rPr>
+              <a:t>Module 02 — Data &amp; AI Engineering Track  |  الوحدة الثانية</a:t>
+            </a:r>
+          </a:p>
+        </p:txBody>
+      </p:sp>
+      <p:sp>
+        <p:nvSpPr>
+          <p:cNvPr id="8" name="TextBox 7"/>
+          <p:cNvSpPr txBox="1"/>
+          <p:nvPr/>
+        </p:nvSpPr>
+        <p:spPr>
+          <a:xfrm>
+            <a:off x="9601200" y="6400800"/>
+            <a:ext cx="1920240" cy="320040"/>
+          </a:xfrm>
+          <a:prstGeom prst="rect">
+            <a:avLst/>
+          </a:prstGeom>
+          <a:noFill/>
+        </p:spPr>
+        <p:txBody>
+          <a:bodyPr wrap="square">
+            <a:spAutoFit/>
+          </a:bodyPr>
+          <a:lstStyle/>
+          <a:p>
+            <a:pPr algn="l" rtl="0"/>
+            <a:r>
+              <a:rPr sz="1000" b="0">
+                <a:solidFill>
+                  <a:srgbClr val="666666"/>
+                </a:solidFill>
+                <a:latin typeface="Calibri"/>
+              </a:rPr>
+              <a:t>12_  •  2/12</a:t>
+            </a:r>
+          </a:p>
+        </p:txBody>
+      </p:sp>
+      <p:sp>
+        <p:nvSpPr>
+          <p:cNvPr id="9" name="TextBox 8"/>
+          <p:cNvSpPr txBox="1"/>
+          <p:nvPr/>
+        </p:nvSpPr>
+        <p:spPr>
+          <a:xfrm>
+            <a:off x="640080" y="6400800"/>
+            <a:ext cx="8686800" cy="320040"/>
+          </a:xfrm>
+          <a:prstGeom prst="rect">
+            <a:avLst/>
+          </a:prstGeom>
+          <a:noFill/>
+        </p:spPr>
+        <p:txBody>
+          <a:bodyPr wrap="square">
+            <a:spAutoFit/>
+          </a:bodyPr>
+          <a:lstStyle/>
+          <a:p>
+            <a:pPr algn="r" rtl="1"/>
+            <a:r>
+              <a:rPr sz="1000" b="0">
+                <a:solidFill>
+                  <a:srgbClr val="666666"/>
+                </a:solidFill>
+                <a:latin typeface="Arial"/>
+              </a:rPr>
+              <a:t>Module 02 — Data &amp; AI Engineering Track  |  الوحدة الثانية</a:t>
+            </a:r>
+          </a:p>
+        </p:txBody>
+      </p:sp>
+      <p:sp>
+        <p:nvSpPr>
+          <p:cNvPr id="10" name="TextBox 9"/>
+          <p:cNvSpPr txBox="1"/>
+          <p:nvPr/>
+        </p:nvSpPr>
+        <p:spPr>
+          <a:xfrm>
+            <a:off x="9601200" y="6400800"/>
+            <a:ext cx="1920240" cy="320040"/>
+          </a:xfrm>
+          <a:prstGeom prst="rect">
+            <a:avLst/>
+          </a:prstGeom>
+          <a:noFill/>
+        </p:spPr>
+        <p:txBody>
+          <a:bodyPr wrap="square">
+            <a:spAutoFit/>
+          </a:bodyPr>
+          <a:lstStyle/>
+          <a:p>
+            <a:pPr algn="l" rtl="0"/>
+            <a:r>
+              <a:rPr sz="1000" b="0">
+                <a:solidFill>
+                  <a:srgbClr val="666666"/>
+                </a:solidFill>
+                <a:latin typeface="Calibri"/>
+              </a:rPr>
+              <a:t>12_  •  2/12</a:t>
             </a:r>
           </a:p>
         </p:txBody>
@@ -4728,9 +5389,9 @@
                 <a:solidFill>
                   <a:srgbClr val="1F3B5C"/>
                 </a:solidFill>
-                <a:latin typeface="Calibri"/>
-              </a:rPr>
-              <a:t>تمييز المفاهيم / Concept Distinctions</a:t>
+                <a:latin typeface="Arial"/>
+              </a:rPr>
+              <a:t>MLOps والأدوات / MLOps &amp; Tools</a:t>
             </a:r>
           </a:p>
         </p:txBody>
@@ -4758,6 +5419,9 @@
           <a:lstStyle/>
           <a:p>
             <a:pPr algn="r" rtl="1">
+              <a:spcBef>
+                <a:spcPts val="200"/>
+              </a:spcBef>
               <a:spcAft>
                 <a:spcPts val="1000"/>
               </a:spcAft>
@@ -4767,57 +5431,238 @@
                 <a:solidFill>
                   <a:srgbClr val="333333"/>
                 </a:solidFill>
-                <a:latin typeface="Calibri"/>
-              </a:rPr>
-              <a:t>• LLM: يرمّز النص ويتنبأ بالرموز التالية. الذكاء التوليدي: يولّد محتوى جديدًا (نص/صورة/صوت).</a:t>
-            </a:r>
-          </a:p>
-          <a:p>
-            <a:pPr algn="r" rtl="0">
+                <a:latin typeface="Arial"/>
+              </a:rPr>
+              <a:t>• MLflow لتتبع التجارب والنماذج، Kubeflow لأتمتة الخطوط، DVC لإصدارات البيانات.</a:t>
+            </a:r>
+          </a:p>
+          <a:p>
+            <a:pPr algn="l" rtl="0">
+              <a:spcBef>
+                <a:spcPts val="200"/>
+              </a:spcBef>
               <a:spcAft>
                 <a:spcPts val="1000"/>
               </a:spcAft>
             </a:pPr>
             <a:r>
-              <a:rPr sz="1900">
+              <a:rPr sz="1600">
                 <a:solidFill>
                   <a:srgbClr val="666666"/>
                 </a:solidFill>
                 <a:latin typeface="Calibri"/>
               </a:rPr>
-              <a:t>   LLM: predicts next tokens. Generative AI: generates new content (text/image/audio).</a:t>
-            </a:r>
-          </a:p>
-          <a:p>
-            <a:pPr algn="r" rtl="1">
-              <a:spcAft>
-                <a:spcPts val="1000"/>
-              </a:spcAft>
-            </a:pPr>
-            <a:r>
-              <a:rPr sz="1900">
-                <a:solidFill>
-                  <a:srgbClr val="333333"/>
+              <a:t>• MLflow for tracking, Kubeflow for pipeline automation, DVC for data versioning.</a:t>
+            </a:r>
+          </a:p>
+        </p:txBody>
+      </p:sp>
+      <p:sp>
+        <p:nvSpPr>
+          <p:cNvPr id="5" name="TextBox 4"/>
+          <p:cNvSpPr txBox="1"/>
+          <p:nvPr/>
+        </p:nvSpPr>
+        <p:spPr>
+          <a:xfrm>
+            <a:off x="640080" y="6400800"/>
+            <a:ext cx="8686800" cy="320040"/>
+          </a:xfrm>
+          <a:prstGeom prst="rect">
+            <a:avLst/>
+          </a:prstGeom>
+          <a:noFill/>
+        </p:spPr>
+        <p:txBody>
+          <a:bodyPr wrap="square">
+            <a:spAutoFit/>
+          </a:bodyPr>
+          <a:lstStyle/>
+          <a:p>
+            <a:pPr algn="r" rtl="1"/>
+            <a:r>
+              <a:rPr sz="1000" b="0">
+                <a:solidFill>
+                  <a:srgbClr val="666666"/>
+                </a:solidFill>
+                <a:latin typeface="Arial"/>
+              </a:rPr>
+              <a:t>Module 02 — Data &amp; AI Engineering Track  |  الوحدة الثانية</a:t>
+            </a:r>
+          </a:p>
+        </p:txBody>
+      </p:sp>
+      <p:sp>
+        <p:nvSpPr>
+          <p:cNvPr id="6" name="TextBox 5"/>
+          <p:cNvSpPr txBox="1"/>
+          <p:nvPr/>
+        </p:nvSpPr>
+        <p:spPr>
+          <a:xfrm>
+            <a:off x="9601200" y="6400800"/>
+            <a:ext cx="1920240" cy="320040"/>
+          </a:xfrm>
+          <a:prstGeom prst="rect">
+            <a:avLst/>
+          </a:prstGeom>
+          <a:noFill/>
+        </p:spPr>
+        <p:txBody>
+          <a:bodyPr wrap="square">
+            <a:spAutoFit/>
+          </a:bodyPr>
+          <a:lstStyle/>
+          <a:p>
+            <a:pPr algn="l" rtl="0"/>
+            <a:r>
+              <a:rPr sz="1000" b="0">
+                <a:solidFill>
+                  <a:srgbClr val="666666"/>
                 </a:solidFill>
                 <a:latin typeface="Calibri"/>
               </a:rPr>
-              <a:t>• الوكلاء: يكشفون النية ويستدعون الأدوات. الأنظمة الوكيلة: تخطيط ذاتي وتنفيذ متعدد الخطوات مع تقييم للنتائج.</a:t>
-            </a:r>
-          </a:p>
-          <a:p>
-            <a:pPr algn="r" rtl="0">
-              <a:spcAft>
-                <a:spcPts val="1000"/>
-              </a:spcAft>
-            </a:pPr>
-            <a:r>
-              <a:rPr sz="1900">
+              <a:t>V12  •  3/13</a:t>
+            </a:r>
+          </a:p>
+        </p:txBody>
+      </p:sp>
+      <p:sp>
+        <p:nvSpPr>
+          <p:cNvPr id="7" name="TextBox 6"/>
+          <p:cNvSpPr txBox="1"/>
+          <p:nvPr/>
+        </p:nvSpPr>
+        <p:spPr>
+          <a:xfrm>
+            <a:off x="640080" y="6400800"/>
+            <a:ext cx="8686800" cy="320040"/>
+          </a:xfrm>
+          <a:prstGeom prst="rect">
+            <a:avLst/>
+          </a:prstGeom>
+          <a:noFill/>
+        </p:spPr>
+        <p:txBody>
+          <a:bodyPr wrap="square">
+            <a:spAutoFit/>
+          </a:bodyPr>
+          <a:lstStyle/>
+          <a:p>
+            <a:pPr algn="r" rtl="1"/>
+            <a:r>
+              <a:rPr sz="1000" b="0">
+                <a:solidFill>
+                  <a:srgbClr val="666666"/>
+                </a:solidFill>
+                <a:latin typeface="Arial"/>
+              </a:rPr>
+              <a:t>Module 02 — Data &amp; AI Engineering Track  |  الوحدة الثانية</a:t>
+            </a:r>
+          </a:p>
+        </p:txBody>
+      </p:sp>
+      <p:sp>
+        <p:nvSpPr>
+          <p:cNvPr id="8" name="TextBox 7"/>
+          <p:cNvSpPr txBox="1"/>
+          <p:nvPr/>
+        </p:nvSpPr>
+        <p:spPr>
+          <a:xfrm>
+            <a:off x="9601200" y="6400800"/>
+            <a:ext cx="1920240" cy="320040"/>
+          </a:xfrm>
+          <a:prstGeom prst="rect">
+            <a:avLst/>
+          </a:prstGeom>
+          <a:noFill/>
+        </p:spPr>
+        <p:txBody>
+          <a:bodyPr wrap="square">
+            <a:spAutoFit/>
+          </a:bodyPr>
+          <a:lstStyle/>
+          <a:p>
+            <a:pPr algn="l" rtl="0"/>
+            <a:r>
+              <a:rPr sz="1000" b="0">
                 <a:solidFill>
                   <a:srgbClr val="666666"/>
                 </a:solidFill>
                 <a:latin typeface="Calibri"/>
               </a:rPr>
-              <a:t>   Agents: detect intent and call tools. Agentic AI: self-directed multi-step planning with outcome evaluation.</a:t>
+              <a:t>12_  •  3/12</a:t>
+            </a:r>
+          </a:p>
+        </p:txBody>
+      </p:sp>
+      <p:sp>
+        <p:nvSpPr>
+          <p:cNvPr id="9" name="TextBox 8"/>
+          <p:cNvSpPr txBox="1"/>
+          <p:nvPr/>
+        </p:nvSpPr>
+        <p:spPr>
+          <a:xfrm>
+            <a:off x="640080" y="6400800"/>
+            <a:ext cx="8686800" cy="320040"/>
+          </a:xfrm>
+          <a:prstGeom prst="rect">
+            <a:avLst/>
+          </a:prstGeom>
+          <a:noFill/>
+        </p:spPr>
+        <p:txBody>
+          <a:bodyPr wrap="square">
+            <a:spAutoFit/>
+          </a:bodyPr>
+          <a:lstStyle/>
+          <a:p>
+            <a:pPr algn="r" rtl="1"/>
+            <a:r>
+              <a:rPr sz="1000" b="0">
+                <a:solidFill>
+                  <a:srgbClr val="666666"/>
+                </a:solidFill>
+                <a:latin typeface="Arial"/>
+              </a:rPr>
+              <a:t>Module 02 — Data &amp; AI Engineering Track  |  الوحدة الثانية</a:t>
+            </a:r>
+          </a:p>
+        </p:txBody>
+      </p:sp>
+      <p:sp>
+        <p:nvSpPr>
+          <p:cNvPr id="10" name="TextBox 9"/>
+          <p:cNvSpPr txBox="1"/>
+          <p:nvPr/>
+        </p:nvSpPr>
+        <p:spPr>
+          <a:xfrm>
+            <a:off x="9601200" y="6400800"/>
+            <a:ext cx="1920240" cy="320040"/>
+          </a:xfrm>
+          <a:prstGeom prst="rect">
+            <a:avLst/>
+          </a:prstGeom>
+          <a:noFill/>
+        </p:spPr>
+        <p:txBody>
+          <a:bodyPr wrap="square">
+            <a:spAutoFit/>
+          </a:bodyPr>
+          <a:lstStyle/>
+          <a:p>
+            <a:pPr algn="l" rtl="0"/>
+            <a:r>
+              <a:rPr sz="1000" b="0">
+                <a:solidFill>
+                  <a:srgbClr val="666666"/>
+                </a:solidFill>
+                <a:latin typeface="Calibri"/>
+              </a:rPr>
+              <a:t>12_  •  3/12</a:t>
             </a:r>
           </a:p>
         </p:txBody>
@@ -4850,57 +5695,22 @@
       <p:grpSpPr/>
       <p:sp>
         <p:nvSpPr>
-          <p:cNvPr id="2" name="TextBox 1"/>
-          <p:cNvSpPr txBox="1"/>
-          <p:nvPr/>
-        </p:nvSpPr>
-        <p:spPr>
-          <a:xfrm>
-            <a:off x="640080" y="137160"/>
-            <a:ext cx="10972800" cy="640080"/>
-          </a:xfrm>
-          <a:prstGeom prst="rect">
-            <a:avLst/>
-          </a:prstGeom>
-          <a:noFill/>
-        </p:spPr>
-        <p:txBody>
-          <a:bodyPr wrap="none">
-            <a:spAutoFit/>
-          </a:bodyPr>
-          <a:lstStyle/>
-          <a:p>
-            <a:pPr algn="r" rtl="1"/>
-            <a:r>
-              <a:rPr sz="3000" b="1">
-                <a:solidFill>
-                  <a:srgbClr val="1F3B5C"/>
-                </a:solidFill>
-                <a:latin typeface="Calibri"/>
-              </a:rPr>
-              <a:t>من LLM إلى الأنظمة الوكيلة / From LLM to Agentic AI</a:t>
-            </a:r>
-          </a:p>
-        </p:txBody>
-      </p:sp>
-      <p:sp>
-        <p:nvSpPr>
-          <p:cNvPr id="3" name="Rounded Rectangle 2"/>
+          <p:cNvPr id="2" name="Rectangle 1"/>
           <p:cNvSpPr/>
           <p:nvPr/>
         </p:nvSpPr>
         <p:spPr>
           <a:xfrm>
-            <a:off x="640080" y="1645920"/>
-            <a:ext cx="2377440" cy="914400"/>
-          </a:xfrm>
-          <a:prstGeom prst="roundRect">
+            <a:off x="0" y="0"/>
+            <a:ext cx="12191695" cy="1005840"/>
+          </a:xfrm>
+          <a:prstGeom prst="rect">
             <a:avLst/>
           </a:prstGeom>
           <a:solidFill>
-            <a:srgbClr val="EDEDED"/>
+            <a:srgbClr val="FFFFFF"/>
           </a:solidFill>
-          <a:ln w="12700">
+          <a:ln w="25400">
             <a:solidFill>
               <a:srgbClr val="1F4E79"/>
             </a:solidFill>
@@ -4922,624 +5732,353 @@
           </a:fontRef>
         </p:style>
         <p:txBody>
-          <a:bodyPr rtlCol="0" anchor="ctr" wrap="square"/>
-          <a:lstStyle/>
-          <a:p>
-            <a:pPr algn="ctr" rtl="1"/>
-            <a:r>
-              <a:rPr sz="1800" b="1">
+          <a:bodyPr rtlCol="0" anchor="ctr"/>
+          <a:lstStyle/>
+          <a:p>
+            <a:pPr algn="ctr"/>
+          </a:p>
+        </p:txBody>
+      </p:sp>
+      <p:sp>
+        <p:nvSpPr>
+          <p:cNvPr id="3" name="TextBox 2"/>
+          <p:cNvSpPr txBox="1"/>
+          <p:nvPr/>
+        </p:nvSpPr>
+        <p:spPr>
+          <a:xfrm>
+            <a:off x="640080" y="182880"/>
+            <a:ext cx="10972800" cy="640080"/>
+          </a:xfrm>
+          <a:prstGeom prst="rect">
+            <a:avLst/>
+          </a:prstGeom>
+          <a:noFill/>
+        </p:spPr>
+        <p:txBody>
+          <a:bodyPr wrap="square">
+            <a:spAutoFit/>
+          </a:bodyPr>
+          <a:lstStyle/>
+          <a:p>
+            <a:pPr algn="r" rtl="1"/>
+            <a:r>
+              <a:rPr sz="3200" b="1">
+                <a:solidFill>
+                  <a:srgbClr val="1F3B5C"/>
+                </a:solidFill>
+                <a:latin typeface="Arial"/>
+              </a:rPr>
+              <a:t>تمييز المفاهيم / Concept Distinctions</a:t>
+            </a:r>
+          </a:p>
+        </p:txBody>
+      </p:sp>
+      <p:sp>
+        <p:nvSpPr>
+          <p:cNvPr id="4" name="TextBox 3"/>
+          <p:cNvSpPr txBox="1"/>
+          <p:nvPr/>
+        </p:nvSpPr>
+        <p:spPr>
+          <a:xfrm>
+            <a:off x="640080" y="1280160"/>
+            <a:ext cx="10972800" cy="5212080"/>
+          </a:xfrm>
+          <a:prstGeom prst="rect">
+            <a:avLst/>
+          </a:prstGeom>
+          <a:noFill/>
+        </p:spPr>
+        <p:txBody>
+          <a:bodyPr wrap="square">
+            <a:spAutoFit/>
+          </a:bodyPr>
+          <a:lstStyle/>
+          <a:p>
+            <a:pPr algn="r" rtl="1">
+              <a:spcBef>
+                <a:spcPts val="200"/>
+              </a:spcBef>
+              <a:spcAft>
+                <a:spcPts val="1000"/>
+              </a:spcAft>
+            </a:pPr>
+            <a:r>
+              <a:rPr sz="1900">
                 <a:solidFill>
                   <a:srgbClr val="333333"/>
                 </a:solidFill>
+                <a:latin typeface="Arial"/>
+              </a:rPr>
+              <a:t>• LLM: يرمّز النص ويتنبأ بالرموز التالية. الذكاء التوليدي: يولّد محتوى جديدًا (نص/صورة/صوت).</a:t>
+            </a:r>
+          </a:p>
+          <a:p>
+            <a:pPr algn="l" rtl="0">
+              <a:spcBef>
+                <a:spcPts val="200"/>
+              </a:spcBef>
+              <a:spcAft>
+                <a:spcPts val="1000"/>
+              </a:spcAft>
+            </a:pPr>
+            <a:r>
+              <a:rPr sz="1600">
+                <a:solidFill>
+                  <a:srgbClr val="666666"/>
+                </a:solidFill>
                 <a:latin typeface="Calibri"/>
               </a:rPr>
-              <a:t>LLM</a:t>
-            </a:r>
-          </a:p>
-        </p:txBody>
-      </p:sp>
-      <p:sp>
-        <p:nvSpPr>
-          <p:cNvPr id="4" name="Rounded Rectangle 3"/>
-          <p:cNvSpPr/>
-          <p:nvPr/>
-        </p:nvSpPr>
-        <p:spPr>
-          <a:xfrm>
-            <a:off x="640080" y="2743200"/>
-            <a:ext cx="2377440" cy="1463040"/>
-          </a:xfrm>
-          <a:prstGeom prst="roundRect">
-            <a:avLst/>
-          </a:prstGeom>
-          <a:solidFill>
-            <a:srgbClr val="EDEDED"/>
-          </a:solidFill>
-          <a:ln w="12700">
-            <a:solidFill>
-              <a:srgbClr val="1F4E79"/>
-            </a:solidFill>
-          </a:ln>
-          <a:effectLst/>
-        </p:spPr>
-        <p:style>
-          <a:lnRef idx="1">
-            <a:schemeClr val="accent1"/>
-          </a:lnRef>
-          <a:fillRef idx="3">
-            <a:schemeClr val="accent1"/>
-          </a:fillRef>
-          <a:effectRef idx="2">
-            <a:schemeClr val="accent1"/>
-          </a:effectRef>
-          <a:fontRef idx="minor">
-            <a:schemeClr val="lt1"/>
-          </a:fontRef>
-        </p:style>
-        <p:txBody>
-          <a:bodyPr rtlCol="0" anchor="ctr" wrap="square"/>
-          <a:lstStyle/>
-          <a:p>
-            <a:pPr algn="ctr" rtl="1"/>
-            <a:r>
-              <a:rPr sz="1300" b="1">
+              <a:t>• LLM: predicts next tokens. Generative AI: generates new content (text/image/audio).</a:t>
+            </a:r>
+          </a:p>
+          <a:p>
+            <a:pPr algn="r" rtl="1">
+              <a:spcBef>
+                <a:spcPts val="200"/>
+              </a:spcBef>
+              <a:spcAft>
+                <a:spcPts val="1000"/>
+              </a:spcAft>
+            </a:pPr>
+            <a:r>
+              <a:rPr sz="1900">
                 <a:solidFill>
                   <a:srgbClr val="333333"/>
                 </a:solidFill>
+                <a:latin typeface="Arial"/>
+              </a:rPr>
+              <a:t>• الوكلاء: يكشفون النية ويستدعون الأدوات. الأنظمة الوكيلة: تخطيط ذاتي وتنفيذ متعدد الخطوات مع تقييم للنتائج.</a:t>
+            </a:r>
+          </a:p>
+          <a:p>
+            <a:pPr algn="l" rtl="0">
+              <a:spcBef>
+                <a:spcPts val="200"/>
+              </a:spcBef>
+              <a:spcAft>
+                <a:spcPts val="1000"/>
+              </a:spcAft>
+            </a:pPr>
+            <a:r>
+              <a:rPr sz="1600">
+                <a:solidFill>
+                  <a:srgbClr val="666666"/>
+                </a:solidFill>
                 <a:latin typeface="Calibri"/>
               </a:rPr>
-              <a:t>تنبؤ بالرموز التالية</a:t>
-            </a:r>
-          </a:p>
-          <a:p>
-            <a:pPr algn="ctr" rtl="0"/>
-            <a:r>
-              <a:rPr sz="1100">
+              <a:t>• Agents: detect intent and call tools. Agentic AI: self-directed multi-step planning with outcome evaluation.</a:t>
+            </a:r>
+          </a:p>
+        </p:txBody>
+      </p:sp>
+      <p:sp>
+        <p:nvSpPr>
+          <p:cNvPr id="5" name="TextBox 4"/>
+          <p:cNvSpPr txBox="1"/>
+          <p:nvPr/>
+        </p:nvSpPr>
+        <p:spPr>
+          <a:xfrm>
+            <a:off x="640080" y="6400800"/>
+            <a:ext cx="8686800" cy="320040"/>
+          </a:xfrm>
+          <a:prstGeom prst="rect">
+            <a:avLst/>
+          </a:prstGeom>
+          <a:noFill/>
+        </p:spPr>
+        <p:txBody>
+          <a:bodyPr wrap="square">
+            <a:spAutoFit/>
+          </a:bodyPr>
+          <a:lstStyle/>
+          <a:p>
+            <a:pPr algn="r" rtl="1"/>
+            <a:r>
+              <a:rPr sz="1000" b="0">
+                <a:solidFill>
+                  <a:srgbClr val="666666"/>
+                </a:solidFill>
+                <a:latin typeface="Arial"/>
+              </a:rPr>
+              <a:t>Module 02 — Data &amp; AI Engineering Track  |  الوحدة الثانية</a:t>
+            </a:r>
+          </a:p>
+        </p:txBody>
+      </p:sp>
+      <p:sp>
+        <p:nvSpPr>
+          <p:cNvPr id="6" name="TextBox 5"/>
+          <p:cNvSpPr txBox="1"/>
+          <p:nvPr/>
+        </p:nvSpPr>
+        <p:spPr>
+          <a:xfrm>
+            <a:off x="9601200" y="6400800"/>
+            <a:ext cx="1920240" cy="320040"/>
+          </a:xfrm>
+          <a:prstGeom prst="rect">
+            <a:avLst/>
+          </a:prstGeom>
+          <a:noFill/>
+        </p:spPr>
+        <p:txBody>
+          <a:bodyPr wrap="square">
+            <a:spAutoFit/>
+          </a:bodyPr>
+          <a:lstStyle/>
+          <a:p>
+            <a:pPr algn="l" rtl="0"/>
+            <a:r>
+              <a:rPr sz="1000" b="0">
                 <a:solidFill>
                   <a:srgbClr val="666666"/>
                 </a:solidFill>
                 <a:latin typeface="Calibri"/>
               </a:rPr>
-              <a:t>Predicts next tokens</a:t>
-            </a:r>
-          </a:p>
-        </p:txBody>
-      </p:sp>
-      <p:sp>
-        <p:nvSpPr>
-          <p:cNvPr id="5" name="Right Arrow 4"/>
-          <p:cNvSpPr/>
-          <p:nvPr/>
-        </p:nvSpPr>
-        <p:spPr>
-          <a:xfrm>
-            <a:off x="3072384" y="1965960"/>
-            <a:ext cx="347472" cy="274320"/>
-          </a:xfrm>
-          <a:prstGeom prst="rightArrow">
-            <a:avLst/>
-          </a:prstGeom>
-          <a:solidFill>
-            <a:srgbClr val="1F4E79"/>
-          </a:solidFill>
-          <a:ln>
-            <a:noFill/>
-          </a:ln>
-          <a:effectLst/>
-        </p:spPr>
-        <p:style>
-          <a:lnRef idx="1">
-            <a:schemeClr val="accent1"/>
-          </a:lnRef>
-          <a:fillRef idx="3">
-            <a:schemeClr val="accent1"/>
-          </a:fillRef>
-          <a:effectRef idx="2">
-            <a:schemeClr val="accent1"/>
-          </a:effectRef>
-          <a:fontRef idx="minor">
-            <a:schemeClr val="lt1"/>
-          </a:fontRef>
-        </p:style>
-        <p:txBody>
-          <a:bodyPr rtlCol="0" anchor="ctr"/>
-          <a:lstStyle/>
-          <a:p>
-            <a:pPr algn="ctr"/>
-          </a:p>
-        </p:txBody>
-      </p:sp>
-      <p:sp>
-        <p:nvSpPr>
-          <p:cNvPr id="6" name="Rounded Rectangle 5"/>
-          <p:cNvSpPr/>
-          <p:nvPr/>
-        </p:nvSpPr>
-        <p:spPr>
-          <a:xfrm>
-            <a:off x="3474720" y="1645920"/>
-            <a:ext cx="2377440" cy="914400"/>
-          </a:xfrm>
-          <a:prstGeom prst="roundRect">
-            <a:avLst/>
-          </a:prstGeom>
-          <a:solidFill>
-            <a:srgbClr val="DCE6F1"/>
-          </a:solidFill>
-          <a:ln w="12700">
-            <a:solidFill>
-              <a:srgbClr val="1F4E79"/>
-            </a:solidFill>
-          </a:ln>
-          <a:effectLst/>
-        </p:spPr>
-        <p:style>
-          <a:lnRef idx="1">
-            <a:schemeClr val="accent1"/>
-          </a:lnRef>
-          <a:fillRef idx="3">
-            <a:schemeClr val="accent1"/>
-          </a:fillRef>
-          <a:effectRef idx="2">
-            <a:schemeClr val="accent1"/>
-          </a:effectRef>
-          <a:fontRef idx="minor">
-            <a:schemeClr val="lt1"/>
-          </a:fontRef>
-        </p:style>
-        <p:txBody>
-          <a:bodyPr rtlCol="0" anchor="ctr" wrap="square"/>
-          <a:lstStyle/>
-          <a:p>
-            <a:pPr algn="ctr" rtl="1"/>
-            <a:r>
-              <a:rPr sz="1800" b="1">
-                <a:solidFill>
-                  <a:srgbClr val="333333"/>
+              <a:t>V12  •  4/13</a:t>
+            </a:r>
+          </a:p>
+        </p:txBody>
+      </p:sp>
+      <p:sp>
+        <p:nvSpPr>
+          <p:cNvPr id="7" name="TextBox 6"/>
+          <p:cNvSpPr txBox="1"/>
+          <p:nvPr/>
+        </p:nvSpPr>
+        <p:spPr>
+          <a:xfrm>
+            <a:off x="640080" y="6400800"/>
+            <a:ext cx="8686800" cy="320040"/>
+          </a:xfrm>
+          <a:prstGeom prst="rect">
+            <a:avLst/>
+          </a:prstGeom>
+          <a:noFill/>
+        </p:spPr>
+        <p:txBody>
+          <a:bodyPr wrap="square">
+            <a:spAutoFit/>
+          </a:bodyPr>
+          <a:lstStyle/>
+          <a:p>
+            <a:pPr algn="r" rtl="1"/>
+            <a:r>
+              <a:rPr sz="1000" b="0">
+                <a:solidFill>
+                  <a:srgbClr val="666666"/>
+                </a:solidFill>
+                <a:latin typeface="Arial"/>
+              </a:rPr>
+              <a:t>Module 02 — Data &amp; AI Engineering Track  |  الوحدة الثانية</a:t>
+            </a:r>
+          </a:p>
+        </p:txBody>
+      </p:sp>
+      <p:sp>
+        <p:nvSpPr>
+          <p:cNvPr id="8" name="TextBox 7"/>
+          <p:cNvSpPr txBox="1"/>
+          <p:nvPr/>
+        </p:nvSpPr>
+        <p:spPr>
+          <a:xfrm>
+            <a:off x="9601200" y="6400800"/>
+            <a:ext cx="1920240" cy="320040"/>
+          </a:xfrm>
+          <a:prstGeom prst="rect">
+            <a:avLst/>
+          </a:prstGeom>
+          <a:noFill/>
+        </p:spPr>
+        <p:txBody>
+          <a:bodyPr wrap="square">
+            <a:spAutoFit/>
+          </a:bodyPr>
+          <a:lstStyle/>
+          <a:p>
+            <a:pPr algn="l" rtl="0"/>
+            <a:r>
+              <a:rPr sz="1000" b="0">
+                <a:solidFill>
+                  <a:srgbClr val="666666"/>
                 </a:solidFill>
                 <a:latin typeface="Calibri"/>
               </a:rPr>
-              <a:t>الذكاء التوليدي</a:t>
-            </a:r>
-          </a:p>
-        </p:txBody>
-      </p:sp>
-      <p:sp>
-        <p:nvSpPr>
-          <p:cNvPr id="7" name="Rounded Rectangle 6"/>
-          <p:cNvSpPr/>
-          <p:nvPr/>
-        </p:nvSpPr>
-        <p:spPr>
-          <a:xfrm>
-            <a:off x="3474720" y="2743200"/>
-            <a:ext cx="2377440" cy="1463040"/>
-          </a:xfrm>
-          <a:prstGeom prst="roundRect">
-            <a:avLst/>
-          </a:prstGeom>
-          <a:solidFill>
-            <a:srgbClr val="EDEDED"/>
-          </a:solidFill>
-          <a:ln w="12700">
-            <a:solidFill>
-              <a:srgbClr val="1F4E79"/>
-            </a:solidFill>
-          </a:ln>
-          <a:effectLst/>
-        </p:spPr>
-        <p:style>
-          <a:lnRef idx="1">
-            <a:schemeClr val="accent1"/>
-          </a:lnRef>
-          <a:fillRef idx="3">
-            <a:schemeClr val="accent1"/>
-          </a:fillRef>
-          <a:effectRef idx="2">
-            <a:schemeClr val="accent1"/>
-          </a:effectRef>
-          <a:fontRef idx="minor">
-            <a:schemeClr val="lt1"/>
-          </a:fontRef>
-        </p:style>
-        <p:txBody>
-          <a:bodyPr rtlCol="0" anchor="ctr" wrap="square"/>
-          <a:lstStyle/>
-          <a:p>
-            <a:pPr algn="ctr" rtl="1"/>
-            <a:r>
-              <a:rPr sz="1300" b="1">
-                <a:solidFill>
-                  <a:srgbClr val="333333"/>
+              <a:t>12_  •  4/12</a:t>
+            </a:r>
+          </a:p>
+        </p:txBody>
+      </p:sp>
+      <p:sp>
+        <p:nvSpPr>
+          <p:cNvPr id="9" name="TextBox 8"/>
+          <p:cNvSpPr txBox="1"/>
+          <p:nvPr/>
+        </p:nvSpPr>
+        <p:spPr>
+          <a:xfrm>
+            <a:off x="640080" y="6400800"/>
+            <a:ext cx="8686800" cy="320040"/>
+          </a:xfrm>
+          <a:prstGeom prst="rect">
+            <a:avLst/>
+          </a:prstGeom>
+          <a:noFill/>
+        </p:spPr>
+        <p:txBody>
+          <a:bodyPr wrap="square">
+            <a:spAutoFit/>
+          </a:bodyPr>
+          <a:lstStyle/>
+          <a:p>
+            <a:pPr algn="r" rtl="1"/>
+            <a:r>
+              <a:rPr sz="1000" b="0">
+                <a:solidFill>
+                  <a:srgbClr val="666666"/>
+                </a:solidFill>
+                <a:latin typeface="Arial"/>
+              </a:rPr>
+              <a:t>Module 02 — Data &amp; AI Engineering Track  |  الوحدة الثانية</a:t>
+            </a:r>
+          </a:p>
+        </p:txBody>
+      </p:sp>
+      <p:sp>
+        <p:nvSpPr>
+          <p:cNvPr id="10" name="TextBox 9"/>
+          <p:cNvSpPr txBox="1"/>
+          <p:nvPr/>
+        </p:nvSpPr>
+        <p:spPr>
+          <a:xfrm>
+            <a:off x="9601200" y="6400800"/>
+            <a:ext cx="1920240" cy="320040"/>
+          </a:xfrm>
+          <a:prstGeom prst="rect">
+            <a:avLst/>
+          </a:prstGeom>
+          <a:noFill/>
+        </p:spPr>
+        <p:txBody>
+          <a:bodyPr wrap="square">
+            <a:spAutoFit/>
+          </a:bodyPr>
+          <a:lstStyle/>
+          <a:p>
+            <a:pPr algn="l" rtl="0"/>
+            <a:r>
+              <a:rPr sz="1000" b="0">
+                <a:solidFill>
+                  <a:srgbClr val="666666"/>
                 </a:solidFill>
                 <a:latin typeface="Calibri"/>
               </a:rPr>
-              <a:t>يولّد محتوى جديدًا</a:t>
-            </a:r>
-          </a:p>
-          <a:p>
-            <a:pPr algn="ctr" rtl="0"/>
-            <a:r>
-              <a:rPr sz="1100">
-                <a:solidFill>
-                  <a:srgbClr val="666666"/>
-                </a:solidFill>
-                <a:latin typeface="Calibri"/>
-              </a:rPr>
-              <a:t>Generates new content</a:t>
-            </a:r>
-          </a:p>
-        </p:txBody>
-      </p:sp>
-      <p:sp>
-        <p:nvSpPr>
-          <p:cNvPr id="8" name="Right Arrow 7"/>
-          <p:cNvSpPr/>
-          <p:nvPr/>
-        </p:nvSpPr>
-        <p:spPr>
-          <a:xfrm>
-            <a:off x="5907024" y="1965960"/>
-            <a:ext cx="347472" cy="274320"/>
-          </a:xfrm>
-          <a:prstGeom prst="rightArrow">
-            <a:avLst/>
-          </a:prstGeom>
-          <a:solidFill>
-            <a:srgbClr val="1F4E79"/>
-          </a:solidFill>
-          <a:ln>
-            <a:noFill/>
-          </a:ln>
-          <a:effectLst/>
-        </p:spPr>
-        <p:style>
-          <a:lnRef idx="1">
-            <a:schemeClr val="accent1"/>
-          </a:lnRef>
-          <a:fillRef idx="3">
-            <a:schemeClr val="accent1"/>
-          </a:fillRef>
-          <a:effectRef idx="2">
-            <a:schemeClr val="accent1"/>
-          </a:effectRef>
-          <a:fontRef idx="minor">
-            <a:schemeClr val="lt1"/>
-          </a:fontRef>
-        </p:style>
-        <p:txBody>
-          <a:bodyPr rtlCol="0" anchor="ctr"/>
-          <a:lstStyle/>
-          <a:p>
-            <a:pPr algn="ctr"/>
-          </a:p>
-        </p:txBody>
-      </p:sp>
-      <p:sp>
-        <p:nvSpPr>
-          <p:cNvPr id="9" name="Rounded Rectangle 8"/>
-          <p:cNvSpPr/>
-          <p:nvPr/>
-        </p:nvSpPr>
-        <p:spPr>
-          <a:xfrm>
-            <a:off x="6309360" y="1645920"/>
-            <a:ext cx="2377440" cy="914400"/>
-          </a:xfrm>
-          <a:prstGeom prst="roundRect">
-            <a:avLst/>
-          </a:prstGeom>
-          <a:solidFill>
-            <a:srgbClr val="FDE9D9"/>
-          </a:solidFill>
-          <a:ln w="12700">
-            <a:solidFill>
-              <a:srgbClr val="1F4E79"/>
-            </a:solidFill>
-          </a:ln>
-          <a:effectLst/>
-        </p:spPr>
-        <p:style>
-          <a:lnRef idx="1">
-            <a:schemeClr val="accent1"/>
-          </a:lnRef>
-          <a:fillRef idx="3">
-            <a:schemeClr val="accent1"/>
-          </a:fillRef>
-          <a:effectRef idx="2">
-            <a:schemeClr val="accent1"/>
-          </a:effectRef>
-          <a:fontRef idx="minor">
-            <a:schemeClr val="lt1"/>
-          </a:fontRef>
-        </p:style>
-        <p:txBody>
-          <a:bodyPr rtlCol="0" anchor="ctr" wrap="square"/>
-          <a:lstStyle/>
-          <a:p>
-            <a:pPr algn="ctr" rtl="1"/>
-            <a:r>
-              <a:rPr sz="1800" b="1">
-                <a:solidFill>
-                  <a:srgbClr val="333333"/>
-                </a:solidFill>
-                <a:latin typeface="Calibri"/>
-              </a:rPr>
-              <a:t>الوكلاء Agents</a:t>
-            </a:r>
-          </a:p>
-        </p:txBody>
-      </p:sp>
-      <p:sp>
-        <p:nvSpPr>
-          <p:cNvPr id="10" name="Rounded Rectangle 9"/>
-          <p:cNvSpPr/>
-          <p:nvPr/>
-        </p:nvSpPr>
-        <p:spPr>
-          <a:xfrm>
-            <a:off x="6309360" y="2743200"/>
-            <a:ext cx="2377440" cy="1463040"/>
-          </a:xfrm>
-          <a:prstGeom prst="roundRect">
-            <a:avLst/>
-          </a:prstGeom>
-          <a:solidFill>
-            <a:srgbClr val="EDEDED"/>
-          </a:solidFill>
-          <a:ln w="12700">
-            <a:solidFill>
-              <a:srgbClr val="1F4E79"/>
-            </a:solidFill>
-          </a:ln>
-          <a:effectLst/>
-        </p:spPr>
-        <p:style>
-          <a:lnRef idx="1">
-            <a:schemeClr val="accent1"/>
-          </a:lnRef>
-          <a:fillRef idx="3">
-            <a:schemeClr val="accent1"/>
-          </a:fillRef>
-          <a:effectRef idx="2">
-            <a:schemeClr val="accent1"/>
-          </a:effectRef>
-          <a:fontRef idx="minor">
-            <a:schemeClr val="lt1"/>
-          </a:fontRef>
-        </p:style>
-        <p:txBody>
-          <a:bodyPr rtlCol="0" anchor="ctr" wrap="square"/>
-          <a:lstStyle/>
-          <a:p>
-            <a:pPr algn="ctr" rtl="1"/>
-            <a:r>
-              <a:rPr sz="1300" b="1">
-                <a:solidFill>
-                  <a:srgbClr val="333333"/>
-                </a:solidFill>
-                <a:latin typeface="Calibri"/>
-              </a:rPr>
-              <a:t>نية + استدعاء أدوات</a:t>
-            </a:r>
-          </a:p>
-          <a:p>
-            <a:pPr algn="ctr" rtl="0"/>
-            <a:r>
-              <a:rPr sz="1100">
-                <a:solidFill>
-                  <a:srgbClr val="666666"/>
-                </a:solidFill>
-                <a:latin typeface="Calibri"/>
-              </a:rPr>
-              <a:t>Intent + tool calls</a:t>
-            </a:r>
-          </a:p>
-        </p:txBody>
-      </p:sp>
-      <p:sp>
-        <p:nvSpPr>
-          <p:cNvPr id="11" name="Right Arrow 10"/>
-          <p:cNvSpPr/>
-          <p:nvPr/>
-        </p:nvSpPr>
-        <p:spPr>
-          <a:xfrm>
-            <a:off x="8741664" y="1965960"/>
-            <a:ext cx="347472" cy="274320"/>
-          </a:xfrm>
-          <a:prstGeom prst="rightArrow">
-            <a:avLst/>
-          </a:prstGeom>
-          <a:solidFill>
-            <a:srgbClr val="1F4E79"/>
-          </a:solidFill>
-          <a:ln>
-            <a:noFill/>
-          </a:ln>
-          <a:effectLst/>
-        </p:spPr>
-        <p:style>
-          <a:lnRef idx="1">
-            <a:schemeClr val="accent1"/>
-          </a:lnRef>
-          <a:fillRef idx="3">
-            <a:schemeClr val="accent1"/>
-          </a:fillRef>
-          <a:effectRef idx="2">
-            <a:schemeClr val="accent1"/>
-          </a:effectRef>
-          <a:fontRef idx="minor">
-            <a:schemeClr val="lt1"/>
-          </a:fontRef>
-        </p:style>
-        <p:txBody>
-          <a:bodyPr rtlCol="0" anchor="ctr"/>
-          <a:lstStyle/>
-          <a:p>
-            <a:pPr algn="ctr"/>
-          </a:p>
-        </p:txBody>
-      </p:sp>
-      <p:sp>
-        <p:nvSpPr>
-          <p:cNvPr id="12" name="Rounded Rectangle 11"/>
-          <p:cNvSpPr/>
-          <p:nvPr/>
-        </p:nvSpPr>
-        <p:spPr>
-          <a:xfrm>
-            <a:off x="9144000" y="1645920"/>
-            <a:ext cx="2377440" cy="914400"/>
-          </a:xfrm>
-          <a:prstGeom prst="roundRect">
-            <a:avLst/>
-          </a:prstGeom>
-          <a:solidFill>
-            <a:srgbClr val="E2EFDA"/>
-          </a:solidFill>
-          <a:ln w="12700">
-            <a:solidFill>
-              <a:srgbClr val="1F4E79"/>
-            </a:solidFill>
-          </a:ln>
-          <a:effectLst/>
-        </p:spPr>
-        <p:style>
-          <a:lnRef idx="1">
-            <a:schemeClr val="accent1"/>
-          </a:lnRef>
-          <a:fillRef idx="3">
-            <a:schemeClr val="accent1"/>
-          </a:fillRef>
-          <a:effectRef idx="2">
-            <a:schemeClr val="accent1"/>
-          </a:effectRef>
-          <a:fontRef idx="minor">
-            <a:schemeClr val="lt1"/>
-          </a:fontRef>
-        </p:style>
-        <p:txBody>
-          <a:bodyPr rtlCol="0" anchor="ctr" wrap="square"/>
-          <a:lstStyle/>
-          <a:p>
-            <a:pPr algn="ctr" rtl="1"/>
-            <a:r>
-              <a:rPr sz="1800" b="1">
-                <a:solidFill>
-                  <a:srgbClr val="333333"/>
-                </a:solidFill>
-                <a:latin typeface="Calibri"/>
-              </a:rPr>
-              <a:t>الأنظمة الوكيلة</a:t>
-            </a:r>
-          </a:p>
-        </p:txBody>
-      </p:sp>
-      <p:sp>
-        <p:nvSpPr>
-          <p:cNvPr id="13" name="Rounded Rectangle 12"/>
-          <p:cNvSpPr/>
-          <p:nvPr/>
-        </p:nvSpPr>
-        <p:spPr>
-          <a:xfrm>
-            <a:off x="9144000" y="2743200"/>
-            <a:ext cx="2377440" cy="1463040"/>
-          </a:xfrm>
-          <a:prstGeom prst="roundRect">
-            <a:avLst/>
-          </a:prstGeom>
-          <a:solidFill>
-            <a:srgbClr val="EDEDED"/>
-          </a:solidFill>
-          <a:ln w="12700">
-            <a:solidFill>
-              <a:srgbClr val="1F4E79"/>
-            </a:solidFill>
-          </a:ln>
-          <a:effectLst/>
-        </p:spPr>
-        <p:style>
-          <a:lnRef idx="1">
-            <a:schemeClr val="accent1"/>
-          </a:lnRef>
-          <a:fillRef idx="3">
-            <a:schemeClr val="accent1"/>
-          </a:fillRef>
-          <a:effectRef idx="2">
-            <a:schemeClr val="accent1"/>
-          </a:effectRef>
-          <a:fontRef idx="minor">
-            <a:schemeClr val="lt1"/>
-          </a:fontRef>
-        </p:style>
-        <p:txBody>
-          <a:bodyPr rtlCol="0" anchor="ctr" wrap="square"/>
-          <a:lstStyle/>
-          <a:p>
-            <a:pPr algn="ctr" rtl="1"/>
-            <a:r>
-              <a:rPr sz="1300" b="1">
-                <a:solidFill>
-                  <a:srgbClr val="333333"/>
-                </a:solidFill>
-                <a:latin typeface="Calibri"/>
-              </a:rPr>
-              <a:t>تخطيط وتنفيذ متعدد الخطوات</a:t>
-            </a:r>
-          </a:p>
-          <a:p>
-            <a:pPr algn="ctr" rtl="0"/>
-            <a:r>
-              <a:rPr sz="1100">
-                <a:solidFill>
-                  <a:srgbClr val="666666"/>
-                </a:solidFill>
-                <a:latin typeface="Calibri"/>
-              </a:rPr>
-              <a:t>Multi-step planning</a:t>
-            </a:r>
-          </a:p>
-        </p:txBody>
-      </p:sp>
-      <p:sp>
-        <p:nvSpPr>
-          <p:cNvPr id="14" name="TextBox 13"/>
-          <p:cNvSpPr txBox="1"/>
-          <p:nvPr/>
-        </p:nvSpPr>
-        <p:spPr>
-          <a:xfrm>
-            <a:off x="640080" y="6126480"/>
-            <a:ext cx="10972800" cy="548640"/>
-          </a:xfrm>
-          <a:prstGeom prst="rect">
-            <a:avLst/>
-          </a:prstGeom>
-          <a:noFill/>
-        </p:spPr>
-        <p:txBody>
-          <a:bodyPr wrap="square">
-            <a:spAutoFit/>
-          </a:bodyPr>
-          <a:lstStyle/>
-          <a:p>
-            <a:pPr algn="r" rtl="1"/>
-            <a:r>
-              <a:rPr sz="1400">
-                <a:solidFill>
-                  <a:srgbClr val="666666"/>
-                </a:solidFill>
-                <a:latin typeface="Calibri"/>
-              </a:rPr>
-              <a:t>Agentic RAG = بحث متجهي + جلب عبر الواجهات بذاكرة متجددة وتحقق قبل التسليم.</a:t>
-            </a:r>
-          </a:p>
-          <a:p>
-            <a:pPr algn="r" rtl="0"/>
-            <a:r>
-              <a:t>Agentic RAG = vector search + API fetching with refreshed memory and verification.</a:t>
+              <a:t>12_  •  4/12</a:t>
             </a:r>
           </a:p>
         </p:txBody>
@@ -5572,22 +6111,57 @@
       <p:grpSpPr/>
       <p:sp>
         <p:nvSpPr>
-          <p:cNvPr id="2" name="Rectangle 1"/>
+          <p:cNvPr id="2" name="TextBox 1"/>
+          <p:cNvSpPr txBox="1"/>
+          <p:nvPr/>
+        </p:nvSpPr>
+        <p:spPr>
+          <a:xfrm>
+            <a:off x="640080" y="137160"/>
+            <a:ext cx="10972800" cy="640080"/>
+          </a:xfrm>
+          <a:prstGeom prst="rect">
+            <a:avLst/>
+          </a:prstGeom>
+          <a:noFill/>
+        </p:spPr>
+        <p:txBody>
+          <a:bodyPr wrap="none">
+            <a:spAutoFit/>
+          </a:bodyPr>
+          <a:lstStyle/>
+          <a:p>
+            <a:pPr algn="r" rtl="1"/>
+            <a:r>
+              <a:rPr sz="3000" b="1">
+                <a:solidFill>
+                  <a:srgbClr val="1F3B5C"/>
+                </a:solidFill>
+                <a:latin typeface="Arial"/>
+              </a:rPr>
+              <a:t>من LLM إلى الأنظمة الوكيلة / From LLM to Agentic AI</a:t>
+            </a:r>
+          </a:p>
+        </p:txBody>
+      </p:sp>
+      <p:sp>
+        <p:nvSpPr>
+          <p:cNvPr id="3" name="Rounded Rectangle 2"/>
           <p:cNvSpPr/>
           <p:nvPr/>
         </p:nvSpPr>
         <p:spPr>
           <a:xfrm>
-            <a:off x="0" y="0"/>
-            <a:ext cx="12191695" cy="1005840"/>
-          </a:xfrm>
-          <a:prstGeom prst="rect">
+            <a:off x="640080" y="1645920"/>
+            <a:ext cx="2377440" cy="914400"/>
+          </a:xfrm>
+          <a:prstGeom prst="roundRect">
             <a:avLst/>
           </a:prstGeom>
           <a:solidFill>
-            <a:srgbClr val="FFFFFF"/>
+            <a:srgbClr val="EDEDED"/>
           </a:solidFill>
-          <a:ln w="25400">
+          <a:ln w="12700">
             <a:solidFill>
               <a:srgbClr val="1F4E79"/>
             </a:solidFill>
@@ -5609,6 +6183,126 @@
           </a:fontRef>
         </p:style>
         <p:txBody>
+          <a:bodyPr rtlCol="0" anchor="ctr" wrap="square"/>
+          <a:lstStyle/>
+          <a:p>
+            <a:pPr algn="ctr" rtl="1"/>
+            <a:r>
+              <a:rPr sz="1800" b="1">
+                <a:solidFill>
+                  <a:srgbClr val="333333"/>
+                </a:solidFill>
+                <a:latin typeface="Arial"/>
+              </a:rPr>
+              <a:t>LLM</a:t>
+            </a:r>
+          </a:p>
+        </p:txBody>
+      </p:sp>
+      <p:sp>
+        <p:nvSpPr>
+          <p:cNvPr id="4" name="Rounded Rectangle 3"/>
+          <p:cNvSpPr/>
+          <p:nvPr/>
+        </p:nvSpPr>
+        <p:spPr>
+          <a:xfrm>
+            <a:off x="640080" y="2743200"/>
+            <a:ext cx="2377440" cy="1463040"/>
+          </a:xfrm>
+          <a:prstGeom prst="roundRect">
+            <a:avLst/>
+          </a:prstGeom>
+          <a:solidFill>
+            <a:srgbClr val="EDEDED"/>
+          </a:solidFill>
+          <a:ln w="12700">
+            <a:solidFill>
+              <a:srgbClr val="1F4E79"/>
+            </a:solidFill>
+          </a:ln>
+          <a:effectLst/>
+        </p:spPr>
+        <p:style>
+          <a:lnRef idx="1">
+            <a:schemeClr val="accent1"/>
+          </a:lnRef>
+          <a:fillRef idx="3">
+            <a:schemeClr val="accent1"/>
+          </a:fillRef>
+          <a:effectRef idx="2">
+            <a:schemeClr val="accent1"/>
+          </a:effectRef>
+          <a:fontRef idx="minor">
+            <a:schemeClr val="lt1"/>
+          </a:fontRef>
+        </p:style>
+        <p:txBody>
+          <a:bodyPr rtlCol="0" anchor="ctr" wrap="square"/>
+          <a:lstStyle/>
+          <a:p>
+            <a:pPr algn="ctr" rtl="1"/>
+            <a:r>
+              <a:rPr sz="1300" b="1">
+                <a:solidFill>
+                  <a:srgbClr val="333333"/>
+                </a:solidFill>
+                <a:latin typeface="Arial"/>
+              </a:rPr>
+              <a:t>تنبؤ بالرموز التالية</a:t>
+            </a:r>
+          </a:p>
+          <a:p>
+            <a:pPr algn="ctr" rtl="0"/>
+            <a:r>
+              <a:rPr sz="1100">
+                <a:solidFill>
+                  <a:srgbClr val="666666"/>
+                </a:solidFill>
+                <a:latin typeface="Calibri"/>
+              </a:rPr>
+              <a:t>Predicts next tokens</a:t>
+            </a:r>
+          </a:p>
+        </p:txBody>
+      </p:sp>
+      <p:sp>
+        <p:nvSpPr>
+          <p:cNvPr id="5" name="Left Arrow 4"/>
+          <p:cNvSpPr/>
+          <p:nvPr/>
+        </p:nvSpPr>
+        <p:spPr>
+          <a:xfrm>
+            <a:off x="3072384" y="1965960"/>
+            <a:ext cx="347472" cy="274320"/>
+          </a:xfrm>
+          <a:prstGeom prst="leftArrow">
+            <a:avLst/>
+          </a:prstGeom>
+          <a:solidFill>
+            <a:srgbClr val="1F4E79"/>
+          </a:solidFill>
+          <a:ln>
+            <a:noFill/>
+          </a:ln>
+          <a:effectLst/>
+        </p:spPr>
+        <p:style>
+          <a:lnRef idx="1">
+            <a:schemeClr val="accent1"/>
+          </a:lnRef>
+          <a:fillRef idx="3">
+            <a:schemeClr val="accent1"/>
+          </a:fillRef>
+          <a:effectRef idx="2">
+            <a:schemeClr val="accent1"/>
+          </a:effectRef>
+          <a:fontRef idx="minor">
+            <a:schemeClr val="lt1"/>
+          </a:fontRef>
+        </p:style>
+        <p:txBody>
           <a:bodyPr rtlCol="0" anchor="ctr"/>
           <a:lstStyle/>
           <a:p>
@@ -5618,14 +6312,468 @@
       </p:sp>
       <p:sp>
         <p:nvSpPr>
-          <p:cNvPr id="3" name="TextBox 2"/>
-          <p:cNvSpPr txBox="1"/>
-          <p:nvPr/>
-        </p:nvSpPr>
-        <p:spPr>
-          <a:xfrm>
-            <a:off x="640080" y="182880"/>
-            <a:ext cx="10972800" cy="640080"/>
+          <p:cNvPr id="6" name="Rounded Rectangle 5"/>
+          <p:cNvSpPr/>
+          <p:nvPr/>
+        </p:nvSpPr>
+        <p:spPr>
+          <a:xfrm>
+            <a:off x="3474720" y="1645920"/>
+            <a:ext cx="2377440" cy="914400"/>
+          </a:xfrm>
+          <a:prstGeom prst="roundRect">
+            <a:avLst/>
+          </a:prstGeom>
+          <a:solidFill>
+            <a:srgbClr val="DCE6F1"/>
+          </a:solidFill>
+          <a:ln w="12700">
+            <a:solidFill>
+              <a:srgbClr val="1F4E79"/>
+            </a:solidFill>
+          </a:ln>
+          <a:effectLst/>
+        </p:spPr>
+        <p:style>
+          <a:lnRef idx="1">
+            <a:schemeClr val="accent1"/>
+          </a:lnRef>
+          <a:fillRef idx="3">
+            <a:schemeClr val="accent1"/>
+          </a:fillRef>
+          <a:effectRef idx="2">
+            <a:schemeClr val="accent1"/>
+          </a:effectRef>
+          <a:fontRef idx="minor">
+            <a:schemeClr val="lt1"/>
+          </a:fontRef>
+        </p:style>
+        <p:txBody>
+          <a:bodyPr rtlCol="0" anchor="ctr" wrap="square"/>
+          <a:lstStyle/>
+          <a:p>
+            <a:pPr algn="ctr" rtl="1"/>
+            <a:r>
+              <a:rPr sz="1800" b="1">
+                <a:solidFill>
+                  <a:srgbClr val="333333"/>
+                </a:solidFill>
+                <a:latin typeface="Arial"/>
+              </a:rPr>
+              <a:t>الذكاء التوليدي</a:t>
+            </a:r>
+          </a:p>
+        </p:txBody>
+      </p:sp>
+      <p:sp>
+        <p:nvSpPr>
+          <p:cNvPr id="7" name="Rounded Rectangle 6"/>
+          <p:cNvSpPr/>
+          <p:nvPr/>
+        </p:nvSpPr>
+        <p:spPr>
+          <a:xfrm>
+            <a:off x="3474720" y="2743200"/>
+            <a:ext cx="2377440" cy="1463040"/>
+          </a:xfrm>
+          <a:prstGeom prst="roundRect">
+            <a:avLst/>
+          </a:prstGeom>
+          <a:solidFill>
+            <a:srgbClr val="EDEDED"/>
+          </a:solidFill>
+          <a:ln w="12700">
+            <a:solidFill>
+              <a:srgbClr val="1F4E79"/>
+            </a:solidFill>
+          </a:ln>
+          <a:effectLst/>
+        </p:spPr>
+        <p:style>
+          <a:lnRef idx="1">
+            <a:schemeClr val="accent1"/>
+          </a:lnRef>
+          <a:fillRef idx="3">
+            <a:schemeClr val="accent1"/>
+          </a:fillRef>
+          <a:effectRef idx="2">
+            <a:schemeClr val="accent1"/>
+          </a:effectRef>
+          <a:fontRef idx="minor">
+            <a:schemeClr val="lt1"/>
+          </a:fontRef>
+        </p:style>
+        <p:txBody>
+          <a:bodyPr rtlCol="0" anchor="ctr" wrap="square"/>
+          <a:lstStyle/>
+          <a:p>
+            <a:pPr algn="ctr" rtl="1"/>
+            <a:r>
+              <a:rPr sz="1300" b="1">
+                <a:solidFill>
+                  <a:srgbClr val="333333"/>
+                </a:solidFill>
+                <a:latin typeface="Arial"/>
+              </a:rPr>
+              <a:t>يولّد محتوى جديدًا</a:t>
+            </a:r>
+          </a:p>
+          <a:p>
+            <a:pPr algn="ctr" rtl="0"/>
+            <a:r>
+              <a:rPr sz="1100">
+                <a:solidFill>
+                  <a:srgbClr val="666666"/>
+                </a:solidFill>
+                <a:latin typeface="Calibri"/>
+              </a:rPr>
+              <a:t>Generates new content</a:t>
+            </a:r>
+          </a:p>
+        </p:txBody>
+      </p:sp>
+      <p:sp>
+        <p:nvSpPr>
+          <p:cNvPr id="8" name="Left Arrow 7"/>
+          <p:cNvSpPr/>
+          <p:nvPr/>
+        </p:nvSpPr>
+        <p:spPr>
+          <a:xfrm>
+            <a:off x="5907024" y="1965960"/>
+            <a:ext cx="347472" cy="274320"/>
+          </a:xfrm>
+          <a:prstGeom prst="leftArrow">
+            <a:avLst/>
+          </a:prstGeom>
+          <a:solidFill>
+            <a:srgbClr val="1F4E79"/>
+          </a:solidFill>
+          <a:ln>
+            <a:noFill/>
+          </a:ln>
+          <a:effectLst/>
+        </p:spPr>
+        <p:style>
+          <a:lnRef idx="1">
+            <a:schemeClr val="accent1"/>
+          </a:lnRef>
+          <a:fillRef idx="3">
+            <a:schemeClr val="accent1"/>
+          </a:fillRef>
+          <a:effectRef idx="2">
+            <a:schemeClr val="accent1"/>
+          </a:effectRef>
+          <a:fontRef idx="minor">
+            <a:schemeClr val="lt1"/>
+          </a:fontRef>
+        </p:style>
+        <p:txBody>
+          <a:bodyPr rtlCol="0" anchor="ctr"/>
+          <a:lstStyle/>
+          <a:p>
+            <a:pPr algn="ctr"/>
+          </a:p>
+        </p:txBody>
+      </p:sp>
+      <p:sp>
+        <p:nvSpPr>
+          <p:cNvPr id="9" name="Rounded Rectangle 8"/>
+          <p:cNvSpPr/>
+          <p:nvPr/>
+        </p:nvSpPr>
+        <p:spPr>
+          <a:xfrm>
+            <a:off x="6309360" y="1645920"/>
+            <a:ext cx="2377440" cy="914400"/>
+          </a:xfrm>
+          <a:prstGeom prst="roundRect">
+            <a:avLst/>
+          </a:prstGeom>
+          <a:solidFill>
+            <a:srgbClr val="FDE9D9"/>
+          </a:solidFill>
+          <a:ln w="12700">
+            <a:solidFill>
+              <a:srgbClr val="1F4E79"/>
+            </a:solidFill>
+          </a:ln>
+          <a:effectLst/>
+        </p:spPr>
+        <p:style>
+          <a:lnRef idx="1">
+            <a:schemeClr val="accent1"/>
+          </a:lnRef>
+          <a:fillRef idx="3">
+            <a:schemeClr val="accent1"/>
+          </a:fillRef>
+          <a:effectRef idx="2">
+            <a:schemeClr val="accent1"/>
+          </a:effectRef>
+          <a:fontRef idx="minor">
+            <a:schemeClr val="lt1"/>
+          </a:fontRef>
+        </p:style>
+        <p:txBody>
+          <a:bodyPr rtlCol="0" anchor="ctr" wrap="square"/>
+          <a:lstStyle/>
+          <a:p>
+            <a:pPr algn="ctr" rtl="1"/>
+            <a:r>
+              <a:rPr sz="1800" b="1">
+                <a:solidFill>
+                  <a:srgbClr val="333333"/>
+                </a:solidFill>
+                <a:latin typeface="Arial"/>
+              </a:rPr>
+              <a:t>الوكلاء Agents</a:t>
+            </a:r>
+          </a:p>
+        </p:txBody>
+      </p:sp>
+      <p:sp>
+        <p:nvSpPr>
+          <p:cNvPr id="10" name="Rounded Rectangle 9"/>
+          <p:cNvSpPr/>
+          <p:nvPr/>
+        </p:nvSpPr>
+        <p:spPr>
+          <a:xfrm>
+            <a:off x="6309360" y="2743200"/>
+            <a:ext cx="2377440" cy="1463040"/>
+          </a:xfrm>
+          <a:prstGeom prst="roundRect">
+            <a:avLst/>
+          </a:prstGeom>
+          <a:solidFill>
+            <a:srgbClr val="EDEDED"/>
+          </a:solidFill>
+          <a:ln w="12700">
+            <a:solidFill>
+              <a:srgbClr val="1F4E79"/>
+            </a:solidFill>
+          </a:ln>
+          <a:effectLst/>
+        </p:spPr>
+        <p:style>
+          <a:lnRef idx="1">
+            <a:schemeClr val="accent1"/>
+          </a:lnRef>
+          <a:fillRef idx="3">
+            <a:schemeClr val="accent1"/>
+          </a:fillRef>
+          <a:effectRef idx="2">
+            <a:schemeClr val="accent1"/>
+          </a:effectRef>
+          <a:fontRef idx="minor">
+            <a:schemeClr val="lt1"/>
+          </a:fontRef>
+        </p:style>
+        <p:txBody>
+          <a:bodyPr rtlCol="0" anchor="ctr" wrap="square"/>
+          <a:lstStyle/>
+          <a:p>
+            <a:pPr algn="ctr" rtl="1"/>
+            <a:r>
+              <a:rPr sz="1300" b="1">
+                <a:solidFill>
+                  <a:srgbClr val="333333"/>
+                </a:solidFill>
+                <a:latin typeface="Arial"/>
+              </a:rPr>
+              <a:t>نية + استدعاء أدوات</a:t>
+            </a:r>
+          </a:p>
+          <a:p>
+            <a:pPr algn="ctr" rtl="0"/>
+            <a:r>
+              <a:rPr sz="1100">
+                <a:solidFill>
+                  <a:srgbClr val="666666"/>
+                </a:solidFill>
+                <a:latin typeface="Calibri"/>
+              </a:rPr>
+              <a:t>Intent + tool calls</a:t>
+            </a:r>
+          </a:p>
+        </p:txBody>
+      </p:sp>
+      <p:sp>
+        <p:nvSpPr>
+          <p:cNvPr id="11" name="Left Arrow 10"/>
+          <p:cNvSpPr/>
+          <p:nvPr/>
+        </p:nvSpPr>
+        <p:spPr>
+          <a:xfrm>
+            <a:off x="8741664" y="1965960"/>
+            <a:ext cx="347472" cy="274320"/>
+          </a:xfrm>
+          <a:prstGeom prst="leftArrow">
+            <a:avLst/>
+          </a:prstGeom>
+          <a:solidFill>
+            <a:srgbClr val="1F4E79"/>
+          </a:solidFill>
+          <a:ln>
+            <a:noFill/>
+          </a:ln>
+          <a:effectLst/>
+        </p:spPr>
+        <p:style>
+          <a:lnRef idx="1">
+            <a:schemeClr val="accent1"/>
+          </a:lnRef>
+          <a:fillRef idx="3">
+            <a:schemeClr val="accent1"/>
+          </a:fillRef>
+          <a:effectRef idx="2">
+            <a:schemeClr val="accent1"/>
+          </a:effectRef>
+          <a:fontRef idx="minor">
+            <a:schemeClr val="lt1"/>
+          </a:fontRef>
+        </p:style>
+        <p:txBody>
+          <a:bodyPr rtlCol="0" anchor="ctr"/>
+          <a:lstStyle/>
+          <a:p>
+            <a:pPr algn="ctr"/>
+          </a:p>
+        </p:txBody>
+      </p:sp>
+      <p:sp>
+        <p:nvSpPr>
+          <p:cNvPr id="12" name="Rounded Rectangle 11"/>
+          <p:cNvSpPr/>
+          <p:nvPr/>
+        </p:nvSpPr>
+        <p:spPr>
+          <a:xfrm>
+            <a:off x="9144000" y="1645920"/>
+            <a:ext cx="2377440" cy="914400"/>
+          </a:xfrm>
+          <a:prstGeom prst="roundRect">
+            <a:avLst/>
+          </a:prstGeom>
+          <a:solidFill>
+            <a:srgbClr val="E2EFDA"/>
+          </a:solidFill>
+          <a:ln w="12700">
+            <a:solidFill>
+              <a:srgbClr val="1F4E79"/>
+            </a:solidFill>
+          </a:ln>
+          <a:effectLst/>
+        </p:spPr>
+        <p:style>
+          <a:lnRef idx="1">
+            <a:schemeClr val="accent1"/>
+          </a:lnRef>
+          <a:fillRef idx="3">
+            <a:schemeClr val="accent1"/>
+          </a:fillRef>
+          <a:effectRef idx="2">
+            <a:schemeClr val="accent1"/>
+          </a:effectRef>
+          <a:fontRef idx="minor">
+            <a:schemeClr val="lt1"/>
+          </a:fontRef>
+        </p:style>
+        <p:txBody>
+          <a:bodyPr rtlCol="0" anchor="ctr" wrap="square"/>
+          <a:lstStyle/>
+          <a:p>
+            <a:pPr algn="ctr" rtl="1"/>
+            <a:r>
+              <a:rPr sz="1800" b="1">
+                <a:solidFill>
+                  <a:srgbClr val="333333"/>
+                </a:solidFill>
+                <a:latin typeface="Arial"/>
+              </a:rPr>
+              <a:t>الأنظمة الوكيلة</a:t>
+            </a:r>
+          </a:p>
+        </p:txBody>
+      </p:sp>
+      <p:sp>
+        <p:nvSpPr>
+          <p:cNvPr id="13" name="Rounded Rectangle 12"/>
+          <p:cNvSpPr/>
+          <p:nvPr/>
+        </p:nvSpPr>
+        <p:spPr>
+          <a:xfrm>
+            <a:off x="9144000" y="2743200"/>
+            <a:ext cx="2377440" cy="1463040"/>
+          </a:xfrm>
+          <a:prstGeom prst="roundRect">
+            <a:avLst/>
+          </a:prstGeom>
+          <a:solidFill>
+            <a:srgbClr val="EDEDED"/>
+          </a:solidFill>
+          <a:ln w="12700">
+            <a:solidFill>
+              <a:srgbClr val="1F4E79"/>
+            </a:solidFill>
+          </a:ln>
+          <a:effectLst/>
+        </p:spPr>
+        <p:style>
+          <a:lnRef idx="1">
+            <a:schemeClr val="accent1"/>
+          </a:lnRef>
+          <a:fillRef idx="3">
+            <a:schemeClr val="accent1"/>
+          </a:fillRef>
+          <a:effectRef idx="2">
+            <a:schemeClr val="accent1"/>
+          </a:effectRef>
+          <a:fontRef idx="minor">
+            <a:schemeClr val="lt1"/>
+          </a:fontRef>
+        </p:style>
+        <p:txBody>
+          <a:bodyPr rtlCol="0" anchor="ctr" wrap="square"/>
+          <a:lstStyle/>
+          <a:p>
+            <a:pPr algn="ctr" rtl="1"/>
+            <a:r>
+              <a:rPr sz="1300" b="1">
+                <a:solidFill>
+                  <a:srgbClr val="333333"/>
+                </a:solidFill>
+                <a:latin typeface="Arial"/>
+              </a:rPr>
+              <a:t>تخطيط وتنفيذ متعدد الخطوات</a:t>
+            </a:r>
+          </a:p>
+          <a:p>
+            <a:pPr algn="ctr" rtl="0"/>
+            <a:r>
+              <a:rPr sz="1100">
+                <a:solidFill>
+                  <a:srgbClr val="666666"/>
+                </a:solidFill>
+                <a:latin typeface="Calibri"/>
+              </a:rPr>
+              <a:t>Multi-step planning</a:t>
+            </a:r>
+          </a:p>
+        </p:txBody>
+      </p:sp>
+      <p:sp>
+        <p:nvSpPr>
+          <p:cNvPr id="14" name="TextBox 13"/>
+          <p:cNvSpPr txBox="1"/>
+          <p:nvPr/>
+        </p:nvSpPr>
+        <p:spPr>
+          <a:xfrm>
+            <a:off x="640080" y="6126480"/>
+            <a:ext cx="10972800" cy="548640"/>
           </a:xfrm>
           <a:prstGeom prst="rect">
             <a:avLst/>
@@ -5640,68 +6788,159 @@
           <a:p>
             <a:pPr algn="r" rtl="1"/>
             <a:r>
-              <a:rPr sz="3200" b="1">
-                <a:solidFill>
-                  <a:srgbClr val="1F3B5C"/>
+              <a:rPr sz="1400">
+                <a:solidFill>
+                  <a:srgbClr val="666666"/>
+                </a:solidFill>
+                <a:latin typeface="Arial"/>
+              </a:rPr>
+              <a:t>Agentic RAG = بحث متجهي + جلب عبر الواجهات بذاكرة متجددة وتحقق قبل التسليم.</a:t>
+            </a:r>
+          </a:p>
+          <a:p>
+            <a:pPr algn="r" rtl="0"/>
+            <a:r>
+              <a:t>Agentic RAG = vector search + API fetching with refreshed memory and verification.</a:t>
+            </a:r>
+          </a:p>
+        </p:txBody>
+      </p:sp>
+      <p:sp>
+        <p:nvSpPr>
+          <p:cNvPr id="15" name="TextBox 14"/>
+          <p:cNvSpPr txBox="1"/>
+          <p:nvPr/>
+        </p:nvSpPr>
+        <p:spPr>
+          <a:xfrm>
+            <a:off x="640080" y="6400800"/>
+            <a:ext cx="8686800" cy="320040"/>
+          </a:xfrm>
+          <a:prstGeom prst="rect">
+            <a:avLst/>
+          </a:prstGeom>
+          <a:noFill/>
+        </p:spPr>
+        <p:txBody>
+          <a:bodyPr wrap="square">
+            <a:spAutoFit/>
+          </a:bodyPr>
+          <a:lstStyle/>
+          <a:p>
+            <a:pPr algn="r" rtl="1"/>
+            <a:r>
+              <a:rPr sz="1000" b="0">
+                <a:solidFill>
+                  <a:srgbClr val="666666"/>
+                </a:solidFill>
+                <a:latin typeface="Arial"/>
+              </a:rPr>
+              <a:t>Module 02 — Data &amp; AI Engineering Track  |  الوحدة الثانية</a:t>
+            </a:r>
+          </a:p>
+        </p:txBody>
+      </p:sp>
+      <p:sp>
+        <p:nvSpPr>
+          <p:cNvPr id="16" name="TextBox 15"/>
+          <p:cNvSpPr txBox="1"/>
+          <p:nvPr/>
+        </p:nvSpPr>
+        <p:spPr>
+          <a:xfrm>
+            <a:off x="9601200" y="6400800"/>
+            <a:ext cx="1920240" cy="320040"/>
+          </a:xfrm>
+          <a:prstGeom prst="rect">
+            <a:avLst/>
+          </a:prstGeom>
+          <a:noFill/>
+        </p:spPr>
+        <p:txBody>
+          <a:bodyPr wrap="square">
+            <a:spAutoFit/>
+          </a:bodyPr>
+          <a:lstStyle/>
+          <a:p>
+            <a:pPr algn="l" rtl="0"/>
+            <a:r>
+              <a:rPr sz="1000" b="0">
+                <a:solidFill>
+                  <a:srgbClr val="666666"/>
                 </a:solidFill>
                 <a:latin typeface="Calibri"/>
               </a:rPr>
-              <a:t>RAG الوكيلي / Agentic RAG</a:t>
-            </a:r>
-          </a:p>
-        </p:txBody>
-      </p:sp>
-      <p:sp>
-        <p:nvSpPr>
-          <p:cNvPr id="4" name="TextBox 3"/>
-          <p:cNvSpPr txBox="1"/>
-          <p:nvPr/>
-        </p:nvSpPr>
-        <p:spPr>
-          <a:xfrm>
-            <a:off x="640080" y="1280160"/>
-            <a:ext cx="10972800" cy="5212080"/>
-          </a:xfrm>
-          <a:prstGeom prst="rect">
-            <a:avLst/>
-          </a:prstGeom>
-          <a:noFill/>
-        </p:spPr>
-        <p:txBody>
-          <a:bodyPr wrap="square">
-            <a:spAutoFit/>
-          </a:bodyPr>
-          <a:lstStyle/>
-          <a:p>
-            <a:pPr algn="r" rtl="1">
-              <a:spcAft>
-                <a:spcPts val="1000"/>
-              </a:spcAft>
-            </a:pPr>
-            <a:r>
-              <a:rPr sz="1800">
-                <a:solidFill>
-                  <a:srgbClr val="333333"/>
+              <a:t>12_  •  5/12</a:t>
+            </a:r>
+          </a:p>
+        </p:txBody>
+      </p:sp>
+      <p:sp>
+        <p:nvSpPr>
+          <p:cNvPr id="17" name="TextBox 16"/>
+          <p:cNvSpPr txBox="1"/>
+          <p:nvPr/>
+        </p:nvSpPr>
+        <p:spPr>
+          <a:xfrm>
+            <a:off x="640080" y="6400800"/>
+            <a:ext cx="8686800" cy="320040"/>
+          </a:xfrm>
+          <a:prstGeom prst="rect">
+            <a:avLst/>
+          </a:prstGeom>
+          <a:noFill/>
+        </p:spPr>
+        <p:txBody>
+          <a:bodyPr wrap="square">
+            <a:spAutoFit/>
+          </a:bodyPr>
+          <a:lstStyle/>
+          <a:p>
+            <a:pPr algn="r" rtl="1"/>
+            <a:r>
+              <a:rPr sz="1000" b="0">
+                <a:solidFill>
+                  <a:srgbClr val="666666"/>
+                </a:solidFill>
+                <a:latin typeface="Arial"/>
+              </a:rPr>
+              <a:t>Module 02 — Data &amp; AI Engineering Track  |  الوحدة الثانية</a:t>
+            </a:r>
+          </a:p>
+        </p:txBody>
+      </p:sp>
+      <p:sp>
+        <p:nvSpPr>
+          <p:cNvPr id="18" name="TextBox 17"/>
+          <p:cNvSpPr txBox="1"/>
+          <p:nvPr/>
+        </p:nvSpPr>
+        <p:spPr>
+          <a:xfrm>
+            <a:off x="9601200" y="6400800"/>
+            <a:ext cx="1920240" cy="320040"/>
+          </a:xfrm>
+          <a:prstGeom prst="rect">
+            <a:avLst/>
+          </a:prstGeom>
+          <a:noFill/>
+        </p:spPr>
+        <p:txBody>
+          <a:bodyPr wrap="square">
+            <a:spAutoFit/>
+          </a:bodyPr>
+          <a:lstStyle/>
+          <a:p>
+            <a:pPr algn="l" rtl="0"/>
+            <a:r>
+              <a:rPr sz="1000" b="0">
+                <a:solidFill>
+                  <a:srgbClr val="666666"/>
                 </a:solidFill>
                 <a:latin typeface="Calibri"/>
               </a:rPr>
-              <a:t>• يجمع البحث المتجهي وجلب البيانات عبر الواجهات في عملية متعددة الخطوات، بذاكرة محدَّثة وتحقق من النتائج قبل التسليم.</a:t>
-            </a:r>
-          </a:p>
-          <a:p>
-            <a:pPr algn="r" rtl="0">
-              <a:spcAft>
-                <a:spcPts val="1000"/>
-              </a:spcAft>
-            </a:pPr>
-            <a:r>
-              <a:rPr sz="1800">
-                <a:solidFill>
-                  <a:srgbClr val="666666"/>
-                </a:solidFill>
-                <a:latin typeface="Calibri"/>
-              </a:rPr>
-              <a:t>   Combines vector search and API fetching in multi-step flows, with refreshed memory and verification before delivery.</a:t>
+              <a:t>12_  •  5/12</a:t>
             </a:r>
           </a:p>
         </p:txBody>
@@ -5806,9 +7045,9 @@
                 <a:solidFill>
                   <a:srgbClr val="1F3B5C"/>
                 </a:solidFill>
-                <a:latin typeface="Calibri"/>
-              </a:rPr>
-              <a:t>التكلفة والأداء عمليًا / Practical Cost &amp; Performance</a:t>
+                <a:latin typeface="Arial"/>
+              </a:rPr>
+              <a:t>RAG الوكيلي / Agentic RAG</a:t>
             </a:r>
           </a:p>
         </p:txBody>
@@ -5836,98 +7075,250 @@
           <a:lstStyle/>
           <a:p>
             <a:pPr algn="r" rtl="1">
+              <a:spcBef>
+                <a:spcPts val="200"/>
+              </a:spcBef>
               <a:spcAft>
                 <a:spcPts val="1000"/>
               </a:spcAft>
             </a:pPr>
             <a:r>
-              <a:rPr sz="1900">
+              <a:rPr sz="1800">
                 <a:solidFill>
                   <a:srgbClr val="333333"/>
                 </a:solidFill>
-                <a:latin typeface="Calibri"/>
-              </a:rPr>
-              <a:t>• التضمين (Embedding) أقل تكلفة بمرتبة كاملة من التوليد (Generation) — الاسترجاع أرخص من التوليد.</a:t>
-            </a:r>
-          </a:p>
-          <a:p>
-            <a:pPr algn="r" rtl="0">
+                <a:latin typeface="Arial"/>
+              </a:rPr>
+              <a:t>• يجمع البحث المتجهي وجلب البيانات عبر الواجهات في عملية متعددة الخطوات، بذاكرة محدَّثة وتحقق من النتائج قبل التسليم.</a:t>
+            </a:r>
+          </a:p>
+          <a:p>
+            <a:pPr algn="l" rtl="0">
+              <a:spcBef>
+                <a:spcPts val="200"/>
+              </a:spcBef>
               <a:spcAft>
                 <a:spcPts val="1000"/>
               </a:spcAft>
             </a:pPr>
             <a:r>
-              <a:rPr sz="1900">
+              <a:rPr sz="1500">
                 <a:solidFill>
                   <a:srgbClr val="666666"/>
                 </a:solidFill>
                 <a:latin typeface="Calibri"/>
               </a:rPr>
-              <a:t>   Embedding costs an order of magnitude less than generation — retrieval is cheaper than generation.</a:t>
-            </a:r>
-          </a:p>
-          <a:p>
-            <a:pPr algn="r" rtl="1">
-              <a:spcAft>
-                <a:spcPts val="1000"/>
-              </a:spcAft>
-            </a:pPr>
-            <a:r>
-              <a:rPr sz="1900">
-                <a:solidFill>
-                  <a:srgbClr val="333333"/>
+              <a:t>• Combines vector search and API fetching in multi-step flows, with refreshed memory and verification before delivery.</a:t>
+            </a:r>
+          </a:p>
+        </p:txBody>
+      </p:sp>
+      <p:sp>
+        <p:nvSpPr>
+          <p:cNvPr id="5" name="TextBox 4"/>
+          <p:cNvSpPr txBox="1"/>
+          <p:nvPr/>
+        </p:nvSpPr>
+        <p:spPr>
+          <a:xfrm>
+            <a:off x="640080" y="6400800"/>
+            <a:ext cx="8686800" cy="320040"/>
+          </a:xfrm>
+          <a:prstGeom prst="rect">
+            <a:avLst/>
+          </a:prstGeom>
+          <a:noFill/>
+        </p:spPr>
+        <p:txBody>
+          <a:bodyPr wrap="square">
+            <a:spAutoFit/>
+          </a:bodyPr>
+          <a:lstStyle/>
+          <a:p>
+            <a:pPr algn="r" rtl="1"/>
+            <a:r>
+              <a:rPr sz="1000" b="0">
+                <a:solidFill>
+                  <a:srgbClr val="666666"/>
+                </a:solidFill>
+                <a:latin typeface="Arial"/>
+              </a:rPr>
+              <a:t>Module 02 — Data &amp; AI Engineering Track  |  الوحدة الثانية</a:t>
+            </a:r>
+          </a:p>
+        </p:txBody>
+      </p:sp>
+      <p:sp>
+        <p:nvSpPr>
+          <p:cNvPr id="6" name="TextBox 5"/>
+          <p:cNvSpPr txBox="1"/>
+          <p:nvPr/>
+        </p:nvSpPr>
+        <p:spPr>
+          <a:xfrm>
+            <a:off x="9601200" y="6400800"/>
+            <a:ext cx="1920240" cy="320040"/>
+          </a:xfrm>
+          <a:prstGeom prst="rect">
+            <a:avLst/>
+          </a:prstGeom>
+          <a:noFill/>
+        </p:spPr>
+        <p:txBody>
+          <a:bodyPr wrap="square">
+            <a:spAutoFit/>
+          </a:bodyPr>
+          <a:lstStyle/>
+          <a:p>
+            <a:pPr algn="l" rtl="0"/>
+            <a:r>
+              <a:rPr sz="1000" b="0">
+                <a:solidFill>
+                  <a:srgbClr val="666666"/>
                 </a:solidFill>
                 <a:latin typeface="Calibri"/>
               </a:rPr>
-              <a:t>• التخزين الدلالي المؤقت يخفض الكمون والتكلفة؛ توجيه الطلبات يرسل المهام البسيطة لنماذج أصغر أرخص.</a:t>
-            </a:r>
-          </a:p>
-          <a:p>
-            <a:pPr algn="r" rtl="0">
-              <a:spcAft>
-                <a:spcPts val="1000"/>
-              </a:spcAft>
-            </a:pPr>
-            <a:r>
-              <a:rPr sz="1900">
+              <a:t>V12  •  5/13</a:t>
+            </a:r>
+          </a:p>
+        </p:txBody>
+      </p:sp>
+      <p:sp>
+        <p:nvSpPr>
+          <p:cNvPr id="7" name="TextBox 6"/>
+          <p:cNvSpPr txBox="1"/>
+          <p:nvPr/>
+        </p:nvSpPr>
+        <p:spPr>
+          <a:xfrm>
+            <a:off x="640080" y="6400800"/>
+            <a:ext cx="8686800" cy="320040"/>
+          </a:xfrm>
+          <a:prstGeom prst="rect">
+            <a:avLst/>
+          </a:prstGeom>
+          <a:noFill/>
+        </p:spPr>
+        <p:txBody>
+          <a:bodyPr wrap="square">
+            <a:spAutoFit/>
+          </a:bodyPr>
+          <a:lstStyle/>
+          <a:p>
+            <a:pPr algn="r" rtl="1"/>
+            <a:r>
+              <a:rPr sz="1000" b="0">
+                <a:solidFill>
+                  <a:srgbClr val="666666"/>
+                </a:solidFill>
+                <a:latin typeface="Arial"/>
+              </a:rPr>
+              <a:t>Module 02 — Data &amp; AI Engineering Track  |  الوحدة الثانية</a:t>
+            </a:r>
+          </a:p>
+        </p:txBody>
+      </p:sp>
+      <p:sp>
+        <p:nvSpPr>
+          <p:cNvPr id="8" name="TextBox 7"/>
+          <p:cNvSpPr txBox="1"/>
+          <p:nvPr/>
+        </p:nvSpPr>
+        <p:spPr>
+          <a:xfrm>
+            <a:off x="9601200" y="6400800"/>
+            <a:ext cx="1920240" cy="320040"/>
+          </a:xfrm>
+          <a:prstGeom prst="rect">
+            <a:avLst/>
+          </a:prstGeom>
+          <a:noFill/>
+        </p:spPr>
+        <p:txBody>
+          <a:bodyPr wrap="square">
+            <a:spAutoFit/>
+          </a:bodyPr>
+          <a:lstStyle/>
+          <a:p>
+            <a:pPr algn="l" rtl="0"/>
+            <a:r>
+              <a:rPr sz="1000" b="0">
                 <a:solidFill>
                   <a:srgbClr val="666666"/>
                 </a:solidFill>
                 <a:latin typeface="Calibri"/>
               </a:rPr>
-              <a:t>   Semantic caching cuts latency and cost; routing sends easy tasks to smaller, cheaper models.</a:t>
-            </a:r>
-          </a:p>
-          <a:p>
-            <a:pPr algn="r" rtl="1">
-              <a:spcAft>
-                <a:spcPts val="1000"/>
-              </a:spcAft>
-            </a:pPr>
-            <a:r>
-              <a:rPr sz="1900">
-                <a:solidFill>
-                  <a:srgbClr val="333333"/>
+              <a:t>12_  •  6/12</a:t>
+            </a:r>
+          </a:p>
+        </p:txBody>
+      </p:sp>
+      <p:sp>
+        <p:nvSpPr>
+          <p:cNvPr id="9" name="TextBox 8"/>
+          <p:cNvSpPr txBox="1"/>
+          <p:nvPr/>
+        </p:nvSpPr>
+        <p:spPr>
+          <a:xfrm>
+            <a:off x="640080" y="6400800"/>
+            <a:ext cx="8686800" cy="320040"/>
+          </a:xfrm>
+          <a:prstGeom prst="rect">
+            <a:avLst/>
+          </a:prstGeom>
+          <a:noFill/>
+        </p:spPr>
+        <p:txBody>
+          <a:bodyPr wrap="square">
+            <a:spAutoFit/>
+          </a:bodyPr>
+          <a:lstStyle/>
+          <a:p>
+            <a:pPr algn="r" rtl="1"/>
+            <a:r>
+              <a:rPr sz="1000" b="0">
+                <a:solidFill>
+                  <a:srgbClr val="666666"/>
+                </a:solidFill>
+                <a:latin typeface="Arial"/>
+              </a:rPr>
+              <a:t>Module 02 — Data &amp; AI Engineering Track  |  الوحدة الثانية</a:t>
+            </a:r>
+          </a:p>
+        </p:txBody>
+      </p:sp>
+      <p:sp>
+        <p:nvSpPr>
+          <p:cNvPr id="10" name="TextBox 9"/>
+          <p:cNvSpPr txBox="1"/>
+          <p:nvPr/>
+        </p:nvSpPr>
+        <p:spPr>
+          <a:xfrm>
+            <a:off x="9601200" y="6400800"/>
+            <a:ext cx="1920240" cy="320040"/>
+          </a:xfrm>
+          <a:prstGeom prst="rect">
+            <a:avLst/>
+          </a:prstGeom>
+          <a:noFill/>
+        </p:spPr>
+        <p:txBody>
+          <a:bodyPr wrap="square">
+            <a:spAutoFit/>
+          </a:bodyPr>
+          <a:lstStyle/>
+          <a:p>
+            <a:pPr algn="l" rtl="0"/>
+            <a:r>
+              <a:rPr sz="1000" b="0">
+                <a:solidFill>
+                  <a:srgbClr val="666666"/>
                 </a:solidFill>
                 <a:latin typeface="Calibri"/>
               </a:rPr>
-              <a:t>• قاعدة FinOps: قِس التكلفة لكل طلب (per-request) قبل التوسع.</a:t>
-            </a:r>
-          </a:p>
-          <a:p>
-            <a:pPr algn="r" rtl="0">
-              <a:spcAft>
-                <a:spcPts val="1000"/>
-              </a:spcAft>
-            </a:pPr>
-            <a:r>
-              <a:rPr sz="1900">
-                <a:solidFill>
-                  <a:srgbClr val="666666"/>
-                </a:solidFill>
-                <a:latin typeface="Calibri"/>
-              </a:rPr>
-              <a:t>   FinOps rule: measure per-request cost before scaling.</a:t>
+              <a:t>12_  •  6/12</a:t>
             </a:r>
           </a:p>
         </p:txBody>
@@ -5960,57 +7351,22 @@
       <p:grpSpPr/>
       <p:sp>
         <p:nvSpPr>
-          <p:cNvPr id="2" name="TextBox 1"/>
-          <p:cNvSpPr txBox="1"/>
-          <p:nvPr/>
-        </p:nvSpPr>
-        <p:spPr>
-          <a:xfrm>
-            <a:off x="640080" y="137160"/>
-            <a:ext cx="10972800" cy="640080"/>
-          </a:xfrm>
-          <a:prstGeom prst="rect">
-            <a:avLst/>
-          </a:prstGeom>
-          <a:noFill/>
-        </p:spPr>
-        <p:txBody>
-          <a:bodyPr wrap="none">
-            <a:spAutoFit/>
-          </a:bodyPr>
-          <a:lstStyle/>
-          <a:p>
-            <a:pPr algn="r" rtl="1"/>
-            <a:r>
-              <a:rPr sz="3000" b="1">
-                <a:solidFill>
-                  <a:srgbClr val="1F3B5C"/>
-                </a:solidFill>
-                <a:latin typeface="Calibri"/>
-              </a:rPr>
-              <a:t>التكلفة عمليًا: التضمين مقابل التوليد / Cost: Embedding vs Generation</a:t>
-            </a:r>
-          </a:p>
-        </p:txBody>
-      </p:sp>
-      <p:sp>
-        <p:nvSpPr>
-          <p:cNvPr id="3" name="Rounded Rectangle 2"/>
+          <p:cNvPr id="2" name="Rectangle 1"/>
           <p:cNvSpPr/>
           <p:nvPr/>
         </p:nvSpPr>
         <p:spPr>
           <a:xfrm>
-            <a:off x="1828800" y="3840480"/>
-            <a:ext cx="2194560" cy="1463040"/>
-          </a:xfrm>
-          <a:prstGeom prst="roundRect">
+            <a:off x="0" y="0"/>
+            <a:ext cx="12191695" cy="1005840"/>
+          </a:xfrm>
+          <a:prstGeom prst="rect">
             <a:avLst/>
           </a:prstGeom>
           <a:solidFill>
-            <a:srgbClr val="E2EFDA"/>
+            <a:srgbClr val="FFFFFF"/>
           </a:solidFill>
-          <a:ln w="12700">
+          <a:ln w="25400">
             <a:solidFill>
               <a:srgbClr val="1F4E79"/>
             </a:solidFill>
@@ -6032,205 +7388,391 @@
           </a:fontRef>
         </p:style>
         <p:txBody>
-          <a:bodyPr rtlCol="0" anchor="ctr" wrap="square"/>
-          <a:lstStyle/>
-          <a:p>
-            <a:pPr algn="ctr" rtl="1"/>
-            <a:r>
-              <a:rPr sz="1800" b="1">
+          <a:bodyPr rtlCol="0" anchor="ctr"/>
+          <a:lstStyle/>
+          <a:p>
+            <a:pPr algn="ctr"/>
+          </a:p>
+        </p:txBody>
+      </p:sp>
+      <p:sp>
+        <p:nvSpPr>
+          <p:cNvPr id="3" name="TextBox 2"/>
+          <p:cNvSpPr txBox="1"/>
+          <p:nvPr/>
+        </p:nvSpPr>
+        <p:spPr>
+          <a:xfrm>
+            <a:off x="640080" y="182880"/>
+            <a:ext cx="10972800" cy="640080"/>
+          </a:xfrm>
+          <a:prstGeom prst="rect">
+            <a:avLst/>
+          </a:prstGeom>
+          <a:noFill/>
+        </p:spPr>
+        <p:txBody>
+          <a:bodyPr wrap="square">
+            <a:spAutoFit/>
+          </a:bodyPr>
+          <a:lstStyle/>
+          <a:p>
+            <a:pPr algn="r" rtl="1"/>
+            <a:r>
+              <a:rPr sz="3200" b="1">
+                <a:solidFill>
+                  <a:srgbClr val="1F3B5C"/>
+                </a:solidFill>
+                <a:latin typeface="Arial"/>
+              </a:rPr>
+              <a:t>التكلفة والأداء عمليًا / Practical Cost &amp; Performance</a:t>
+            </a:r>
+          </a:p>
+        </p:txBody>
+      </p:sp>
+      <p:sp>
+        <p:nvSpPr>
+          <p:cNvPr id="4" name="TextBox 3"/>
+          <p:cNvSpPr txBox="1"/>
+          <p:nvPr/>
+        </p:nvSpPr>
+        <p:spPr>
+          <a:xfrm>
+            <a:off x="640080" y="1280160"/>
+            <a:ext cx="10972800" cy="5212080"/>
+          </a:xfrm>
+          <a:prstGeom prst="rect">
+            <a:avLst/>
+          </a:prstGeom>
+          <a:noFill/>
+        </p:spPr>
+        <p:txBody>
+          <a:bodyPr wrap="square">
+            <a:spAutoFit/>
+          </a:bodyPr>
+          <a:lstStyle/>
+          <a:p>
+            <a:pPr algn="r" rtl="1">
+              <a:spcBef>
+                <a:spcPts val="200"/>
+              </a:spcBef>
+              <a:spcAft>
+                <a:spcPts val="1000"/>
+              </a:spcAft>
+            </a:pPr>
+            <a:r>
+              <a:rPr sz="1900">
                 <a:solidFill>
                   <a:srgbClr val="333333"/>
                 </a:solidFill>
+                <a:latin typeface="Arial"/>
+              </a:rPr>
+              <a:t>• التضمين (Embedding) أقل تكلفة بمرتبة كاملة من التوليد (Generation) — الاسترجاع أرخص من التوليد.</a:t>
+            </a:r>
+          </a:p>
+          <a:p>
+            <a:pPr algn="l" rtl="0">
+              <a:spcBef>
+                <a:spcPts val="200"/>
+              </a:spcBef>
+              <a:spcAft>
+                <a:spcPts val="1000"/>
+              </a:spcAft>
+            </a:pPr>
+            <a:r>
+              <a:rPr sz="1600">
+                <a:solidFill>
+                  <a:srgbClr val="666666"/>
+                </a:solidFill>
                 <a:latin typeface="Calibri"/>
               </a:rPr>
-              <a:t>التضمين 1x</a:t>
-            </a:r>
-          </a:p>
-          <a:p>
-            <a:pPr algn="ctr" rtl="0"/>
-            <a:r>
-              <a:rPr sz="1200">
+              <a:t>• Embedding costs an order of magnitude less than generation — retrieval is cheaper than generation.</a:t>
+            </a:r>
+          </a:p>
+          <a:p>
+            <a:pPr algn="r" rtl="1">
+              <a:spcBef>
+                <a:spcPts val="200"/>
+              </a:spcBef>
+              <a:spcAft>
+                <a:spcPts val="1000"/>
+              </a:spcAft>
+            </a:pPr>
+            <a:r>
+              <a:rPr sz="1900">
+                <a:solidFill>
+                  <a:srgbClr val="333333"/>
+                </a:solidFill>
+                <a:latin typeface="Arial"/>
+              </a:rPr>
+              <a:t>• التخزين الدلالي المؤقت يخفض الكمون والتكلفة؛ توجيه الطلبات يرسل المهام البسيطة لنماذج أصغر أرخص.</a:t>
+            </a:r>
+          </a:p>
+          <a:p>
+            <a:pPr algn="l" rtl="0">
+              <a:spcBef>
+                <a:spcPts val="200"/>
+              </a:spcBef>
+              <a:spcAft>
+                <a:spcPts val="1000"/>
+              </a:spcAft>
+            </a:pPr>
+            <a:r>
+              <a:rPr sz="1600">
                 <a:solidFill>
                   <a:srgbClr val="666666"/>
                 </a:solidFill>
                 <a:latin typeface="Calibri"/>
               </a:rPr>
-              <a:t>Embedding — cheap</a:t>
-            </a:r>
-          </a:p>
-        </p:txBody>
-      </p:sp>
-      <p:sp>
-        <p:nvSpPr>
-          <p:cNvPr id="4" name="Rounded Rectangle 3"/>
-          <p:cNvSpPr/>
-          <p:nvPr/>
-        </p:nvSpPr>
-        <p:spPr>
-          <a:xfrm>
-            <a:off x="4754880" y="1554480"/>
-            <a:ext cx="2194560" cy="3749039"/>
-          </a:xfrm>
-          <a:prstGeom prst="roundRect">
-            <a:avLst/>
-          </a:prstGeom>
-          <a:solidFill>
-            <a:srgbClr val="FDE9D9"/>
-          </a:solidFill>
-          <a:ln w="12700">
-            <a:solidFill>
-              <a:srgbClr val="1F4E79"/>
-            </a:solidFill>
-          </a:ln>
-          <a:effectLst/>
-        </p:spPr>
-        <p:style>
-          <a:lnRef idx="1">
-            <a:schemeClr val="accent1"/>
-          </a:lnRef>
-          <a:fillRef idx="3">
-            <a:schemeClr val="accent1"/>
-          </a:fillRef>
-          <a:effectRef idx="2">
-            <a:schemeClr val="accent1"/>
-          </a:effectRef>
-          <a:fontRef idx="minor">
-            <a:schemeClr val="lt1"/>
-          </a:fontRef>
-        </p:style>
-        <p:txBody>
-          <a:bodyPr rtlCol="0" anchor="ctr" wrap="square"/>
-          <a:lstStyle/>
-          <a:p>
-            <a:pPr algn="ctr" rtl="1"/>
-            <a:r>
-              <a:rPr sz="1800" b="1">
+              <a:t>• Semantic caching cuts latency and cost; routing sends easy tasks to smaller, cheaper models.</a:t>
+            </a:r>
+          </a:p>
+          <a:p>
+            <a:pPr algn="r" rtl="1">
+              <a:spcBef>
+                <a:spcPts val="200"/>
+              </a:spcBef>
+              <a:spcAft>
+                <a:spcPts val="1000"/>
+              </a:spcAft>
+            </a:pPr>
+            <a:r>
+              <a:rPr sz="1900">
                 <a:solidFill>
                   <a:srgbClr val="333333"/>
                 </a:solidFill>
+                <a:latin typeface="Arial"/>
+              </a:rPr>
+              <a:t>• قاعدة FinOps: قِس التكلفة لكل طلب (per-request) قبل التوسع.</a:t>
+            </a:r>
+          </a:p>
+          <a:p>
+            <a:pPr algn="l" rtl="0">
+              <a:spcBef>
+                <a:spcPts val="200"/>
+              </a:spcBef>
+              <a:spcAft>
+                <a:spcPts val="1000"/>
+              </a:spcAft>
+            </a:pPr>
+            <a:r>
+              <a:rPr sz="1600">
+                <a:solidFill>
+                  <a:srgbClr val="666666"/>
+                </a:solidFill>
                 <a:latin typeface="Calibri"/>
               </a:rPr>
-              <a:t>التوليد ~10x</a:t>
-            </a:r>
-          </a:p>
-          <a:p>
-            <a:pPr algn="ctr" rtl="0"/>
-            <a:r>
-              <a:rPr sz="1200">
+              <a:t>• FinOps rule: measure per-request cost before scaling.</a:t>
+            </a:r>
+          </a:p>
+        </p:txBody>
+      </p:sp>
+      <p:sp>
+        <p:nvSpPr>
+          <p:cNvPr id="5" name="TextBox 4"/>
+          <p:cNvSpPr txBox="1"/>
+          <p:nvPr/>
+        </p:nvSpPr>
+        <p:spPr>
+          <a:xfrm>
+            <a:off x="640080" y="6400800"/>
+            <a:ext cx="8686800" cy="320040"/>
+          </a:xfrm>
+          <a:prstGeom prst="rect">
+            <a:avLst/>
+          </a:prstGeom>
+          <a:noFill/>
+        </p:spPr>
+        <p:txBody>
+          <a:bodyPr wrap="square">
+            <a:spAutoFit/>
+          </a:bodyPr>
+          <a:lstStyle/>
+          <a:p>
+            <a:pPr algn="r" rtl="1"/>
+            <a:r>
+              <a:rPr sz="1000" b="0">
+                <a:solidFill>
+                  <a:srgbClr val="666666"/>
+                </a:solidFill>
+                <a:latin typeface="Arial"/>
+              </a:rPr>
+              <a:t>Module 02 — Data &amp; AI Engineering Track  |  الوحدة الثانية</a:t>
+            </a:r>
+          </a:p>
+        </p:txBody>
+      </p:sp>
+      <p:sp>
+        <p:nvSpPr>
+          <p:cNvPr id="6" name="TextBox 5"/>
+          <p:cNvSpPr txBox="1"/>
+          <p:nvPr/>
+        </p:nvSpPr>
+        <p:spPr>
+          <a:xfrm>
+            <a:off x="9601200" y="6400800"/>
+            <a:ext cx="1920240" cy="320040"/>
+          </a:xfrm>
+          <a:prstGeom prst="rect">
+            <a:avLst/>
+          </a:prstGeom>
+          <a:noFill/>
+        </p:spPr>
+        <p:txBody>
+          <a:bodyPr wrap="square">
+            <a:spAutoFit/>
+          </a:bodyPr>
+          <a:lstStyle/>
+          <a:p>
+            <a:pPr algn="l" rtl="0"/>
+            <a:r>
+              <a:rPr sz="1000" b="0">
                 <a:solidFill>
                   <a:srgbClr val="666666"/>
                 </a:solidFill>
                 <a:latin typeface="Calibri"/>
               </a:rPr>
-              <a:t>Generation — costly</a:t>
-            </a:r>
-          </a:p>
-        </p:txBody>
-      </p:sp>
-      <p:sp>
-        <p:nvSpPr>
-          <p:cNvPr id="5" name="Rounded Rectangle 4"/>
-          <p:cNvSpPr/>
-          <p:nvPr/>
-        </p:nvSpPr>
-        <p:spPr>
-          <a:xfrm>
-            <a:off x="7863840" y="3108960"/>
-            <a:ext cx="2651760" cy="2194560"/>
-          </a:xfrm>
-          <a:prstGeom prst="roundRect">
-            <a:avLst/>
-          </a:prstGeom>
-          <a:solidFill>
-            <a:srgbClr val="DCE6F1"/>
-          </a:solidFill>
-          <a:ln w="12700">
-            <a:solidFill>
-              <a:srgbClr val="1F4E79"/>
-            </a:solidFill>
-          </a:ln>
-          <a:effectLst/>
-        </p:spPr>
-        <p:style>
-          <a:lnRef idx="1">
-            <a:schemeClr val="accent1"/>
-          </a:lnRef>
-          <a:fillRef idx="3">
-            <a:schemeClr val="accent1"/>
-          </a:fillRef>
-          <a:effectRef idx="2">
-            <a:schemeClr val="accent1"/>
-          </a:effectRef>
-          <a:fontRef idx="minor">
-            <a:schemeClr val="lt1"/>
-          </a:fontRef>
-        </p:style>
-        <p:txBody>
-          <a:bodyPr rtlCol="0" anchor="ctr" wrap="square"/>
-          <a:lstStyle/>
-          <a:p>
-            <a:pPr algn="ctr" rtl="1"/>
-            <a:r>
-              <a:rPr sz="1500" b="1">
-                <a:solidFill>
-                  <a:srgbClr val="333333"/>
+              <a:t>V12  •  6/13</a:t>
+            </a:r>
+          </a:p>
+        </p:txBody>
+      </p:sp>
+      <p:sp>
+        <p:nvSpPr>
+          <p:cNvPr id="7" name="TextBox 6"/>
+          <p:cNvSpPr txBox="1"/>
+          <p:nvPr/>
+        </p:nvSpPr>
+        <p:spPr>
+          <a:xfrm>
+            <a:off x="640080" y="6400800"/>
+            <a:ext cx="8686800" cy="320040"/>
+          </a:xfrm>
+          <a:prstGeom prst="rect">
+            <a:avLst/>
+          </a:prstGeom>
+          <a:noFill/>
+        </p:spPr>
+        <p:txBody>
+          <a:bodyPr wrap="square">
+            <a:spAutoFit/>
+          </a:bodyPr>
+          <a:lstStyle/>
+          <a:p>
+            <a:pPr algn="r" rtl="1"/>
+            <a:r>
+              <a:rPr sz="1000" b="0">
+                <a:solidFill>
+                  <a:srgbClr val="666666"/>
+                </a:solidFill>
+                <a:latin typeface="Arial"/>
+              </a:rPr>
+              <a:t>Module 02 — Data &amp; AI Engineering Track  |  الوحدة الثانية</a:t>
+            </a:r>
+          </a:p>
+        </p:txBody>
+      </p:sp>
+      <p:sp>
+        <p:nvSpPr>
+          <p:cNvPr id="8" name="TextBox 7"/>
+          <p:cNvSpPr txBox="1"/>
+          <p:nvPr/>
+        </p:nvSpPr>
+        <p:spPr>
+          <a:xfrm>
+            <a:off x="9601200" y="6400800"/>
+            <a:ext cx="1920240" cy="320040"/>
+          </a:xfrm>
+          <a:prstGeom prst="rect">
+            <a:avLst/>
+          </a:prstGeom>
+          <a:noFill/>
+        </p:spPr>
+        <p:txBody>
+          <a:bodyPr wrap="square">
+            <a:spAutoFit/>
+          </a:bodyPr>
+          <a:lstStyle/>
+          <a:p>
+            <a:pPr algn="l" rtl="0"/>
+            <a:r>
+              <a:rPr sz="1000" b="0">
+                <a:solidFill>
+                  <a:srgbClr val="666666"/>
                 </a:solidFill>
                 <a:latin typeface="Calibri"/>
               </a:rPr>
-              <a:t>الحل: تخزين مؤقت + توجيه</a:t>
-            </a:r>
-          </a:p>
-          <a:p>
-            <a:pPr algn="ctr" rtl="0"/>
-            <a:r>
-              <a:rPr sz="1200">
+              <a:t>12_  •  7/12</a:t>
+            </a:r>
+          </a:p>
+        </p:txBody>
+      </p:sp>
+      <p:sp>
+        <p:nvSpPr>
+          <p:cNvPr id="9" name="TextBox 8"/>
+          <p:cNvSpPr txBox="1"/>
+          <p:nvPr/>
+        </p:nvSpPr>
+        <p:spPr>
+          <a:xfrm>
+            <a:off x="640080" y="6400800"/>
+            <a:ext cx="8686800" cy="320040"/>
+          </a:xfrm>
+          <a:prstGeom prst="rect">
+            <a:avLst/>
+          </a:prstGeom>
+          <a:noFill/>
+        </p:spPr>
+        <p:txBody>
+          <a:bodyPr wrap="square">
+            <a:spAutoFit/>
+          </a:bodyPr>
+          <a:lstStyle/>
+          <a:p>
+            <a:pPr algn="r" rtl="1"/>
+            <a:r>
+              <a:rPr sz="1000" b="0">
+                <a:solidFill>
+                  <a:srgbClr val="666666"/>
+                </a:solidFill>
+                <a:latin typeface="Arial"/>
+              </a:rPr>
+              <a:t>Module 02 — Data &amp; AI Engineering Track  |  الوحدة الثانية</a:t>
+            </a:r>
+          </a:p>
+        </p:txBody>
+      </p:sp>
+      <p:sp>
+        <p:nvSpPr>
+          <p:cNvPr id="10" name="TextBox 9"/>
+          <p:cNvSpPr txBox="1"/>
+          <p:nvPr/>
+        </p:nvSpPr>
+        <p:spPr>
+          <a:xfrm>
+            <a:off x="9601200" y="6400800"/>
+            <a:ext cx="1920240" cy="320040"/>
+          </a:xfrm>
+          <a:prstGeom prst="rect">
+            <a:avLst/>
+          </a:prstGeom>
+          <a:noFill/>
+        </p:spPr>
+        <p:txBody>
+          <a:bodyPr wrap="square">
+            <a:spAutoFit/>
+          </a:bodyPr>
+          <a:lstStyle/>
+          <a:p>
+            <a:pPr algn="l" rtl="0"/>
+            <a:r>
+              <a:rPr sz="1000" b="0">
                 <a:solidFill>
                   <a:srgbClr val="666666"/>
                 </a:solidFill>
                 <a:latin typeface="Calibri"/>
               </a:rPr>
-              <a:t>Fix: caching + routing</a:t>
-            </a:r>
-          </a:p>
-        </p:txBody>
-      </p:sp>
-      <p:sp>
-        <p:nvSpPr>
-          <p:cNvPr id="6" name="TextBox 5"/>
-          <p:cNvSpPr txBox="1"/>
-          <p:nvPr/>
-        </p:nvSpPr>
-        <p:spPr>
-          <a:xfrm>
-            <a:off x="640080" y="6126480"/>
-            <a:ext cx="10972800" cy="548640"/>
-          </a:xfrm>
-          <a:prstGeom prst="rect">
-            <a:avLst/>
-          </a:prstGeom>
-          <a:noFill/>
-        </p:spPr>
-        <p:txBody>
-          <a:bodyPr wrap="square">
-            <a:spAutoFit/>
-          </a:bodyPr>
-          <a:lstStyle/>
-          <a:p>
-            <a:pPr algn="r" rtl="1"/>
-            <a:r>
-              <a:rPr sz="1400">
-                <a:solidFill>
-                  <a:srgbClr val="666666"/>
-                </a:solidFill>
-                <a:latin typeface="Calibri"/>
-              </a:rPr>
-              <a:t>قاعدة FinOps: قِس التكلفة لكل طلب قبل التوسع.</a:t>
-            </a:r>
-          </a:p>
-          <a:p>
-            <a:pPr algn="r" rtl="0"/>
-            <a:r>
-              <a:t>FinOps rule: measure per-request cost before scaling.</a:t>
+              <a:t>12_  •  7/12</a:t>
             </a:r>
           </a:p>
         </p:txBody>
@@ -6263,22 +7805,57 @@
       <p:grpSpPr/>
       <p:sp>
         <p:nvSpPr>
-          <p:cNvPr id="2" name="Rectangle 1"/>
+          <p:cNvPr id="2" name="TextBox 1"/>
+          <p:cNvSpPr txBox="1"/>
+          <p:nvPr/>
+        </p:nvSpPr>
+        <p:spPr>
+          <a:xfrm>
+            <a:off x="640080" y="137160"/>
+            <a:ext cx="10972800" cy="640080"/>
+          </a:xfrm>
+          <a:prstGeom prst="rect">
+            <a:avLst/>
+          </a:prstGeom>
+          <a:noFill/>
+        </p:spPr>
+        <p:txBody>
+          <a:bodyPr wrap="none">
+            <a:spAutoFit/>
+          </a:bodyPr>
+          <a:lstStyle/>
+          <a:p>
+            <a:pPr algn="r" rtl="1"/>
+            <a:r>
+              <a:rPr sz="3000" b="1">
+                <a:solidFill>
+                  <a:srgbClr val="1F3B5C"/>
+                </a:solidFill>
+                <a:latin typeface="Arial"/>
+              </a:rPr>
+              <a:t>التكلفة عمليًا: التضمين مقابل التوليد / Cost: Embedding vs Generation</a:t>
+            </a:r>
+          </a:p>
+        </p:txBody>
+      </p:sp>
+      <p:sp>
+        <p:nvSpPr>
+          <p:cNvPr id="3" name="Rounded Rectangle 2"/>
           <p:cNvSpPr/>
           <p:nvPr/>
         </p:nvSpPr>
         <p:spPr>
           <a:xfrm>
-            <a:off x="0" y="0"/>
-            <a:ext cx="12191695" cy="1005840"/>
-          </a:xfrm>
-          <a:prstGeom prst="rect">
+            <a:off x="1828800" y="3840480"/>
+            <a:ext cx="2194560" cy="1463040"/>
+          </a:xfrm>
+          <a:prstGeom prst="roundRect">
             <a:avLst/>
           </a:prstGeom>
           <a:solidFill>
-            <a:srgbClr val="FFFFFF"/>
+            <a:srgbClr val="E2EFDA"/>
           </a:solidFill>
-          <a:ln w="25400">
+          <a:ln w="12700">
             <a:solidFill>
               <a:srgbClr val="1F4E79"/>
             </a:solidFill>
@@ -6300,23 +7877,178 @@
           </a:fontRef>
         </p:style>
         <p:txBody>
-          <a:bodyPr rtlCol="0" anchor="ctr"/>
-          <a:lstStyle/>
-          <a:p>
-            <a:pPr algn="ctr"/>
-          </a:p>
-        </p:txBody>
-      </p:sp>
-      <p:sp>
-        <p:nvSpPr>
-          <p:cNvPr id="3" name="TextBox 2"/>
-          <p:cNvSpPr txBox="1"/>
-          <p:nvPr/>
-        </p:nvSpPr>
-        <p:spPr>
-          <a:xfrm>
-            <a:off x="640080" y="182880"/>
-            <a:ext cx="10972800" cy="640080"/>
+          <a:bodyPr rtlCol="0" anchor="ctr" wrap="square"/>
+          <a:lstStyle/>
+          <a:p>
+            <a:pPr algn="ctr" rtl="1"/>
+            <a:r>
+              <a:rPr sz="1800" b="1">
+                <a:solidFill>
+                  <a:srgbClr val="333333"/>
+                </a:solidFill>
+                <a:latin typeface="Arial"/>
+              </a:rPr>
+              <a:t>التضمين 1x</a:t>
+            </a:r>
+          </a:p>
+          <a:p>
+            <a:pPr algn="ctr" rtl="0"/>
+            <a:r>
+              <a:rPr sz="1200">
+                <a:solidFill>
+                  <a:srgbClr val="666666"/>
+                </a:solidFill>
+                <a:latin typeface="Calibri"/>
+              </a:rPr>
+              <a:t>Embedding — cheap</a:t>
+            </a:r>
+          </a:p>
+        </p:txBody>
+      </p:sp>
+      <p:sp>
+        <p:nvSpPr>
+          <p:cNvPr id="4" name="Rounded Rectangle 3"/>
+          <p:cNvSpPr/>
+          <p:nvPr/>
+        </p:nvSpPr>
+        <p:spPr>
+          <a:xfrm>
+            <a:off x="4754880" y="1554480"/>
+            <a:ext cx="2194560" cy="3749039"/>
+          </a:xfrm>
+          <a:prstGeom prst="roundRect">
+            <a:avLst/>
+          </a:prstGeom>
+          <a:solidFill>
+            <a:srgbClr val="FDE9D9"/>
+          </a:solidFill>
+          <a:ln w="12700">
+            <a:solidFill>
+              <a:srgbClr val="1F4E79"/>
+            </a:solidFill>
+          </a:ln>
+          <a:effectLst/>
+        </p:spPr>
+        <p:style>
+          <a:lnRef idx="1">
+            <a:schemeClr val="accent1"/>
+          </a:lnRef>
+          <a:fillRef idx="3">
+            <a:schemeClr val="accent1"/>
+          </a:fillRef>
+          <a:effectRef idx="2">
+            <a:schemeClr val="accent1"/>
+          </a:effectRef>
+          <a:fontRef idx="minor">
+            <a:schemeClr val="lt1"/>
+          </a:fontRef>
+        </p:style>
+        <p:txBody>
+          <a:bodyPr rtlCol="0" anchor="ctr" wrap="square"/>
+          <a:lstStyle/>
+          <a:p>
+            <a:pPr algn="ctr" rtl="1"/>
+            <a:r>
+              <a:rPr sz="1800" b="1">
+                <a:solidFill>
+                  <a:srgbClr val="333333"/>
+                </a:solidFill>
+                <a:latin typeface="Arial"/>
+              </a:rPr>
+              <a:t>التوليد ~10x</a:t>
+            </a:r>
+          </a:p>
+          <a:p>
+            <a:pPr algn="ctr" rtl="0"/>
+            <a:r>
+              <a:rPr sz="1200">
+                <a:solidFill>
+                  <a:srgbClr val="666666"/>
+                </a:solidFill>
+                <a:latin typeface="Calibri"/>
+              </a:rPr>
+              <a:t>Generation — costly</a:t>
+            </a:r>
+          </a:p>
+        </p:txBody>
+      </p:sp>
+      <p:sp>
+        <p:nvSpPr>
+          <p:cNvPr id="5" name="Rounded Rectangle 4"/>
+          <p:cNvSpPr/>
+          <p:nvPr/>
+        </p:nvSpPr>
+        <p:spPr>
+          <a:xfrm>
+            <a:off x="7863840" y="3108960"/>
+            <a:ext cx="2651760" cy="2194560"/>
+          </a:xfrm>
+          <a:prstGeom prst="roundRect">
+            <a:avLst/>
+          </a:prstGeom>
+          <a:solidFill>
+            <a:srgbClr val="DCE6F1"/>
+          </a:solidFill>
+          <a:ln w="12700">
+            <a:solidFill>
+              <a:srgbClr val="1F4E79"/>
+            </a:solidFill>
+          </a:ln>
+          <a:effectLst/>
+        </p:spPr>
+        <p:style>
+          <a:lnRef idx="1">
+            <a:schemeClr val="accent1"/>
+          </a:lnRef>
+          <a:fillRef idx="3">
+            <a:schemeClr val="accent1"/>
+          </a:fillRef>
+          <a:effectRef idx="2">
+            <a:schemeClr val="accent1"/>
+          </a:effectRef>
+          <a:fontRef idx="minor">
+            <a:schemeClr val="lt1"/>
+          </a:fontRef>
+        </p:style>
+        <p:txBody>
+          <a:bodyPr rtlCol="0" anchor="ctr" wrap="square"/>
+          <a:lstStyle/>
+          <a:p>
+            <a:pPr algn="ctr" rtl="1"/>
+            <a:r>
+              <a:rPr sz="1500" b="1">
+                <a:solidFill>
+                  <a:srgbClr val="333333"/>
+                </a:solidFill>
+                <a:latin typeface="Arial"/>
+              </a:rPr>
+              <a:t>الحل: تخزين مؤقت + توجيه</a:t>
+            </a:r>
+          </a:p>
+          <a:p>
+            <a:pPr algn="ctr" rtl="0"/>
+            <a:r>
+              <a:rPr sz="1200">
+                <a:solidFill>
+                  <a:srgbClr val="666666"/>
+                </a:solidFill>
+                <a:latin typeface="Calibri"/>
+              </a:rPr>
+              <a:t>Fix: caching + routing</a:t>
+            </a:r>
+          </a:p>
+        </p:txBody>
+      </p:sp>
+      <p:sp>
+        <p:nvSpPr>
+          <p:cNvPr id="6" name="TextBox 5"/>
+          <p:cNvSpPr txBox="1"/>
+          <p:nvPr/>
+        </p:nvSpPr>
+        <p:spPr>
+          <a:xfrm>
+            <a:off x="640080" y="6126480"/>
+            <a:ext cx="10972800" cy="548640"/>
           </a:xfrm>
           <a:prstGeom prst="rect">
             <a:avLst/>
@@ -6331,68 +8063,159 @@
           <a:p>
             <a:pPr algn="r" rtl="1"/>
             <a:r>
-              <a:rPr sz="3200" b="1">
-                <a:solidFill>
-                  <a:srgbClr val="1F3B5C"/>
+              <a:rPr sz="1400">
+                <a:solidFill>
+                  <a:srgbClr val="666666"/>
+                </a:solidFill>
+                <a:latin typeface="Arial"/>
+              </a:rPr>
+              <a:t>قاعدة FinOps: قِس التكلفة لكل طلب قبل التوسع.</a:t>
+            </a:r>
+          </a:p>
+          <a:p>
+            <a:pPr algn="r" rtl="0"/>
+            <a:r>
+              <a:t>FinOps rule: measure per-request cost before scaling.</a:t>
+            </a:r>
+          </a:p>
+        </p:txBody>
+      </p:sp>
+      <p:sp>
+        <p:nvSpPr>
+          <p:cNvPr id="7" name="TextBox 6"/>
+          <p:cNvSpPr txBox="1"/>
+          <p:nvPr/>
+        </p:nvSpPr>
+        <p:spPr>
+          <a:xfrm>
+            <a:off x="640080" y="6400800"/>
+            <a:ext cx="8686800" cy="320040"/>
+          </a:xfrm>
+          <a:prstGeom prst="rect">
+            <a:avLst/>
+          </a:prstGeom>
+          <a:noFill/>
+        </p:spPr>
+        <p:txBody>
+          <a:bodyPr wrap="square">
+            <a:spAutoFit/>
+          </a:bodyPr>
+          <a:lstStyle/>
+          <a:p>
+            <a:pPr algn="r" rtl="1"/>
+            <a:r>
+              <a:rPr sz="1000" b="0">
+                <a:solidFill>
+                  <a:srgbClr val="666666"/>
+                </a:solidFill>
+                <a:latin typeface="Arial"/>
+              </a:rPr>
+              <a:t>Module 02 — Data &amp; AI Engineering Track  |  الوحدة الثانية</a:t>
+            </a:r>
+          </a:p>
+        </p:txBody>
+      </p:sp>
+      <p:sp>
+        <p:nvSpPr>
+          <p:cNvPr id="8" name="TextBox 7"/>
+          <p:cNvSpPr txBox="1"/>
+          <p:nvPr/>
+        </p:nvSpPr>
+        <p:spPr>
+          <a:xfrm>
+            <a:off x="9601200" y="6400800"/>
+            <a:ext cx="1920240" cy="320040"/>
+          </a:xfrm>
+          <a:prstGeom prst="rect">
+            <a:avLst/>
+          </a:prstGeom>
+          <a:noFill/>
+        </p:spPr>
+        <p:txBody>
+          <a:bodyPr wrap="square">
+            <a:spAutoFit/>
+          </a:bodyPr>
+          <a:lstStyle/>
+          <a:p>
+            <a:pPr algn="l" rtl="0"/>
+            <a:r>
+              <a:rPr sz="1000" b="0">
+                <a:solidFill>
+                  <a:srgbClr val="666666"/>
                 </a:solidFill>
                 <a:latin typeface="Calibri"/>
               </a:rPr>
-              <a:t>تمهيد للمختبر L03 / Lab Prelude</a:t>
-            </a:r>
-          </a:p>
-        </p:txBody>
-      </p:sp>
-      <p:sp>
-        <p:nvSpPr>
-          <p:cNvPr id="4" name="TextBox 3"/>
-          <p:cNvSpPr txBox="1"/>
-          <p:nvPr/>
-        </p:nvSpPr>
-        <p:spPr>
-          <a:xfrm>
-            <a:off x="640080" y="1280160"/>
-            <a:ext cx="10972800" cy="5212080"/>
-          </a:xfrm>
-          <a:prstGeom prst="rect">
-            <a:avLst/>
-          </a:prstGeom>
-          <a:noFill/>
-        </p:spPr>
-        <p:txBody>
-          <a:bodyPr wrap="square">
-            <a:spAutoFit/>
-          </a:bodyPr>
-          <a:lstStyle/>
-          <a:p>
-            <a:pPr algn="r" rtl="1">
-              <a:spcAft>
-                <a:spcPts val="1000"/>
-              </a:spcAft>
-            </a:pPr>
-            <a:r>
-              <a:rPr sz="1800">
-                <a:solidFill>
-                  <a:srgbClr val="333333"/>
+              <a:t>12_  •  8/12</a:t>
+            </a:r>
+          </a:p>
+        </p:txBody>
+      </p:sp>
+      <p:sp>
+        <p:nvSpPr>
+          <p:cNvPr id="9" name="TextBox 8"/>
+          <p:cNvSpPr txBox="1"/>
+          <p:nvPr/>
+        </p:nvSpPr>
+        <p:spPr>
+          <a:xfrm>
+            <a:off x="640080" y="6400800"/>
+            <a:ext cx="8686800" cy="320040"/>
+          </a:xfrm>
+          <a:prstGeom prst="rect">
+            <a:avLst/>
+          </a:prstGeom>
+          <a:noFill/>
+        </p:spPr>
+        <p:txBody>
+          <a:bodyPr wrap="square">
+            <a:spAutoFit/>
+          </a:bodyPr>
+          <a:lstStyle/>
+          <a:p>
+            <a:pPr algn="r" rtl="1"/>
+            <a:r>
+              <a:rPr sz="1000" b="0">
+                <a:solidFill>
+                  <a:srgbClr val="666666"/>
+                </a:solidFill>
+                <a:latin typeface="Arial"/>
+              </a:rPr>
+              <a:t>Module 02 — Data &amp; AI Engineering Track  |  الوحدة الثانية</a:t>
+            </a:r>
+          </a:p>
+        </p:txBody>
+      </p:sp>
+      <p:sp>
+        <p:nvSpPr>
+          <p:cNvPr id="10" name="TextBox 9"/>
+          <p:cNvSpPr txBox="1"/>
+          <p:nvPr/>
+        </p:nvSpPr>
+        <p:spPr>
+          <a:xfrm>
+            <a:off x="9601200" y="6400800"/>
+            <a:ext cx="1920240" cy="320040"/>
+          </a:xfrm>
+          <a:prstGeom prst="rect">
+            <a:avLst/>
+          </a:prstGeom>
+          <a:noFill/>
+        </p:spPr>
+        <p:txBody>
+          <a:bodyPr wrap="square">
+            <a:spAutoFit/>
+          </a:bodyPr>
+          <a:lstStyle/>
+          <a:p>
+            <a:pPr algn="l" rtl="0"/>
+            <a:r>
+              <a:rPr sz="1000" b="0">
+                <a:solidFill>
+                  <a:srgbClr val="666666"/>
                 </a:solidFill>
                 <a:latin typeface="Calibri"/>
               </a:rPr>
-              <a:t>• المختبر: خط محلي خفيف — Python venv + SQLite مدمجة (Bronze/Silver) + ChromaDB (Gold) — دون Docker، بنقطة نهاية FastAPI على المسار /query.</a:t>
-            </a:r>
-          </a:p>
-          <a:p>
-            <a:pPr algn="r" rtl="0">
-              <a:spcAft>
-                <a:spcPts val="1000"/>
-              </a:spcAft>
-            </a:pPr>
-            <a:r>
-              <a:rPr sz="1800">
-                <a:solidFill>
-                  <a:srgbClr val="666666"/>
-                </a:solidFill>
-                <a:latin typeface="Calibri"/>
-              </a:rPr>
-              <a:t>   The lab: lightweight local pipeline — Python venv + built-in SQLite (Bronze/Silver) + ChromaDB (Gold) — no Docker, ending in a FastAPI /query endpoint.</a:t>
+              <a:t>12_  •  8/12</a:t>
             </a:r>
           </a:p>
         </p:txBody>
@@ -6497,9 +8320,9 @@
                 <a:solidFill>
                   <a:srgbClr val="1F3B5C"/>
                 </a:solidFill>
-                <a:latin typeface="Calibri"/>
-              </a:rPr>
-              <a:t>اختبار قصير / Quick Quiz</a:t>
+                <a:latin typeface="Arial"/>
+              </a:rPr>
+              <a:t>تمهيد للمختبر L03 / Lab Prelude</a:t>
             </a:r>
           </a:p>
         </p:txBody>
@@ -6527,98 +8350,250 @@
           <a:lstStyle/>
           <a:p>
             <a:pPr algn="r" rtl="1">
+              <a:spcBef>
+                <a:spcPts val="200"/>
+              </a:spcBef>
               <a:spcAft>
                 <a:spcPts val="1000"/>
               </a:spcAft>
             </a:pPr>
             <a:r>
-              <a:rPr sz="2000">
+              <a:rPr sz="1800">
                 <a:solidFill>
                   <a:srgbClr val="333333"/>
                 </a:solidFill>
-                <a:latin typeface="Calibri"/>
-              </a:rPr>
-              <a:t>• 1. فرّق بين AI Agent وAgentic AI.</a:t>
-            </a:r>
-          </a:p>
-          <a:p>
-            <a:pPr algn="r" rtl="0">
+                <a:latin typeface="Arial"/>
+              </a:rPr>
+              <a:t>• المختبر: خط محلي خفيف — Python venv + SQLite مدمجة (Bronze/Silver) + ChromaDB (Gold) — دون Docker، بنقطة نهاية FastAPI على المسار /query.</a:t>
+            </a:r>
+          </a:p>
+          <a:p>
+            <a:pPr algn="l" rtl="0">
+              <a:spcBef>
+                <a:spcPts val="200"/>
+              </a:spcBef>
               <a:spcAft>
                 <a:spcPts val="1000"/>
               </a:spcAft>
             </a:pPr>
             <a:r>
-              <a:rPr sz="2000">
+              <a:rPr sz="1500">
                 <a:solidFill>
                   <a:srgbClr val="666666"/>
                 </a:solidFill>
                 <a:latin typeface="Calibri"/>
               </a:rPr>
-              <a:t>   Differentiate an AI agent from agentic AI.</a:t>
-            </a:r>
-          </a:p>
-          <a:p>
-            <a:pPr algn="r" rtl="1">
-              <a:spcAft>
-                <a:spcPts val="1000"/>
-              </a:spcAft>
-            </a:pPr>
-            <a:r>
-              <a:rPr sz="2000">
-                <a:solidFill>
-                  <a:srgbClr val="333333"/>
+              <a:t>• The lab: lightweight local pipeline — Python venv + built-in SQLite (Bronze/Silver) + ChromaDB (Gold) — no Docker, ending in a FastAPI /query endpoint.</a:t>
+            </a:r>
+          </a:p>
+        </p:txBody>
+      </p:sp>
+      <p:sp>
+        <p:nvSpPr>
+          <p:cNvPr id="5" name="TextBox 4"/>
+          <p:cNvSpPr txBox="1"/>
+          <p:nvPr/>
+        </p:nvSpPr>
+        <p:spPr>
+          <a:xfrm>
+            <a:off x="640080" y="6400800"/>
+            <a:ext cx="8686800" cy="320040"/>
+          </a:xfrm>
+          <a:prstGeom prst="rect">
+            <a:avLst/>
+          </a:prstGeom>
+          <a:noFill/>
+        </p:spPr>
+        <p:txBody>
+          <a:bodyPr wrap="square">
+            <a:spAutoFit/>
+          </a:bodyPr>
+          <a:lstStyle/>
+          <a:p>
+            <a:pPr algn="r" rtl="1"/>
+            <a:r>
+              <a:rPr sz="1000" b="0">
+                <a:solidFill>
+                  <a:srgbClr val="666666"/>
+                </a:solidFill>
+                <a:latin typeface="Arial"/>
+              </a:rPr>
+              <a:t>Module 02 — Data &amp; AI Engineering Track  |  الوحدة الثانية</a:t>
+            </a:r>
+          </a:p>
+        </p:txBody>
+      </p:sp>
+      <p:sp>
+        <p:nvSpPr>
+          <p:cNvPr id="6" name="TextBox 5"/>
+          <p:cNvSpPr txBox="1"/>
+          <p:nvPr/>
+        </p:nvSpPr>
+        <p:spPr>
+          <a:xfrm>
+            <a:off x="9601200" y="6400800"/>
+            <a:ext cx="1920240" cy="320040"/>
+          </a:xfrm>
+          <a:prstGeom prst="rect">
+            <a:avLst/>
+          </a:prstGeom>
+          <a:noFill/>
+        </p:spPr>
+        <p:txBody>
+          <a:bodyPr wrap="square">
+            <a:spAutoFit/>
+          </a:bodyPr>
+          <a:lstStyle/>
+          <a:p>
+            <a:pPr algn="l" rtl="0"/>
+            <a:r>
+              <a:rPr sz="1000" b="0">
+                <a:solidFill>
+                  <a:srgbClr val="666666"/>
                 </a:solidFill>
                 <a:latin typeface="Calibri"/>
               </a:rPr>
-              <a:t>• 2. ما أرخص: تضمين أم توليد؟</a:t>
-            </a:r>
-          </a:p>
-          <a:p>
-            <a:pPr algn="r" rtl="0">
-              <a:spcAft>
-                <a:spcPts val="1000"/>
-              </a:spcAft>
-            </a:pPr>
-            <a:r>
-              <a:rPr sz="2000">
+              <a:t>V12  •  7/13</a:t>
+            </a:r>
+          </a:p>
+        </p:txBody>
+      </p:sp>
+      <p:sp>
+        <p:nvSpPr>
+          <p:cNvPr id="7" name="TextBox 6"/>
+          <p:cNvSpPr txBox="1"/>
+          <p:nvPr/>
+        </p:nvSpPr>
+        <p:spPr>
+          <a:xfrm>
+            <a:off x="640080" y="6400800"/>
+            <a:ext cx="8686800" cy="320040"/>
+          </a:xfrm>
+          <a:prstGeom prst="rect">
+            <a:avLst/>
+          </a:prstGeom>
+          <a:noFill/>
+        </p:spPr>
+        <p:txBody>
+          <a:bodyPr wrap="square">
+            <a:spAutoFit/>
+          </a:bodyPr>
+          <a:lstStyle/>
+          <a:p>
+            <a:pPr algn="r" rtl="1"/>
+            <a:r>
+              <a:rPr sz="1000" b="0">
+                <a:solidFill>
+                  <a:srgbClr val="666666"/>
+                </a:solidFill>
+                <a:latin typeface="Arial"/>
+              </a:rPr>
+              <a:t>Module 02 — Data &amp; AI Engineering Track  |  الوحدة الثانية</a:t>
+            </a:r>
+          </a:p>
+        </p:txBody>
+      </p:sp>
+      <p:sp>
+        <p:nvSpPr>
+          <p:cNvPr id="8" name="TextBox 7"/>
+          <p:cNvSpPr txBox="1"/>
+          <p:nvPr/>
+        </p:nvSpPr>
+        <p:spPr>
+          <a:xfrm>
+            <a:off x="9601200" y="6400800"/>
+            <a:ext cx="1920240" cy="320040"/>
+          </a:xfrm>
+          <a:prstGeom prst="rect">
+            <a:avLst/>
+          </a:prstGeom>
+          <a:noFill/>
+        </p:spPr>
+        <p:txBody>
+          <a:bodyPr wrap="square">
+            <a:spAutoFit/>
+          </a:bodyPr>
+          <a:lstStyle/>
+          <a:p>
+            <a:pPr algn="l" rtl="0"/>
+            <a:r>
+              <a:rPr sz="1000" b="0">
                 <a:solidFill>
                   <a:srgbClr val="666666"/>
                 </a:solidFill>
                 <a:latin typeface="Calibri"/>
               </a:rPr>
-              <a:t>   Which is cheaper: embedding or generation?</a:t>
-            </a:r>
-          </a:p>
-          <a:p>
-            <a:pPr algn="r" rtl="1">
-              <a:spcAft>
-                <a:spcPts val="1000"/>
-              </a:spcAft>
-            </a:pPr>
-            <a:r>
-              <a:rPr sz="2000">
-                <a:solidFill>
-                  <a:srgbClr val="333333"/>
+              <a:t>12_  •  9/12</a:t>
+            </a:r>
+          </a:p>
+        </p:txBody>
+      </p:sp>
+      <p:sp>
+        <p:nvSpPr>
+          <p:cNvPr id="9" name="TextBox 8"/>
+          <p:cNvSpPr txBox="1"/>
+          <p:nvPr/>
+        </p:nvSpPr>
+        <p:spPr>
+          <a:xfrm>
+            <a:off x="640080" y="6400800"/>
+            <a:ext cx="8686800" cy="320040"/>
+          </a:xfrm>
+          <a:prstGeom prst="rect">
+            <a:avLst/>
+          </a:prstGeom>
+          <a:noFill/>
+        </p:spPr>
+        <p:txBody>
+          <a:bodyPr wrap="square">
+            <a:spAutoFit/>
+          </a:bodyPr>
+          <a:lstStyle/>
+          <a:p>
+            <a:pPr algn="r" rtl="1"/>
+            <a:r>
+              <a:rPr sz="1000" b="0">
+                <a:solidFill>
+                  <a:srgbClr val="666666"/>
+                </a:solidFill>
+                <a:latin typeface="Arial"/>
+              </a:rPr>
+              <a:t>Module 02 — Data &amp; AI Engineering Track  |  الوحدة الثانية</a:t>
+            </a:r>
+          </a:p>
+        </p:txBody>
+      </p:sp>
+      <p:sp>
+        <p:nvSpPr>
+          <p:cNvPr id="10" name="TextBox 9"/>
+          <p:cNvSpPr txBox="1"/>
+          <p:nvPr/>
+        </p:nvSpPr>
+        <p:spPr>
+          <a:xfrm>
+            <a:off x="9601200" y="6400800"/>
+            <a:ext cx="1920240" cy="320040"/>
+          </a:xfrm>
+          <a:prstGeom prst="rect">
+            <a:avLst/>
+          </a:prstGeom>
+          <a:noFill/>
+        </p:spPr>
+        <p:txBody>
+          <a:bodyPr wrap="square">
+            <a:spAutoFit/>
+          </a:bodyPr>
+          <a:lstStyle/>
+          <a:p>
+            <a:pPr algn="l" rtl="0"/>
+            <a:r>
+              <a:rPr sz="1000" b="0">
+                <a:solidFill>
+                  <a:srgbClr val="666666"/>
                 </a:solidFill>
                 <a:latin typeface="Calibri"/>
               </a:rPr>
-              <a:t>• 3. ما أدوات تتبع التجارب وإصدارات البيانات؟</a:t>
-            </a:r>
-          </a:p>
-          <a:p>
-            <a:pPr algn="r" rtl="0">
-              <a:spcAft>
-                <a:spcPts val="1000"/>
-              </a:spcAft>
-            </a:pPr>
-            <a:r>
-              <a:rPr sz="2000">
-                <a:solidFill>
-                  <a:srgbClr val="666666"/>
-                </a:solidFill>
-                <a:latin typeface="Calibri"/>
-              </a:rPr>
-              <a:t>   Which tools track experiments and version data?</a:t>
+              <a:t>12_  •  9/12</a:t>
             </a:r>
           </a:p>
         </p:txBody>

--- a/output/Module02_V12_Updated.pptx
+++ b/output/Module02_V12_Updated.pptx
@@ -3129,13 +3129,15 @@
           </a:bodyPr>
           <a:lstStyle/>
           <a:p>
-            <a:pPr algn="l" rtl="0"/>
+            <a:pPr algn="r" rtl="0"/>
             <a:r>
               <a:rPr sz="2800" b="1">
                 <a:solidFill>
                   <a:srgbClr val="1F4E79"/>
                 </a:solidFill>
                 <a:latin typeface="Calibri"/>
+                <a:cs typeface="Arial"/>
+                <a:ea typeface="Calibri"/>
               </a:rPr>
               <a:t>Module 02  |  V12</a:t>
             </a:r>
@@ -3171,6 +3173,8 @@
                   <a:srgbClr val="1F3B5C"/>
                 </a:solidFill>
                 <a:latin typeface="Arial"/>
+                <a:cs typeface="Arial"/>
+                <a:ea typeface="Calibri"/>
               </a:rPr>
               <a:t>أساسيات MLOps + تمهيد للمختبر</a:t>
             </a:r>
@@ -3199,15 +3203,17 @@
           </a:bodyPr>
           <a:lstStyle/>
           <a:p>
-            <a:pPr algn="l" rtl="0"/>
+            <a:pPr algn="r" rtl="0"/>
             <a:r>
               <a:rPr sz="3000" b="0">
                 <a:solidFill>
                   <a:srgbClr val="333333"/>
                 </a:solidFill>
                 <a:latin typeface="Calibri"/>
-              </a:rPr>
-              <a:t>MLOps Fundamentals + Lab Prelude</a:t>
+                <a:cs typeface="Arial"/>
+                <a:ea typeface="Calibri"/>
+              </a:rPr>
+              <a:t>MLOps Fundamentals + Lab Introduction</a:t>
             </a:r>
           </a:p>
         </p:txBody>
@@ -3241,6 +3247,8 @@
                   <a:srgbClr val="666666"/>
                 </a:solidFill>
                 <a:latin typeface="Arial"/>
+                <a:cs typeface="Arial"/>
+                <a:ea typeface="Calibri"/>
               </a:rPr>
               <a:t>Module 02 — Data &amp; AI Engineering Track  |  الوحدة الثانية</a:t>
             </a:r>
@@ -3269,13 +3277,15 @@
           </a:bodyPr>
           <a:lstStyle/>
           <a:p>
-            <a:pPr algn="l" rtl="0"/>
+            <a:pPr algn="r" rtl="0"/>
             <a:r>
               <a:rPr sz="1400" b="0">
                 <a:solidFill>
                   <a:srgbClr val="666666"/>
                 </a:solidFill>
                 <a:latin typeface="Calibri"/>
+                <a:cs typeface="Arial"/>
+                <a:ea typeface="Calibri"/>
               </a:rPr>
               <a:t>Light theme  |  Bilingual AR/EN  |  Ready to present</a:t>
             </a:r>
@@ -3311,6 +3321,8 @@
                   <a:srgbClr val="666666"/>
                 </a:solidFill>
                 <a:latin typeface="Arial"/>
+                <a:cs typeface="Arial"/>
+                <a:ea typeface="Calibri"/>
               </a:rPr>
               <a:t>Module 02 — Data &amp; AI Engineering Track  |  الوحدة الثانية</a:t>
             </a:r>
@@ -3346,6 +3358,8 @@
                   <a:srgbClr val="666666"/>
                 </a:solidFill>
                 <a:latin typeface="Calibri"/>
+                <a:cs typeface="Arial"/>
+                <a:ea typeface="Calibri"/>
               </a:rPr>
               <a:t>V12  •  1/13</a:t>
             </a:r>
@@ -3381,6 +3395,8 @@
                   <a:srgbClr val="666666"/>
                 </a:solidFill>
                 <a:latin typeface="Arial"/>
+                <a:cs typeface="Arial"/>
+                <a:ea typeface="Calibri"/>
               </a:rPr>
               <a:t>Module 02 — Data &amp; AI Engineering Track  |  الوحدة الثانية</a:t>
             </a:r>
@@ -3416,6 +3432,8 @@
                   <a:srgbClr val="666666"/>
                 </a:solidFill>
                 <a:latin typeface="Calibri"/>
+                <a:cs typeface="Arial"/>
+                <a:ea typeface="Calibri"/>
               </a:rPr>
               <a:t>12_  •  1/12</a:t>
             </a:r>
@@ -3451,6 +3469,8 @@
                   <a:srgbClr val="666666"/>
                 </a:solidFill>
                 <a:latin typeface="Arial"/>
+                <a:cs typeface="Arial"/>
+                <a:ea typeface="Calibri"/>
               </a:rPr>
               <a:t>Module 02 — Data &amp; AI Engineering Track  |  الوحدة الثانية</a:t>
             </a:r>
@@ -3486,6 +3506,8 @@
                   <a:srgbClr val="666666"/>
                 </a:solidFill>
                 <a:latin typeface="Calibri"/>
+                <a:cs typeface="Arial"/>
+                <a:ea typeface="Calibri"/>
               </a:rPr>
               <a:t>12_  •  1/12</a:t>
             </a:r>
@@ -3593,6 +3615,8 @@
                   <a:srgbClr val="1F3B5C"/>
                 </a:solidFill>
                 <a:latin typeface="Arial"/>
+                <a:cs typeface="Arial"/>
+                <a:ea typeface="Calibri"/>
               </a:rPr>
               <a:t>اختبار قصير / Quick Quiz</a:t>
             </a:r>
@@ -3635,12 +3659,14 @@
                   <a:srgbClr val="333333"/>
                 </a:solidFill>
                 <a:latin typeface="Arial"/>
+                <a:cs typeface="Arial"/>
+                <a:ea typeface="Calibri"/>
               </a:rPr>
               <a:t>• 1. فرّق بين AI Agent وAgentic AI.</a:t>
             </a:r>
           </a:p>
           <a:p>
-            <a:pPr algn="l" rtl="0">
+            <a:pPr algn="r" rtl="0">
               <a:spcBef>
                 <a:spcPts val="200"/>
               </a:spcBef>
@@ -3654,6 +3680,8 @@
                   <a:srgbClr val="666666"/>
                 </a:solidFill>
                 <a:latin typeface="Calibri"/>
+                <a:cs typeface="Arial"/>
+                <a:ea typeface="Calibri"/>
               </a:rPr>
               <a:t>• Differentiate an AI agent from agentic AI.</a:t>
             </a:r>
@@ -3673,12 +3701,14 @@
                   <a:srgbClr val="333333"/>
                 </a:solidFill>
                 <a:latin typeface="Arial"/>
+                <a:cs typeface="Arial"/>
+                <a:ea typeface="Calibri"/>
               </a:rPr>
               <a:t>• 2. ما أرخص: تضمين أم توليد؟</a:t>
             </a:r>
           </a:p>
           <a:p>
-            <a:pPr algn="l" rtl="0">
+            <a:pPr algn="r" rtl="0">
               <a:spcBef>
                 <a:spcPts val="200"/>
               </a:spcBef>
@@ -3692,6 +3722,8 @@
                   <a:srgbClr val="666666"/>
                 </a:solidFill>
                 <a:latin typeface="Calibri"/>
+                <a:cs typeface="Arial"/>
+                <a:ea typeface="Calibri"/>
               </a:rPr>
               <a:t>• Which is cheaper: embedding or generation?</a:t>
             </a:r>
@@ -3711,12 +3743,14 @@
                   <a:srgbClr val="333333"/>
                 </a:solidFill>
                 <a:latin typeface="Arial"/>
+                <a:cs typeface="Arial"/>
+                <a:ea typeface="Calibri"/>
               </a:rPr>
               <a:t>• 3. ما أدوات تتبع التجارب وإصدارات البيانات؟</a:t>
             </a:r>
           </a:p>
           <a:p>
-            <a:pPr algn="l" rtl="0">
+            <a:pPr algn="r" rtl="0">
               <a:spcBef>
                 <a:spcPts val="200"/>
               </a:spcBef>
@@ -3730,6 +3764,8 @@
                   <a:srgbClr val="666666"/>
                 </a:solidFill>
                 <a:latin typeface="Calibri"/>
+                <a:cs typeface="Arial"/>
+                <a:ea typeface="Calibri"/>
               </a:rPr>
               <a:t>• Which tools track experiments and version data?</a:t>
             </a:r>
@@ -3765,6 +3801,8 @@
                   <a:srgbClr val="666666"/>
                 </a:solidFill>
                 <a:latin typeface="Arial"/>
+                <a:cs typeface="Arial"/>
+                <a:ea typeface="Calibri"/>
               </a:rPr>
               <a:t>Module 02 — Data &amp; AI Engineering Track  |  الوحدة الثانية</a:t>
             </a:r>
@@ -3800,6 +3838,8 @@
                   <a:srgbClr val="666666"/>
                 </a:solidFill>
                 <a:latin typeface="Calibri"/>
+                <a:cs typeface="Arial"/>
+                <a:ea typeface="Calibri"/>
               </a:rPr>
               <a:t>V12  •  8/13</a:t>
             </a:r>
@@ -3835,6 +3875,8 @@
                   <a:srgbClr val="666666"/>
                 </a:solidFill>
                 <a:latin typeface="Arial"/>
+                <a:cs typeface="Arial"/>
+                <a:ea typeface="Calibri"/>
               </a:rPr>
               <a:t>Module 02 — Data &amp; AI Engineering Track  |  الوحدة الثانية</a:t>
             </a:r>
@@ -3870,6 +3912,8 @@
                   <a:srgbClr val="666666"/>
                 </a:solidFill>
                 <a:latin typeface="Calibri"/>
+                <a:cs typeface="Arial"/>
+                <a:ea typeface="Calibri"/>
               </a:rPr>
               <a:t>12_  •  10/12</a:t>
             </a:r>
@@ -3905,6 +3949,8 @@
                   <a:srgbClr val="666666"/>
                 </a:solidFill>
                 <a:latin typeface="Arial"/>
+                <a:cs typeface="Arial"/>
+                <a:ea typeface="Calibri"/>
               </a:rPr>
               <a:t>Module 02 — Data &amp; AI Engineering Track  |  الوحدة الثانية</a:t>
             </a:r>
@@ -3940,6 +3986,8 @@
                   <a:srgbClr val="666666"/>
                 </a:solidFill>
                 <a:latin typeface="Calibri"/>
+                <a:cs typeface="Arial"/>
+                <a:ea typeface="Calibri"/>
               </a:rPr>
               <a:t>12_  •  10/12</a:t>
             </a:r>
@@ -4047,6 +4095,8 @@
                   <a:srgbClr val="1F3B5C"/>
                 </a:solidFill>
                 <a:latin typeface="Arial"/>
+                <a:cs typeface="Arial"/>
+                <a:ea typeface="Calibri"/>
               </a:rPr>
               <a:t>إجابات الاختبار / Quiz Answers</a:t>
             </a:r>
@@ -4089,12 +4139,14 @@
                   <a:srgbClr val="333333"/>
                 </a:solidFill>
                 <a:latin typeface="Arial"/>
+                <a:cs typeface="Arial"/>
+                <a:ea typeface="Calibri"/>
               </a:rPr>
               <a:t>• 1. الوكيل يستجيب ويستدعي أدوات؛ الوكيلي يخطط ذاتيًا وينفذ خطوات متعددة ويتكيف.</a:t>
             </a:r>
           </a:p>
           <a:p>
-            <a:pPr algn="l" rtl="0">
+            <a:pPr algn="r" rtl="0">
               <a:spcBef>
                 <a:spcPts val="200"/>
               </a:spcBef>
@@ -4108,6 +4160,8 @@
                   <a:srgbClr val="666666"/>
                 </a:solidFill>
                 <a:latin typeface="Calibri"/>
+                <a:cs typeface="Arial"/>
+                <a:ea typeface="Calibri"/>
               </a:rPr>
               <a:t>• An agent responds and calls tools; agentic AI self-plans multi-step execution.</a:t>
             </a:r>
@@ -4127,12 +4181,14 @@
                   <a:srgbClr val="333333"/>
                 </a:solidFill>
                 <a:latin typeface="Arial"/>
+                <a:cs typeface="Arial"/>
+                <a:ea typeface="Calibri"/>
               </a:rPr>
               <a:t>• 2. التضمين — أقل بتكلفة مرتبة كاملة.</a:t>
             </a:r>
           </a:p>
           <a:p>
-            <a:pPr algn="l" rtl="0">
+            <a:pPr algn="r" rtl="0">
               <a:spcBef>
                 <a:spcPts val="200"/>
               </a:spcBef>
@@ -4146,6 +4202,8 @@
                   <a:srgbClr val="666666"/>
                 </a:solidFill>
                 <a:latin typeface="Calibri"/>
+                <a:cs typeface="Arial"/>
+                <a:ea typeface="Calibri"/>
               </a:rPr>
               <a:t>• Embedding — roughly an order of magnitude cheaper.</a:t>
             </a:r>
@@ -4165,12 +4223,14 @@
                   <a:srgbClr val="333333"/>
                 </a:solidFill>
                 <a:latin typeface="Arial"/>
+                <a:cs typeface="Arial"/>
+                <a:ea typeface="Calibri"/>
               </a:rPr>
               <a:t>• 3. MLflow للتتبع وDVC لإصدارات البيانات.</a:t>
             </a:r>
           </a:p>
           <a:p>
-            <a:pPr algn="l" rtl="0">
+            <a:pPr algn="r" rtl="0">
               <a:spcBef>
                 <a:spcPts val="200"/>
               </a:spcBef>
@@ -4184,6 +4244,8 @@
                   <a:srgbClr val="666666"/>
                 </a:solidFill>
                 <a:latin typeface="Calibri"/>
+                <a:cs typeface="Arial"/>
+                <a:ea typeface="Calibri"/>
               </a:rPr>
               <a:t>• MLflow for tracking, DVC for data versioning.</a:t>
             </a:r>
@@ -4219,6 +4281,8 @@
                   <a:srgbClr val="666666"/>
                 </a:solidFill>
                 <a:latin typeface="Arial"/>
+                <a:cs typeface="Arial"/>
+                <a:ea typeface="Calibri"/>
               </a:rPr>
               <a:t>Module 02 — Data &amp; AI Engineering Track  |  الوحدة الثانية</a:t>
             </a:r>
@@ -4254,6 +4318,8 @@
                   <a:srgbClr val="666666"/>
                 </a:solidFill>
                 <a:latin typeface="Calibri"/>
+                <a:cs typeface="Arial"/>
+                <a:ea typeface="Calibri"/>
               </a:rPr>
               <a:t>V12  •  9/13</a:t>
             </a:r>
@@ -4289,6 +4355,8 @@
                   <a:srgbClr val="666666"/>
                 </a:solidFill>
                 <a:latin typeface="Arial"/>
+                <a:cs typeface="Arial"/>
+                <a:ea typeface="Calibri"/>
               </a:rPr>
               <a:t>Module 02 — Data &amp; AI Engineering Track  |  الوحدة الثانية</a:t>
             </a:r>
@@ -4324,6 +4392,8 @@
                   <a:srgbClr val="666666"/>
                 </a:solidFill>
                 <a:latin typeface="Calibri"/>
+                <a:cs typeface="Arial"/>
+                <a:ea typeface="Calibri"/>
               </a:rPr>
               <a:t>12_  •  11/12</a:t>
             </a:r>
@@ -4359,6 +4429,8 @@
                   <a:srgbClr val="666666"/>
                 </a:solidFill>
                 <a:latin typeface="Arial"/>
+                <a:cs typeface="Arial"/>
+                <a:ea typeface="Calibri"/>
               </a:rPr>
               <a:t>Module 02 — Data &amp; AI Engineering Track  |  الوحدة الثانية</a:t>
             </a:r>
@@ -4394,6 +4466,8 @@
                   <a:srgbClr val="666666"/>
                 </a:solidFill>
                 <a:latin typeface="Calibri"/>
+                <a:cs typeface="Arial"/>
+                <a:ea typeface="Calibri"/>
               </a:rPr>
               <a:t>12_  •  11/12</a:t>
             </a:r>
@@ -4501,6 +4575,8 @@
                   <a:srgbClr val="1F3B5C"/>
                 </a:solidFill>
                 <a:latin typeface="Arial"/>
+                <a:cs typeface="Arial"/>
+                <a:ea typeface="Calibri"/>
               </a:rPr>
               <a:t>للاستزادة / Further Reading</a:t>
             </a:r>
@@ -4543,12 +4619,14 @@
                   <a:srgbClr val="333333"/>
                 </a:solidFill>
                 <a:latin typeface="Arial"/>
+                <a:cs typeface="Arial"/>
+                <a:ea typeface="Calibri"/>
               </a:rPr>
               <a:t>• توثيق MLflow وDVC.</a:t>
             </a:r>
           </a:p>
           <a:p>
-            <a:pPr algn="l" rtl="0">
+            <a:pPr algn="r" rtl="0">
               <a:spcBef>
                 <a:spcPts val="200"/>
               </a:spcBef>
@@ -4562,6 +4640,8 @@
                   <a:srgbClr val="666666"/>
                 </a:solidFill>
                 <a:latin typeface="Calibri"/>
+                <a:cs typeface="Arial"/>
+                <a:ea typeface="Calibri"/>
               </a:rPr>
               <a:t>• MLflow and DVC docs.</a:t>
             </a:r>
@@ -4581,12 +4661,14 @@
                   <a:srgbClr val="333333"/>
                 </a:solidFill>
                 <a:latin typeface="Arial"/>
+                <a:cs typeface="Arial"/>
+                <a:ea typeface="Calibri"/>
               </a:rPr>
               <a:t>• دليل تجهيز البيئة للمختبر L03.</a:t>
             </a:r>
           </a:p>
           <a:p>
-            <a:pPr algn="l" rtl="0">
+            <a:pPr algn="r" rtl="0">
               <a:spcBef>
                 <a:spcPts val="200"/>
               </a:spcBef>
@@ -4600,6 +4682,8 @@
                   <a:srgbClr val="666666"/>
                 </a:solidFill>
                 <a:latin typeface="Calibri"/>
+                <a:cs typeface="Arial"/>
+                <a:ea typeface="Calibri"/>
               </a:rPr>
               <a:t>• L03 Environment Setup Guide.</a:t>
             </a:r>
@@ -4635,6 +4719,8 @@
                   <a:srgbClr val="666666"/>
                 </a:solidFill>
                 <a:latin typeface="Arial"/>
+                <a:cs typeface="Arial"/>
+                <a:ea typeface="Calibri"/>
               </a:rPr>
               <a:t>Module 02 — Data &amp; AI Engineering Track  |  الوحدة الثانية</a:t>
             </a:r>
@@ -4670,6 +4756,8 @@
                   <a:srgbClr val="666666"/>
                 </a:solidFill>
                 <a:latin typeface="Calibri"/>
+                <a:cs typeface="Arial"/>
+                <a:ea typeface="Calibri"/>
               </a:rPr>
               <a:t>V12  •  10/13</a:t>
             </a:r>
@@ -4705,6 +4793,8 @@
                   <a:srgbClr val="666666"/>
                 </a:solidFill>
                 <a:latin typeface="Arial"/>
+                <a:cs typeface="Arial"/>
+                <a:ea typeface="Calibri"/>
               </a:rPr>
               <a:t>Module 02 — Data &amp; AI Engineering Track  |  الوحدة الثانية</a:t>
             </a:r>
@@ -4740,6 +4830,8 @@
                   <a:srgbClr val="666666"/>
                 </a:solidFill>
                 <a:latin typeface="Calibri"/>
+                <a:cs typeface="Arial"/>
+                <a:ea typeface="Calibri"/>
               </a:rPr>
               <a:t>12_  •  12/12</a:t>
             </a:r>
@@ -4775,6 +4867,8 @@
                   <a:srgbClr val="666666"/>
                 </a:solidFill>
                 <a:latin typeface="Arial"/>
+                <a:cs typeface="Arial"/>
+                <a:ea typeface="Calibri"/>
               </a:rPr>
               <a:t>Module 02 — Data &amp; AI Engineering Track  |  الوحدة الثانية</a:t>
             </a:r>
@@ -4810,6 +4904,8 @@
                   <a:srgbClr val="666666"/>
                 </a:solidFill>
                 <a:latin typeface="Calibri"/>
+                <a:cs typeface="Arial"/>
+                <a:ea typeface="Calibri"/>
               </a:rPr>
               <a:t>12_  •  12/12</a:t>
             </a:r>
@@ -4917,6 +5013,8 @@
                   <a:srgbClr val="1F3B5C"/>
                 </a:solidFill>
                 <a:latin typeface="Arial"/>
+                <a:cs typeface="Arial"/>
+                <a:ea typeface="Calibri"/>
               </a:rPr>
               <a:t>أجندة العرض / Agenda</a:t>
             </a:r>
@@ -4959,12 +5057,14 @@
                   <a:srgbClr val="333333"/>
                 </a:solidFill>
                 <a:latin typeface="Arial"/>
+                <a:cs typeface="Arial"/>
+                <a:ea typeface="Calibri"/>
               </a:rPr>
               <a:t>• V12 — أساسيات MLOps + تمهيد للمختبر</a:t>
             </a:r>
           </a:p>
           <a:p>
-            <a:pPr algn="l" rtl="0">
+            <a:pPr algn="r" rtl="0">
               <a:spcBef>
                 <a:spcPts val="200"/>
               </a:spcBef>
@@ -4978,8 +5078,10 @@
                   <a:srgbClr val="666666"/>
                 </a:solidFill>
                 <a:latin typeface="Calibri"/>
-              </a:rPr>
-              <a:t>• V12 — MLOps Fundamentals + Lab Prelude</a:t>
+                <a:cs typeface="Arial"/>
+                <a:ea typeface="Calibri"/>
+              </a:rPr>
+              <a:t>• V12 — MLOps Fundamentals + Lab Introduction</a:t>
             </a:r>
           </a:p>
           <a:p>
@@ -4997,6 +5099,8 @@
                   <a:srgbClr val="333333"/>
                 </a:solidFill>
                 <a:latin typeface="Arial"/>
+                <a:cs typeface="Arial"/>
+                <a:ea typeface="Calibri"/>
               </a:rPr>
               <a:t>• MLOps والأدوات / MLOps &amp; Tools</a:t>
             </a:r>
@@ -5016,6 +5120,8 @@
                   <a:srgbClr val="333333"/>
                 </a:solidFill>
                 <a:latin typeface="Arial"/>
+                <a:cs typeface="Arial"/>
+                <a:ea typeface="Calibri"/>
               </a:rPr>
               <a:t>• تمييز المفاهيم / Concept Distinctions</a:t>
             </a:r>
@@ -5035,6 +5141,8 @@
                   <a:srgbClr val="333333"/>
                 </a:solidFill>
                 <a:latin typeface="Arial"/>
+                <a:cs typeface="Arial"/>
+                <a:ea typeface="Calibri"/>
               </a:rPr>
               <a:t>• RAG الوكيلي / Agentic RAG</a:t>
             </a:r>
@@ -5054,6 +5162,8 @@
                   <a:srgbClr val="333333"/>
                 </a:solidFill>
                 <a:latin typeface="Arial"/>
+                <a:cs typeface="Arial"/>
+                <a:ea typeface="Calibri"/>
               </a:rPr>
               <a:t>• التكلفة والأداء عمليًا / Practical Cost &amp; Performance</a:t>
             </a:r>
@@ -5073,8 +5183,10 @@
                   <a:srgbClr val="333333"/>
                 </a:solidFill>
                 <a:latin typeface="Arial"/>
-              </a:rPr>
-              <a:t>• تمهيد للمختبر L03 / Lab Prelude</a:t>
+                <a:cs typeface="Arial"/>
+                <a:ea typeface="Calibri"/>
+              </a:rPr>
+              <a:t>• تمهيد للمختبر L03 / Lab Introduction</a:t>
             </a:r>
           </a:p>
         </p:txBody>
@@ -5108,6 +5220,8 @@
                   <a:srgbClr val="666666"/>
                 </a:solidFill>
                 <a:latin typeface="Arial"/>
+                <a:cs typeface="Arial"/>
+                <a:ea typeface="Calibri"/>
               </a:rPr>
               <a:t>Module 02 — Data &amp; AI Engineering Track  |  الوحدة الثانية</a:t>
             </a:r>
@@ -5143,6 +5257,8 @@
                   <a:srgbClr val="666666"/>
                 </a:solidFill>
                 <a:latin typeface="Calibri"/>
+                <a:cs typeface="Arial"/>
+                <a:ea typeface="Calibri"/>
               </a:rPr>
               <a:t>V12  •  2/13</a:t>
             </a:r>
@@ -5178,6 +5294,8 @@
                   <a:srgbClr val="666666"/>
                 </a:solidFill>
                 <a:latin typeface="Arial"/>
+                <a:cs typeface="Arial"/>
+                <a:ea typeface="Calibri"/>
               </a:rPr>
               <a:t>Module 02 — Data &amp; AI Engineering Track  |  الوحدة الثانية</a:t>
             </a:r>
@@ -5213,6 +5331,8 @@
                   <a:srgbClr val="666666"/>
                 </a:solidFill>
                 <a:latin typeface="Calibri"/>
+                <a:cs typeface="Arial"/>
+                <a:ea typeface="Calibri"/>
               </a:rPr>
               <a:t>12_  •  2/12</a:t>
             </a:r>
@@ -5248,6 +5368,8 @@
                   <a:srgbClr val="666666"/>
                 </a:solidFill>
                 <a:latin typeface="Arial"/>
+                <a:cs typeface="Arial"/>
+                <a:ea typeface="Calibri"/>
               </a:rPr>
               <a:t>Module 02 — Data &amp; AI Engineering Track  |  الوحدة الثانية</a:t>
             </a:r>
@@ -5283,6 +5405,8 @@
                   <a:srgbClr val="666666"/>
                 </a:solidFill>
                 <a:latin typeface="Calibri"/>
+                <a:cs typeface="Arial"/>
+                <a:ea typeface="Calibri"/>
               </a:rPr>
               <a:t>12_  •  2/12</a:t>
             </a:r>
@@ -5390,6 +5514,8 @@
                   <a:srgbClr val="1F3B5C"/>
                 </a:solidFill>
                 <a:latin typeface="Arial"/>
+                <a:cs typeface="Arial"/>
+                <a:ea typeface="Calibri"/>
               </a:rPr>
               <a:t>MLOps والأدوات / MLOps &amp; Tools</a:t>
             </a:r>
@@ -5432,12 +5558,14 @@
                   <a:srgbClr val="333333"/>
                 </a:solidFill>
                 <a:latin typeface="Arial"/>
+                <a:cs typeface="Arial"/>
+                <a:ea typeface="Calibri"/>
               </a:rPr>
               <a:t>• MLflow لتتبع التجارب والنماذج، Kubeflow لأتمتة الخطوط، DVC لإصدارات البيانات.</a:t>
             </a:r>
           </a:p>
           <a:p>
-            <a:pPr algn="l" rtl="0">
+            <a:pPr algn="r" rtl="0">
               <a:spcBef>
                 <a:spcPts val="200"/>
               </a:spcBef>
@@ -5451,6 +5579,8 @@
                   <a:srgbClr val="666666"/>
                 </a:solidFill>
                 <a:latin typeface="Calibri"/>
+                <a:cs typeface="Arial"/>
+                <a:ea typeface="Calibri"/>
               </a:rPr>
               <a:t>• MLflow for tracking, Kubeflow for pipeline automation, DVC for data versioning.</a:t>
             </a:r>
@@ -5486,6 +5616,8 @@
                   <a:srgbClr val="666666"/>
                 </a:solidFill>
                 <a:latin typeface="Arial"/>
+                <a:cs typeface="Arial"/>
+                <a:ea typeface="Calibri"/>
               </a:rPr>
               <a:t>Module 02 — Data &amp; AI Engineering Track  |  الوحدة الثانية</a:t>
             </a:r>
@@ -5521,6 +5653,8 @@
                   <a:srgbClr val="666666"/>
                 </a:solidFill>
                 <a:latin typeface="Calibri"/>
+                <a:cs typeface="Arial"/>
+                <a:ea typeface="Calibri"/>
               </a:rPr>
               <a:t>V12  •  3/13</a:t>
             </a:r>
@@ -5556,6 +5690,8 @@
                   <a:srgbClr val="666666"/>
                 </a:solidFill>
                 <a:latin typeface="Arial"/>
+                <a:cs typeface="Arial"/>
+                <a:ea typeface="Calibri"/>
               </a:rPr>
               <a:t>Module 02 — Data &amp; AI Engineering Track  |  الوحدة الثانية</a:t>
             </a:r>
@@ -5591,6 +5727,8 @@
                   <a:srgbClr val="666666"/>
                 </a:solidFill>
                 <a:latin typeface="Calibri"/>
+                <a:cs typeface="Arial"/>
+                <a:ea typeface="Calibri"/>
               </a:rPr>
               <a:t>12_  •  3/12</a:t>
             </a:r>
@@ -5626,6 +5764,8 @@
                   <a:srgbClr val="666666"/>
                 </a:solidFill>
                 <a:latin typeface="Arial"/>
+                <a:cs typeface="Arial"/>
+                <a:ea typeface="Calibri"/>
               </a:rPr>
               <a:t>Module 02 — Data &amp; AI Engineering Track  |  الوحدة الثانية</a:t>
             </a:r>
@@ -5661,6 +5801,8 @@
                   <a:srgbClr val="666666"/>
                 </a:solidFill>
                 <a:latin typeface="Calibri"/>
+                <a:cs typeface="Arial"/>
+                <a:ea typeface="Calibri"/>
               </a:rPr>
               <a:t>12_  •  3/12</a:t>
             </a:r>
@@ -5768,6 +5910,8 @@
                   <a:srgbClr val="1F3B5C"/>
                 </a:solidFill>
                 <a:latin typeface="Arial"/>
+                <a:cs typeface="Arial"/>
+                <a:ea typeface="Calibri"/>
               </a:rPr>
               <a:t>تمييز المفاهيم / Concept Distinctions</a:t>
             </a:r>
@@ -5810,12 +5954,14 @@
                   <a:srgbClr val="333333"/>
                 </a:solidFill>
                 <a:latin typeface="Arial"/>
+                <a:cs typeface="Arial"/>
+                <a:ea typeface="Calibri"/>
               </a:rPr>
               <a:t>• LLM: يرمّز النص ويتنبأ بالرموز التالية. الذكاء التوليدي: يولّد محتوى جديدًا (نص/صورة/صوت).</a:t>
             </a:r>
           </a:p>
           <a:p>
-            <a:pPr algn="l" rtl="0">
+            <a:pPr algn="r" rtl="0">
               <a:spcBef>
                 <a:spcPts val="200"/>
               </a:spcBef>
@@ -5829,6 +5975,8 @@
                   <a:srgbClr val="666666"/>
                 </a:solidFill>
                 <a:latin typeface="Calibri"/>
+                <a:cs typeface="Arial"/>
+                <a:ea typeface="Calibri"/>
               </a:rPr>
               <a:t>• LLM: predicts next tokens. Generative AI: generates new content (text/image/audio).</a:t>
             </a:r>
@@ -5848,12 +5996,14 @@
                   <a:srgbClr val="333333"/>
                 </a:solidFill>
                 <a:latin typeface="Arial"/>
+                <a:cs typeface="Arial"/>
+                <a:ea typeface="Calibri"/>
               </a:rPr>
               <a:t>• الوكلاء: يكشفون النية ويستدعون الأدوات. الأنظمة الوكيلة: تخطيط ذاتي وتنفيذ متعدد الخطوات مع تقييم للنتائج.</a:t>
             </a:r>
           </a:p>
           <a:p>
-            <a:pPr algn="l" rtl="0">
+            <a:pPr algn="r" rtl="0">
               <a:spcBef>
                 <a:spcPts val="200"/>
               </a:spcBef>
@@ -5867,6 +6017,8 @@
                   <a:srgbClr val="666666"/>
                 </a:solidFill>
                 <a:latin typeface="Calibri"/>
+                <a:cs typeface="Arial"/>
+                <a:ea typeface="Calibri"/>
               </a:rPr>
               <a:t>• Agents: detect intent and call tools. Agentic AI: self-directed multi-step planning with outcome evaluation.</a:t>
             </a:r>
@@ -5902,6 +6054,8 @@
                   <a:srgbClr val="666666"/>
                 </a:solidFill>
                 <a:latin typeface="Arial"/>
+                <a:cs typeface="Arial"/>
+                <a:ea typeface="Calibri"/>
               </a:rPr>
               <a:t>Module 02 — Data &amp; AI Engineering Track  |  الوحدة الثانية</a:t>
             </a:r>
@@ -5937,6 +6091,8 @@
                   <a:srgbClr val="666666"/>
                 </a:solidFill>
                 <a:latin typeface="Calibri"/>
+                <a:cs typeface="Arial"/>
+                <a:ea typeface="Calibri"/>
               </a:rPr>
               <a:t>V12  •  4/13</a:t>
             </a:r>
@@ -5972,6 +6128,8 @@
                   <a:srgbClr val="666666"/>
                 </a:solidFill>
                 <a:latin typeface="Arial"/>
+                <a:cs typeface="Arial"/>
+                <a:ea typeface="Calibri"/>
               </a:rPr>
               <a:t>Module 02 — Data &amp; AI Engineering Track  |  الوحدة الثانية</a:t>
             </a:r>
@@ -6007,6 +6165,8 @@
                   <a:srgbClr val="666666"/>
                 </a:solidFill>
                 <a:latin typeface="Calibri"/>
+                <a:cs typeface="Arial"/>
+                <a:ea typeface="Calibri"/>
               </a:rPr>
               <a:t>12_  •  4/12</a:t>
             </a:r>
@@ -6042,6 +6202,8 @@
                   <a:srgbClr val="666666"/>
                 </a:solidFill>
                 <a:latin typeface="Arial"/>
+                <a:cs typeface="Arial"/>
+                <a:ea typeface="Calibri"/>
               </a:rPr>
               <a:t>Module 02 — Data &amp; AI Engineering Track  |  الوحدة الثانية</a:t>
             </a:r>
@@ -6077,6 +6239,8 @@
                   <a:srgbClr val="666666"/>
                 </a:solidFill>
                 <a:latin typeface="Calibri"/>
+                <a:cs typeface="Arial"/>
+                <a:ea typeface="Calibri"/>
               </a:rPr>
               <a:t>12_  •  4/12</a:t>
             </a:r>
@@ -6138,6 +6302,8 @@
                   <a:srgbClr val="1F3B5C"/>
                 </a:solidFill>
                 <a:latin typeface="Arial"/>
+                <a:cs typeface="Arial"/>
+                <a:ea typeface="Calibri"/>
               </a:rPr>
               <a:t>من LLM إلى الأنظمة الوكيلة / From LLM to Agentic AI</a:t>
             </a:r>
@@ -6186,13 +6352,15 @@
           <a:bodyPr rtlCol="0" anchor="ctr" wrap="square"/>
           <a:lstStyle/>
           <a:p>
-            <a:pPr algn="ctr" rtl="1"/>
+            <a:pPr algn="ctr" rtl="0"/>
             <a:r>
               <a:rPr sz="1800" b="1">
                 <a:solidFill>
                   <a:srgbClr val="333333"/>
                 </a:solidFill>
-                <a:latin typeface="Arial"/>
+                <a:latin typeface="Calibri"/>
+                <a:cs typeface="Arial"/>
+                <a:ea typeface="Calibri"/>
               </a:rPr>
               <a:t>LLM</a:t>
             </a:r>
@@ -6248,6 +6416,8 @@
                   <a:srgbClr val="333333"/>
                 </a:solidFill>
                 <a:latin typeface="Arial"/>
+                <a:cs typeface="Arial"/>
+                <a:ea typeface="Calibri"/>
               </a:rPr>
               <a:t>تنبؤ بالرموز التالية</a:t>
             </a:r>
@@ -6260,6 +6430,8 @@
                   <a:srgbClr val="666666"/>
                 </a:solidFill>
                 <a:latin typeface="Calibri"/>
+                <a:cs typeface="Arial"/>
+                <a:ea typeface="Calibri"/>
               </a:rPr>
               <a:t>Predicts next tokens</a:t>
             </a:r>
@@ -6359,6 +6531,8 @@
                   <a:srgbClr val="333333"/>
                 </a:solidFill>
                 <a:latin typeface="Arial"/>
+                <a:cs typeface="Arial"/>
+                <a:ea typeface="Calibri"/>
               </a:rPr>
               <a:t>الذكاء التوليدي</a:t>
             </a:r>
@@ -6414,6 +6588,8 @@
                   <a:srgbClr val="333333"/>
                 </a:solidFill>
                 <a:latin typeface="Arial"/>
+                <a:cs typeface="Arial"/>
+                <a:ea typeface="Calibri"/>
               </a:rPr>
               <a:t>يولّد محتوى جديدًا</a:t>
             </a:r>
@@ -6426,6 +6602,8 @@
                   <a:srgbClr val="666666"/>
                 </a:solidFill>
                 <a:latin typeface="Calibri"/>
+                <a:cs typeface="Arial"/>
+                <a:ea typeface="Calibri"/>
               </a:rPr>
               <a:t>Generates new content</a:t>
             </a:r>
@@ -6525,6 +6703,8 @@
                   <a:srgbClr val="333333"/>
                 </a:solidFill>
                 <a:latin typeface="Arial"/>
+                <a:cs typeface="Arial"/>
+                <a:ea typeface="Calibri"/>
               </a:rPr>
               <a:t>الوكلاء Agents</a:t>
             </a:r>
@@ -6580,6 +6760,8 @@
                   <a:srgbClr val="333333"/>
                 </a:solidFill>
                 <a:latin typeface="Arial"/>
+                <a:cs typeface="Arial"/>
+                <a:ea typeface="Calibri"/>
               </a:rPr>
               <a:t>نية + استدعاء أدوات</a:t>
             </a:r>
@@ -6592,6 +6774,8 @@
                   <a:srgbClr val="666666"/>
                 </a:solidFill>
                 <a:latin typeface="Calibri"/>
+                <a:cs typeface="Arial"/>
+                <a:ea typeface="Calibri"/>
               </a:rPr>
               <a:t>Intent + tool calls</a:t>
             </a:r>
@@ -6691,6 +6875,8 @@
                   <a:srgbClr val="333333"/>
                 </a:solidFill>
                 <a:latin typeface="Arial"/>
+                <a:cs typeface="Arial"/>
+                <a:ea typeface="Calibri"/>
               </a:rPr>
               <a:t>الأنظمة الوكيلة</a:t>
             </a:r>
@@ -6746,6 +6932,8 @@
                   <a:srgbClr val="333333"/>
                 </a:solidFill>
                 <a:latin typeface="Arial"/>
+                <a:cs typeface="Arial"/>
+                <a:ea typeface="Calibri"/>
               </a:rPr>
               <a:t>تخطيط وتنفيذ متعدد الخطوات</a:t>
             </a:r>
@@ -6758,6 +6946,8 @@
                   <a:srgbClr val="666666"/>
                 </a:solidFill>
                 <a:latin typeface="Calibri"/>
+                <a:cs typeface="Arial"/>
+                <a:ea typeface="Calibri"/>
               </a:rPr>
               <a:t>Multi-step planning</a:t>
             </a:r>
@@ -6793,6 +6983,8 @@
                   <a:srgbClr val="666666"/>
                 </a:solidFill>
                 <a:latin typeface="Arial"/>
+                <a:cs typeface="Arial"/>
+                <a:ea typeface="Calibri"/>
               </a:rPr>
               <a:t>Agentic RAG = بحث متجهي + جلب عبر الواجهات بذاكرة متجددة وتحقق قبل التسليم.</a:t>
             </a:r>
@@ -6800,6 +6992,11 @@
           <a:p>
             <a:pPr algn="r" rtl="0"/>
             <a:r>
+              <a:rPr>
+                <a:latin typeface="Calibri"/>
+                <a:cs typeface="Arial"/>
+                <a:ea typeface="Calibri"/>
+              </a:rPr>
               <a:t>Agentic RAG = vector search + API fetching with refreshed memory and verification.</a:t>
             </a:r>
           </a:p>
@@ -6834,6 +7031,8 @@
                   <a:srgbClr val="666666"/>
                 </a:solidFill>
                 <a:latin typeface="Arial"/>
+                <a:cs typeface="Arial"/>
+                <a:ea typeface="Calibri"/>
               </a:rPr>
               <a:t>Module 02 — Data &amp; AI Engineering Track  |  الوحدة الثانية</a:t>
             </a:r>
@@ -6869,6 +7068,8 @@
                   <a:srgbClr val="666666"/>
                 </a:solidFill>
                 <a:latin typeface="Calibri"/>
+                <a:cs typeface="Arial"/>
+                <a:ea typeface="Calibri"/>
               </a:rPr>
               <a:t>12_  •  5/12</a:t>
             </a:r>
@@ -6904,6 +7105,8 @@
                   <a:srgbClr val="666666"/>
                 </a:solidFill>
                 <a:latin typeface="Arial"/>
+                <a:cs typeface="Arial"/>
+                <a:ea typeface="Calibri"/>
               </a:rPr>
               <a:t>Module 02 — Data &amp; AI Engineering Track  |  الوحدة الثانية</a:t>
             </a:r>
@@ -6939,6 +7142,8 @@
                   <a:srgbClr val="666666"/>
                 </a:solidFill>
                 <a:latin typeface="Calibri"/>
+                <a:cs typeface="Arial"/>
+                <a:ea typeface="Calibri"/>
               </a:rPr>
               <a:t>12_  •  5/12</a:t>
             </a:r>
@@ -7046,6 +7251,8 @@
                   <a:srgbClr val="1F3B5C"/>
                 </a:solidFill>
                 <a:latin typeface="Arial"/>
+                <a:cs typeface="Arial"/>
+                <a:ea typeface="Calibri"/>
               </a:rPr>
               <a:t>RAG الوكيلي / Agentic RAG</a:t>
             </a:r>
@@ -7088,12 +7295,14 @@
                   <a:srgbClr val="333333"/>
                 </a:solidFill>
                 <a:latin typeface="Arial"/>
+                <a:cs typeface="Arial"/>
+                <a:ea typeface="Calibri"/>
               </a:rPr>
               <a:t>• يجمع البحث المتجهي وجلب البيانات عبر الواجهات في عملية متعددة الخطوات، بذاكرة محدَّثة وتحقق من النتائج قبل التسليم.</a:t>
             </a:r>
           </a:p>
           <a:p>
-            <a:pPr algn="l" rtl="0">
+            <a:pPr algn="r" rtl="0">
               <a:spcBef>
                 <a:spcPts val="200"/>
               </a:spcBef>
@@ -7107,6 +7316,8 @@
                   <a:srgbClr val="666666"/>
                 </a:solidFill>
                 <a:latin typeface="Calibri"/>
+                <a:cs typeface="Arial"/>
+                <a:ea typeface="Calibri"/>
               </a:rPr>
               <a:t>• Combines vector search and API fetching in multi-step flows, with refreshed memory and verification before delivery.</a:t>
             </a:r>
@@ -7142,6 +7353,8 @@
                   <a:srgbClr val="666666"/>
                 </a:solidFill>
                 <a:latin typeface="Arial"/>
+                <a:cs typeface="Arial"/>
+                <a:ea typeface="Calibri"/>
               </a:rPr>
               <a:t>Module 02 — Data &amp; AI Engineering Track  |  الوحدة الثانية</a:t>
             </a:r>
@@ -7177,6 +7390,8 @@
                   <a:srgbClr val="666666"/>
                 </a:solidFill>
                 <a:latin typeface="Calibri"/>
+                <a:cs typeface="Arial"/>
+                <a:ea typeface="Calibri"/>
               </a:rPr>
               <a:t>V12  •  5/13</a:t>
             </a:r>
@@ -7212,6 +7427,8 @@
                   <a:srgbClr val="666666"/>
                 </a:solidFill>
                 <a:latin typeface="Arial"/>
+                <a:cs typeface="Arial"/>
+                <a:ea typeface="Calibri"/>
               </a:rPr>
               <a:t>Module 02 — Data &amp; AI Engineering Track  |  الوحدة الثانية</a:t>
             </a:r>
@@ -7247,6 +7464,8 @@
                   <a:srgbClr val="666666"/>
                 </a:solidFill>
                 <a:latin typeface="Calibri"/>
+                <a:cs typeface="Arial"/>
+                <a:ea typeface="Calibri"/>
               </a:rPr>
               <a:t>12_  •  6/12</a:t>
             </a:r>
@@ -7282,6 +7501,8 @@
                   <a:srgbClr val="666666"/>
                 </a:solidFill>
                 <a:latin typeface="Arial"/>
+                <a:cs typeface="Arial"/>
+                <a:ea typeface="Calibri"/>
               </a:rPr>
               <a:t>Module 02 — Data &amp; AI Engineering Track  |  الوحدة الثانية</a:t>
             </a:r>
@@ -7317,6 +7538,8 @@
                   <a:srgbClr val="666666"/>
                 </a:solidFill>
                 <a:latin typeface="Calibri"/>
+                <a:cs typeface="Arial"/>
+                <a:ea typeface="Calibri"/>
               </a:rPr>
               <a:t>12_  •  6/12</a:t>
             </a:r>
@@ -7424,6 +7647,8 @@
                   <a:srgbClr val="1F3B5C"/>
                 </a:solidFill>
                 <a:latin typeface="Arial"/>
+                <a:cs typeface="Arial"/>
+                <a:ea typeface="Calibri"/>
               </a:rPr>
               <a:t>التكلفة والأداء عمليًا / Practical Cost &amp; Performance</a:t>
             </a:r>
@@ -7466,12 +7691,14 @@
                   <a:srgbClr val="333333"/>
                 </a:solidFill>
                 <a:latin typeface="Arial"/>
+                <a:cs typeface="Arial"/>
+                <a:ea typeface="Calibri"/>
               </a:rPr>
               <a:t>• التضمين (Embedding) أقل تكلفة بمرتبة كاملة من التوليد (Generation) — الاسترجاع أرخص من التوليد.</a:t>
             </a:r>
           </a:p>
           <a:p>
-            <a:pPr algn="l" rtl="0">
+            <a:pPr algn="r" rtl="0">
               <a:spcBef>
                 <a:spcPts val="200"/>
               </a:spcBef>
@@ -7485,6 +7712,8 @@
                   <a:srgbClr val="666666"/>
                 </a:solidFill>
                 <a:latin typeface="Calibri"/>
+                <a:cs typeface="Arial"/>
+                <a:ea typeface="Calibri"/>
               </a:rPr>
               <a:t>• Embedding costs an order of magnitude less than generation — retrieval is cheaper than generation.</a:t>
             </a:r>
@@ -7504,12 +7733,14 @@
                   <a:srgbClr val="333333"/>
                 </a:solidFill>
                 <a:latin typeface="Arial"/>
+                <a:cs typeface="Arial"/>
+                <a:ea typeface="Calibri"/>
               </a:rPr>
               <a:t>• التخزين الدلالي المؤقت يخفض الكمون والتكلفة؛ توجيه الطلبات يرسل المهام البسيطة لنماذج أصغر أرخص.</a:t>
             </a:r>
           </a:p>
           <a:p>
-            <a:pPr algn="l" rtl="0">
+            <a:pPr algn="r" rtl="0">
               <a:spcBef>
                 <a:spcPts val="200"/>
               </a:spcBef>
@@ -7523,6 +7754,8 @@
                   <a:srgbClr val="666666"/>
                 </a:solidFill>
                 <a:latin typeface="Calibri"/>
+                <a:cs typeface="Arial"/>
+                <a:ea typeface="Calibri"/>
               </a:rPr>
               <a:t>• Semantic caching cuts latency and cost; routing sends easy tasks to smaller, cheaper models.</a:t>
             </a:r>
@@ -7542,12 +7775,14 @@
                   <a:srgbClr val="333333"/>
                 </a:solidFill>
                 <a:latin typeface="Arial"/>
+                <a:cs typeface="Arial"/>
+                <a:ea typeface="Calibri"/>
               </a:rPr>
               <a:t>• قاعدة FinOps: قِس التكلفة لكل طلب (per-request) قبل التوسع.</a:t>
             </a:r>
           </a:p>
           <a:p>
-            <a:pPr algn="l" rtl="0">
+            <a:pPr algn="r" rtl="0">
               <a:spcBef>
                 <a:spcPts val="200"/>
               </a:spcBef>
@@ -7561,6 +7796,8 @@
                   <a:srgbClr val="666666"/>
                 </a:solidFill>
                 <a:latin typeface="Calibri"/>
+                <a:cs typeface="Arial"/>
+                <a:ea typeface="Calibri"/>
               </a:rPr>
               <a:t>• FinOps rule: measure per-request cost before scaling.</a:t>
             </a:r>
@@ -7596,6 +7833,8 @@
                   <a:srgbClr val="666666"/>
                 </a:solidFill>
                 <a:latin typeface="Arial"/>
+                <a:cs typeface="Arial"/>
+                <a:ea typeface="Calibri"/>
               </a:rPr>
               <a:t>Module 02 — Data &amp; AI Engineering Track  |  الوحدة الثانية</a:t>
             </a:r>
@@ -7631,6 +7870,8 @@
                   <a:srgbClr val="666666"/>
                 </a:solidFill>
                 <a:latin typeface="Calibri"/>
+                <a:cs typeface="Arial"/>
+                <a:ea typeface="Calibri"/>
               </a:rPr>
               <a:t>V12  •  6/13</a:t>
             </a:r>
@@ -7666,6 +7907,8 @@
                   <a:srgbClr val="666666"/>
                 </a:solidFill>
                 <a:latin typeface="Arial"/>
+                <a:cs typeface="Arial"/>
+                <a:ea typeface="Calibri"/>
               </a:rPr>
               <a:t>Module 02 — Data &amp; AI Engineering Track  |  الوحدة الثانية</a:t>
             </a:r>
@@ -7701,6 +7944,8 @@
                   <a:srgbClr val="666666"/>
                 </a:solidFill>
                 <a:latin typeface="Calibri"/>
+                <a:cs typeface="Arial"/>
+                <a:ea typeface="Calibri"/>
               </a:rPr>
               <a:t>12_  •  7/12</a:t>
             </a:r>
@@ -7736,6 +7981,8 @@
                   <a:srgbClr val="666666"/>
                 </a:solidFill>
                 <a:latin typeface="Arial"/>
+                <a:cs typeface="Arial"/>
+                <a:ea typeface="Calibri"/>
               </a:rPr>
               <a:t>Module 02 — Data &amp; AI Engineering Track  |  الوحدة الثانية</a:t>
             </a:r>
@@ -7771,6 +8018,8 @@
                   <a:srgbClr val="666666"/>
                 </a:solidFill>
                 <a:latin typeface="Calibri"/>
+                <a:cs typeface="Arial"/>
+                <a:ea typeface="Calibri"/>
               </a:rPr>
               <a:t>12_  •  7/12</a:t>
             </a:r>
@@ -7832,6 +8081,8 @@
                   <a:srgbClr val="1F3B5C"/>
                 </a:solidFill>
                 <a:latin typeface="Arial"/>
+                <a:cs typeface="Arial"/>
+                <a:ea typeface="Calibri"/>
               </a:rPr>
               <a:t>التكلفة عمليًا: التضمين مقابل التوليد / Cost: Embedding vs Generation</a:t>
             </a:r>
@@ -7887,6 +8138,8 @@
                   <a:srgbClr val="333333"/>
                 </a:solidFill>
                 <a:latin typeface="Arial"/>
+                <a:cs typeface="Arial"/>
+                <a:ea typeface="Calibri"/>
               </a:rPr>
               <a:t>التضمين 1x</a:t>
             </a:r>
@@ -7899,6 +8152,8 @@
                   <a:srgbClr val="666666"/>
                 </a:solidFill>
                 <a:latin typeface="Calibri"/>
+                <a:cs typeface="Arial"/>
+                <a:ea typeface="Calibri"/>
               </a:rPr>
               <a:t>Embedding — cheap</a:t>
             </a:r>
@@ -7954,6 +8209,8 @@
                   <a:srgbClr val="333333"/>
                 </a:solidFill>
                 <a:latin typeface="Arial"/>
+                <a:cs typeface="Arial"/>
+                <a:ea typeface="Calibri"/>
               </a:rPr>
               <a:t>التوليد ~10x</a:t>
             </a:r>
@@ -7966,6 +8223,8 @@
                   <a:srgbClr val="666666"/>
                 </a:solidFill>
                 <a:latin typeface="Calibri"/>
+                <a:cs typeface="Arial"/>
+                <a:ea typeface="Calibri"/>
               </a:rPr>
               <a:t>Generation — costly</a:t>
             </a:r>
@@ -8021,6 +8280,8 @@
                   <a:srgbClr val="333333"/>
                 </a:solidFill>
                 <a:latin typeface="Arial"/>
+                <a:cs typeface="Arial"/>
+                <a:ea typeface="Calibri"/>
               </a:rPr>
               <a:t>الحل: تخزين مؤقت + توجيه</a:t>
             </a:r>
@@ -8033,6 +8294,8 @@
                   <a:srgbClr val="666666"/>
                 </a:solidFill>
                 <a:latin typeface="Calibri"/>
+                <a:cs typeface="Arial"/>
+                <a:ea typeface="Calibri"/>
               </a:rPr>
               <a:t>Fix: caching + routing</a:t>
             </a:r>
@@ -8068,6 +8331,8 @@
                   <a:srgbClr val="666666"/>
                 </a:solidFill>
                 <a:latin typeface="Arial"/>
+                <a:cs typeface="Arial"/>
+                <a:ea typeface="Calibri"/>
               </a:rPr>
               <a:t>قاعدة FinOps: قِس التكلفة لكل طلب قبل التوسع.</a:t>
             </a:r>
@@ -8075,6 +8340,11 @@
           <a:p>
             <a:pPr algn="r" rtl="0"/>
             <a:r>
+              <a:rPr>
+                <a:latin typeface="Calibri"/>
+                <a:cs typeface="Arial"/>
+                <a:ea typeface="Calibri"/>
+              </a:rPr>
               <a:t>FinOps rule: measure per-request cost before scaling.</a:t>
             </a:r>
           </a:p>
@@ -8109,6 +8379,8 @@
                   <a:srgbClr val="666666"/>
                 </a:solidFill>
                 <a:latin typeface="Arial"/>
+                <a:cs typeface="Arial"/>
+                <a:ea typeface="Calibri"/>
               </a:rPr>
               <a:t>Module 02 — Data &amp; AI Engineering Track  |  الوحدة الثانية</a:t>
             </a:r>
@@ -8144,6 +8416,8 @@
                   <a:srgbClr val="666666"/>
                 </a:solidFill>
                 <a:latin typeface="Calibri"/>
+                <a:cs typeface="Arial"/>
+                <a:ea typeface="Calibri"/>
               </a:rPr>
               <a:t>12_  •  8/12</a:t>
             </a:r>
@@ -8179,6 +8453,8 @@
                   <a:srgbClr val="666666"/>
                 </a:solidFill>
                 <a:latin typeface="Arial"/>
+                <a:cs typeface="Arial"/>
+                <a:ea typeface="Calibri"/>
               </a:rPr>
               <a:t>Module 02 — Data &amp; AI Engineering Track  |  الوحدة الثانية</a:t>
             </a:r>
@@ -8214,6 +8490,8 @@
                   <a:srgbClr val="666666"/>
                 </a:solidFill>
                 <a:latin typeface="Calibri"/>
+                <a:cs typeface="Arial"/>
+                <a:ea typeface="Calibri"/>
               </a:rPr>
               <a:t>12_  •  8/12</a:t>
             </a:r>
@@ -8321,8 +8599,10 @@
                   <a:srgbClr val="1F3B5C"/>
                 </a:solidFill>
                 <a:latin typeface="Arial"/>
-              </a:rPr>
-              <a:t>تمهيد للمختبر L03 / Lab Prelude</a:t>
+                <a:cs typeface="Arial"/>
+                <a:ea typeface="Calibri"/>
+              </a:rPr>
+              <a:t>تمهيد للمختبر L03 / Lab Introduction</a:t>
             </a:r>
           </a:p>
         </p:txBody>
@@ -8363,6 +8643,8 @@
                   <a:srgbClr val="333333"/>
                 </a:solidFill>
                 <a:latin typeface="Arial"/>
+                <a:cs typeface="Arial"/>
+                <a:ea typeface="Calibri"/>
               </a:rPr>
               <a:t>• المختبر: خط محلي خفيف — Python venv + SQLite مدمجة (Bronze/Silver) + ChromaDB (Gold) — دون Docker، بنقطة نهاية FastAPI على المسار /query.</a:t>
             </a:r>
@@ -8382,6 +8664,8 @@
                   <a:srgbClr val="666666"/>
                 </a:solidFill>
                 <a:latin typeface="Calibri"/>
+                <a:cs typeface="Arial"/>
+                <a:ea typeface="Calibri"/>
               </a:rPr>
               <a:t>• The lab: lightweight local pipeline — Python venv + built-in SQLite (Bronze/Silver) + ChromaDB (Gold) — no Docker, ending in a FastAPI /query endpoint.</a:t>
             </a:r>
@@ -8417,6 +8701,8 @@
                   <a:srgbClr val="666666"/>
                 </a:solidFill>
                 <a:latin typeface="Arial"/>
+                <a:cs typeface="Arial"/>
+                <a:ea typeface="Calibri"/>
               </a:rPr>
               <a:t>Module 02 — Data &amp; AI Engineering Track  |  الوحدة الثانية</a:t>
             </a:r>
@@ -8452,6 +8738,8 @@
                   <a:srgbClr val="666666"/>
                 </a:solidFill>
                 <a:latin typeface="Calibri"/>
+                <a:cs typeface="Arial"/>
+                <a:ea typeface="Calibri"/>
               </a:rPr>
               <a:t>V12  •  7/13</a:t>
             </a:r>
@@ -8487,6 +8775,8 @@
                   <a:srgbClr val="666666"/>
                 </a:solidFill>
                 <a:latin typeface="Arial"/>
+                <a:cs typeface="Arial"/>
+                <a:ea typeface="Calibri"/>
               </a:rPr>
               <a:t>Module 02 — Data &amp; AI Engineering Track  |  الوحدة الثانية</a:t>
             </a:r>
@@ -8522,6 +8812,8 @@
                   <a:srgbClr val="666666"/>
                 </a:solidFill>
                 <a:latin typeface="Calibri"/>
+                <a:cs typeface="Arial"/>
+                <a:ea typeface="Calibri"/>
               </a:rPr>
               <a:t>12_  •  9/12</a:t>
             </a:r>
@@ -8557,6 +8849,8 @@
                   <a:srgbClr val="666666"/>
                 </a:solidFill>
                 <a:latin typeface="Arial"/>
+                <a:cs typeface="Arial"/>
+                <a:ea typeface="Calibri"/>
               </a:rPr>
               <a:t>Module 02 — Data &amp; AI Engineering Track  |  الوحدة الثانية</a:t>
             </a:r>
@@ -8592,6 +8886,8 @@
                   <a:srgbClr val="666666"/>
                 </a:solidFill>
                 <a:latin typeface="Calibri"/>
+                <a:cs typeface="Arial"/>
+                <a:ea typeface="Calibri"/>
               </a:rPr>
               <a:t>12_  •  9/12</a:t>
             </a:r>

--- a/output/Module02_V12_Updated.pptx
+++ b/output/Module02_V12_Updated.pptx
@@ -3129,15 +3129,13 @@
           </a:bodyPr>
           <a:lstStyle/>
           <a:p>
-            <a:pPr algn="r" rtl="0"/>
+            <a:pPr algn="l" rtl="0"/>
             <a:r>
               <a:rPr sz="2800" b="1">
                 <a:solidFill>
                   <a:srgbClr val="1F4E79"/>
                 </a:solidFill>
                 <a:latin typeface="Calibri"/>
-                <a:cs typeface="Arial"/>
-                <a:ea typeface="Calibri"/>
               </a:rPr>
               <a:t>Module 02  |  V12</a:t>
             </a:r>
@@ -3173,8 +3171,6 @@
                   <a:srgbClr val="1F3B5C"/>
                 </a:solidFill>
                 <a:latin typeface="Arial"/>
-                <a:cs typeface="Arial"/>
-                <a:ea typeface="Calibri"/>
               </a:rPr>
               <a:t>أساسيات MLOps + تمهيد للمختبر</a:t>
             </a:r>
@@ -3203,15 +3199,13 @@
           </a:bodyPr>
           <a:lstStyle/>
           <a:p>
-            <a:pPr algn="r" rtl="0"/>
+            <a:pPr algn="l" rtl="0"/>
             <a:r>
               <a:rPr sz="3000" b="0">
                 <a:solidFill>
                   <a:srgbClr val="333333"/>
                 </a:solidFill>
                 <a:latin typeface="Calibri"/>
-                <a:cs typeface="Arial"/>
-                <a:ea typeface="Calibri"/>
               </a:rPr>
               <a:t>MLOps Fundamentals + Lab Introduction</a:t>
             </a:r>
@@ -3220,14 +3214,14 @@
       </p:sp>
       <p:sp>
         <p:nvSpPr>
-          <p:cNvPr id="5" name="TextBox 4"/>
+          <p:cNvPr id="6" name="TextBox 5"/>
           <p:cNvSpPr txBox="1"/>
           <p:nvPr/>
         </p:nvSpPr>
         <p:spPr>
           <a:xfrm>
-            <a:off x="822960" y="4937760"/>
-            <a:ext cx="10515600" cy="548640"/>
+            <a:off x="822960" y="5486400"/>
+            <a:ext cx="10515600" cy="457200"/>
           </a:xfrm>
           <a:prstGeom prst="rect">
             <a:avLst/>
@@ -3240,31 +3234,29 @@
           </a:bodyPr>
           <a:lstStyle/>
           <a:p>
-            <a:pPr algn="r" rtl="1"/>
-            <a:r>
-              <a:rPr sz="1800" b="0">
+            <a:pPr algn="l" rtl="0"/>
+            <a:r>
+              <a:rPr sz="1400" b="0">
                 <a:solidFill>
                   <a:srgbClr val="666666"/>
                 </a:solidFill>
-                <a:latin typeface="Arial"/>
-                <a:cs typeface="Arial"/>
-                <a:ea typeface="Calibri"/>
-              </a:rPr>
-              <a:t>Module 02 — Data &amp; AI Engineering Track  |  الوحدة الثانية</a:t>
-            </a:r>
-          </a:p>
-        </p:txBody>
-      </p:sp>
-      <p:sp>
-        <p:nvSpPr>
-          <p:cNvPr id="6" name="TextBox 5"/>
+                <a:latin typeface="Calibri"/>
+              </a:rPr>
+              <a:t>Light theme  |  Bilingual AR/EN  |  Ready to present</a:t>
+            </a:r>
+          </a:p>
+        </p:txBody>
+      </p:sp>
+      <p:sp>
+        <p:nvSpPr>
+          <p:cNvPr id="7" name="TextBox 6"/>
           <p:cNvSpPr txBox="1"/>
           <p:nvPr/>
         </p:nvSpPr>
         <p:spPr>
           <a:xfrm>
-            <a:off x="822960" y="5486400"/>
-            <a:ext cx="10515600" cy="457200"/>
+            <a:off x="640080" y="6400800"/>
+            <a:ext cx="8686800" cy="320040"/>
           </a:xfrm>
           <a:prstGeom prst="rect">
             <a:avLst/>
@@ -3277,31 +3269,29 @@
           </a:bodyPr>
           <a:lstStyle/>
           <a:p>
-            <a:pPr algn="r" rtl="0"/>
-            <a:r>
-              <a:rPr sz="1400" b="0">
+            <a:pPr algn="r" rtl="1"/>
+            <a:r>
+              <a:rPr sz="1000" b="0">
                 <a:solidFill>
                   <a:srgbClr val="666666"/>
                 </a:solidFill>
-                <a:latin typeface="Calibri"/>
-                <a:cs typeface="Arial"/>
-                <a:ea typeface="Calibri"/>
-              </a:rPr>
-              <a:t>Light theme  |  Bilingual AR/EN  |  Ready to present</a:t>
-            </a:r>
-          </a:p>
-        </p:txBody>
-      </p:sp>
-      <p:sp>
-        <p:nvSpPr>
-          <p:cNvPr id="7" name="TextBox 6"/>
+                <a:latin typeface="Arial"/>
+              </a:rPr>
+              <a:t>Module 02 — Data &amp; AI Engineering Track  |  الوحدة الثانية</a:t>
+            </a:r>
+          </a:p>
+        </p:txBody>
+      </p:sp>
+      <p:sp>
+        <p:nvSpPr>
+          <p:cNvPr id="8" name="TextBox 7"/>
           <p:cNvSpPr txBox="1"/>
           <p:nvPr/>
         </p:nvSpPr>
         <p:spPr>
           <a:xfrm>
-            <a:off x="640080" y="6400800"/>
-            <a:ext cx="8686800" cy="320040"/>
+            <a:off x="9601200" y="6400800"/>
+            <a:ext cx="1920240" cy="320040"/>
           </a:xfrm>
           <a:prstGeom prst="rect">
             <a:avLst/>
@@ -3314,202 +3304,15 @@
           </a:bodyPr>
           <a:lstStyle/>
           <a:p>
-            <a:pPr algn="r" rtl="1"/>
+            <a:pPr algn="l" rtl="0"/>
             <a:r>
               <a:rPr sz="1000" b="0">
                 <a:solidFill>
                   <a:srgbClr val="666666"/>
                 </a:solidFill>
-                <a:latin typeface="Arial"/>
-                <a:cs typeface="Arial"/>
-                <a:ea typeface="Calibri"/>
-              </a:rPr>
-              <a:t>Module 02 — Data &amp; AI Engineering Track  |  الوحدة الثانية</a:t>
-            </a:r>
-          </a:p>
-        </p:txBody>
-      </p:sp>
-      <p:sp>
-        <p:nvSpPr>
-          <p:cNvPr id="8" name="TextBox 7"/>
-          <p:cNvSpPr txBox="1"/>
-          <p:nvPr/>
-        </p:nvSpPr>
-        <p:spPr>
-          <a:xfrm>
-            <a:off x="9601200" y="6400800"/>
-            <a:ext cx="1920240" cy="320040"/>
-          </a:xfrm>
-          <a:prstGeom prst="rect">
-            <a:avLst/>
-          </a:prstGeom>
-          <a:noFill/>
-        </p:spPr>
-        <p:txBody>
-          <a:bodyPr wrap="square">
-            <a:spAutoFit/>
-          </a:bodyPr>
-          <a:lstStyle/>
-          <a:p>
-            <a:pPr algn="l" rtl="0"/>
-            <a:r>
-              <a:rPr sz="1000" b="0">
-                <a:solidFill>
-                  <a:srgbClr val="666666"/>
-                </a:solidFill>
                 <a:latin typeface="Calibri"/>
-                <a:cs typeface="Arial"/>
-                <a:ea typeface="Calibri"/>
-              </a:rPr>
-              <a:t>V12  •  1/13</a:t>
-            </a:r>
-          </a:p>
-        </p:txBody>
-      </p:sp>
-      <p:sp>
-        <p:nvSpPr>
-          <p:cNvPr id="9" name="TextBox 8"/>
-          <p:cNvSpPr txBox="1"/>
-          <p:nvPr/>
-        </p:nvSpPr>
-        <p:spPr>
-          <a:xfrm>
-            <a:off x="640080" y="6400800"/>
-            <a:ext cx="8686800" cy="320040"/>
-          </a:xfrm>
-          <a:prstGeom prst="rect">
-            <a:avLst/>
-          </a:prstGeom>
-          <a:noFill/>
-        </p:spPr>
-        <p:txBody>
-          <a:bodyPr wrap="square">
-            <a:spAutoFit/>
-          </a:bodyPr>
-          <a:lstStyle/>
-          <a:p>
-            <a:pPr algn="r" rtl="1"/>
-            <a:r>
-              <a:rPr sz="1000" b="0">
-                <a:solidFill>
-                  <a:srgbClr val="666666"/>
-                </a:solidFill>
-                <a:latin typeface="Arial"/>
-                <a:cs typeface="Arial"/>
-                <a:ea typeface="Calibri"/>
-              </a:rPr>
-              <a:t>Module 02 — Data &amp; AI Engineering Track  |  الوحدة الثانية</a:t>
-            </a:r>
-          </a:p>
-        </p:txBody>
-      </p:sp>
-      <p:sp>
-        <p:nvSpPr>
-          <p:cNvPr id="10" name="TextBox 9"/>
-          <p:cNvSpPr txBox="1"/>
-          <p:nvPr/>
-        </p:nvSpPr>
-        <p:spPr>
-          <a:xfrm>
-            <a:off x="9601200" y="6400800"/>
-            <a:ext cx="1920240" cy="320040"/>
-          </a:xfrm>
-          <a:prstGeom prst="rect">
-            <a:avLst/>
-          </a:prstGeom>
-          <a:noFill/>
-        </p:spPr>
-        <p:txBody>
-          <a:bodyPr wrap="square">
-            <a:spAutoFit/>
-          </a:bodyPr>
-          <a:lstStyle/>
-          <a:p>
-            <a:pPr algn="l" rtl="0"/>
-            <a:r>
-              <a:rPr sz="1000" b="0">
-                <a:solidFill>
-                  <a:srgbClr val="666666"/>
-                </a:solidFill>
-                <a:latin typeface="Calibri"/>
-                <a:cs typeface="Arial"/>
-                <a:ea typeface="Calibri"/>
-              </a:rPr>
-              <a:t>12_  •  1/12</a:t>
-            </a:r>
-          </a:p>
-        </p:txBody>
-      </p:sp>
-      <p:sp>
-        <p:nvSpPr>
-          <p:cNvPr id="11" name="TextBox 10"/>
-          <p:cNvSpPr txBox="1"/>
-          <p:nvPr/>
-        </p:nvSpPr>
-        <p:spPr>
-          <a:xfrm>
-            <a:off x="640080" y="6400800"/>
-            <a:ext cx="8686800" cy="320040"/>
-          </a:xfrm>
-          <a:prstGeom prst="rect">
-            <a:avLst/>
-          </a:prstGeom>
-          <a:noFill/>
-        </p:spPr>
-        <p:txBody>
-          <a:bodyPr wrap="square">
-            <a:spAutoFit/>
-          </a:bodyPr>
-          <a:lstStyle/>
-          <a:p>
-            <a:pPr algn="r" rtl="1"/>
-            <a:r>
-              <a:rPr sz="1000" b="0">
-                <a:solidFill>
-                  <a:srgbClr val="666666"/>
-                </a:solidFill>
-                <a:latin typeface="Arial"/>
-                <a:cs typeface="Arial"/>
-                <a:ea typeface="Calibri"/>
-              </a:rPr>
-              <a:t>Module 02 — Data &amp; AI Engineering Track  |  الوحدة الثانية</a:t>
-            </a:r>
-          </a:p>
-        </p:txBody>
-      </p:sp>
-      <p:sp>
-        <p:nvSpPr>
-          <p:cNvPr id="12" name="TextBox 11"/>
-          <p:cNvSpPr txBox="1"/>
-          <p:nvPr/>
-        </p:nvSpPr>
-        <p:spPr>
-          <a:xfrm>
-            <a:off x="9601200" y="6400800"/>
-            <a:ext cx="1920240" cy="320040"/>
-          </a:xfrm>
-          <a:prstGeom prst="rect">
-            <a:avLst/>
-          </a:prstGeom>
-          <a:noFill/>
-        </p:spPr>
-        <p:txBody>
-          <a:bodyPr wrap="square">
-            <a:spAutoFit/>
-          </a:bodyPr>
-          <a:lstStyle/>
-          <a:p>
-            <a:pPr algn="l" rtl="0"/>
-            <a:r>
-              <a:rPr sz="1000" b="0">
-                <a:solidFill>
-                  <a:srgbClr val="666666"/>
-                </a:solidFill>
-                <a:latin typeface="Calibri"/>
-                <a:cs typeface="Arial"/>
-                <a:ea typeface="Calibri"/>
-              </a:rPr>
-              <a:t>12_  •  1/12</a:t>
+              </a:rPr>
+              <a:t>V12  •  1/12</a:t>
             </a:r>
           </a:p>
         </p:txBody>
@@ -3615,10 +3418,8 @@
                   <a:srgbClr val="1F3B5C"/>
                 </a:solidFill>
                 <a:latin typeface="Arial"/>
-                <a:cs typeface="Arial"/>
-                <a:ea typeface="Calibri"/>
-              </a:rPr>
-              <a:t>اختبار قصير / Quick Quiz</a:t>
+              </a:rPr>
+              <a:t>للاستزادة / Further Reading</a:t>
             </a:r>
           </a:p>
         </p:txBody>
@@ -3659,14 +3460,12 @@
                   <a:srgbClr val="333333"/>
                 </a:solidFill>
                 <a:latin typeface="Arial"/>
-                <a:cs typeface="Arial"/>
-                <a:ea typeface="Calibri"/>
-              </a:rPr>
-              <a:t>• 1. فرّق بين AI Agent وAgentic AI.</a:t>
-            </a:r>
-          </a:p>
-          <a:p>
-            <a:pPr algn="r" rtl="0">
+              </a:rPr>
+              <a:t>• توثيق MLflow وDVC.</a:t>
+            </a:r>
+          </a:p>
+          <a:p>
+            <a:pPr algn="l" rtl="0">
               <a:spcBef>
                 <a:spcPts val="200"/>
               </a:spcBef>
@@ -3680,10 +3479,8 @@
                   <a:srgbClr val="666666"/>
                 </a:solidFill>
                 <a:latin typeface="Calibri"/>
-                <a:cs typeface="Arial"/>
-                <a:ea typeface="Calibri"/>
-              </a:rPr>
-              <a:t>• Differentiate an AI agent from agentic AI.</a:t>
+              </a:rPr>
+              <a:t>• MLflow and DVC docs.</a:t>
             </a:r>
           </a:p>
           <a:p>
@@ -3701,14 +3498,12 @@
                   <a:srgbClr val="333333"/>
                 </a:solidFill>
                 <a:latin typeface="Arial"/>
-                <a:cs typeface="Arial"/>
-                <a:ea typeface="Calibri"/>
-              </a:rPr>
-              <a:t>• 2. ما أرخص: تضمين أم توليد؟</a:t>
-            </a:r>
-          </a:p>
-          <a:p>
-            <a:pPr algn="r" rtl="0">
+              </a:rPr>
+              <a:t>• دليل تجهيز البيئة للمختبر L03.</a:t>
+            </a:r>
+          </a:p>
+          <a:p>
+            <a:pPr algn="l" rtl="0">
               <a:spcBef>
                 <a:spcPts val="200"/>
               </a:spcBef>
@@ -3722,52 +3517,8 @@
                   <a:srgbClr val="666666"/>
                 </a:solidFill>
                 <a:latin typeface="Calibri"/>
-                <a:cs typeface="Arial"/>
-                <a:ea typeface="Calibri"/>
-              </a:rPr>
-              <a:t>• Which is cheaper: embedding or generation?</a:t>
-            </a:r>
-          </a:p>
-          <a:p>
-            <a:pPr algn="r" rtl="1">
-              <a:spcBef>
-                <a:spcPts val="200"/>
-              </a:spcBef>
-              <a:spcAft>
-                <a:spcPts val="1000"/>
-              </a:spcAft>
-            </a:pPr>
-            <a:r>
-              <a:rPr sz="2000">
-                <a:solidFill>
-                  <a:srgbClr val="333333"/>
-                </a:solidFill>
-                <a:latin typeface="Arial"/>
-                <a:cs typeface="Arial"/>
-                <a:ea typeface="Calibri"/>
-              </a:rPr>
-              <a:t>• 3. ما أدوات تتبع التجارب وإصدارات البيانات؟</a:t>
-            </a:r>
-          </a:p>
-          <a:p>
-            <a:pPr algn="r" rtl="0">
-              <a:spcBef>
-                <a:spcPts val="200"/>
-              </a:spcBef>
-              <a:spcAft>
-                <a:spcPts val="1000"/>
-              </a:spcAft>
-            </a:pPr>
-            <a:r>
-              <a:rPr sz="1700">
-                <a:solidFill>
-                  <a:srgbClr val="666666"/>
-                </a:solidFill>
-                <a:latin typeface="Calibri"/>
-                <a:cs typeface="Arial"/>
-                <a:ea typeface="Calibri"/>
-              </a:rPr>
-              <a:t>• Which tools track experiments and version data?</a:t>
+              </a:rPr>
+              <a:t>• L03 Environment Setup Guide.</a:t>
             </a:r>
           </a:p>
         </p:txBody>
@@ -3801,8 +3552,6 @@
                   <a:srgbClr val="666666"/>
                 </a:solidFill>
                 <a:latin typeface="Arial"/>
-                <a:cs typeface="Arial"/>
-                <a:ea typeface="Calibri"/>
               </a:rPr>
               <a:t>Module 02 — Data &amp; AI Engineering Track  |  الوحدة الثانية</a:t>
             </a:r>
@@ -3838,158 +3587,8 @@
                   <a:srgbClr val="666666"/>
                 </a:solidFill>
                 <a:latin typeface="Calibri"/>
-                <a:cs typeface="Arial"/>
-                <a:ea typeface="Calibri"/>
-              </a:rPr>
-              <a:t>V12  •  8/13</a:t>
-            </a:r>
-          </a:p>
-        </p:txBody>
-      </p:sp>
-      <p:sp>
-        <p:nvSpPr>
-          <p:cNvPr id="7" name="TextBox 6"/>
-          <p:cNvSpPr txBox="1"/>
-          <p:nvPr/>
-        </p:nvSpPr>
-        <p:spPr>
-          <a:xfrm>
-            <a:off x="640080" y="6400800"/>
-            <a:ext cx="8686800" cy="320040"/>
-          </a:xfrm>
-          <a:prstGeom prst="rect">
-            <a:avLst/>
-          </a:prstGeom>
-          <a:noFill/>
-        </p:spPr>
-        <p:txBody>
-          <a:bodyPr wrap="square">
-            <a:spAutoFit/>
-          </a:bodyPr>
-          <a:lstStyle/>
-          <a:p>
-            <a:pPr algn="r" rtl="1"/>
-            <a:r>
-              <a:rPr sz="1000" b="0">
-                <a:solidFill>
-                  <a:srgbClr val="666666"/>
-                </a:solidFill>
-                <a:latin typeface="Arial"/>
-                <a:cs typeface="Arial"/>
-                <a:ea typeface="Calibri"/>
-              </a:rPr>
-              <a:t>Module 02 — Data &amp; AI Engineering Track  |  الوحدة الثانية</a:t>
-            </a:r>
-          </a:p>
-        </p:txBody>
-      </p:sp>
-      <p:sp>
-        <p:nvSpPr>
-          <p:cNvPr id="8" name="TextBox 7"/>
-          <p:cNvSpPr txBox="1"/>
-          <p:nvPr/>
-        </p:nvSpPr>
-        <p:spPr>
-          <a:xfrm>
-            <a:off x="9601200" y="6400800"/>
-            <a:ext cx="1920240" cy="320040"/>
-          </a:xfrm>
-          <a:prstGeom prst="rect">
-            <a:avLst/>
-          </a:prstGeom>
-          <a:noFill/>
-        </p:spPr>
-        <p:txBody>
-          <a:bodyPr wrap="square">
-            <a:spAutoFit/>
-          </a:bodyPr>
-          <a:lstStyle/>
-          <a:p>
-            <a:pPr algn="l" rtl="0"/>
-            <a:r>
-              <a:rPr sz="1000" b="0">
-                <a:solidFill>
-                  <a:srgbClr val="666666"/>
-                </a:solidFill>
-                <a:latin typeface="Calibri"/>
-                <a:cs typeface="Arial"/>
-                <a:ea typeface="Calibri"/>
-              </a:rPr>
-              <a:t>12_  •  10/12</a:t>
-            </a:r>
-          </a:p>
-        </p:txBody>
-      </p:sp>
-      <p:sp>
-        <p:nvSpPr>
-          <p:cNvPr id="9" name="TextBox 8"/>
-          <p:cNvSpPr txBox="1"/>
-          <p:nvPr/>
-        </p:nvSpPr>
-        <p:spPr>
-          <a:xfrm>
-            <a:off x="640080" y="6400800"/>
-            <a:ext cx="8686800" cy="320040"/>
-          </a:xfrm>
-          <a:prstGeom prst="rect">
-            <a:avLst/>
-          </a:prstGeom>
-          <a:noFill/>
-        </p:spPr>
-        <p:txBody>
-          <a:bodyPr wrap="square">
-            <a:spAutoFit/>
-          </a:bodyPr>
-          <a:lstStyle/>
-          <a:p>
-            <a:pPr algn="r" rtl="1"/>
-            <a:r>
-              <a:rPr sz="1000" b="0">
-                <a:solidFill>
-                  <a:srgbClr val="666666"/>
-                </a:solidFill>
-                <a:latin typeface="Arial"/>
-                <a:cs typeface="Arial"/>
-                <a:ea typeface="Calibri"/>
-              </a:rPr>
-              <a:t>Module 02 — Data &amp; AI Engineering Track  |  الوحدة الثانية</a:t>
-            </a:r>
-          </a:p>
-        </p:txBody>
-      </p:sp>
-      <p:sp>
-        <p:nvSpPr>
-          <p:cNvPr id="10" name="TextBox 9"/>
-          <p:cNvSpPr txBox="1"/>
-          <p:nvPr/>
-        </p:nvSpPr>
-        <p:spPr>
-          <a:xfrm>
-            <a:off x="9601200" y="6400800"/>
-            <a:ext cx="1920240" cy="320040"/>
-          </a:xfrm>
-          <a:prstGeom prst="rect">
-            <a:avLst/>
-          </a:prstGeom>
-          <a:noFill/>
-        </p:spPr>
-        <p:txBody>
-          <a:bodyPr wrap="square">
-            <a:spAutoFit/>
-          </a:bodyPr>
-          <a:lstStyle/>
-          <a:p>
-            <a:pPr algn="l" rtl="0"/>
-            <a:r>
-              <a:rPr sz="1000" b="0">
-                <a:solidFill>
-                  <a:srgbClr val="666666"/>
-                </a:solidFill>
-                <a:latin typeface="Calibri"/>
-                <a:cs typeface="Arial"/>
-                <a:ea typeface="Calibri"/>
-              </a:rPr>
-              <a:t>12_  •  10/12</a:t>
+              </a:rPr>
+              <a:t>V12  •  12/12</a:t>
             </a:r>
           </a:p>
         </p:txBody>
@@ -4022,22 +3621,57 @@
       <p:grpSpPr/>
       <p:sp>
         <p:nvSpPr>
-          <p:cNvPr id="2" name="Rectangle 1"/>
+          <p:cNvPr id="2" name="TextBox 1"/>
+          <p:cNvSpPr txBox="1"/>
+          <p:nvPr/>
+        </p:nvSpPr>
+        <p:spPr>
+          <a:xfrm>
+            <a:off x="640080" y="137160"/>
+            <a:ext cx="10972800" cy="640080"/>
+          </a:xfrm>
+          <a:prstGeom prst="rect">
+            <a:avLst/>
+          </a:prstGeom>
+          <a:noFill/>
+        </p:spPr>
+        <p:txBody>
+          <a:bodyPr wrap="none">
+            <a:spAutoFit/>
+          </a:bodyPr>
+          <a:lstStyle/>
+          <a:p>
+            <a:pPr algn="r" rtl="1"/>
+            <a:r>
+              <a:rPr sz="3000" b="1">
+                <a:solidFill>
+                  <a:srgbClr val="1F3B5C"/>
+                </a:solidFill>
+                <a:latin typeface="Arial"/>
+              </a:rPr>
+              <a:t>من LLM إلى الأنظمة الوكيلة / From LLM to Agentic AI</a:t>
+            </a:r>
+          </a:p>
+        </p:txBody>
+      </p:sp>
+      <p:sp>
+        <p:nvSpPr>
+          <p:cNvPr id="3" name="Rounded Rectangle 2"/>
           <p:cNvSpPr/>
           <p:nvPr/>
         </p:nvSpPr>
         <p:spPr>
           <a:xfrm>
-            <a:off x="0" y="0"/>
-            <a:ext cx="12191695" cy="1005840"/>
-          </a:xfrm>
-          <a:prstGeom prst="rect">
+            <a:off x="640080" y="1645920"/>
+            <a:ext cx="2377440" cy="914400"/>
+          </a:xfrm>
+          <a:prstGeom prst="roundRect">
             <a:avLst/>
           </a:prstGeom>
           <a:solidFill>
-            <a:srgbClr val="FFFFFF"/>
+            <a:srgbClr val="EDEDED"/>
           </a:solidFill>
-          <a:ln w="25400">
+          <a:ln w="12700">
             <a:solidFill>
               <a:srgbClr val="1F4E79"/>
             </a:solidFill>
@@ -4059,6 +3693,126 @@
           </a:fontRef>
         </p:style>
         <p:txBody>
+          <a:bodyPr rtlCol="0" anchor="ctr" wrap="square"/>
+          <a:lstStyle/>
+          <a:p>
+            <a:pPr algn="ctr" rtl="1"/>
+            <a:r>
+              <a:rPr sz="1800" b="1">
+                <a:solidFill>
+                  <a:srgbClr val="333333"/>
+                </a:solidFill>
+                <a:latin typeface="Arial"/>
+              </a:rPr>
+              <a:t>LLM</a:t>
+            </a:r>
+          </a:p>
+        </p:txBody>
+      </p:sp>
+      <p:sp>
+        <p:nvSpPr>
+          <p:cNvPr id="4" name="Rounded Rectangle 3"/>
+          <p:cNvSpPr/>
+          <p:nvPr/>
+        </p:nvSpPr>
+        <p:spPr>
+          <a:xfrm>
+            <a:off x="640080" y="2743200"/>
+            <a:ext cx="2377440" cy="1463040"/>
+          </a:xfrm>
+          <a:prstGeom prst="roundRect">
+            <a:avLst/>
+          </a:prstGeom>
+          <a:solidFill>
+            <a:srgbClr val="EDEDED"/>
+          </a:solidFill>
+          <a:ln w="12700">
+            <a:solidFill>
+              <a:srgbClr val="1F4E79"/>
+            </a:solidFill>
+          </a:ln>
+          <a:effectLst/>
+        </p:spPr>
+        <p:style>
+          <a:lnRef idx="1">
+            <a:schemeClr val="accent1"/>
+          </a:lnRef>
+          <a:fillRef idx="3">
+            <a:schemeClr val="accent1"/>
+          </a:fillRef>
+          <a:effectRef idx="2">
+            <a:schemeClr val="accent1"/>
+          </a:effectRef>
+          <a:fontRef idx="minor">
+            <a:schemeClr val="lt1"/>
+          </a:fontRef>
+        </p:style>
+        <p:txBody>
+          <a:bodyPr rtlCol="0" anchor="ctr" wrap="square"/>
+          <a:lstStyle/>
+          <a:p>
+            <a:pPr algn="ctr" rtl="1"/>
+            <a:r>
+              <a:rPr sz="1300" b="1">
+                <a:solidFill>
+                  <a:srgbClr val="333333"/>
+                </a:solidFill>
+                <a:latin typeface="Arial"/>
+              </a:rPr>
+              <a:t>تنبؤ بالرموز التالية</a:t>
+            </a:r>
+          </a:p>
+          <a:p>
+            <a:pPr algn="ctr" rtl="0"/>
+            <a:r>
+              <a:rPr sz="1100">
+                <a:solidFill>
+                  <a:srgbClr val="666666"/>
+                </a:solidFill>
+                <a:latin typeface="Calibri"/>
+              </a:rPr>
+              <a:t>Predicts next tokens</a:t>
+            </a:r>
+          </a:p>
+        </p:txBody>
+      </p:sp>
+      <p:sp>
+        <p:nvSpPr>
+          <p:cNvPr id="5" name="Left Arrow 4"/>
+          <p:cNvSpPr/>
+          <p:nvPr/>
+        </p:nvSpPr>
+        <p:spPr>
+          <a:xfrm>
+            <a:off x="3072384" y="1965960"/>
+            <a:ext cx="347472" cy="274320"/>
+          </a:xfrm>
+          <a:prstGeom prst="leftArrow">
+            <a:avLst/>
+          </a:prstGeom>
+          <a:solidFill>
+            <a:srgbClr val="1F4E79"/>
+          </a:solidFill>
+          <a:ln>
+            <a:noFill/>
+          </a:ln>
+          <a:effectLst/>
+        </p:spPr>
+        <p:style>
+          <a:lnRef idx="1">
+            <a:schemeClr val="accent1"/>
+          </a:lnRef>
+          <a:fillRef idx="3">
+            <a:schemeClr val="accent1"/>
+          </a:fillRef>
+          <a:effectRef idx="2">
+            <a:schemeClr val="accent1"/>
+          </a:effectRef>
+          <a:fontRef idx="minor">
+            <a:schemeClr val="lt1"/>
+          </a:fontRef>
+        </p:style>
+        <p:txBody>
           <a:bodyPr rtlCol="0" anchor="ctr"/>
           <a:lstStyle/>
           <a:p>
@@ -4068,14 +3822,468 @@
       </p:sp>
       <p:sp>
         <p:nvSpPr>
-          <p:cNvPr id="3" name="TextBox 2"/>
+          <p:cNvPr id="6" name="Rounded Rectangle 5"/>
+          <p:cNvSpPr/>
+          <p:nvPr/>
+        </p:nvSpPr>
+        <p:spPr>
+          <a:xfrm>
+            <a:off x="3474720" y="1645920"/>
+            <a:ext cx="2377440" cy="914400"/>
+          </a:xfrm>
+          <a:prstGeom prst="roundRect">
+            <a:avLst/>
+          </a:prstGeom>
+          <a:solidFill>
+            <a:srgbClr val="DCE6F1"/>
+          </a:solidFill>
+          <a:ln w="12700">
+            <a:solidFill>
+              <a:srgbClr val="1F4E79"/>
+            </a:solidFill>
+          </a:ln>
+          <a:effectLst/>
+        </p:spPr>
+        <p:style>
+          <a:lnRef idx="1">
+            <a:schemeClr val="accent1"/>
+          </a:lnRef>
+          <a:fillRef idx="3">
+            <a:schemeClr val="accent1"/>
+          </a:fillRef>
+          <a:effectRef idx="2">
+            <a:schemeClr val="accent1"/>
+          </a:effectRef>
+          <a:fontRef idx="minor">
+            <a:schemeClr val="lt1"/>
+          </a:fontRef>
+        </p:style>
+        <p:txBody>
+          <a:bodyPr rtlCol="0" anchor="ctr" wrap="square"/>
+          <a:lstStyle/>
+          <a:p>
+            <a:pPr algn="ctr" rtl="1"/>
+            <a:r>
+              <a:rPr sz="1800" b="1">
+                <a:solidFill>
+                  <a:srgbClr val="333333"/>
+                </a:solidFill>
+                <a:latin typeface="Arial"/>
+              </a:rPr>
+              <a:t>الذكاء التوليدي</a:t>
+            </a:r>
+          </a:p>
+        </p:txBody>
+      </p:sp>
+      <p:sp>
+        <p:nvSpPr>
+          <p:cNvPr id="7" name="Rounded Rectangle 6"/>
+          <p:cNvSpPr/>
+          <p:nvPr/>
+        </p:nvSpPr>
+        <p:spPr>
+          <a:xfrm>
+            <a:off x="3474720" y="2743200"/>
+            <a:ext cx="2377440" cy="1463040"/>
+          </a:xfrm>
+          <a:prstGeom prst="roundRect">
+            <a:avLst/>
+          </a:prstGeom>
+          <a:solidFill>
+            <a:srgbClr val="EDEDED"/>
+          </a:solidFill>
+          <a:ln w="12700">
+            <a:solidFill>
+              <a:srgbClr val="1F4E79"/>
+            </a:solidFill>
+          </a:ln>
+          <a:effectLst/>
+        </p:spPr>
+        <p:style>
+          <a:lnRef idx="1">
+            <a:schemeClr val="accent1"/>
+          </a:lnRef>
+          <a:fillRef idx="3">
+            <a:schemeClr val="accent1"/>
+          </a:fillRef>
+          <a:effectRef idx="2">
+            <a:schemeClr val="accent1"/>
+          </a:effectRef>
+          <a:fontRef idx="minor">
+            <a:schemeClr val="lt1"/>
+          </a:fontRef>
+        </p:style>
+        <p:txBody>
+          <a:bodyPr rtlCol="0" anchor="ctr" wrap="square"/>
+          <a:lstStyle/>
+          <a:p>
+            <a:pPr algn="ctr" rtl="1"/>
+            <a:r>
+              <a:rPr sz="1300" b="1">
+                <a:solidFill>
+                  <a:srgbClr val="333333"/>
+                </a:solidFill>
+                <a:latin typeface="Arial"/>
+              </a:rPr>
+              <a:t>يولّد محتوى جديدًا</a:t>
+            </a:r>
+          </a:p>
+          <a:p>
+            <a:pPr algn="ctr" rtl="0"/>
+            <a:r>
+              <a:rPr sz="1100">
+                <a:solidFill>
+                  <a:srgbClr val="666666"/>
+                </a:solidFill>
+                <a:latin typeface="Calibri"/>
+              </a:rPr>
+              <a:t>Generates new content</a:t>
+            </a:r>
+          </a:p>
+        </p:txBody>
+      </p:sp>
+      <p:sp>
+        <p:nvSpPr>
+          <p:cNvPr id="8" name="Left Arrow 7"/>
+          <p:cNvSpPr/>
+          <p:nvPr/>
+        </p:nvSpPr>
+        <p:spPr>
+          <a:xfrm>
+            <a:off x="5907024" y="1965960"/>
+            <a:ext cx="347472" cy="274320"/>
+          </a:xfrm>
+          <a:prstGeom prst="leftArrow">
+            <a:avLst/>
+          </a:prstGeom>
+          <a:solidFill>
+            <a:srgbClr val="1F4E79"/>
+          </a:solidFill>
+          <a:ln>
+            <a:noFill/>
+          </a:ln>
+          <a:effectLst/>
+        </p:spPr>
+        <p:style>
+          <a:lnRef idx="1">
+            <a:schemeClr val="accent1"/>
+          </a:lnRef>
+          <a:fillRef idx="3">
+            <a:schemeClr val="accent1"/>
+          </a:fillRef>
+          <a:effectRef idx="2">
+            <a:schemeClr val="accent1"/>
+          </a:effectRef>
+          <a:fontRef idx="minor">
+            <a:schemeClr val="lt1"/>
+          </a:fontRef>
+        </p:style>
+        <p:txBody>
+          <a:bodyPr rtlCol="0" anchor="ctr"/>
+          <a:lstStyle/>
+          <a:p>
+            <a:pPr algn="ctr"/>
+          </a:p>
+        </p:txBody>
+      </p:sp>
+      <p:sp>
+        <p:nvSpPr>
+          <p:cNvPr id="9" name="Rounded Rectangle 8"/>
+          <p:cNvSpPr/>
+          <p:nvPr/>
+        </p:nvSpPr>
+        <p:spPr>
+          <a:xfrm>
+            <a:off x="6309360" y="1645920"/>
+            <a:ext cx="2377440" cy="914400"/>
+          </a:xfrm>
+          <a:prstGeom prst="roundRect">
+            <a:avLst/>
+          </a:prstGeom>
+          <a:solidFill>
+            <a:srgbClr val="FDE9D9"/>
+          </a:solidFill>
+          <a:ln w="12700">
+            <a:solidFill>
+              <a:srgbClr val="1F4E79"/>
+            </a:solidFill>
+          </a:ln>
+          <a:effectLst/>
+        </p:spPr>
+        <p:style>
+          <a:lnRef idx="1">
+            <a:schemeClr val="accent1"/>
+          </a:lnRef>
+          <a:fillRef idx="3">
+            <a:schemeClr val="accent1"/>
+          </a:fillRef>
+          <a:effectRef idx="2">
+            <a:schemeClr val="accent1"/>
+          </a:effectRef>
+          <a:fontRef idx="minor">
+            <a:schemeClr val="lt1"/>
+          </a:fontRef>
+        </p:style>
+        <p:txBody>
+          <a:bodyPr rtlCol="0" anchor="ctr" wrap="square"/>
+          <a:lstStyle/>
+          <a:p>
+            <a:pPr algn="ctr" rtl="1"/>
+            <a:r>
+              <a:rPr sz="1800" b="1">
+                <a:solidFill>
+                  <a:srgbClr val="333333"/>
+                </a:solidFill>
+                <a:latin typeface="Arial"/>
+              </a:rPr>
+              <a:t>الوكلاء Agents</a:t>
+            </a:r>
+          </a:p>
+        </p:txBody>
+      </p:sp>
+      <p:sp>
+        <p:nvSpPr>
+          <p:cNvPr id="10" name="Rounded Rectangle 9"/>
+          <p:cNvSpPr/>
+          <p:nvPr/>
+        </p:nvSpPr>
+        <p:spPr>
+          <a:xfrm>
+            <a:off x="6309360" y="2743200"/>
+            <a:ext cx="2377440" cy="1463040"/>
+          </a:xfrm>
+          <a:prstGeom prst="roundRect">
+            <a:avLst/>
+          </a:prstGeom>
+          <a:solidFill>
+            <a:srgbClr val="EDEDED"/>
+          </a:solidFill>
+          <a:ln w="12700">
+            <a:solidFill>
+              <a:srgbClr val="1F4E79"/>
+            </a:solidFill>
+          </a:ln>
+          <a:effectLst/>
+        </p:spPr>
+        <p:style>
+          <a:lnRef idx="1">
+            <a:schemeClr val="accent1"/>
+          </a:lnRef>
+          <a:fillRef idx="3">
+            <a:schemeClr val="accent1"/>
+          </a:fillRef>
+          <a:effectRef idx="2">
+            <a:schemeClr val="accent1"/>
+          </a:effectRef>
+          <a:fontRef idx="minor">
+            <a:schemeClr val="lt1"/>
+          </a:fontRef>
+        </p:style>
+        <p:txBody>
+          <a:bodyPr rtlCol="0" anchor="ctr" wrap="square"/>
+          <a:lstStyle/>
+          <a:p>
+            <a:pPr algn="ctr" rtl="1"/>
+            <a:r>
+              <a:rPr sz="1300" b="1">
+                <a:solidFill>
+                  <a:srgbClr val="333333"/>
+                </a:solidFill>
+                <a:latin typeface="Arial"/>
+              </a:rPr>
+              <a:t>نية + استدعاء أدوات</a:t>
+            </a:r>
+          </a:p>
+          <a:p>
+            <a:pPr algn="ctr" rtl="0"/>
+            <a:r>
+              <a:rPr sz="1100">
+                <a:solidFill>
+                  <a:srgbClr val="666666"/>
+                </a:solidFill>
+                <a:latin typeface="Calibri"/>
+              </a:rPr>
+              <a:t>Intent + tool calls</a:t>
+            </a:r>
+          </a:p>
+        </p:txBody>
+      </p:sp>
+      <p:sp>
+        <p:nvSpPr>
+          <p:cNvPr id="11" name="Left Arrow 10"/>
+          <p:cNvSpPr/>
+          <p:nvPr/>
+        </p:nvSpPr>
+        <p:spPr>
+          <a:xfrm>
+            <a:off x="8741664" y="1965960"/>
+            <a:ext cx="347472" cy="274320"/>
+          </a:xfrm>
+          <a:prstGeom prst="leftArrow">
+            <a:avLst/>
+          </a:prstGeom>
+          <a:solidFill>
+            <a:srgbClr val="1F4E79"/>
+          </a:solidFill>
+          <a:ln>
+            <a:noFill/>
+          </a:ln>
+          <a:effectLst/>
+        </p:spPr>
+        <p:style>
+          <a:lnRef idx="1">
+            <a:schemeClr val="accent1"/>
+          </a:lnRef>
+          <a:fillRef idx="3">
+            <a:schemeClr val="accent1"/>
+          </a:fillRef>
+          <a:effectRef idx="2">
+            <a:schemeClr val="accent1"/>
+          </a:effectRef>
+          <a:fontRef idx="minor">
+            <a:schemeClr val="lt1"/>
+          </a:fontRef>
+        </p:style>
+        <p:txBody>
+          <a:bodyPr rtlCol="0" anchor="ctr"/>
+          <a:lstStyle/>
+          <a:p>
+            <a:pPr algn="ctr"/>
+          </a:p>
+        </p:txBody>
+      </p:sp>
+      <p:sp>
+        <p:nvSpPr>
+          <p:cNvPr id="12" name="Rounded Rectangle 11"/>
+          <p:cNvSpPr/>
+          <p:nvPr/>
+        </p:nvSpPr>
+        <p:spPr>
+          <a:xfrm>
+            <a:off x="9144000" y="1645920"/>
+            <a:ext cx="2377440" cy="914400"/>
+          </a:xfrm>
+          <a:prstGeom prst="roundRect">
+            <a:avLst/>
+          </a:prstGeom>
+          <a:solidFill>
+            <a:srgbClr val="E2EFDA"/>
+          </a:solidFill>
+          <a:ln w="12700">
+            <a:solidFill>
+              <a:srgbClr val="1F4E79"/>
+            </a:solidFill>
+          </a:ln>
+          <a:effectLst/>
+        </p:spPr>
+        <p:style>
+          <a:lnRef idx="1">
+            <a:schemeClr val="accent1"/>
+          </a:lnRef>
+          <a:fillRef idx="3">
+            <a:schemeClr val="accent1"/>
+          </a:fillRef>
+          <a:effectRef idx="2">
+            <a:schemeClr val="accent1"/>
+          </a:effectRef>
+          <a:fontRef idx="minor">
+            <a:schemeClr val="lt1"/>
+          </a:fontRef>
+        </p:style>
+        <p:txBody>
+          <a:bodyPr rtlCol="0" anchor="ctr" wrap="square"/>
+          <a:lstStyle/>
+          <a:p>
+            <a:pPr algn="ctr" rtl="1"/>
+            <a:r>
+              <a:rPr sz="1800" b="1">
+                <a:solidFill>
+                  <a:srgbClr val="333333"/>
+                </a:solidFill>
+                <a:latin typeface="Arial"/>
+              </a:rPr>
+              <a:t>الأنظمة الوكيلة</a:t>
+            </a:r>
+          </a:p>
+        </p:txBody>
+      </p:sp>
+      <p:sp>
+        <p:nvSpPr>
+          <p:cNvPr id="13" name="Rounded Rectangle 12"/>
+          <p:cNvSpPr/>
+          <p:nvPr/>
+        </p:nvSpPr>
+        <p:spPr>
+          <a:xfrm>
+            <a:off x="9144000" y="2743200"/>
+            <a:ext cx="2377440" cy="1463040"/>
+          </a:xfrm>
+          <a:prstGeom prst="roundRect">
+            <a:avLst/>
+          </a:prstGeom>
+          <a:solidFill>
+            <a:srgbClr val="EDEDED"/>
+          </a:solidFill>
+          <a:ln w="12700">
+            <a:solidFill>
+              <a:srgbClr val="1F4E79"/>
+            </a:solidFill>
+          </a:ln>
+          <a:effectLst/>
+        </p:spPr>
+        <p:style>
+          <a:lnRef idx="1">
+            <a:schemeClr val="accent1"/>
+          </a:lnRef>
+          <a:fillRef idx="3">
+            <a:schemeClr val="accent1"/>
+          </a:fillRef>
+          <a:effectRef idx="2">
+            <a:schemeClr val="accent1"/>
+          </a:effectRef>
+          <a:fontRef idx="minor">
+            <a:schemeClr val="lt1"/>
+          </a:fontRef>
+        </p:style>
+        <p:txBody>
+          <a:bodyPr rtlCol="0" anchor="ctr" wrap="square"/>
+          <a:lstStyle/>
+          <a:p>
+            <a:pPr algn="ctr" rtl="1"/>
+            <a:r>
+              <a:rPr sz="1300" b="1">
+                <a:solidFill>
+                  <a:srgbClr val="333333"/>
+                </a:solidFill>
+                <a:latin typeface="Arial"/>
+              </a:rPr>
+              <a:t>تخطيط وتنفيذ متعدد الخطوات</a:t>
+            </a:r>
+          </a:p>
+          <a:p>
+            <a:pPr algn="ctr" rtl="0"/>
+            <a:r>
+              <a:rPr sz="1100">
+                <a:solidFill>
+                  <a:srgbClr val="666666"/>
+                </a:solidFill>
+                <a:latin typeface="Calibri"/>
+              </a:rPr>
+              <a:t>Multi-step planning</a:t>
+            </a:r>
+          </a:p>
+        </p:txBody>
+      </p:sp>
+      <p:sp>
+        <p:nvSpPr>
+          <p:cNvPr id="14" name="TextBox 13"/>
           <p:cNvSpPr txBox="1"/>
           <p:nvPr/>
         </p:nvSpPr>
         <p:spPr>
           <a:xfrm>
-            <a:off x="640080" y="182880"/>
-            <a:ext cx="10972800" cy="640080"/>
+            <a:off x="640080" y="6126480"/>
+            <a:ext cx="10972800" cy="548640"/>
           </a:xfrm>
           <a:prstGeom prst="rect">
             <a:avLst/>
@@ -4090,29 +4298,33 @@
           <a:p>
             <a:pPr algn="r" rtl="1"/>
             <a:r>
-              <a:rPr sz="3200" b="1">
-                <a:solidFill>
-                  <a:srgbClr val="1F3B5C"/>
+              <a:rPr sz="1400">
+                <a:solidFill>
+                  <a:srgbClr val="666666"/>
                 </a:solidFill>
                 <a:latin typeface="Arial"/>
-                <a:cs typeface="Arial"/>
-                <a:ea typeface="Calibri"/>
-              </a:rPr>
-              <a:t>إجابات الاختبار / Quiz Answers</a:t>
-            </a:r>
-          </a:p>
-        </p:txBody>
-      </p:sp>
-      <p:sp>
-        <p:nvSpPr>
-          <p:cNvPr id="4" name="TextBox 3"/>
+              </a:rPr>
+              <a:t>Agentic RAG = بحث متجهي + جلب عبر الواجهات بذاكرة متجددة وتحقق قبل التسليم.</a:t>
+            </a:r>
+          </a:p>
+          <a:p>
+            <a:pPr algn="r" rtl="0"/>
+            <a:r>
+              <a:t>Agentic RAG = vector search + API fetching with refreshed memory and verification.</a:t>
+            </a:r>
+          </a:p>
+        </p:txBody>
+      </p:sp>
+      <p:sp>
+        <p:nvSpPr>
+          <p:cNvPr id="15" name="TextBox 14"/>
           <p:cNvSpPr txBox="1"/>
           <p:nvPr/>
         </p:nvSpPr>
         <p:spPr>
           <a:xfrm>
-            <a:off x="640080" y="1280160"/>
-            <a:ext cx="10972800" cy="5212080"/>
+            <a:off x="640080" y="6400800"/>
+            <a:ext cx="8686800" cy="320040"/>
           </a:xfrm>
           <a:prstGeom prst="rect">
             <a:avLst/>
@@ -4125,143 +4337,29 @@
           </a:bodyPr>
           <a:lstStyle/>
           <a:p>
-            <a:pPr algn="r" rtl="1">
-              <a:spcBef>
-                <a:spcPts val="200"/>
-              </a:spcBef>
-              <a:spcAft>
-                <a:spcPts val="1000"/>
-              </a:spcAft>
-            </a:pPr>
-            <a:r>
-              <a:rPr sz="1800">
-                <a:solidFill>
-                  <a:srgbClr val="333333"/>
+            <a:pPr algn="r" rtl="1"/>
+            <a:r>
+              <a:rPr sz="1000" b="0">
+                <a:solidFill>
+                  <a:srgbClr val="666666"/>
                 </a:solidFill>
                 <a:latin typeface="Arial"/>
-                <a:cs typeface="Arial"/>
-                <a:ea typeface="Calibri"/>
-              </a:rPr>
-              <a:t>• 1. الوكيل يستجيب ويستدعي أدوات؛ الوكيلي يخطط ذاتيًا وينفذ خطوات متعددة ويتكيف.</a:t>
-            </a:r>
-          </a:p>
-          <a:p>
-            <a:pPr algn="r" rtl="0">
-              <a:spcBef>
-                <a:spcPts val="200"/>
-              </a:spcBef>
-              <a:spcAft>
-                <a:spcPts val="1000"/>
-              </a:spcAft>
-            </a:pPr>
-            <a:r>
-              <a:rPr sz="1500">
-                <a:solidFill>
-                  <a:srgbClr val="666666"/>
-                </a:solidFill>
-                <a:latin typeface="Calibri"/>
-                <a:cs typeface="Arial"/>
-                <a:ea typeface="Calibri"/>
-              </a:rPr>
-              <a:t>• An agent responds and calls tools; agentic AI self-plans multi-step execution.</a:t>
-            </a:r>
-          </a:p>
-          <a:p>
-            <a:pPr algn="r" rtl="1">
-              <a:spcBef>
-                <a:spcPts val="200"/>
-              </a:spcBef>
-              <a:spcAft>
-                <a:spcPts val="1000"/>
-              </a:spcAft>
-            </a:pPr>
-            <a:r>
-              <a:rPr sz="1800">
-                <a:solidFill>
-                  <a:srgbClr val="333333"/>
-                </a:solidFill>
-                <a:latin typeface="Arial"/>
-                <a:cs typeface="Arial"/>
-                <a:ea typeface="Calibri"/>
-              </a:rPr>
-              <a:t>• 2. التضمين — أقل بتكلفة مرتبة كاملة.</a:t>
-            </a:r>
-          </a:p>
-          <a:p>
-            <a:pPr algn="r" rtl="0">
-              <a:spcBef>
-                <a:spcPts val="200"/>
-              </a:spcBef>
-              <a:spcAft>
-                <a:spcPts val="1000"/>
-              </a:spcAft>
-            </a:pPr>
-            <a:r>
-              <a:rPr sz="1500">
-                <a:solidFill>
-                  <a:srgbClr val="666666"/>
-                </a:solidFill>
-                <a:latin typeface="Calibri"/>
-                <a:cs typeface="Arial"/>
-                <a:ea typeface="Calibri"/>
-              </a:rPr>
-              <a:t>• Embedding — roughly an order of magnitude cheaper.</a:t>
-            </a:r>
-          </a:p>
-          <a:p>
-            <a:pPr algn="r" rtl="1">
-              <a:spcBef>
-                <a:spcPts val="200"/>
-              </a:spcBef>
-              <a:spcAft>
-                <a:spcPts val="1000"/>
-              </a:spcAft>
-            </a:pPr>
-            <a:r>
-              <a:rPr sz="1800">
-                <a:solidFill>
-                  <a:srgbClr val="333333"/>
-                </a:solidFill>
-                <a:latin typeface="Arial"/>
-                <a:cs typeface="Arial"/>
-                <a:ea typeface="Calibri"/>
-              </a:rPr>
-              <a:t>• 3. MLflow للتتبع وDVC لإصدارات البيانات.</a:t>
-            </a:r>
-          </a:p>
-          <a:p>
-            <a:pPr algn="r" rtl="0">
-              <a:spcBef>
-                <a:spcPts val="200"/>
-              </a:spcBef>
-              <a:spcAft>
-                <a:spcPts val="1000"/>
-              </a:spcAft>
-            </a:pPr>
-            <a:r>
-              <a:rPr sz="1500">
-                <a:solidFill>
-                  <a:srgbClr val="666666"/>
-                </a:solidFill>
-                <a:latin typeface="Calibri"/>
-                <a:cs typeface="Arial"/>
-                <a:ea typeface="Calibri"/>
-              </a:rPr>
-              <a:t>• MLflow for tracking, DVC for data versioning.</a:t>
-            </a:r>
-          </a:p>
-        </p:txBody>
-      </p:sp>
-      <p:sp>
-        <p:nvSpPr>
-          <p:cNvPr id="5" name="TextBox 4"/>
+              </a:rPr>
+              <a:t>Module 02 — Data &amp; AI Engineering Track  |  الوحدة الثانية</a:t>
+            </a:r>
+          </a:p>
+        </p:txBody>
+      </p:sp>
+      <p:sp>
+        <p:nvSpPr>
+          <p:cNvPr id="16" name="TextBox 15"/>
           <p:cNvSpPr txBox="1"/>
           <p:nvPr/>
         </p:nvSpPr>
         <p:spPr>
           <a:xfrm>
-            <a:off x="640080" y="6400800"/>
-            <a:ext cx="8686800" cy="320040"/>
+            <a:off x="9601200" y="6400800"/>
+            <a:ext cx="1920240" cy="320040"/>
           </a:xfrm>
           <a:prstGeom prst="rect">
             <a:avLst/>
@@ -4274,202 +4372,15 @@
           </a:bodyPr>
           <a:lstStyle/>
           <a:p>
-            <a:pPr algn="r" rtl="1"/>
+            <a:pPr algn="l" rtl="0"/>
             <a:r>
               <a:rPr sz="1000" b="0">
                 <a:solidFill>
                   <a:srgbClr val="666666"/>
                 </a:solidFill>
-                <a:latin typeface="Arial"/>
-                <a:cs typeface="Arial"/>
-                <a:ea typeface="Calibri"/>
-              </a:rPr>
-              <a:t>Module 02 — Data &amp; AI Engineering Track  |  الوحدة الثانية</a:t>
-            </a:r>
-          </a:p>
-        </p:txBody>
-      </p:sp>
-      <p:sp>
-        <p:nvSpPr>
-          <p:cNvPr id="6" name="TextBox 5"/>
-          <p:cNvSpPr txBox="1"/>
-          <p:nvPr/>
-        </p:nvSpPr>
-        <p:spPr>
-          <a:xfrm>
-            <a:off x="9601200" y="6400800"/>
-            <a:ext cx="1920240" cy="320040"/>
-          </a:xfrm>
-          <a:prstGeom prst="rect">
-            <a:avLst/>
-          </a:prstGeom>
-          <a:noFill/>
-        </p:spPr>
-        <p:txBody>
-          <a:bodyPr wrap="square">
-            <a:spAutoFit/>
-          </a:bodyPr>
-          <a:lstStyle/>
-          <a:p>
-            <a:pPr algn="l" rtl="0"/>
-            <a:r>
-              <a:rPr sz="1000" b="0">
-                <a:solidFill>
-                  <a:srgbClr val="666666"/>
-                </a:solidFill>
                 <a:latin typeface="Calibri"/>
-                <a:cs typeface="Arial"/>
-                <a:ea typeface="Calibri"/>
-              </a:rPr>
-              <a:t>V12  •  9/13</a:t>
-            </a:r>
-          </a:p>
-        </p:txBody>
-      </p:sp>
-      <p:sp>
-        <p:nvSpPr>
-          <p:cNvPr id="7" name="TextBox 6"/>
-          <p:cNvSpPr txBox="1"/>
-          <p:nvPr/>
-        </p:nvSpPr>
-        <p:spPr>
-          <a:xfrm>
-            <a:off x="640080" y="6400800"/>
-            <a:ext cx="8686800" cy="320040"/>
-          </a:xfrm>
-          <a:prstGeom prst="rect">
-            <a:avLst/>
-          </a:prstGeom>
-          <a:noFill/>
-        </p:spPr>
-        <p:txBody>
-          <a:bodyPr wrap="square">
-            <a:spAutoFit/>
-          </a:bodyPr>
-          <a:lstStyle/>
-          <a:p>
-            <a:pPr algn="r" rtl="1"/>
-            <a:r>
-              <a:rPr sz="1000" b="0">
-                <a:solidFill>
-                  <a:srgbClr val="666666"/>
-                </a:solidFill>
-                <a:latin typeface="Arial"/>
-                <a:cs typeface="Arial"/>
-                <a:ea typeface="Calibri"/>
-              </a:rPr>
-              <a:t>Module 02 — Data &amp; AI Engineering Track  |  الوحدة الثانية</a:t>
-            </a:r>
-          </a:p>
-        </p:txBody>
-      </p:sp>
-      <p:sp>
-        <p:nvSpPr>
-          <p:cNvPr id="8" name="TextBox 7"/>
-          <p:cNvSpPr txBox="1"/>
-          <p:nvPr/>
-        </p:nvSpPr>
-        <p:spPr>
-          <a:xfrm>
-            <a:off x="9601200" y="6400800"/>
-            <a:ext cx="1920240" cy="320040"/>
-          </a:xfrm>
-          <a:prstGeom prst="rect">
-            <a:avLst/>
-          </a:prstGeom>
-          <a:noFill/>
-        </p:spPr>
-        <p:txBody>
-          <a:bodyPr wrap="square">
-            <a:spAutoFit/>
-          </a:bodyPr>
-          <a:lstStyle/>
-          <a:p>
-            <a:pPr algn="l" rtl="0"/>
-            <a:r>
-              <a:rPr sz="1000" b="0">
-                <a:solidFill>
-                  <a:srgbClr val="666666"/>
-                </a:solidFill>
-                <a:latin typeface="Calibri"/>
-                <a:cs typeface="Arial"/>
-                <a:ea typeface="Calibri"/>
-              </a:rPr>
-              <a:t>12_  •  11/12</a:t>
-            </a:r>
-          </a:p>
-        </p:txBody>
-      </p:sp>
-      <p:sp>
-        <p:nvSpPr>
-          <p:cNvPr id="9" name="TextBox 8"/>
-          <p:cNvSpPr txBox="1"/>
-          <p:nvPr/>
-        </p:nvSpPr>
-        <p:spPr>
-          <a:xfrm>
-            <a:off x="640080" y="6400800"/>
-            <a:ext cx="8686800" cy="320040"/>
-          </a:xfrm>
-          <a:prstGeom prst="rect">
-            <a:avLst/>
-          </a:prstGeom>
-          <a:noFill/>
-        </p:spPr>
-        <p:txBody>
-          <a:bodyPr wrap="square">
-            <a:spAutoFit/>
-          </a:bodyPr>
-          <a:lstStyle/>
-          <a:p>
-            <a:pPr algn="r" rtl="1"/>
-            <a:r>
-              <a:rPr sz="1000" b="0">
-                <a:solidFill>
-                  <a:srgbClr val="666666"/>
-                </a:solidFill>
-                <a:latin typeface="Arial"/>
-                <a:cs typeface="Arial"/>
-                <a:ea typeface="Calibri"/>
-              </a:rPr>
-              <a:t>Module 02 — Data &amp; AI Engineering Track  |  الوحدة الثانية</a:t>
-            </a:r>
-          </a:p>
-        </p:txBody>
-      </p:sp>
-      <p:sp>
-        <p:nvSpPr>
-          <p:cNvPr id="10" name="TextBox 9"/>
-          <p:cNvSpPr txBox="1"/>
-          <p:nvPr/>
-        </p:nvSpPr>
-        <p:spPr>
-          <a:xfrm>
-            <a:off x="9601200" y="6400800"/>
-            <a:ext cx="1920240" cy="320040"/>
-          </a:xfrm>
-          <a:prstGeom prst="rect">
-            <a:avLst/>
-          </a:prstGeom>
-          <a:noFill/>
-        </p:spPr>
-        <p:txBody>
-          <a:bodyPr wrap="square">
-            <a:spAutoFit/>
-          </a:bodyPr>
-          <a:lstStyle/>
-          <a:p>
-            <a:pPr algn="l" rtl="0"/>
-            <a:r>
-              <a:rPr sz="1000" b="0">
-                <a:solidFill>
-                  <a:srgbClr val="666666"/>
-                </a:solidFill>
-                <a:latin typeface="Calibri"/>
-                <a:cs typeface="Arial"/>
-                <a:ea typeface="Calibri"/>
-              </a:rPr>
-              <a:t>12_  •  11/12</a:t>
+              </a:rPr>
+              <a:t>V12  •  5/12</a:t>
             </a:r>
           </a:p>
         </p:txBody>
@@ -4502,22 +4413,57 @@
       <p:grpSpPr/>
       <p:sp>
         <p:nvSpPr>
-          <p:cNvPr id="2" name="Rectangle 1"/>
+          <p:cNvPr id="2" name="TextBox 1"/>
+          <p:cNvSpPr txBox="1"/>
+          <p:nvPr/>
+        </p:nvSpPr>
+        <p:spPr>
+          <a:xfrm>
+            <a:off x="640080" y="137160"/>
+            <a:ext cx="10972800" cy="640080"/>
+          </a:xfrm>
+          <a:prstGeom prst="rect">
+            <a:avLst/>
+          </a:prstGeom>
+          <a:noFill/>
+        </p:spPr>
+        <p:txBody>
+          <a:bodyPr wrap="none">
+            <a:spAutoFit/>
+          </a:bodyPr>
+          <a:lstStyle/>
+          <a:p>
+            <a:pPr algn="r" rtl="1"/>
+            <a:r>
+              <a:rPr sz="3000" b="1">
+                <a:solidFill>
+                  <a:srgbClr val="1F3B5C"/>
+                </a:solidFill>
+                <a:latin typeface="Arial"/>
+              </a:rPr>
+              <a:t>التكلفة عمليًا: التضمين مقابل التوليد / Cost: Embedding vs Generation</a:t>
+            </a:r>
+          </a:p>
+        </p:txBody>
+      </p:sp>
+      <p:sp>
+        <p:nvSpPr>
+          <p:cNvPr id="3" name="Rounded Rectangle 2"/>
           <p:cNvSpPr/>
           <p:nvPr/>
         </p:nvSpPr>
         <p:spPr>
           <a:xfrm>
-            <a:off x="0" y="0"/>
-            <a:ext cx="12191695" cy="1005840"/>
-          </a:xfrm>
-          <a:prstGeom prst="rect">
+            <a:off x="1828800" y="3840480"/>
+            <a:ext cx="2194560" cy="1463040"/>
+          </a:xfrm>
+          <a:prstGeom prst="roundRect">
             <a:avLst/>
           </a:prstGeom>
           <a:solidFill>
-            <a:srgbClr val="FFFFFF"/>
+            <a:srgbClr val="E2EFDA"/>
           </a:solidFill>
-          <a:ln w="25400">
+          <a:ln w="12700">
             <a:solidFill>
               <a:srgbClr val="1F4E79"/>
             </a:solidFill>
@@ -4539,23 +4485,178 @@
           </a:fontRef>
         </p:style>
         <p:txBody>
-          <a:bodyPr rtlCol="0" anchor="ctr"/>
-          <a:lstStyle/>
-          <a:p>
-            <a:pPr algn="ctr"/>
-          </a:p>
-        </p:txBody>
-      </p:sp>
-      <p:sp>
-        <p:nvSpPr>
-          <p:cNvPr id="3" name="TextBox 2"/>
+          <a:bodyPr rtlCol="0" anchor="ctr" wrap="square"/>
+          <a:lstStyle/>
+          <a:p>
+            <a:pPr algn="ctr" rtl="1"/>
+            <a:r>
+              <a:rPr sz="1800" b="1">
+                <a:solidFill>
+                  <a:srgbClr val="333333"/>
+                </a:solidFill>
+                <a:latin typeface="Arial"/>
+              </a:rPr>
+              <a:t>التضمين 1x</a:t>
+            </a:r>
+          </a:p>
+          <a:p>
+            <a:pPr algn="ctr" rtl="0"/>
+            <a:r>
+              <a:rPr sz="1200">
+                <a:solidFill>
+                  <a:srgbClr val="666666"/>
+                </a:solidFill>
+                <a:latin typeface="Calibri"/>
+              </a:rPr>
+              <a:t>Embedding — cheap</a:t>
+            </a:r>
+          </a:p>
+        </p:txBody>
+      </p:sp>
+      <p:sp>
+        <p:nvSpPr>
+          <p:cNvPr id="4" name="Rounded Rectangle 3"/>
+          <p:cNvSpPr/>
+          <p:nvPr/>
+        </p:nvSpPr>
+        <p:spPr>
+          <a:xfrm>
+            <a:off x="4754880" y="1554480"/>
+            <a:ext cx="2194560" cy="3749039"/>
+          </a:xfrm>
+          <a:prstGeom prst="roundRect">
+            <a:avLst/>
+          </a:prstGeom>
+          <a:solidFill>
+            <a:srgbClr val="FDE9D9"/>
+          </a:solidFill>
+          <a:ln w="12700">
+            <a:solidFill>
+              <a:srgbClr val="1F4E79"/>
+            </a:solidFill>
+          </a:ln>
+          <a:effectLst/>
+        </p:spPr>
+        <p:style>
+          <a:lnRef idx="1">
+            <a:schemeClr val="accent1"/>
+          </a:lnRef>
+          <a:fillRef idx="3">
+            <a:schemeClr val="accent1"/>
+          </a:fillRef>
+          <a:effectRef idx="2">
+            <a:schemeClr val="accent1"/>
+          </a:effectRef>
+          <a:fontRef idx="minor">
+            <a:schemeClr val="lt1"/>
+          </a:fontRef>
+        </p:style>
+        <p:txBody>
+          <a:bodyPr rtlCol="0" anchor="ctr" wrap="square"/>
+          <a:lstStyle/>
+          <a:p>
+            <a:pPr algn="ctr" rtl="1"/>
+            <a:r>
+              <a:rPr sz="1800" b="1">
+                <a:solidFill>
+                  <a:srgbClr val="333333"/>
+                </a:solidFill>
+                <a:latin typeface="Arial"/>
+              </a:rPr>
+              <a:t>التوليد ~10x</a:t>
+            </a:r>
+          </a:p>
+          <a:p>
+            <a:pPr algn="ctr" rtl="0"/>
+            <a:r>
+              <a:rPr sz="1200">
+                <a:solidFill>
+                  <a:srgbClr val="666666"/>
+                </a:solidFill>
+                <a:latin typeface="Calibri"/>
+              </a:rPr>
+              <a:t>Generation — costly</a:t>
+            </a:r>
+          </a:p>
+        </p:txBody>
+      </p:sp>
+      <p:sp>
+        <p:nvSpPr>
+          <p:cNvPr id="5" name="Rounded Rectangle 4"/>
+          <p:cNvSpPr/>
+          <p:nvPr/>
+        </p:nvSpPr>
+        <p:spPr>
+          <a:xfrm>
+            <a:off x="7863840" y="3108960"/>
+            <a:ext cx="2651760" cy="2194560"/>
+          </a:xfrm>
+          <a:prstGeom prst="roundRect">
+            <a:avLst/>
+          </a:prstGeom>
+          <a:solidFill>
+            <a:srgbClr val="DCE6F1"/>
+          </a:solidFill>
+          <a:ln w="12700">
+            <a:solidFill>
+              <a:srgbClr val="1F4E79"/>
+            </a:solidFill>
+          </a:ln>
+          <a:effectLst/>
+        </p:spPr>
+        <p:style>
+          <a:lnRef idx="1">
+            <a:schemeClr val="accent1"/>
+          </a:lnRef>
+          <a:fillRef idx="3">
+            <a:schemeClr val="accent1"/>
+          </a:fillRef>
+          <a:effectRef idx="2">
+            <a:schemeClr val="accent1"/>
+          </a:effectRef>
+          <a:fontRef idx="minor">
+            <a:schemeClr val="lt1"/>
+          </a:fontRef>
+        </p:style>
+        <p:txBody>
+          <a:bodyPr rtlCol="0" anchor="ctr" wrap="square"/>
+          <a:lstStyle/>
+          <a:p>
+            <a:pPr algn="ctr" rtl="1"/>
+            <a:r>
+              <a:rPr sz="1500" b="1">
+                <a:solidFill>
+                  <a:srgbClr val="333333"/>
+                </a:solidFill>
+                <a:latin typeface="Arial"/>
+              </a:rPr>
+              <a:t>الحل: تخزين مؤقت + توجيه</a:t>
+            </a:r>
+          </a:p>
+          <a:p>
+            <a:pPr algn="ctr" rtl="0"/>
+            <a:r>
+              <a:rPr sz="1200">
+                <a:solidFill>
+                  <a:srgbClr val="666666"/>
+                </a:solidFill>
+                <a:latin typeface="Calibri"/>
+              </a:rPr>
+              <a:t>Fix: caching + routing</a:t>
+            </a:r>
+          </a:p>
+        </p:txBody>
+      </p:sp>
+      <p:sp>
+        <p:nvSpPr>
+          <p:cNvPr id="6" name="TextBox 5"/>
           <p:cNvSpPr txBox="1"/>
           <p:nvPr/>
         </p:nvSpPr>
         <p:spPr>
           <a:xfrm>
-            <a:off x="640080" y="182880"/>
-            <a:ext cx="10972800" cy="640080"/>
+            <a:off x="640080" y="6126480"/>
+            <a:ext cx="10972800" cy="548640"/>
           </a:xfrm>
           <a:prstGeom prst="rect">
             <a:avLst/>
@@ -4570,29 +4671,33 @@
           <a:p>
             <a:pPr algn="r" rtl="1"/>
             <a:r>
-              <a:rPr sz="3200" b="1">
-                <a:solidFill>
-                  <a:srgbClr val="1F3B5C"/>
+              <a:rPr sz="1400">
+                <a:solidFill>
+                  <a:srgbClr val="666666"/>
                 </a:solidFill>
                 <a:latin typeface="Arial"/>
-                <a:cs typeface="Arial"/>
-                <a:ea typeface="Calibri"/>
-              </a:rPr>
-              <a:t>للاستزادة / Further Reading</a:t>
-            </a:r>
-          </a:p>
-        </p:txBody>
-      </p:sp>
-      <p:sp>
-        <p:nvSpPr>
-          <p:cNvPr id="4" name="TextBox 3"/>
+              </a:rPr>
+              <a:t>قاعدة FinOps: قِس التكلفة لكل طلب قبل التوسع.</a:t>
+            </a:r>
+          </a:p>
+          <a:p>
+            <a:pPr algn="r" rtl="0"/>
+            <a:r>
+              <a:t>FinOps rule: measure per-request cost before scaling.</a:t>
+            </a:r>
+          </a:p>
+        </p:txBody>
+      </p:sp>
+      <p:sp>
+        <p:nvSpPr>
+          <p:cNvPr id="7" name="TextBox 6"/>
           <p:cNvSpPr txBox="1"/>
           <p:nvPr/>
         </p:nvSpPr>
         <p:spPr>
           <a:xfrm>
-            <a:off x="640080" y="1280160"/>
-            <a:ext cx="10972800" cy="5212080"/>
+            <a:off x="640080" y="6400800"/>
+            <a:ext cx="8686800" cy="320040"/>
           </a:xfrm>
           <a:prstGeom prst="rect">
             <a:avLst/>
@@ -4605,101 +4710,29 @@
           </a:bodyPr>
           <a:lstStyle/>
           <a:p>
-            <a:pPr algn="r" rtl="1">
-              <a:spcBef>
-                <a:spcPts val="200"/>
-              </a:spcBef>
-              <a:spcAft>
-                <a:spcPts val="1000"/>
-              </a:spcAft>
-            </a:pPr>
-            <a:r>
-              <a:rPr sz="2000">
-                <a:solidFill>
-                  <a:srgbClr val="333333"/>
+            <a:pPr algn="r" rtl="1"/>
+            <a:r>
+              <a:rPr sz="1000" b="0">
+                <a:solidFill>
+                  <a:srgbClr val="666666"/>
                 </a:solidFill>
                 <a:latin typeface="Arial"/>
-                <a:cs typeface="Arial"/>
-                <a:ea typeface="Calibri"/>
-              </a:rPr>
-              <a:t>• توثيق MLflow وDVC.</a:t>
-            </a:r>
-          </a:p>
-          <a:p>
-            <a:pPr algn="r" rtl="0">
-              <a:spcBef>
-                <a:spcPts val="200"/>
-              </a:spcBef>
-              <a:spcAft>
-                <a:spcPts val="1000"/>
-              </a:spcAft>
-            </a:pPr>
-            <a:r>
-              <a:rPr sz="1700">
-                <a:solidFill>
-                  <a:srgbClr val="666666"/>
-                </a:solidFill>
-                <a:latin typeface="Calibri"/>
-                <a:cs typeface="Arial"/>
-                <a:ea typeface="Calibri"/>
-              </a:rPr>
-              <a:t>• MLflow and DVC docs.</a:t>
-            </a:r>
-          </a:p>
-          <a:p>
-            <a:pPr algn="r" rtl="1">
-              <a:spcBef>
-                <a:spcPts val="200"/>
-              </a:spcBef>
-              <a:spcAft>
-                <a:spcPts val="1000"/>
-              </a:spcAft>
-            </a:pPr>
-            <a:r>
-              <a:rPr sz="2000">
-                <a:solidFill>
-                  <a:srgbClr val="333333"/>
-                </a:solidFill>
-                <a:latin typeface="Arial"/>
-                <a:cs typeface="Arial"/>
-                <a:ea typeface="Calibri"/>
-              </a:rPr>
-              <a:t>• دليل تجهيز البيئة للمختبر L03.</a:t>
-            </a:r>
-          </a:p>
-          <a:p>
-            <a:pPr algn="r" rtl="0">
-              <a:spcBef>
-                <a:spcPts val="200"/>
-              </a:spcBef>
-              <a:spcAft>
-                <a:spcPts val="1000"/>
-              </a:spcAft>
-            </a:pPr>
-            <a:r>
-              <a:rPr sz="1700">
-                <a:solidFill>
-                  <a:srgbClr val="666666"/>
-                </a:solidFill>
-                <a:latin typeface="Calibri"/>
-                <a:cs typeface="Arial"/>
-                <a:ea typeface="Calibri"/>
-              </a:rPr>
-              <a:t>• L03 Environment Setup Guide.</a:t>
-            </a:r>
-          </a:p>
-        </p:txBody>
-      </p:sp>
-      <p:sp>
-        <p:nvSpPr>
-          <p:cNvPr id="5" name="TextBox 4"/>
+              </a:rPr>
+              <a:t>Module 02 — Data &amp; AI Engineering Track  |  الوحدة الثانية</a:t>
+            </a:r>
+          </a:p>
+        </p:txBody>
+      </p:sp>
+      <p:sp>
+        <p:nvSpPr>
+          <p:cNvPr id="8" name="TextBox 7"/>
           <p:cNvSpPr txBox="1"/>
           <p:nvPr/>
         </p:nvSpPr>
         <p:spPr>
           <a:xfrm>
-            <a:off x="640080" y="6400800"/>
-            <a:ext cx="8686800" cy="320040"/>
+            <a:off x="9601200" y="6400800"/>
+            <a:ext cx="1920240" cy="320040"/>
           </a:xfrm>
           <a:prstGeom prst="rect">
             <a:avLst/>
@@ -4712,202 +4745,15 @@
           </a:bodyPr>
           <a:lstStyle/>
           <a:p>
-            <a:pPr algn="r" rtl="1"/>
+            <a:pPr algn="l" rtl="0"/>
             <a:r>
               <a:rPr sz="1000" b="0">
                 <a:solidFill>
                   <a:srgbClr val="666666"/>
                 </a:solidFill>
-                <a:latin typeface="Arial"/>
-                <a:cs typeface="Arial"/>
-                <a:ea typeface="Calibri"/>
-              </a:rPr>
-              <a:t>Module 02 — Data &amp; AI Engineering Track  |  الوحدة الثانية</a:t>
-            </a:r>
-          </a:p>
-        </p:txBody>
-      </p:sp>
-      <p:sp>
-        <p:nvSpPr>
-          <p:cNvPr id="6" name="TextBox 5"/>
-          <p:cNvSpPr txBox="1"/>
-          <p:nvPr/>
-        </p:nvSpPr>
-        <p:spPr>
-          <a:xfrm>
-            <a:off x="9601200" y="6400800"/>
-            <a:ext cx="1920240" cy="320040"/>
-          </a:xfrm>
-          <a:prstGeom prst="rect">
-            <a:avLst/>
-          </a:prstGeom>
-          <a:noFill/>
-        </p:spPr>
-        <p:txBody>
-          <a:bodyPr wrap="square">
-            <a:spAutoFit/>
-          </a:bodyPr>
-          <a:lstStyle/>
-          <a:p>
-            <a:pPr algn="l" rtl="0"/>
-            <a:r>
-              <a:rPr sz="1000" b="0">
-                <a:solidFill>
-                  <a:srgbClr val="666666"/>
-                </a:solidFill>
                 <a:latin typeface="Calibri"/>
-                <a:cs typeface="Arial"/>
-                <a:ea typeface="Calibri"/>
-              </a:rPr>
-              <a:t>V12  •  10/13</a:t>
-            </a:r>
-          </a:p>
-        </p:txBody>
-      </p:sp>
-      <p:sp>
-        <p:nvSpPr>
-          <p:cNvPr id="7" name="TextBox 6"/>
-          <p:cNvSpPr txBox="1"/>
-          <p:nvPr/>
-        </p:nvSpPr>
-        <p:spPr>
-          <a:xfrm>
-            <a:off x="640080" y="6400800"/>
-            <a:ext cx="8686800" cy="320040"/>
-          </a:xfrm>
-          <a:prstGeom prst="rect">
-            <a:avLst/>
-          </a:prstGeom>
-          <a:noFill/>
-        </p:spPr>
-        <p:txBody>
-          <a:bodyPr wrap="square">
-            <a:spAutoFit/>
-          </a:bodyPr>
-          <a:lstStyle/>
-          <a:p>
-            <a:pPr algn="r" rtl="1"/>
-            <a:r>
-              <a:rPr sz="1000" b="0">
-                <a:solidFill>
-                  <a:srgbClr val="666666"/>
-                </a:solidFill>
-                <a:latin typeface="Arial"/>
-                <a:cs typeface="Arial"/>
-                <a:ea typeface="Calibri"/>
-              </a:rPr>
-              <a:t>Module 02 — Data &amp; AI Engineering Track  |  الوحدة الثانية</a:t>
-            </a:r>
-          </a:p>
-        </p:txBody>
-      </p:sp>
-      <p:sp>
-        <p:nvSpPr>
-          <p:cNvPr id="8" name="TextBox 7"/>
-          <p:cNvSpPr txBox="1"/>
-          <p:nvPr/>
-        </p:nvSpPr>
-        <p:spPr>
-          <a:xfrm>
-            <a:off x="9601200" y="6400800"/>
-            <a:ext cx="1920240" cy="320040"/>
-          </a:xfrm>
-          <a:prstGeom prst="rect">
-            <a:avLst/>
-          </a:prstGeom>
-          <a:noFill/>
-        </p:spPr>
-        <p:txBody>
-          <a:bodyPr wrap="square">
-            <a:spAutoFit/>
-          </a:bodyPr>
-          <a:lstStyle/>
-          <a:p>
-            <a:pPr algn="l" rtl="0"/>
-            <a:r>
-              <a:rPr sz="1000" b="0">
-                <a:solidFill>
-                  <a:srgbClr val="666666"/>
-                </a:solidFill>
-                <a:latin typeface="Calibri"/>
-                <a:cs typeface="Arial"/>
-                <a:ea typeface="Calibri"/>
-              </a:rPr>
-              <a:t>12_  •  12/12</a:t>
-            </a:r>
-          </a:p>
-        </p:txBody>
-      </p:sp>
-      <p:sp>
-        <p:nvSpPr>
-          <p:cNvPr id="9" name="TextBox 8"/>
-          <p:cNvSpPr txBox="1"/>
-          <p:nvPr/>
-        </p:nvSpPr>
-        <p:spPr>
-          <a:xfrm>
-            <a:off x="640080" y="6400800"/>
-            <a:ext cx="8686800" cy="320040"/>
-          </a:xfrm>
-          <a:prstGeom prst="rect">
-            <a:avLst/>
-          </a:prstGeom>
-          <a:noFill/>
-        </p:spPr>
-        <p:txBody>
-          <a:bodyPr wrap="square">
-            <a:spAutoFit/>
-          </a:bodyPr>
-          <a:lstStyle/>
-          <a:p>
-            <a:pPr algn="r" rtl="1"/>
-            <a:r>
-              <a:rPr sz="1000" b="0">
-                <a:solidFill>
-                  <a:srgbClr val="666666"/>
-                </a:solidFill>
-                <a:latin typeface="Arial"/>
-                <a:cs typeface="Arial"/>
-                <a:ea typeface="Calibri"/>
-              </a:rPr>
-              <a:t>Module 02 — Data &amp; AI Engineering Track  |  الوحدة الثانية</a:t>
-            </a:r>
-          </a:p>
-        </p:txBody>
-      </p:sp>
-      <p:sp>
-        <p:nvSpPr>
-          <p:cNvPr id="10" name="TextBox 9"/>
-          <p:cNvSpPr txBox="1"/>
-          <p:nvPr/>
-        </p:nvSpPr>
-        <p:spPr>
-          <a:xfrm>
-            <a:off x="9601200" y="6400800"/>
-            <a:ext cx="1920240" cy="320040"/>
-          </a:xfrm>
-          <a:prstGeom prst="rect">
-            <a:avLst/>
-          </a:prstGeom>
-          <a:noFill/>
-        </p:spPr>
-        <p:txBody>
-          <a:bodyPr wrap="square">
-            <a:spAutoFit/>
-          </a:bodyPr>
-          <a:lstStyle/>
-          <a:p>
-            <a:pPr algn="l" rtl="0"/>
-            <a:r>
-              <a:rPr sz="1000" b="0">
-                <a:solidFill>
-                  <a:srgbClr val="666666"/>
-                </a:solidFill>
-                <a:latin typeface="Calibri"/>
-                <a:cs typeface="Arial"/>
-                <a:ea typeface="Calibri"/>
-              </a:rPr>
-              <a:t>12_  •  12/12</a:t>
+              </a:rPr>
+              <a:t>V12  •  8/12</a:t>
             </a:r>
           </a:p>
         </p:txBody>
@@ -5013,8 +4859,6 @@
                   <a:srgbClr val="1F3B5C"/>
                 </a:solidFill>
                 <a:latin typeface="Arial"/>
-                <a:cs typeface="Arial"/>
-                <a:ea typeface="Calibri"/>
               </a:rPr>
               <a:t>أجندة العرض / Agenda</a:t>
             </a:r>
@@ -5057,14 +4901,12 @@
                   <a:srgbClr val="333333"/>
                 </a:solidFill>
                 <a:latin typeface="Arial"/>
-                <a:cs typeface="Arial"/>
-                <a:ea typeface="Calibri"/>
               </a:rPr>
               <a:t>• V12 — أساسيات MLOps + تمهيد للمختبر</a:t>
             </a:r>
           </a:p>
           <a:p>
-            <a:pPr algn="r" rtl="0">
+            <a:pPr algn="l" rtl="0">
               <a:spcBef>
                 <a:spcPts val="200"/>
               </a:spcBef>
@@ -5078,8 +4920,6 @@
                   <a:srgbClr val="666666"/>
                 </a:solidFill>
                 <a:latin typeface="Calibri"/>
-                <a:cs typeface="Arial"/>
-                <a:ea typeface="Calibri"/>
               </a:rPr>
               <a:t>• V12 — MLOps Fundamentals + Lab Introduction</a:t>
             </a:r>
@@ -5099,8 +4939,6 @@
                   <a:srgbClr val="333333"/>
                 </a:solidFill>
                 <a:latin typeface="Arial"/>
-                <a:cs typeface="Arial"/>
-                <a:ea typeface="Calibri"/>
               </a:rPr>
               <a:t>• MLOps والأدوات / MLOps &amp; Tools</a:t>
             </a:r>
@@ -5120,8 +4958,6 @@
                   <a:srgbClr val="333333"/>
                 </a:solidFill>
                 <a:latin typeface="Arial"/>
-                <a:cs typeface="Arial"/>
-                <a:ea typeface="Calibri"/>
               </a:rPr>
               <a:t>• تمييز المفاهيم / Concept Distinctions</a:t>
             </a:r>
@@ -5141,8 +4977,6 @@
                   <a:srgbClr val="333333"/>
                 </a:solidFill>
                 <a:latin typeface="Arial"/>
-                <a:cs typeface="Arial"/>
-                <a:ea typeface="Calibri"/>
               </a:rPr>
               <a:t>• RAG الوكيلي / Agentic RAG</a:t>
             </a:r>
@@ -5162,8 +4996,6 @@
                   <a:srgbClr val="333333"/>
                 </a:solidFill>
                 <a:latin typeface="Arial"/>
-                <a:cs typeface="Arial"/>
-                <a:ea typeface="Calibri"/>
               </a:rPr>
               <a:t>• التكلفة والأداء عمليًا / Practical Cost &amp; Performance</a:t>
             </a:r>
@@ -5183,8 +5015,6 @@
                   <a:srgbClr val="333333"/>
                 </a:solidFill>
                 <a:latin typeface="Arial"/>
-                <a:cs typeface="Arial"/>
-                <a:ea typeface="Calibri"/>
               </a:rPr>
               <a:t>• تمهيد للمختبر L03 / Lab Introduction</a:t>
             </a:r>
@@ -5220,8 +5050,6 @@
                   <a:srgbClr val="666666"/>
                 </a:solidFill>
                 <a:latin typeface="Arial"/>
-                <a:cs typeface="Arial"/>
-                <a:ea typeface="Calibri"/>
               </a:rPr>
               <a:t>Module 02 — Data &amp; AI Engineering Track  |  الوحدة الثانية</a:t>
             </a:r>
@@ -5257,158 +5085,8 @@
                   <a:srgbClr val="666666"/>
                 </a:solidFill>
                 <a:latin typeface="Calibri"/>
-                <a:cs typeface="Arial"/>
-                <a:ea typeface="Calibri"/>
-              </a:rPr>
-              <a:t>V12  •  2/13</a:t>
-            </a:r>
-          </a:p>
-        </p:txBody>
-      </p:sp>
-      <p:sp>
-        <p:nvSpPr>
-          <p:cNvPr id="7" name="TextBox 6"/>
-          <p:cNvSpPr txBox="1"/>
-          <p:nvPr/>
-        </p:nvSpPr>
-        <p:spPr>
-          <a:xfrm>
-            <a:off x="640080" y="6400800"/>
-            <a:ext cx="8686800" cy="320040"/>
-          </a:xfrm>
-          <a:prstGeom prst="rect">
-            <a:avLst/>
-          </a:prstGeom>
-          <a:noFill/>
-        </p:spPr>
-        <p:txBody>
-          <a:bodyPr wrap="square">
-            <a:spAutoFit/>
-          </a:bodyPr>
-          <a:lstStyle/>
-          <a:p>
-            <a:pPr algn="r" rtl="1"/>
-            <a:r>
-              <a:rPr sz="1000" b="0">
-                <a:solidFill>
-                  <a:srgbClr val="666666"/>
-                </a:solidFill>
-                <a:latin typeface="Arial"/>
-                <a:cs typeface="Arial"/>
-                <a:ea typeface="Calibri"/>
-              </a:rPr>
-              <a:t>Module 02 — Data &amp; AI Engineering Track  |  الوحدة الثانية</a:t>
-            </a:r>
-          </a:p>
-        </p:txBody>
-      </p:sp>
-      <p:sp>
-        <p:nvSpPr>
-          <p:cNvPr id="8" name="TextBox 7"/>
-          <p:cNvSpPr txBox="1"/>
-          <p:nvPr/>
-        </p:nvSpPr>
-        <p:spPr>
-          <a:xfrm>
-            <a:off x="9601200" y="6400800"/>
-            <a:ext cx="1920240" cy="320040"/>
-          </a:xfrm>
-          <a:prstGeom prst="rect">
-            <a:avLst/>
-          </a:prstGeom>
-          <a:noFill/>
-        </p:spPr>
-        <p:txBody>
-          <a:bodyPr wrap="square">
-            <a:spAutoFit/>
-          </a:bodyPr>
-          <a:lstStyle/>
-          <a:p>
-            <a:pPr algn="l" rtl="0"/>
-            <a:r>
-              <a:rPr sz="1000" b="0">
-                <a:solidFill>
-                  <a:srgbClr val="666666"/>
-                </a:solidFill>
-                <a:latin typeface="Calibri"/>
-                <a:cs typeface="Arial"/>
-                <a:ea typeface="Calibri"/>
-              </a:rPr>
-              <a:t>12_  •  2/12</a:t>
-            </a:r>
-          </a:p>
-        </p:txBody>
-      </p:sp>
-      <p:sp>
-        <p:nvSpPr>
-          <p:cNvPr id="9" name="TextBox 8"/>
-          <p:cNvSpPr txBox="1"/>
-          <p:nvPr/>
-        </p:nvSpPr>
-        <p:spPr>
-          <a:xfrm>
-            <a:off x="640080" y="6400800"/>
-            <a:ext cx="8686800" cy="320040"/>
-          </a:xfrm>
-          <a:prstGeom prst="rect">
-            <a:avLst/>
-          </a:prstGeom>
-          <a:noFill/>
-        </p:spPr>
-        <p:txBody>
-          <a:bodyPr wrap="square">
-            <a:spAutoFit/>
-          </a:bodyPr>
-          <a:lstStyle/>
-          <a:p>
-            <a:pPr algn="r" rtl="1"/>
-            <a:r>
-              <a:rPr sz="1000" b="0">
-                <a:solidFill>
-                  <a:srgbClr val="666666"/>
-                </a:solidFill>
-                <a:latin typeface="Arial"/>
-                <a:cs typeface="Arial"/>
-                <a:ea typeface="Calibri"/>
-              </a:rPr>
-              <a:t>Module 02 — Data &amp; AI Engineering Track  |  الوحدة الثانية</a:t>
-            </a:r>
-          </a:p>
-        </p:txBody>
-      </p:sp>
-      <p:sp>
-        <p:nvSpPr>
-          <p:cNvPr id="10" name="TextBox 9"/>
-          <p:cNvSpPr txBox="1"/>
-          <p:nvPr/>
-        </p:nvSpPr>
-        <p:spPr>
-          <a:xfrm>
-            <a:off x="9601200" y="6400800"/>
-            <a:ext cx="1920240" cy="320040"/>
-          </a:xfrm>
-          <a:prstGeom prst="rect">
-            <a:avLst/>
-          </a:prstGeom>
-          <a:noFill/>
-        </p:spPr>
-        <p:txBody>
-          <a:bodyPr wrap="square">
-            <a:spAutoFit/>
-          </a:bodyPr>
-          <a:lstStyle/>
-          <a:p>
-            <a:pPr algn="l" rtl="0"/>
-            <a:r>
-              <a:rPr sz="1000" b="0">
-                <a:solidFill>
-                  <a:srgbClr val="666666"/>
-                </a:solidFill>
-                <a:latin typeface="Calibri"/>
-                <a:cs typeface="Arial"/>
-                <a:ea typeface="Calibri"/>
-              </a:rPr>
-              <a:t>12_  •  2/12</a:t>
+              </a:rPr>
+              <a:t>V12  •  2/12</a:t>
             </a:r>
           </a:p>
         </p:txBody>
@@ -5514,8 +5192,6 @@
                   <a:srgbClr val="1F3B5C"/>
                 </a:solidFill>
                 <a:latin typeface="Arial"/>
-                <a:cs typeface="Arial"/>
-                <a:ea typeface="Calibri"/>
               </a:rPr>
               <a:t>MLOps والأدوات / MLOps &amp; Tools</a:t>
             </a:r>
@@ -5558,14 +5234,12 @@
                   <a:srgbClr val="333333"/>
                 </a:solidFill>
                 <a:latin typeface="Arial"/>
-                <a:cs typeface="Arial"/>
-                <a:ea typeface="Calibri"/>
               </a:rPr>
               <a:t>• MLflow لتتبع التجارب والنماذج، Kubeflow لأتمتة الخطوط، DVC لإصدارات البيانات.</a:t>
             </a:r>
           </a:p>
           <a:p>
-            <a:pPr algn="r" rtl="0">
+            <a:pPr algn="l" rtl="0">
               <a:spcBef>
                 <a:spcPts val="200"/>
               </a:spcBef>
@@ -5579,8 +5253,6 @@
                   <a:srgbClr val="666666"/>
                 </a:solidFill>
                 <a:latin typeface="Calibri"/>
-                <a:cs typeface="Arial"/>
-                <a:ea typeface="Calibri"/>
               </a:rPr>
               <a:t>• MLflow for tracking, Kubeflow for pipeline automation, DVC for data versioning.</a:t>
             </a:r>
@@ -5616,8 +5288,6 @@
                   <a:srgbClr val="666666"/>
                 </a:solidFill>
                 <a:latin typeface="Arial"/>
-                <a:cs typeface="Arial"/>
-                <a:ea typeface="Calibri"/>
               </a:rPr>
               <a:t>Module 02 — Data &amp; AI Engineering Track  |  الوحدة الثانية</a:t>
             </a:r>
@@ -5653,158 +5323,8 @@
                   <a:srgbClr val="666666"/>
                 </a:solidFill>
                 <a:latin typeface="Calibri"/>
-                <a:cs typeface="Arial"/>
-                <a:ea typeface="Calibri"/>
-              </a:rPr>
-              <a:t>V12  •  3/13</a:t>
-            </a:r>
-          </a:p>
-        </p:txBody>
-      </p:sp>
-      <p:sp>
-        <p:nvSpPr>
-          <p:cNvPr id="7" name="TextBox 6"/>
-          <p:cNvSpPr txBox="1"/>
-          <p:nvPr/>
-        </p:nvSpPr>
-        <p:spPr>
-          <a:xfrm>
-            <a:off x="640080" y="6400800"/>
-            <a:ext cx="8686800" cy="320040"/>
-          </a:xfrm>
-          <a:prstGeom prst="rect">
-            <a:avLst/>
-          </a:prstGeom>
-          <a:noFill/>
-        </p:spPr>
-        <p:txBody>
-          <a:bodyPr wrap="square">
-            <a:spAutoFit/>
-          </a:bodyPr>
-          <a:lstStyle/>
-          <a:p>
-            <a:pPr algn="r" rtl="1"/>
-            <a:r>
-              <a:rPr sz="1000" b="0">
-                <a:solidFill>
-                  <a:srgbClr val="666666"/>
-                </a:solidFill>
-                <a:latin typeface="Arial"/>
-                <a:cs typeface="Arial"/>
-                <a:ea typeface="Calibri"/>
-              </a:rPr>
-              <a:t>Module 02 — Data &amp; AI Engineering Track  |  الوحدة الثانية</a:t>
-            </a:r>
-          </a:p>
-        </p:txBody>
-      </p:sp>
-      <p:sp>
-        <p:nvSpPr>
-          <p:cNvPr id="8" name="TextBox 7"/>
-          <p:cNvSpPr txBox="1"/>
-          <p:nvPr/>
-        </p:nvSpPr>
-        <p:spPr>
-          <a:xfrm>
-            <a:off x="9601200" y="6400800"/>
-            <a:ext cx="1920240" cy="320040"/>
-          </a:xfrm>
-          <a:prstGeom prst="rect">
-            <a:avLst/>
-          </a:prstGeom>
-          <a:noFill/>
-        </p:spPr>
-        <p:txBody>
-          <a:bodyPr wrap="square">
-            <a:spAutoFit/>
-          </a:bodyPr>
-          <a:lstStyle/>
-          <a:p>
-            <a:pPr algn="l" rtl="0"/>
-            <a:r>
-              <a:rPr sz="1000" b="0">
-                <a:solidFill>
-                  <a:srgbClr val="666666"/>
-                </a:solidFill>
-                <a:latin typeface="Calibri"/>
-                <a:cs typeface="Arial"/>
-                <a:ea typeface="Calibri"/>
-              </a:rPr>
-              <a:t>12_  •  3/12</a:t>
-            </a:r>
-          </a:p>
-        </p:txBody>
-      </p:sp>
-      <p:sp>
-        <p:nvSpPr>
-          <p:cNvPr id="9" name="TextBox 8"/>
-          <p:cNvSpPr txBox="1"/>
-          <p:nvPr/>
-        </p:nvSpPr>
-        <p:spPr>
-          <a:xfrm>
-            <a:off x="640080" y="6400800"/>
-            <a:ext cx="8686800" cy="320040"/>
-          </a:xfrm>
-          <a:prstGeom prst="rect">
-            <a:avLst/>
-          </a:prstGeom>
-          <a:noFill/>
-        </p:spPr>
-        <p:txBody>
-          <a:bodyPr wrap="square">
-            <a:spAutoFit/>
-          </a:bodyPr>
-          <a:lstStyle/>
-          <a:p>
-            <a:pPr algn="r" rtl="1"/>
-            <a:r>
-              <a:rPr sz="1000" b="0">
-                <a:solidFill>
-                  <a:srgbClr val="666666"/>
-                </a:solidFill>
-                <a:latin typeface="Arial"/>
-                <a:cs typeface="Arial"/>
-                <a:ea typeface="Calibri"/>
-              </a:rPr>
-              <a:t>Module 02 — Data &amp; AI Engineering Track  |  الوحدة الثانية</a:t>
-            </a:r>
-          </a:p>
-        </p:txBody>
-      </p:sp>
-      <p:sp>
-        <p:nvSpPr>
-          <p:cNvPr id="10" name="TextBox 9"/>
-          <p:cNvSpPr txBox="1"/>
-          <p:nvPr/>
-        </p:nvSpPr>
-        <p:spPr>
-          <a:xfrm>
-            <a:off x="9601200" y="6400800"/>
-            <a:ext cx="1920240" cy="320040"/>
-          </a:xfrm>
-          <a:prstGeom prst="rect">
-            <a:avLst/>
-          </a:prstGeom>
-          <a:noFill/>
-        </p:spPr>
-        <p:txBody>
-          <a:bodyPr wrap="square">
-            <a:spAutoFit/>
-          </a:bodyPr>
-          <a:lstStyle/>
-          <a:p>
-            <a:pPr algn="l" rtl="0"/>
-            <a:r>
-              <a:rPr sz="1000" b="0">
-                <a:solidFill>
-                  <a:srgbClr val="666666"/>
-                </a:solidFill>
-                <a:latin typeface="Calibri"/>
-                <a:cs typeface="Arial"/>
-                <a:ea typeface="Calibri"/>
-              </a:rPr>
-              <a:t>12_  •  3/12</a:t>
+              </a:rPr>
+              <a:t>V12  •  3/12</a:t>
             </a:r>
           </a:p>
         </p:txBody>
@@ -5910,8 +5430,6 @@
                   <a:srgbClr val="1F3B5C"/>
                 </a:solidFill>
                 <a:latin typeface="Arial"/>
-                <a:cs typeface="Arial"/>
-                <a:ea typeface="Calibri"/>
               </a:rPr>
               <a:t>تمييز المفاهيم / Concept Distinctions</a:t>
             </a:r>
@@ -5954,14 +5472,12 @@
                   <a:srgbClr val="333333"/>
                 </a:solidFill>
                 <a:latin typeface="Arial"/>
-                <a:cs typeface="Arial"/>
-                <a:ea typeface="Calibri"/>
               </a:rPr>
               <a:t>• LLM: يرمّز النص ويتنبأ بالرموز التالية. الذكاء التوليدي: يولّد محتوى جديدًا (نص/صورة/صوت).</a:t>
             </a:r>
           </a:p>
           <a:p>
-            <a:pPr algn="r" rtl="0">
+            <a:pPr algn="l" rtl="0">
               <a:spcBef>
                 <a:spcPts val="200"/>
               </a:spcBef>
@@ -5975,8 +5491,6 @@
                   <a:srgbClr val="666666"/>
                 </a:solidFill>
                 <a:latin typeface="Calibri"/>
-                <a:cs typeface="Arial"/>
-                <a:ea typeface="Calibri"/>
               </a:rPr>
               <a:t>• LLM: predicts next tokens. Generative AI: generates new content (text/image/audio).</a:t>
             </a:r>
@@ -5996,14 +5510,12 @@
                   <a:srgbClr val="333333"/>
                 </a:solidFill>
                 <a:latin typeface="Arial"/>
-                <a:cs typeface="Arial"/>
-                <a:ea typeface="Calibri"/>
               </a:rPr>
               <a:t>• الوكلاء: يكشفون النية ويستدعون الأدوات. الأنظمة الوكيلة: تخطيط ذاتي وتنفيذ متعدد الخطوات مع تقييم للنتائج.</a:t>
             </a:r>
           </a:p>
           <a:p>
-            <a:pPr algn="r" rtl="0">
+            <a:pPr algn="l" rtl="0">
               <a:spcBef>
                 <a:spcPts val="200"/>
               </a:spcBef>
@@ -6017,8 +5529,6 @@
                   <a:srgbClr val="666666"/>
                 </a:solidFill>
                 <a:latin typeface="Calibri"/>
-                <a:cs typeface="Arial"/>
-                <a:ea typeface="Calibri"/>
               </a:rPr>
               <a:t>• Agents: detect intent and call tools. Agentic AI: self-directed multi-step planning with outcome evaluation.</a:t>
             </a:r>
@@ -6054,8 +5564,6 @@
                   <a:srgbClr val="666666"/>
                 </a:solidFill>
                 <a:latin typeface="Arial"/>
-                <a:cs typeface="Arial"/>
-                <a:ea typeface="Calibri"/>
               </a:rPr>
               <a:t>Module 02 — Data &amp; AI Engineering Track  |  الوحدة الثانية</a:t>
             </a:r>
@@ -6091,158 +5599,8 @@
                   <a:srgbClr val="666666"/>
                 </a:solidFill>
                 <a:latin typeface="Calibri"/>
-                <a:cs typeface="Arial"/>
-                <a:ea typeface="Calibri"/>
-              </a:rPr>
-              <a:t>V12  •  4/13</a:t>
-            </a:r>
-          </a:p>
-        </p:txBody>
-      </p:sp>
-      <p:sp>
-        <p:nvSpPr>
-          <p:cNvPr id="7" name="TextBox 6"/>
-          <p:cNvSpPr txBox="1"/>
-          <p:nvPr/>
-        </p:nvSpPr>
-        <p:spPr>
-          <a:xfrm>
-            <a:off x="640080" y="6400800"/>
-            <a:ext cx="8686800" cy="320040"/>
-          </a:xfrm>
-          <a:prstGeom prst="rect">
-            <a:avLst/>
-          </a:prstGeom>
-          <a:noFill/>
-        </p:spPr>
-        <p:txBody>
-          <a:bodyPr wrap="square">
-            <a:spAutoFit/>
-          </a:bodyPr>
-          <a:lstStyle/>
-          <a:p>
-            <a:pPr algn="r" rtl="1"/>
-            <a:r>
-              <a:rPr sz="1000" b="0">
-                <a:solidFill>
-                  <a:srgbClr val="666666"/>
-                </a:solidFill>
-                <a:latin typeface="Arial"/>
-                <a:cs typeface="Arial"/>
-                <a:ea typeface="Calibri"/>
-              </a:rPr>
-              <a:t>Module 02 — Data &amp; AI Engineering Track  |  الوحدة الثانية</a:t>
-            </a:r>
-          </a:p>
-        </p:txBody>
-      </p:sp>
-      <p:sp>
-        <p:nvSpPr>
-          <p:cNvPr id="8" name="TextBox 7"/>
-          <p:cNvSpPr txBox="1"/>
-          <p:nvPr/>
-        </p:nvSpPr>
-        <p:spPr>
-          <a:xfrm>
-            <a:off x="9601200" y="6400800"/>
-            <a:ext cx="1920240" cy="320040"/>
-          </a:xfrm>
-          <a:prstGeom prst="rect">
-            <a:avLst/>
-          </a:prstGeom>
-          <a:noFill/>
-        </p:spPr>
-        <p:txBody>
-          <a:bodyPr wrap="square">
-            <a:spAutoFit/>
-          </a:bodyPr>
-          <a:lstStyle/>
-          <a:p>
-            <a:pPr algn="l" rtl="0"/>
-            <a:r>
-              <a:rPr sz="1000" b="0">
-                <a:solidFill>
-                  <a:srgbClr val="666666"/>
-                </a:solidFill>
-                <a:latin typeface="Calibri"/>
-                <a:cs typeface="Arial"/>
-                <a:ea typeface="Calibri"/>
-              </a:rPr>
-              <a:t>12_  •  4/12</a:t>
-            </a:r>
-          </a:p>
-        </p:txBody>
-      </p:sp>
-      <p:sp>
-        <p:nvSpPr>
-          <p:cNvPr id="9" name="TextBox 8"/>
-          <p:cNvSpPr txBox="1"/>
-          <p:nvPr/>
-        </p:nvSpPr>
-        <p:spPr>
-          <a:xfrm>
-            <a:off x="640080" y="6400800"/>
-            <a:ext cx="8686800" cy="320040"/>
-          </a:xfrm>
-          <a:prstGeom prst="rect">
-            <a:avLst/>
-          </a:prstGeom>
-          <a:noFill/>
-        </p:spPr>
-        <p:txBody>
-          <a:bodyPr wrap="square">
-            <a:spAutoFit/>
-          </a:bodyPr>
-          <a:lstStyle/>
-          <a:p>
-            <a:pPr algn="r" rtl="1"/>
-            <a:r>
-              <a:rPr sz="1000" b="0">
-                <a:solidFill>
-                  <a:srgbClr val="666666"/>
-                </a:solidFill>
-                <a:latin typeface="Arial"/>
-                <a:cs typeface="Arial"/>
-                <a:ea typeface="Calibri"/>
-              </a:rPr>
-              <a:t>Module 02 — Data &amp; AI Engineering Track  |  الوحدة الثانية</a:t>
-            </a:r>
-          </a:p>
-        </p:txBody>
-      </p:sp>
-      <p:sp>
-        <p:nvSpPr>
-          <p:cNvPr id="10" name="TextBox 9"/>
-          <p:cNvSpPr txBox="1"/>
-          <p:nvPr/>
-        </p:nvSpPr>
-        <p:spPr>
-          <a:xfrm>
-            <a:off x="9601200" y="6400800"/>
-            <a:ext cx="1920240" cy="320040"/>
-          </a:xfrm>
-          <a:prstGeom prst="rect">
-            <a:avLst/>
-          </a:prstGeom>
-          <a:noFill/>
-        </p:spPr>
-        <p:txBody>
-          <a:bodyPr wrap="square">
-            <a:spAutoFit/>
-          </a:bodyPr>
-          <a:lstStyle/>
-          <a:p>
-            <a:pPr algn="l" rtl="0"/>
-            <a:r>
-              <a:rPr sz="1000" b="0">
-                <a:solidFill>
-                  <a:srgbClr val="666666"/>
-                </a:solidFill>
-                <a:latin typeface="Calibri"/>
-                <a:cs typeface="Arial"/>
-                <a:ea typeface="Calibri"/>
-              </a:rPr>
-              <a:t>12_  •  4/12</a:t>
+              </a:rPr>
+              <a:t>V12  •  4/12</a:t>
             </a:r>
           </a:p>
         </p:txBody>
@@ -6275,59 +5633,22 @@
       <p:grpSpPr/>
       <p:sp>
         <p:nvSpPr>
-          <p:cNvPr id="2" name="TextBox 1"/>
-          <p:cNvSpPr txBox="1"/>
-          <p:nvPr/>
-        </p:nvSpPr>
-        <p:spPr>
-          <a:xfrm>
-            <a:off x="640080" y="137160"/>
-            <a:ext cx="10972800" cy="640080"/>
-          </a:xfrm>
-          <a:prstGeom prst="rect">
-            <a:avLst/>
-          </a:prstGeom>
-          <a:noFill/>
-        </p:spPr>
-        <p:txBody>
-          <a:bodyPr wrap="none">
-            <a:spAutoFit/>
-          </a:bodyPr>
-          <a:lstStyle/>
-          <a:p>
-            <a:pPr algn="r" rtl="1"/>
-            <a:r>
-              <a:rPr sz="3000" b="1">
-                <a:solidFill>
-                  <a:srgbClr val="1F3B5C"/>
-                </a:solidFill>
-                <a:latin typeface="Arial"/>
-                <a:cs typeface="Arial"/>
-                <a:ea typeface="Calibri"/>
-              </a:rPr>
-              <a:t>من LLM إلى الأنظمة الوكيلة / From LLM to Agentic AI</a:t>
-            </a:r>
-          </a:p>
-        </p:txBody>
-      </p:sp>
-      <p:sp>
-        <p:nvSpPr>
-          <p:cNvPr id="3" name="Rounded Rectangle 2"/>
+          <p:cNvPr id="2" name="Rectangle 1"/>
           <p:cNvSpPr/>
           <p:nvPr/>
         </p:nvSpPr>
         <p:spPr>
           <a:xfrm>
-            <a:off x="640080" y="1645920"/>
-            <a:ext cx="2377440" cy="914400"/>
-          </a:xfrm>
-          <a:prstGeom prst="roundRect">
+            <a:off x="0" y="0"/>
+            <a:ext cx="12191695" cy="1005840"/>
+          </a:xfrm>
+          <a:prstGeom prst="rect">
             <a:avLst/>
           </a:prstGeom>
           <a:solidFill>
-            <a:srgbClr val="EDEDED"/>
+            <a:srgbClr val="FFFFFF"/>
           </a:solidFill>
-          <a:ln w="12700">
+          <a:ln w="25400">
             <a:solidFill>
               <a:srgbClr val="1F4E79"/>
             </a:solidFill>
@@ -6349,132 +5670,6 @@
           </a:fontRef>
         </p:style>
         <p:txBody>
-          <a:bodyPr rtlCol="0" anchor="ctr" wrap="square"/>
-          <a:lstStyle/>
-          <a:p>
-            <a:pPr algn="ctr" rtl="0"/>
-            <a:r>
-              <a:rPr sz="1800" b="1">
-                <a:solidFill>
-                  <a:srgbClr val="333333"/>
-                </a:solidFill>
-                <a:latin typeface="Calibri"/>
-                <a:cs typeface="Arial"/>
-                <a:ea typeface="Calibri"/>
-              </a:rPr>
-              <a:t>LLM</a:t>
-            </a:r>
-          </a:p>
-        </p:txBody>
-      </p:sp>
-      <p:sp>
-        <p:nvSpPr>
-          <p:cNvPr id="4" name="Rounded Rectangle 3"/>
-          <p:cNvSpPr/>
-          <p:nvPr/>
-        </p:nvSpPr>
-        <p:spPr>
-          <a:xfrm>
-            <a:off x="640080" y="2743200"/>
-            <a:ext cx="2377440" cy="1463040"/>
-          </a:xfrm>
-          <a:prstGeom prst="roundRect">
-            <a:avLst/>
-          </a:prstGeom>
-          <a:solidFill>
-            <a:srgbClr val="EDEDED"/>
-          </a:solidFill>
-          <a:ln w="12700">
-            <a:solidFill>
-              <a:srgbClr val="1F4E79"/>
-            </a:solidFill>
-          </a:ln>
-          <a:effectLst/>
-        </p:spPr>
-        <p:style>
-          <a:lnRef idx="1">
-            <a:schemeClr val="accent1"/>
-          </a:lnRef>
-          <a:fillRef idx="3">
-            <a:schemeClr val="accent1"/>
-          </a:fillRef>
-          <a:effectRef idx="2">
-            <a:schemeClr val="accent1"/>
-          </a:effectRef>
-          <a:fontRef idx="minor">
-            <a:schemeClr val="lt1"/>
-          </a:fontRef>
-        </p:style>
-        <p:txBody>
-          <a:bodyPr rtlCol="0" anchor="ctr" wrap="square"/>
-          <a:lstStyle/>
-          <a:p>
-            <a:pPr algn="ctr" rtl="1"/>
-            <a:r>
-              <a:rPr sz="1300" b="1">
-                <a:solidFill>
-                  <a:srgbClr val="333333"/>
-                </a:solidFill>
-                <a:latin typeface="Arial"/>
-                <a:cs typeface="Arial"/>
-                <a:ea typeface="Calibri"/>
-              </a:rPr>
-              <a:t>تنبؤ بالرموز التالية</a:t>
-            </a:r>
-          </a:p>
-          <a:p>
-            <a:pPr algn="ctr" rtl="0"/>
-            <a:r>
-              <a:rPr sz="1100">
-                <a:solidFill>
-                  <a:srgbClr val="666666"/>
-                </a:solidFill>
-                <a:latin typeface="Calibri"/>
-                <a:cs typeface="Arial"/>
-                <a:ea typeface="Calibri"/>
-              </a:rPr>
-              <a:t>Predicts next tokens</a:t>
-            </a:r>
-          </a:p>
-        </p:txBody>
-      </p:sp>
-      <p:sp>
-        <p:nvSpPr>
-          <p:cNvPr id="5" name="Left Arrow 4"/>
-          <p:cNvSpPr/>
-          <p:nvPr/>
-        </p:nvSpPr>
-        <p:spPr>
-          <a:xfrm>
-            <a:off x="3072384" y="1965960"/>
-            <a:ext cx="347472" cy="274320"/>
-          </a:xfrm>
-          <a:prstGeom prst="leftArrow">
-            <a:avLst/>
-          </a:prstGeom>
-          <a:solidFill>
-            <a:srgbClr val="1F4E79"/>
-          </a:solidFill>
-          <a:ln>
-            <a:noFill/>
-          </a:ln>
-          <a:effectLst/>
-        </p:spPr>
-        <p:style>
-          <a:lnRef idx="1">
-            <a:schemeClr val="accent1"/>
-          </a:lnRef>
-          <a:fillRef idx="3">
-            <a:schemeClr val="accent1"/>
-          </a:fillRef>
-          <a:effectRef idx="2">
-            <a:schemeClr val="accent1"/>
-          </a:effectRef>
-          <a:fontRef idx="minor">
-            <a:schemeClr val="lt1"/>
-          </a:fontRef>
-        </p:style>
-        <p:txBody>
           <a:bodyPr rtlCol="0" anchor="ctr"/>
           <a:lstStyle/>
           <a:p>
@@ -6484,486 +5679,14 @@
       </p:sp>
       <p:sp>
         <p:nvSpPr>
-          <p:cNvPr id="6" name="Rounded Rectangle 5"/>
-          <p:cNvSpPr/>
-          <p:nvPr/>
-        </p:nvSpPr>
-        <p:spPr>
-          <a:xfrm>
-            <a:off x="3474720" y="1645920"/>
-            <a:ext cx="2377440" cy="914400"/>
-          </a:xfrm>
-          <a:prstGeom prst="roundRect">
-            <a:avLst/>
-          </a:prstGeom>
-          <a:solidFill>
-            <a:srgbClr val="DCE6F1"/>
-          </a:solidFill>
-          <a:ln w="12700">
-            <a:solidFill>
-              <a:srgbClr val="1F4E79"/>
-            </a:solidFill>
-          </a:ln>
-          <a:effectLst/>
-        </p:spPr>
-        <p:style>
-          <a:lnRef idx="1">
-            <a:schemeClr val="accent1"/>
-          </a:lnRef>
-          <a:fillRef idx="3">
-            <a:schemeClr val="accent1"/>
-          </a:fillRef>
-          <a:effectRef idx="2">
-            <a:schemeClr val="accent1"/>
-          </a:effectRef>
-          <a:fontRef idx="minor">
-            <a:schemeClr val="lt1"/>
-          </a:fontRef>
-        </p:style>
-        <p:txBody>
-          <a:bodyPr rtlCol="0" anchor="ctr" wrap="square"/>
-          <a:lstStyle/>
-          <a:p>
-            <a:pPr algn="ctr" rtl="1"/>
-            <a:r>
-              <a:rPr sz="1800" b="1">
-                <a:solidFill>
-                  <a:srgbClr val="333333"/>
-                </a:solidFill>
-                <a:latin typeface="Arial"/>
-                <a:cs typeface="Arial"/>
-                <a:ea typeface="Calibri"/>
-              </a:rPr>
-              <a:t>الذكاء التوليدي</a:t>
-            </a:r>
-          </a:p>
-        </p:txBody>
-      </p:sp>
-      <p:sp>
-        <p:nvSpPr>
-          <p:cNvPr id="7" name="Rounded Rectangle 6"/>
-          <p:cNvSpPr/>
-          <p:nvPr/>
-        </p:nvSpPr>
-        <p:spPr>
-          <a:xfrm>
-            <a:off x="3474720" y="2743200"/>
-            <a:ext cx="2377440" cy="1463040"/>
-          </a:xfrm>
-          <a:prstGeom prst="roundRect">
-            <a:avLst/>
-          </a:prstGeom>
-          <a:solidFill>
-            <a:srgbClr val="EDEDED"/>
-          </a:solidFill>
-          <a:ln w="12700">
-            <a:solidFill>
-              <a:srgbClr val="1F4E79"/>
-            </a:solidFill>
-          </a:ln>
-          <a:effectLst/>
-        </p:spPr>
-        <p:style>
-          <a:lnRef idx="1">
-            <a:schemeClr val="accent1"/>
-          </a:lnRef>
-          <a:fillRef idx="3">
-            <a:schemeClr val="accent1"/>
-          </a:fillRef>
-          <a:effectRef idx="2">
-            <a:schemeClr val="accent1"/>
-          </a:effectRef>
-          <a:fontRef idx="minor">
-            <a:schemeClr val="lt1"/>
-          </a:fontRef>
-        </p:style>
-        <p:txBody>
-          <a:bodyPr rtlCol="0" anchor="ctr" wrap="square"/>
-          <a:lstStyle/>
-          <a:p>
-            <a:pPr algn="ctr" rtl="1"/>
-            <a:r>
-              <a:rPr sz="1300" b="1">
-                <a:solidFill>
-                  <a:srgbClr val="333333"/>
-                </a:solidFill>
-                <a:latin typeface="Arial"/>
-                <a:cs typeface="Arial"/>
-                <a:ea typeface="Calibri"/>
-              </a:rPr>
-              <a:t>يولّد محتوى جديدًا</a:t>
-            </a:r>
-          </a:p>
-          <a:p>
-            <a:pPr algn="ctr" rtl="0"/>
-            <a:r>
-              <a:rPr sz="1100">
-                <a:solidFill>
-                  <a:srgbClr val="666666"/>
-                </a:solidFill>
-                <a:latin typeface="Calibri"/>
-                <a:cs typeface="Arial"/>
-                <a:ea typeface="Calibri"/>
-              </a:rPr>
-              <a:t>Generates new content</a:t>
-            </a:r>
-          </a:p>
-        </p:txBody>
-      </p:sp>
-      <p:sp>
-        <p:nvSpPr>
-          <p:cNvPr id="8" name="Left Arrow 7"/>
-          <p:cNvSpPr/>
-          <p:nvPr/>
-        </p:nvSpPr>
-        <p:spPr>
-          <a:xfrm>
-            <a:off x="5907024" y="1965960"/>
-            <a:ext cx="347472" cy="274320"/>
-          </a:xfrm>
-          <a:prstGeom prst="leftArrow">
-            <a:avLst/>
-          </a:prstGeom>
-          <a:solidFill>
-            <a:srgbClr val="1F4E79"/>
-          </a:solidFill>
-          <a:ln>
-            <a:noFill/>
-          </a:ln>
-          <a:effectLst/>
-        </p:spPr>
-        <p:style>
-          <a:lnRef idx="1">
-            <a:schemeClr val="accent1"/>
-          </a:lnRef>
-          <a:fillRef idx="3">
-            <a:schemeClr val="accent1"/>
-          </a:fillRef>
-          <a:effectRef idx="2">
-            <a:schemeClr val="accent1"/>
-          </a:effectRef>
-          <a:fontRef idx="minor">
-            <a:schemeClr val="lt1"/>
-          </a:fontRef>
-        </p:style>
-        <p:txBody>
-          <a:bodyPr rtlCol="0" anchor="ctr"/>
-          <a:lstStyle/>
-          <a:p>
-            <a:pPr algn="ctr"/>
-          </a:p>
-        </p:txBody>
-      </p:sp>
-      <p:sp>
-        <p:nvSpPr>
-          <p:cNvPr id="9" name="Rounded Rectangle 8"/>
-          <p:cNvSpPr/>
-          <p:nvPr/>
-        </p:nvSpPr>
-        <p:spPr>
-          <a:xfrm>
-            <a:off x="6309360" y="1645920"/>
-            <a:ext cx="2377440" cy="914400"/>
-          </a:xfrm>
-          <a:prstGeom prst="roundRect">
-            <a:avLst/>
-          </a:prstGeom>
-          <a:solidFill>
-            <a:srgbClr val="FDE9D9"/>
-          </a:solidFill>
-          <a:ln w="12700">
-            <a:solidFill>
-              <a:srgbClr val="1F4E79"/>
-            </a:solidFill>
-          </a:ln>
-          <a:effectLst/>
-        </p:spPr>
-        <p:style>
-          <a:lnRef idx="1">
-            <a:schemeClr val="accent1"/>
-          </a:lnRef>
-          <a:fillRef idx="3">
-            <a:schemeClr val="accent1"/>
-          </a:fillRef>
-          <a:effectRef idx="2">
-            <a:schemeClr val="accent1"/>
-          </a:effectRef>
-          <a:fontRef idx="minor">
-            <a:schemeClr val="lt1"/>
-          </a:fontRef>
-        </p:style>
-        <p:txBody>
-          <a:bodyPr rtlCol="0" anchor="ctr" wrap="square"/>
-          <a:lstStyle/>
-          <a:p>
-            <a:pPr algn="ctr" rtl="1"/>
-            <a:r>
-              <a:rPr sz="1800" b="1">
-                <a:solidFill>
-                  <a:srgbClr val="333333"/>
-                </a:solidFill>
-                <a:latin typeface="Arial"/>
-                <a:cs typeface="Arial"/>
-                <a:ea typeface="Calibri"/>
-              </a:rPr>
-              <a:t>الوكلاء Agents</a:t>
-            </a:r>
-          </a:p>
-        </p:txBody>
-      </p:sp>
-      <p:sp>
-        <p:nvSpPr>
-          <p:cNvPr id="10" name="Rounded Rectangle 9"/>
-          <p:cNvSpPr/>
-          <p:nvPr/>
-        </p:nvSpPr>
-        <p:spPr>
-          <a:xfrm>
-            <a:off x="6309360" y="2743200"/>
-            <a:ext cx="2377440" cy="1463040"/>
-          </a:xfrm>
-          <a:prstGeom prst="roundRect">
-            <a:avLst/>
-          </a:prstGeom>
-          <a:solidFill>
-            <a:srgbClr val="EDEDED"/>
-          </a:solidFill>
-          <a:ln w="12700">
-            <a:solidFill>
-              <a:srgbClr val="1F4E79"/>
-            </a:solidFill>
-          </a:ln>
-          <a:effectLst/>
-        </p:spPr>
-        <p:style>
-          <a:lnRef idx="1">
-            <a:schemeClr val="accent1"/>
-          </a:lnRef>
-          <a:fillRef idx="3">
-            <a:schemeClr val="accent1"/>
-          </a:fillRef>
-          <a:effectRef idx="2">
-            <a:schemeClr val="accent1"/>
-          </a:effectRef>
-          <a:fontRef idx="minor">
-            <a:schemeClr val="lt1"/>
-          </a:fontRef>
-        </p:style>
-        <p:txBody>
-          <a:bodyPr rtlCol="0" anchor="ctr" wrap="square"/>
-          <a:lstStyle/>
-          <a:p>
-            <a:pPr algn="ctr" rtl="1"/>
-            <a:r>
-              <a:rPr sz="1300" b="1">
-                <a:solidFill>
-                  <a:srgbClr val="333333"/>
-                </a:solidFill>
-                <a:latin typeface="Arial"/>
-                <a:cs typeface="Arial"/>
-                <a:ea typeface="Calibri"/>
-              </a:rPr>
-              <a:t>نية + استدعاء أدوات</a:t>
-            </a:r>
-          </a:p>
-          <a:p>
-            <a:pPr algn="ctr" rtl="0"/>
-            <a:r>
-              <a:rPr sz="1100">
-                <a:solidFill>
-                  <a:srgbClr val="666666"/>
-                </a:solidFill>
-                <a:latin typeface="Calibri"/>
-                <a:cs typeface="Arial"/>
-                <a:ea typeface="Calibri"/>
-              </a:rPr>
-              <a:t>Intent + tool calls</a:t>
-            </a:r>
-          </a:p>
-        </p:txBody>
-      </p:sp>
-      <p:sp>
-        <p:nvSpPr>
-          <p:cNvPr id="11" name="Left Arrow 10"/>
-          <p:cNvSpPr/>
-          <p:nvPr/>
-        </p:nvSpPr>
-        <p:spPr>
-          <a:xfrm>
-            <a:off x="8741664" y="1965960"/>
-            <a:ext cx="347472" cy="274320"/>
-          </a:xfrm>
-          <a:prstGeom prst="leftArrow">
-            <a:avLst/>
-          </a:prstGeom>
-          <a:solidFill>
-            <a:srgbClr val="1F4E79"/>
-          </a:solidFill>
-          <a:ln>
-            <a:noFill/>
-          </a:ln>
-          <a:effectLst/>
-        </p:spPr>
-        <p:style>
-          <a:lnRef idx="1">
-            <a:schemeClr val="accent1"/>
-          </a:lnRef>
-          <a:fillRef idx="3">
-            <a:schemeClr val="accent1"/>
-          </a:fillRef>
-          <a:effectRef idx="2">
-            <a:schemeClr val="accent1"/>
-          </a:effectRef>
-          <a:fontRef idx="minor">
-            <a:schemeClr val="lt1"/>
-          </a:fontRef>
-        </p:style>
-        <p:txBody>
-          <a:bodyPr rtlCol="0" anchor="ctr"/>
-          <a:lstStyle/>
-          <a:p>
-            <a:pPr algn="ctr"/>
-          </a:p>
-        </p:txBody>
-      </p:sp>
-      <p:sp>
-        <p:nvSpPr>
-          <p:cNvPr id="12" name="Rounded Rectangle 11"/>
-          <p:cNvSpPr/>
-          <p:nvPr/>
-        </p:nvSpPr>
-        <p:spPr>
-          <a:xfrm>
-            <a:off x="9144000" y="1645920"/>
-            <a:ext cx="2377440" cy="914400"/>
-          </a:xfrm>
-          <a:prstGeom prst="roundRect">
-            <a:avLst/>
-          </a:prstGeom>
-          <a:solidFill>
-            <a:srgbClr val="E2EFDA"/>
-          </a:solidFill>
-          <a:ln w="12700">
-            <a:solidFill>
-              <a:srgbClr val="1F4E79"/>
-            </a:solidFill>
-          </a:ln>
-          <a:effectLst/>
-        </p:spPr>
-        <p:style>
-          <a:lnRef idx="1">
-            <a:schemeClr val="accent1"/>
-          </a:lnRef>
-          <a:fillRef idx="3">
-            <a:schemeClr val="accent1"/>
-          </a:fillRef>
-          <a:effectRef idx="2">
-            <a:schemeClr val="accent1"/>
-          </a:effectRef>
-          <a:fontRef idx="minor">
-            <a:schemeClr val="lt1"/>
-          </a:fontRef>
-        </p:style>
-        <p:txBody>
-          <a:bodyPr rtlCol="0" anchor="ctr" wrap="square"/>
-          <a:lstStyle/>
-          <a:p>
-            <a:pPr algn="ctr" rtl="1"/>
-            <a:r>
-              <a:rPr sz="1800" b="1">
-                <a:solidFill>
-                  <a:srgbClr val="333333"/>
-                </a:solidFill>
-                <a:latin typeface="Arial"/>
-                <a:cs typeface="Arial"/>
-                <a:ea typeface="Calibri"/>
-              </a:rPr>
-              <a:t>الأنظمة الوكيلة</a:t>
-            </a:r>
-          </a:p>
-        </p:txBody>
-      </p:sp>
-      <p:sp>
-        <p:nvSpPr>
-          <p:cNvPr id="13" name="Rounded Rectangle 12"/>
-          <p:cNvSpPr/>
-          <p:nvPr/>
-        </p:nvSpPr>
-        <p:spPr>
-          <a:xfrm>
-            <a:off x="9144000" y="2743200"/>
-            <a:ext cx="2377440" cy="1463040"/>
-          </a:xfrm>
-          <a:prstGeom prst="roundRect">
-            <a:avLst/>
-          </a:prstGeom>
-          <a:solidFill>
-            <a:srgbClr val="EDEDED"/>
-          </a:solidFill>
-          <a:ln w="12700">
-            <a:solidFill>
-              <a:srgbClr val="1F4E79"/>
-            </a:solidFill>
-          </a:ln>
-          <a:effectLst/>
-        </p:spPr>
-        <p:style>
-          <a:lnRef idx="1">
-            <a:schemeClr val="accent1"/>
-          </a:lnRef>
-          <a:fillRef idx="3">
-            <a:schemeClr val="accent1"/>
-          </a:fillRef>
-          <a:effectRef idx="2">
-            <a:schemeClr val="accent1"/>
-          </a:effectRef>
-          <a:fontRef idx="minor">
-            <a:schemeClr val="lt1"/>
-          </a:fontRef>
-        </p:style>
-        <p:txBody>
-          <a:bodyPr rtlCol="0" anchor="ctr" wrap="square"/>
-          <a:lstStyle/>
-          <a:p>
-            <a:pPr algn="ctr" rtl="1"/>
-            <a:r>
-              <a:rPr sz="1300" b="1">
-                <a:solidFill>
-                  <a:srgbClr val="333333"/>
-                </a:solidFill>
-                <a:latin typeface="Arial"/>
-                <a:cs typeface="Arial"/>
-                <a:ea typeface="Calibri"/>
-              </a:rPr>
-              <a:t>تخطيط وتنفيذ متعدد الخطوات</a:t>
-            </a:r>
-          </a:p>
-          <a:p>
-            <a:pPr algn="ctr" rtl="0"/>
-            <a:r>
-              <a:rPr sz="1100">
-                <a:solidFill>
-                  <a:srgbClr val="666666"/>
-                </a:solidFill>
-                <a:latin typeface="Calibri"/>
-                <a:cs typeface="Arial"/>
-                <a:ea typeface="Calibri"/>
-              </a:rPr>
-              <a:t>Multi-step planning</a:t>
-            </a:r>
-          </a:p>
-        </p:txBody>
-      </p:sp>
-      <p:sp>
-        <p:nvSpPr>
-          <p:cNvPr id="14" name="TextBox 13"/>
+          <p:cNvPr id="3" name="TextBox 2"/>
           <p:cNvSpPr txBox="1"/>
           <p:nvPr/>
         </p:nvSpPr>
         <p:spPr>
           <a:xfrm>
-            <a:off x="640080" y="6126480"/>
-            <a:ext cx="10972800" cy="548640"/>
+            <a:off x="640080" y="182880"/>
+            <a:ext cx="10972800" cy="640080"/>
           </a:xfrm>
           <a:prstGeom prst="rect">
             <a:avLst/>
@@ -6978,40 +5701,27 @@
           <a:p>
             <a:pPr algn="r" rtl="1"/>
             <a:r>
-              <a:rPr sz="1400">
-                <a:solidFill>
-                  <a:srgbClr val="666666"/>
+              <a:rPr sz="3200" b="1">
+                <a:solidFill>
+                  <a:srgbClr val="1F3B5C"/>
                 </a:solidFill>
                 <a:latin typeface="Arial"/>
-                <a:cs typeface="Arial"/>
-                <a:ea typeface="Calibri"/>
-              </a:rPr>
-              <a:t>Agentic RAG = بحث متجهي + جلب عبر الواجهات بذاكرة متجددة وتحقق قبل التسليم.</a:t>
-            </a:r>
-          </a:p>
-          <a:p>
-            <a:pPr algn="r" rtl="0"/>
-            <a:r>
-              <a:rPr>
-                <a:latin typeface="Calibri"/>
-                <a:cs typeface="Arial"/>
-                <a:ea typeface="Calibri"/>
-              </a:rPr>
-              <a:t>Agentic RAG = vector search + API fetching with refreshed memory and verification.</a:t>
-            </a:r>
-          </a:p>
-        </p:txBody>
-      </p:sp>
-      <p:sp>
-        <p:nvSpPr>
-          <p:cNvPr id="15" name="TextBox 14"/>
+              </a:rPr>
+              <a:t>RAG الوكيلي / Agentic RAG</a:t>
+            </a:r>
+          </a:p>
+        </p:txBody>
+      </p:sp>
+      <p:sp>
+        <p:nvSpPr>
+          <p:cNvPr id="4" name="TextBox 3"/>
           <p:cNvSpPr txBox="1"/>
           <p:nvPr/>
         </p:nvSpPr>
         <p:spPr>
           <a:xfrm>
-            <a:off x="640080" y="6400800"/>
-            <a:ext cx="8686800" cy="320040"/>
+            <a:off x="640080" y="1280160"/>
+            <a:ext cx="10972800" cy="5212080"/>
           </a:xfrm>
           <a:prstGeom prst="rect">
             <a:avLst/>
@@ -7024,31 +5734,55 @@
           </a:bodyPr>
           <a:lstStyle/>
           <a:p>
-            <a:pPr algn="r" rtl="1"/>
-            <a:r>
-              <a:rPr sz="1000" b="0">
+            <a:pPr algn="r" rtl="1">
+              <a:spcBef>
+                <a:spcPts val="200"/>
+              </a:spcBef>
+              <a:spcAft>
+                <a:spcPts val="1000"/>
+              </a:spcAft>
+            </a:pPr>
+            <a:r>
+              <a:rPr sz="1800">
+                <a:solidFill>
+                  <a:srgbClr val="333333"/>
+                </a:solidFill>
+                <a:latin typeface="Arial"/>
+              </a:rPr>
+              <a:t>• يجمع البحث المتجهي وجلب البيانات عبر الواجهات في عملية متعددة الخطوات، بذاكرة محدَّثة وتحقق من النتائج قبل التسليم.</a:t>
+            </a:r>
+          </a:p>
+          <a:p>
+            <a:pPr algn="l" rtl="0">
+              <a:spcBef>
+                <a:spcPts val="200"/>
+              </a:spcBef>
+              <a:spcAft>
+                <a:spcPts val="1000"/>
+              </a:spcAft>
+            </a:pPr>
+            <a:r>
+              <a:rPr sz="1500">
                 <a:solidFill>
                   <a:srgbClr val="666666"/>
                 </a:solidFill>
-                <a:latin typeface="Arial"/>
-                <a:cs typeface="Arial"/>
-                <a:ea typeface="Calibri"/>
-              </a:rPr>
-              <a:t>Module 02 — Data &amp; AI Engineering Track  |  الوحدة الثانية</a:t>
-            </a:r>
-          </a:p>
-        </p:txBody>
-      </p:sp>
-      <p:sp>
-        <p:nvSpPr>
-          <p:cNvPr id="16" name="TextBox 15"/>
+                <a:latin typeface="Calibri"/>
+              </a:rPr>
+              <a:t>• Combines vector search and API fetching in multi-step flows, with refreshed memory and verification before delivery.</a:t>
+            </a:r>
+          </a:p>
+        </p:txBody>
+      </p:sp>
+      <p:sp>
+        <p:nvSpPr>
+          <p:cNvPr id="5" name="TextBox 4"/>
           <p:cNvSpPr txBox="1"/>
           <p:nvPr/>
         </p:nvSpPr>
         <p:spPr>
           <a:xfrm>
-            <a:off x="9601200" y="6400800"/>
-            <a:ext cx="1920240" cy="320040"/>
+            <a:off x="640080" y="6400800"/>
+            <a:ext cx="8686800" cy="320040"/>
           </a:xfrm>
           <a:prstGeom prst="rect">
             <a:avLst/>
@@ -7061,31 +5795,29 @@
           </a:bodyPr>
           <a:lstStyle/>
           <a:p>
-            <a:pPr algn="l" rtl="0"/>
+            <a:pPr algn="r" rtl="1"/>
             <a:r>
               <a:rPr sz="1000" b="0">
                 <a:solidFill>
                   <a:srgbClr val="666666"/>
                 </a:solidFill>
-                <a:latin typeface="Calibri"/>
-                <a:cs typeface="Arial"/>
-                <a:ea typeface="Calibri"/>
-              </a:rPr>
-              <a:t>12_  •  5/12</a:t>
-            </a:r>
-          </a:p>
-        </p:txBody>
-      </p:sp>
-      <p:sp>
-        <p:nvSpPr>
-          <p:cNvPr id="17" name="TextBox 16"/>
+                <a:latin typeface="Arial"/>
+              </a:rPr>
+              <a:t>Module 02 — Data &amp; AI Engineering Track  |  الوحدة الثانية</a:t>
+            </a:r>
+          </a:p>
+        </p:txBody>
+      </p:sp>
+      <p:sp>
+        <p:nvSpPr>
+          <p:cNvPr id="6" name="TextBox 5"/>
           <p:cNvSpPr txBox="1"/>
           <p:nvPr/>
         </p:nvSpPr>
         <p:spPr>
           <a:xfrm>
-            <a:off x="640080" y="6400800"/>
-            <a:ext cx="8686800" cy="320040"/>
+            <a:off x="9601200" y="6400800"/>
+            <a:ext cx="1920240" cy="320040"/>
           </a:xfrm>
           <a:prstGeom prst="rect">
             <a:avLst/>
@@ -7098,54 +5830,15 @@
           </a:bodyPr>
           <a:lstStyle/>
           <a:p>
-            <a:pPr algn="r" rtl="1"/>
+            <a:pPr algn="l" rtl="0"/>
             <a:r>
               <a:rPr sz="1000" b="0">
                 <a:solidFill>
                   <a:srgbClr val="666666"/>
                 </a:solidFill>
-                <a:latin typeface="Arial"/>
-                <a:cs typeface="Arial"/>
-                <a:ea typeface="Calibri"/>
-              </a:rPr>
-              <a:t>Module 02 — Data &amp; AI Engineering Track  |  الوحدة الثانية</a:t>
-            </a:r>
-          </a:p>
-        </p:txBody>
-      </p:sp>
-      <p:sp>
-        <p:nvSpPr>
-          <p:cNvPr id="18" name="TextBox 17"/>
-          <p:cNvSpPr txBox="1"/>
-          <p:nvPr/>
-        </p:nvSpPr>
-        <p:spPr>
-          <a:xfrm>
-            <a:off x="9601200" y="6400800"/>
-            <a:ext cx="1920240" cy="320040"/>
-          </a:xfrm>
-          <a:prstGeom prst="rect">
-            <a:avLst/>
-          </a:prstGeom>
-          <a:noFill/>
-        </p:spPr>
-        <p:txBody>
-          <a:bodyPr wrap="square">
-            <a:spAutoFit/>
-          </a:bodyPr>
-          <a:lstStyle/>
-          <a:p>
-            <a:pPr algn="l" rtl="0"/>
-            <a:r>
-              <a:rPr sz="1000" b="0">
-                <a:solidFill>
-                  <a:srgbClr val="666666"/>
-                </a:solidFill>
                 <a:latin typeface="Calibri"/>
-                <a:cs typeface="Arial"/>
-                <a:ea typeface="Calibri"/>
-              </a:rPr>
-              <a:t>12_  •  5/12</a:t>
+              </a:rPr>
+              <a:t>V12  •  6/12</a:t>
             </a:r>
           </a:p>
         </p:txBody>
@@ -7251,10 +5944,8 @@
                   <a:srgbClr val="1F3B5C"/>
                 </a:solidFill>
                 <a:latin typeface="Arial"/>
-                <a:cs typeface="Arial"/>
-                <a:ea typeface="Calibri"/>
-              </a:rPr>
-              <a:t>RAG الوكيلي / Agentic RAG</a:t>
+              </a:rPr>
+              <a:t>التكلفة والأداء عمليًا / Practical Cost &amp; Performance</a:t>
             </a:r>
           </a:p>
         </p:txBody>
@@ -7290,19 +5981,17 @@
               </a:spcAft>
             </a:pPr>
             <a:r>
-              <a:rPr sz="1800">
+              <a:rPr sz="1900">
                 <a:solidFill>
                   <a:srgbClr val="333333"/>
                 </a:solidFill>
                 <a:latin typeface="Arial"/>
-                <a:cs typeface="Arial"/>
-                <a:ea typeface="Calibri"/>
-              </a:rPr>
-              <a:t>• يجمع البحث المتجهي وجلب البيانات عبر الواجهات في عملية متعددة الخطوات، بذاكرة محدَّثة وتحقق من النتائج قبل التسليم.</a:t>
-            </a:r>
-          </a:p>
-          <a:p>
-            <a:pPr algn="r" rtl="0">
+              </a:rPr>
+              <a:t>• التضمين (Embedding) أقل تكلفة بمرتبة كاملة من التوليد (Generation) — الاسترجاع أرخص من التوليد.</a:t>
+            </a:r>
+          </a:p>
+          <a:p>
+            <a:pPr algn="l" rtl="0">
               <a:spcBef>
                 <a:spcPts val="200"/>
               </a:spcBef>
@@ -7311,15 +6000,89 @@
               </a:spcAft>
             </a:pPr>
             <a:r>
-              <a:rPr sz="1500">
+              <a:rPr sz="1600">
                 <a:solidFill>
                   <a:srgbClr val="666666"/>
                 </a:solidFill>
                 <a:latin typeface="Calibri"/>
-                <a:cs typeface="Arial"/>
-                <a:ea typeface="Calibri"/>
-              </a:rPr>
-              <a:t>• Combines vector search and API fetching in multi-step flows, with refreshed memory and verification before delivery.</a:t>
+              </a:rPr>
+              <a:t>• Embedding costs an order of magnitude less than generation — retrieval is cheaper than generation.</a:t>
+            </a:r>
+          </a:p>
+          <a:p>
+            <a:pPr algn="r" rtl="1">
+              <a:spcBef>
+                <a:spcPts val="200"/>
+              </a:spcBef>
+              <a:spcAft>
+                <a:spcPts val="1000"/>
+              </a:spcAft>
+            </a:pPr>
+            <a:r>
+              <a:rPr sz="1900">
+                <a:solidFill>
+                  <a:srgbClr val="333333"/>
+                </a:solidFill>
+                <a:latin typeface="Arial"/>
+              </a:rPr>
+              <a:t>• التخزين الدلالي المؤقت يخفض الكمون والتكلفة؛ توجيه الطلبات يرسل المهام البسيطة لنماذج أصغر أرخص.</a:t>
+            </a:r>
+          </a:p>
+          <a:p>
+            <a:pPr algn="l" rtl="0">
+              <a:spcBef>
+                <a:spcPts val="200"/>
+              </a:spcBef>
+              <a:spcAft>
+                <a:spcPts val="1000"/>
+              </a:spcAft>
+            </a:pPr>
+            <a:r>
+              <a:rPr sz="1600">
+                <a:solidFill>
+                  <a:srgbClr val="666666"/>
+                </a:solidFill>
+                <a:latin typeface="Calibri"/>
+              </a:rPr>
+              <a:t>• Semantic caching cuts latency and cost; routing sends easy tasks to smaller, cheaper models.</a:t>
+            </a:r>
+          </a:p>
+          <a:p>
+            <a:pPr algn="r" rtl="1">
+              <a:spcBef>
+                <a:spcPts val="200"/>
+              </a:spcBef>
+              <a:spcAft>
+                <a:spcPts val="1000"/>
+              </a:spcAft>
+            </a:pPr>
+            <a:r>
+              <a:rPr sz="1900">
+                <a:solidFill>
+                  <a:srgbClr val="333333"/>
+                </a:solidFill>
+                <a:latin typeface="Arial"/>
+              </a:rPr>
+              <a:t>• قاعدة FinOps: قِس التكلفة لكل طلب (per-request) قبل التوسع.</a:t>
+            </a:r>
+          </a:p>
+          <a:p>
+            <a:pPr algn="l" rtl="0">
+              <a:spcBef>
+                <a:spcPts val="200"/>
+              </a:spcBef>
+              <a:spcAft>
+                <a:spcPts val="1000"/>
+              </a:spcAft>
+            </a:pPr>
+            <a:r>
+              <a:rPr sz="1600">
+                <a:solidFill>
+                  <a:srgbClr val="666666"/>
+                </a:solidFill>
+                <a:latin typeface="Calibri"/>
+              </a:rPr>
+              <a:t>• FinOps rule: measure per-request cost before scaling.</a:t>
             </a:r>
           </a:p>
         </p:txBody>
@@ -7353,8 +6116,6 @@
                   <a:srgbClr val="666666"/>
                 </a:solidFill>
                 <a:latin typeface="Arial"/>
-                <a:cs typeface="Arial"/>
-                <a:ea typeface="Calibri"/>
               </a:rPr>
               <a:t>Module 02 — Data &amp; AI Engineering Track  |  الوحدة الثانية</a:t>
             </a:r>
@@ -7390,158 +6151,8 @@
                   <a:srgbClr val="666666"/>
                 </a:solidFill>
                 <a:latin typeface="Calibri"/>
-                <a:cs typeface="Arial"/>
-                <a:ea typeface="Calibri"/>
-              </a:rPr>
-              <a:t>V12  •  5/13</a:t>
-            </a:r>
-          </a:p>
-        </p:txBody>
-      </p:sp>
-      <p:sp>
-        <p:nvSpPr>
-          <p:cNvPr id="7" name="TextBox 6"/>
-          <p:cNvSpPr txBox="1"/>
-          <p:nvPr/>
-        </p:nvSpPr>
-        <p:spPr>
-          <a:xfrm>
-            <a:off x="640080" y="6400800"/>
-            <a:ext cx="8686800" cy="320040"/>
-          </a:xfrm>
-          <a:prstGeom prst="rect">
-            <a:avLst/>
-          </a:prstGeom>
-          <a:noFill/>
-        </p:spPr>
-        <p:txBody>
-          <a:bodyPr wrap="square">
-            <a:spAutoFit/>
-          </a:bodyPr>
-          <a:lstStyle/>
-          <a:p>
-            <a:pPr algn="r" rtl="1"/>
-            <a:r>
-              <a:rPr sz="1000" b="0">
-                <a:solidFill>
-                  <a:srgbClr val="666666"/>
-                </a:solidFill>
-                <a:latin typeface="Arial"/>
-                <a:cs typeface="Arial"/>
-                <a:ea typeface="Calibri"/>
-              </a:rPr>
-              <a:t>Module 02 — Data &amp; AI Engineering Track  |  الوحدة الثانية</a:t>
-            </a:r>
-          </a:p>
-        </p:txBody>
-      </p:sp>
-      <p:sp>
-        <p:nvSpPr>
-          <p:cNvPr id="8" name="TextBox 7"/>
-          <p:cNvSpPr txBox="1"/>
-          <p:nvPr/>
-        </p:nvSpPr>
-        <p:spPr>
-          <a:xfrm>
-            <a:off x="9601200" y="6400800"/>
-            <a:ext cx="1920240" cy="320040"/>
-          </a:xfrm>
-          <a:prstGeom prst="rect">
-            <a:avLst/>
-          </a:prstGeom>
-          <a:noFill/>
-        </p:spPr>
-        <p:txBody>
-          <a:bodyPr wrap="square">
-            <a:spAutoFit/>
-          </a:bodyPr>
-          <a:lstStyle/>
-          <a:p>
-            <a:pPr algn="l" rtl="0"/>
-            <a:r>
-              <a:rPr sz="1000" b="0">
-                <a:solidFill>
-                  <a:srgbClr val="666666"/>
-                </a:solidFill>
-                <a:latin typeface="Calibri"/>
-                <a:cs typeface="Arial"/>
-                <a:ea typeface="Calibri"/>
-              </a:rPr>
-              <a:t>12_  •  6/12</a:t>
-            </a:r>
-          </a:p>
-        </p:txBody>
-      </p:sp>
-      <p:sp>
-        <p:nvSpPr>
-          <p:cNvPr id="9" name="TextBox 8"/>
-          <p:cNvSpPr txBox="1"/>
-          <p:nvPr/>
-        </p:nvSpPr>
-        <p:spPr>
-          <a:xfrm>
-            <a:off x="640080" y="6400800"/>
-            <a:ext cx="8686800" cy="320040"/>
-          </a:xfrm>
-          <a:prstGeom prst="rect">
-            <a:avLst/>
-          </a:prstGeom>
-          <a:noFill/>
-        </p:spPr>
-        <p:txBody>
-          <a:bodyPr wrap="square">
-            <a:spAutoFit/>
-          </a:bodyPr>
-          <a:lstStyle/>
-          <a:p>
-            <a:pPr algn="r" rtl="1"/>
-            <a:r>
-              <a:rPr sz="1000" b="0">
-                <a:solidFill>
-                  <a:srgbClr val="666666"/>
-                </a:solidFill>
-                <a:latin typeface="Arial"/>
-                <a:cs typeface="Arial"/>
-                <a:ea typeface="Calibri"/>
-              </a:rPr>
-              <a:t>Module 02 — Data &amp; AI Engineering Track  |  الوحدة الثانية</a:t>
-            </a:r>
-          </a:p>
-        </p:txBody>
-      </p:sp>
-      <p:sp>
-        <p:nvSpPr>
-          <p:cNvPr id="10" name="TextBox 9"/>
-          <p:cNvSpPr txBox="1"/>
-          <p:nvPr/>
-        </p:nvSpPr>
-        <p:spPr>
-          <a:xfrm>
-            <a:off x="9601200" y="6400800"/>
-            <a:ext cx="1920240" cy="320040"/>
-          </a:xfrm>
-          <a:prstGeom prst="rect">
-            <a:avLst/>
-          </a:prstGeom>
-          <a:noFill/>
-        </p:spPr>
-        <p:txBody>
-          <a:bodyPr wrap="square">
-            <a:spAutoFit/>
-          </a:bodyPr>
-          <a:lstStyle/>
-          <a:p>
-            <a:pPr algn="l" rtl="0"/>
-            <a:r>
-              <a:rPr sz="1000" b="0">
-                <a:solidFill>
-                  <a:srgbClr val="666666"/>
-                </a:solidFill>
-                <a:latin typeface="Calibri"/>
-                <a:cs typeface="Arial"/>
-                <a:ea typeface="Calibri"/>
-              </a:rPr>
-              <a:t>12_  •  6/12</a:t>
+              </a:rPr>
+              <a:t>V12  •  7/12</a:t>
             </a:r>
           </a:p>
         </p:txBody>
@@ -7647,10 +6258,8 @@
                   <a:srgbClr val="1F3B5C"/>
                 </a:solidFill>
                 <a:latin typeface="Arial"/>
-                <a:cs typeface="Arial"/>
-                <a:ea typeface="Calibri"/>
-              </a:rPr>
-              <a:t>التكلفة والأداء عمليًا / Practical Cost &amp; Performance</a:t>
+              </a:rPr>
+              <a:t>تمهيد للمختبر L03 / Lab Introduction</a:t>
             </a:r>
           </a:p>
         </p:txBody>
@@ -7686,19 +6295,17 @@
               </a:spcAft>
             </a:pPr>
             <a:r>
-              <a:rPr sz="1900">
+              <a:rPr sz="1800">
                 <a:solidFill>
                   <a:srgbClr val="333333"/>
                 </a:solidFill>
                 <a:latin typeface="Arial"/>
-                <a:cs typeface="Arial"/>
-                <a:ea typeface="Calibri"/>
-              </a:rPr>
-              <a:t>• التضمين (Embedding) أقل تكلفة بمرتبة كاملة من التوليد (Generation) — الاسترجاع أرخص من التوليد.</a:t>
-            </a:r>
-          </a:p>
-          <a:p>
-            <a:pPr algn="r" rtl="0">
+              </a:rPr>
+              <a:t>• المختبر: خط محلي خفيف — Python venv + SQLite مدمجة (Bronze/Silver) + ChromaDB (Gold) — دون Docker، بنقطة نهاية FastAPI على المسار /query.</a:t>
+            </a:r>
+          </a:p>
+          <a:p>
+            <a:pPr algn="l" rtl="0">
               <a:spcBef>
                 <a:spcPts val="200"/>
               </a:spcBef>
@@ -7707,99 +6314,13 @@
               </a:spcAft>
             </a:pPr>
             <a:r>
-              <a:rPr sz="1600">
+              <a:rPr sz="1500">
                 <a:solidFill>
                   <a:srgbClr val="666666"/>
                 </a:solidFill>
                 <a:latin typeface="Calibri"/>
-                <a:cs typeface="Arial"/>
-                <a:ea typeface="Calibri"/>
-              </a:rPr>
-              <a:t>• Embedding costs an order of magnitude less than generation — retrieval is cheaper than generation.</a:t>
-            </a:r>
-          </a:p>
-          <a:p>
-            <a:pPr algn="r" rtl="1">
-              <a:spcBef>
-                <a:spcPts val="200"/>
-              </a:spcBef>
-              <a:spcAft>
-                <a:spcPts val="1000"/>
-              </a:spcAft>
-            </a:pPr>
-            <a:r>
-              <a:rPr sz="1900">
-                <a:solidFill>
-                  <a:srgbClr val="333333"/>
-                </a:solidFill>
-                <a:latin typeface="Arial"/>
-                <a:cs typeface="Arial"/>
-                <a:ea typeface="Calibri"/>
-              </a:rPr>
-              <a:t>• التخزين الدلالي المؤقت يخفض الكمون والتكلفة؛ توجيه الطلبات يرسل المهام البسيطة لنماذج أصغر أرخص.</a:t>
-            </a:r>
-          </a:p>
-          <a:p>
-            <a:pPr algn="r" rtl="0">
-              <a:spcBef>
-                <a:spcPts val="200"/>
-              </a:spcBef>
-              <a:spcAft>
-                <a:spcPts val="1000"/>
-              </a:spcAft>
-            </a:pPr>
-            <a:r>
-              <a:rPr sz="1600">
-                <a:solidFill>
-                  <a:srgbClr val="666666"/>
-                </a:solidFill>
-                <a:latin typeface="Calibri"/>
-                <a:cs typeface="Arial"/>
-                <a:ea typeface="Calibri"/>
-              </a:rPr>
-              <a:t>• Semantic caching cuts latency and cost; routing sends easy tasks to smaller, cheaper models.</a:t>
-            </a:r>
-          </a:p>
-          <a:p>
-            <a:pPr algn="r" rtl="1">
-              <a:spcBef>
-                <a:spcPts val="200"/>
-              </a:spcBef>
-              <a:spcAft>
-                <a:spcPts val="1000"/>
-              </a:spcAft>
-            </a:pPr>
-            <a:r>
-              <a:rPr sz="1900">
-                <a:solidFill>
-                  <a:srgbClr val="333333"/>
-                </a:solidFill>
-                <a:latin typeface="Arial"/>
-                <a:cs typeface="Arial"/>
-                <a:ea typeface="Calibri"/>
-              </a:rPr>
-              <a:t>• قاعدة FinOps: قِس التكلفة لكل طلب (per-request) قبل التوسع.</a:t>
-            </a:r>
-          </a:p>
-          <a:p>
-            <a:pPr algn="r" rtl="0">
-              <a:spcBef>
-                <a:spcPts val="200"/>
-              </a:spcBef>
-              <a:spcAft>
-                <a:spcPts val="1000"/>
-              </a:spcAft>
-            </a:pPr>
-            <a:r>
-              <a:rPr sz="1600">
-                <a:solidFill>
-                  <a:srgbClr val="666666"/>
-                </a:solidFill>
-                <a:latin typeface="Calibri"/>
-                <a:cs typeface="Arial"/>
-                <a:ea typeface="Calibri"/>
-              </a:rPr>
-              <a:t>• FinOps rule: measure per-request cost before scaling.</a:t>
+              </a:rPr>
+              <a:t>• The lab: lightweight local pipeline — Python venv + built-in SQLite (Bronze/Silver) + ChromaDB (Gold) — no Docker, ending in a FastAPI /query endpoint.</a:t>
             </a:r>
           </a:p>
         </p:txBody>
@@ -7833,8 +6354,6 @@
                   <a:srgbClr val="666666"/>
                 </a:solidFill>
                 <a:latin typeface="Arial"/>
-                <a:cs typeface="Arial"/>
-                <a:ea typeface="Calibri"/>
               </a:rPr>
               <a:t>Module 02 — Data &amp; AI Engineering Track  |  الوحدة الثانية</a:t>
             </a:r>
@@ -7870,158 +6389,8 @@
                   <a:srgbClr val="666666"/>
                 </a:solidFill>
                 <a:latin typeface="Calibri"/>
-                <a:cs typeface="Arial"/>
-                <a:ea typeface="Calibri"/>
-              </a:rPr>
-              <a:t>V12  •  6/13</a:t>
-            </a:r>
-          </a:p>
-        </p:txBody>
-      </p:sp>
-      <p:sp>
-        <p:nvSpPr>
-          <p:cNvPr id="7" name="TextBox 6"/>
-          <p:cNvSpPr txBox="1"/>
-          <p:nvPr/>
-        </p:nvSpPr>
-        <p:spPr>
-          <a:xfrm>
-            <a:off x="640080" y="6400800"/>
-            <a:ext cx="8686800" cy="320040"/>
-          </a:xfrm>
-          <a:prstGeom prst="rect">
-            <a:avLst/>
-          </a:prstGeom>
-          <a:noFill/>
-        </p:spPr>
-        <p:txBody>
-          <a:bodyPr wrap="square">
-            <a:spAutoFit/>
-          </a:bodyPr>
-          <a:lstStyle/>
-          <a:p>
-            <a:pPr algn="r" rtl="1"/>
-            <a:r>
-              <a:rPr sz="1000" b="0">
-                <a:solidFill>
-                  <a:srgbClr val="666666"/>
-                </a:solidFill>
-                <a:latin typeface="Arial"/>
-                <a:cs typeface="Arial"/>
-                <a:ea typeface="Calibri"/>
-              </a:rPr>
-              <a:t>Module 02 — Data &amp; AI Engineering Track  |  الوحدة الثانية</a:t>
-            </a:r>
-          </a:p>
-        </p:txBody>
-      </p:sp>
-      <p:sp>
-        <p:nvSpPr>
-          <p:cNvPr id="8" name="TextBox 7"/>
-          <p:cNvSpPr txBox="1"/>
-          <p:nvPr/>
-        </p:nvSpPr>
-        <p:spPr>
-          <a:xfrm>
-            <a:off x="9601200" y="6400800"/>
-            <a:ext cx="1920240" cy="320040"/>
-          </a:xfrm>
-          <a:prstGeom prst="rect">
-            <a:avLst/>
-          </a:prstGeom>
-          <a:noFill/>
-        </p:spPr>
-        <p:txBody>
-          <a:bodyPr wrap="square">
-            <a:spAutoFit/>
-          </a:bodyPr>
-          <a:lstStyle/>
-          <a:p>
-            <a:pPr algn="l" rtl="0"/>
-            <a:r>
-              <a:rPr sz="1000" b="0">
-                <a:solidFill>
-                  <a:srgbClr val="666666"/>
-                </a:solidFill>
-                <a:latin typeface="Calibri"/>
-                <a:cs typeface="Arial"/>
-                <a:ea typeface="Calibri"/>
-              </a:rPr>
-              <a:t>12_  •  7/12</a:t>
-            </a:r>
-          </a:p>
-        </p:txBody>
-      </p:sp>
-      <p:sp>
-        <p:nvSpPr>
-          <p:cNvPr id="9" name="TextBox 8"/>
-          <p:cNvSpPr txBox="1"/>
-          <p:nvPr/>
-        </p:nvSpPr>
-        <p:spPr>
-          <a:xfrm>
-            <a:off x="640080" y="6400800"/>
-            <a:ext cx="8686800" cy="320040"/>
-          </a:xfrm>
-          <a:prstGeom prst="rect">
-            <a:avLst/>
-          </a:prstGeom>
-          <a:noFill/>
-        </p:spPr>
-        <p:txBody>
-          <a:bodyPr wrap="square">
-            <a:spAutoFit/>
-          </a:bodyPr>
-          <a:lstStyle/>
-          <a:p>
-            <a:pPr algn="r" rtl="1"/>
-            <a:r>
-              <a:rPr sz="1000" b="0">
-                <a:solidFill>
-                  <a:srgbClr val="666666"/>
-                </a:solidFill>
-                <a:latin typeface="Arial"/>
-                <a:cs typeface="Arial"/>
-                <a:ea typeface="Calibri"/>
-              </a:rPr>
-              <a:t>Module 02 — Data &amp; AI Engineering Track  |  الوحدة الثانية</a:t>
-            </a:r>
-          </a:p>
-        </p:txBody>
-      </p:sp>
-      <p:sp>
-        <p:nvSpPr>
-          <p:cNvPr id="10" name="TextBox 9"/>
-          <p:cNvSpPr txBox="1"/>
-          <p:nvPr/>
-        </p:nvSpPr>
-        <p:spPr>
-          <a:xfrm>
-            <a:off x="9601200" y="6400800"/>
-            <a:ext cx="1920240" cy="320040"/>
-          </a:xfrm>
-          <a:prstGeom prst="rect">
-            <a:avLst/>
-          </a:prstGeom>
-          <a:noFill/>
-        </p:spPr>
-        <p:txBody>
-          <a:bodyPr wrap="square">
-            <a:spAutoFit/>
-          </a:bodyPr>
-          <a:lstStyle/>
-          <a:p>
-            <a:pPr algn="l" rtl="0"/>
-            <a:r>
-              <a:rPr sz="1000" b="0">
-                <a:solidFill>
-                  <a:srgbClr val="666666"/>
-                </a:solidFill>
-                <a:latin typeface="Calibri"/>
-                <a:cs typeface="Arial"/>
-                <a:ea typeface="Calibri"/>
-              </a:rPr>
-              <a:t>12_  •  7/12</a:t>
+              </a:rPr>
+              <a:t>V12  •  9/12</a:t>
             </a:r>
           </a:p>
         </p:txBody>
@@ -8054,59 +6423,22 @@
       <p:grpSpPr/>
       <p:sp>
         <p:nvSpPr>
-          <p:cNvPr id="2" name="TextBox 1"/>
-          <p:cNvSpPr txBox="1"/>
-          <p:nvPr/>
-        </p:nvSpPr>
-        <p:spPr>
-          <a:xfrm>
-            <a:off x="640080" y="137160"/>
-            <a:ext cx="10972800" cy="640080"/>
-          </a:xfrm>
-          <a:prstGeom prst="rect">
-            <a:avLst/>
-          </a:prstGeom>
-          <a:noFill/>
-        </p:spPr>
-        <p:txBody>
-          <a:bodyPr wrap="none">
-            <a:spAutoFit/>
-          </a:bodyPr>
-          <a:lstStyle/>
-          <a:p>
-            <a:pPr algn="r" rtl="1"/>
-            <a:r>
-              <a:rPr sz="3000" b="1">
-                <a:solidFill>
-                  <a:srgbClr val="1F3B5C"/>
-                </a:solidFill>
-                <a:latin typeface="Arial"/>
-                <a:cs typeface="Arial"/>
-                <a:ea typeface="Calibri"/>
-              </a:rPr>
-              <a:t>التكلفة عمليًا: التضمين مقابل التوليد / Cost: Embedding vs Generation</a:t>
-            </a:r>
-          </a:p>
-        </p:txBody>
-      </p:sp>
-      <p:sp>
-        <p:nvSpPr>
-          <p:cNvPr id="3" name="Rounded Rectangle 2"/>
+          <p:cNvPr id="2" name="Rectangle 1"/>
           <p:cNvSpPr/>
           <p:nvPr/>
         </p:nvSpPr>
         <p:spPr>
           <a:xfrm>
-            <a:off x="1828800" y="3840480"/>
-            <a:ext cx="2194560" cy="1463040"/>
-          </a:xfrm>
-          <a:prstGeom prst="roundRect">
+            <a:off x="0" y="0"/>
+            <a:ext cx="12191695" cy="1005840"/>
+          </a:xfrm>
+          <a:prstGeom prst="rect">
             <a:avLst/>
           </a:prstGeom>
           <a:solidFill>
-            <a:srgbClr val="E2EFDA"/>
+            <a:srgbClr val="FFFFFF"/>
           </a:solidFill>
-          <a:ln w="12700">
+          <a:ln w="25400">
             <a:solidFill>
               <a:srgbClr val="1F4E79"/>
             </a:solidFill>
@@ -8128,176 +6460,216 @@
           </a:fontRef>
         </p:style>
         <p:txBody>
-          <a:bodyPr rtlCol="0" anchor="ctr" wrap="square"/>
-          <a:lstStyle/>
-          <a:p>
-            <a:pPr algn="ctr" rtl="1"/>
-            <a:r>
-              <a:rPr sz="1800" b="1">
+          <a:bodyPr rtlCol="0" anchor="ctr"/>
+          <a:lstStyle/>
+          <a:p>
+            <a:pPr algn="ctr"/>
+          </a:p>
+        </p:txBody>
+      </p:sp>
+      <p:sp>
+        <p:nvSpPr>
+          <p:cNvPr id="3" name="TextBox 2"/>
+          <p:cNvSpPr txBox="1"/>
+          <p:nvPr/>
+        </p:nvSpPr>
+        <p:spPr>
+          <a:xfrm>
+            <a:off x="640080" y="182880"/>
+            <a:ext cx="10972800" cy="640080"/>
+          </a:xfrm>
+          <a:prstGeom prst="rect">
+            <a:avLst/>
+          </a:prstGeom>
+          <a:noFill/>
+        </p:spPr>
+        <p:txBody>
+          <a:bodyPr wrap="square">
+            <a:spAutoFit/>
+          </a:bodyPr>
+          <a:lstStyle/>
+          <a:p>
+            <a:pPr algn="r" rtl="1"/>
+            <a:r>
+              <a:rPr sz="3200" b="1">
+                <a:solidFill>
+                  <a:srgbClr val="1F3B5C"/>
+                </a:solidFill>
+                <a:latin typeface="Arial"/>
+              </a:rPr>
+              <a:t>اختبار قصير / Quick Quiz</a:t>
+            </a:r>
+          </a:p>
+        </p:txBody>
+      </p:sp>
+      <p:sp>
+        <p:nvSpPr>
+          <p:cNvPr id="4" name="TextBox 3"/>
+          <p:cNvSpPr txBox="1"/>
+          <p:nvPr/>
+        </p:nvSpPr>
+        <p:spPr>
+          <a:xfrm>
+            <a:off x="640080" y="1280160"/>
+            <a:ext cx="10972800" cy="5212080"/>
+          </a:xfrm>
+          <a:prstGeom prst="rect">
+            <a:avLst/>
+          </a:prstGeom>
+          <a:noFill/>
+        </p:spPr>
+        <p:txBody>
+          <a:bodyPr wrap="square">
+            <a:spAutoFit/>
+          </a:bodyPr>
+          <a:lstStyle/>
+          <a:p>
+            <a:pPr algn="r" rtl="1">
+              <a:spcBef>
+                <a:spcPts val="200"/>
+              </a:spcBef>
+              <a:spcAft>
+                <a:spcPts val="1000"/>
+              </a:spcAft>
+            </a:pPr>
+            <a:r>
+              <a:rPr sz="2000">
                 <a:solidFill>
                   <a:srgbClr val="333333"/>
                 </a:solidFill>
                 <a:latin typeface="Arial"/>
-                <a:cs typeface="Arial"/>
-                <a:ea typeface="Calibri"/>
-              </a:rPr>
-              <a:t>التضمين 1x</a:t>
-            </a:r>
-          </a:p>
-          <a:p>
-            <a:pPr algn="ctr" rtl="0"/>
-            <a:r>
-              <a:rPr sz="1200">
+              </a:rPr>
+              <a:t>• 1. فرّق بين AI Agent وAgentic AI.</a:t>
+            </a:r>
+          </a:p>
+          <a:p>
+            <a:pPr algn="l" rtl="0">
+              <a:spcBef>
+                <a:spcPts val="200"/>
+              </a:spcBef>
+              <a:spcAft>
+                <a:spcPts val="1000"/>
+              </a:spcAft>
+            </a:pPr>
+            <a:r>
+              <a:rPr sz="1700">
                 <a:solidFill>
                   <a:srgbClr val="666666"/>
                 </a:solidFill>
                 <a:latin typeface="Calibri"/>
-                <a:cs typeface="Arial"/>
-                <a:ea typeface="Calibri"/>
-              </a:rPr>
-              <a:t>Embedding — cheap</a:t>
-            </a:r>
-          </a:p>
-        </p:txBody>
-      </p:sp>
-      <p:sp>
-        <p:nvSpPr>
-          <p:cNvPr id="4" name="Rounded Rectangle 3"/>
-          <p:cNvSpPr/>
+              </a:rPr>
+              <a:t>• Differentiate an AI agent from agentic AI.</a:t>
+            </a:r>
+          </a:p>
+          <a:p>
+            <a:pPr algn="r" rtl="1">
+              <a:spcBef>
+                <a:spcPts val="200"/>
+              </a:spcBef>
+              <a:spcAft>
+                <a:spcPts val="1000"/>
+              </a:spcAft>
+            </a:pPr>
+            <a:r>
+              <a:rPr sz="2000">
+                <a:solidFill>
+                  <a:srgbClr val="333333"/>
+                </a:solidFill>
+                <a:latin typeface="Arial"/>
+              </a:rPr>
+              <a:t>• 2. ما أرخص: تضمين أم توليد؟</a:t>
+            </a:r>
+          </a:p>
+          <a:p>
+            <a:pPr algn="l" rtl="0">
+              <a:spcBef>
+                <a:spcPts val="200"/>
+              </a:spcBef>
+              <a:spcAft>
+                <a:spcPts val="1000"/>
+              </a:spcAft>
+            </a:pPr>
+            <a:r>
+              <a:rPr sz="1700">
+                <a:solidFill>
+                  <a:srgbClr val="666666"/>
+                </a:solidFill>
+                <a:latin typeface="Calibri"/>
+              </a:rPr>
+              <a:t>• Which is cheaper: embedding or generation?</a:t>
+            </a:r>
+          </a:p>
+          <a:p>
+            <a:pPr algn="r" rtl="1">
+              <a:spcBef>
+                <a:spcPts val="200"/>
+              </a:spcBef>
+              <a:spcAft>
+                <a:spcPts val="1000"/>
+              </a:spcAft>
+            </a:pPr>
+            <a:r>
+              <a:rPr sz="2000">
+                <a:solidFill>
+                  <a:srgbClr val="333333"/>
+                </a:solidFill>
+                <a:latin typeface="Arial"/>
+              </a:rPr>
+              <a:t>• 3. ما أدوات تتبع التجارب وإصدارات البيانات؟</a:t>
+            </a:r>
+          </a:p>
+          <a:p>
+            <a:pPr algn="l" rtl="0">
+              <a:spcBef>
+                <a:spcPts val="200"/>
+              </a:spcBef>
+              <a:spcAft>
+                <a:spcPts val="1000"/>
+              </a:spcAft>
+            </a:pPr>
+            <a:r>
+              <a:rPr sz="1700">
+                <a:solidFill>
+                  <a:srgbClr val="666666"/>
+                </a:solidFill>
+                <a:latin typeface="Calibri"/>
+              </a:rPr>
+              <a:t>• Which tools track experiments and version data?</a:t>
+            </a:r>
+          </a:p>
+        </p:txBody>
+      </p:sp>
+      <p:sp>
+        <p:nvSpPr>
+          <p:cNvPr id="5" name="TextBox 4"/>
+          <p:cNvSpPr txBox="1"/>
           <p:nvPr/>
         </p:nvSpPr>
         <p:spPr>
           <a:xfrm>
-            <a:off x="4754880" y="1554480"/>
-            <a:ext cx="2194560" cy="3749039"/>
-          </a:xfrm>
-          <a:prstGeom prst="roundRect">
-            <a:avLst/>
-          </a:prstGeom>
-          <a:solidFill>
-            <a:srgbClr val="FDE9D9"/>
-          </a:solidFill>
-          <a:ln w="12700">
-            <a:solidFill>
-              <a:srgbClr val="1F4E79"/>
-            </a:solidFill>
-          </a:ln>
-          <a:effectLst/>
-        </p:spPr>
-        <p:style>
-          <a:lnRef idx="1">
-            <a:schemeClr val="accent1"/>
-          </a:lnRef>
-          <a:fillRef idx="3">
-            <a:schemeClr val="accent1"/>
-          </a:fillRef>
-          <a:effectRef idx="2">
-            <a:schemeClr val="accent1"/>
-          </a:effectRef>
-          <a:fontRef idx="minor">
-            <a:schemeClr val="lt1"/>
-          </a:fontRef>
-        </p:style>
-        <p:txBody>
-          <a:bodyPr rtlCol="0" anchor="ctr" wrap="square"/>
-          <a:lstStyle/>
-          <a:p>
-            <a:pPr algn="ctr" rtl="1"/>
-            <a:r>
-              <a:rPr sz="1800" b="1">
-                <a:solidFill>
-                  <a:srgbClr val="333333"/>
+            <a:off x="640080" y="6400800"/>
+            <a:ext cx="8686800" cy="320040"/>
+          </a:xfrm>
+          <a:prstGeom prst="rect">
+            <a:avLst/>
+          </a:prstGeom>
+          <a:noFill/>
+        </p:spPr>
+        <p:txBody>
+          <a:bodyPr wrap="square">
+            <a:spAutoFit/>
+          </a:bodyPr>
+          <a:lstStyle/>
+          <a:p>
+            <a:pPr algn="r" rtl="1"/>
+            <a:r>
+              <a:rPr sz="1000" b="0">
+                <a:solidFill>
+                  <a:srgbClr val="666666"/>
                 </a:solidFill>
                 <a:latin typeface="Arial"/>
-                <a:cs typeface="Arial"/>
-                <a:ea typeface="Calibri"/>
-              </a:rPr>
-              <a:t>التوليد ~10x</a:t>
-            </a:r>
-          </a:p>
-          <a:p>
-            <a:pPr algn="ctr" rtl="0"/>
-            <a:r>
-              <a:rPr sz="1200">
-                <a:solidFill>
-                  <a:srgbClr val="666666"/>
-                </a:solidFill>
-                <a:latin typeface="Calibri"/>
-                <a:cs typeface="Arial"/>
-                <a:ea typeface="Calibri"/>
-              </a:rPr>
-              <a:t>Generation — costly</a:t>
-            </a:r>
-          </a:p>
-        </p:txBody>
-      </p:sp>
-      <p:sp>
-        <p:nvSpPr>
-          <p:cNvPr id="5" name="Rounded Rectangle 4"/>
-          <p:cNvSpPr/>
-          <p:nvPr/>
-        </p:nvSpPr>
-        <p:spPr>
-          <a:xfrm>
-            <a:off x="7863840" y="3108960"/>
-            <a:ext cx="2651760" cy="2194560"/>
-          </a:xfrm>
-          <a:prstGeom prst="roundRect">
-            <a:avLst/>
-          </a:prstGeom>
-          <a:solidFill>
-            <a:srgbClr val="DCE6F1"/>
-          </a:solidFill>
-          <a:ln w="12700">
-            <a:solidFill>
-              <a:srgbClr val="1F4E79"/>
-            </a:solidFill>
-          </a:ln>
-          <a:effectLst/>
-        </p:spPr>
-        <p:style>
-          <a:lnRef idx="1">
-            <a:schemeClr val="accent1"/>
-          </a:lnRef>
-          <a:fillRef idx="3">
-            <a:schemeClr val="accent1"/>
-          </a:fillRef>
-          <a:effectRef idx="2">
-            <a:schemeClr val="accent1"/>
-          </a:effectRef>
-          <a:fontRef idx="minor">
-            <a:schemeClr val="lt1"/>
-          </a:fontRef>
-        </p:style>
-        <p:txBody>
-          <a:bodyPr rtlCol="0" anchor="ctr" wrap="square"/>
-          <a:lstStyle/>
-          <a:p>
-            <a:pPr algn="ctr" rtl="1"/>
-            <a:r>
-              <a:rPr sz="1500" b="1">
-                <a:solidFill>
-                  <a:srgbClr val="333333"/>
-                </a:solidFill>
-                <a:latin typeface="Arial"/>
-                <a:cs typeface="Arial"/>
-                <a:ea typeface="Calibri"/>
-              </a:rPr>
-              <a:t>الحل: تخزين مؤقت + توجيه</a:t>
-            </a:r>
-          </a:p>
-          <a:p>
-            <a:pPr algn="ctr" rtl="0"/>
-            <a:r>
-              <a:rPr sz="1200">
-                <a:solidFill>
-                  <a:srgbClr val="666666"/>
-                </a:solidFill>
-                <a:latin typeface="Calibri"/>
-                <a:cs typeface="Arial"/>
-                <a:ea typeface="Calibri"/>
-              </a:rPr>
-              <a:t>Fix: caching + routing</a:t>
+              </a:rPr>
+              <a:t>Module 02 — Data &amp; AI Engineering Track  |  الوحدة الثانية</a:t>
             </a:r>
           </a:p>
         </p:txBody>
@@ -8310,8 +6682,8 @@
         </p:nvSpPr>
         <p:spPr>
           <a:xfrm>
-            <a:off x="640080" y="6126480"/>
-            <a:ext cx="10972800" cy="548640"/>
+            <a:off x="9601200" y="6400800"/>
+            <a:ext cx="1920240" cy="320040"/>
           </a:xfrm>
           <a:prstGeom prst="rect">
             <a:avLst/>
@@ -8324,176 +6696,15 @@
           </a:bodyPr>
           <a:lstStyle/>
           <a:p>
-            <a:pPr algn="r" rtl="1"/>
-            <a:r>
-              <a:rPr sz="1400">
+            <a:pPr algn="l" rtl="0"/>
+            <a:r>
+              <a:rPr sz="1000" b="0">
                 <a:solidFill>
                   <a:srgbClr val="666666"/>
                 </a:solidFill>
-                <a:latin typeface="Arial"/>
-                <a:cs typeface="Arial"/>
-                <a:ea typeface="Calibri"/>
-              </a:rPr>
-              <a:t>قاعدة FinOps: قِس التكلفة لكل طلب قبل التوسع.</a:t>
-            </a:r>
-          </a:p>
-          <a:p>
-            <a:pPr algn="r" rtl="0"/>
-            <a:r>
-              <a:rPr>
                 <a:latin typeface="Calibri"/>
-                <a:cs typeface="Arial"/>
-                <a:ea typeface="Calibri"/>
-              </a:rPr>
-              <a:t>FinOps rule: measure per-request cost before scaling.</a:t>
-            </a:r>
-          </a:p>
-        </p:txBody>
-      </p:sp>
-      <p:sp>
-        <p:nvSpPr>
-          <p:cNvPr id="7" name="TextBox 6"/>
-          <p:cNvSpPr txBox="1"/>
-          <p:nvPr/>
-        </p:nvSpPr>
-        <p:spPr>
-          <a:xfrm>
-            <a:off x="640080" y="6400800"/>
-            <a:ext cx="8686800" cy="320040"/>
-          </a:xfrm>
-          <a:prstGeom prst="rect">
-            <a:avLst/>
-          </a:prstGeom>
-          <a:noFill/>
-        </p:spPr>
-        <p:txBody>
-          <a:bodyPr wrap="square">
-            <a:spAutoFit/>
-          </a:bodyPr>
-          <a:lstStyle/>
-          <a:p>
-            <a:pPr algn="r" rtl="1"/>
-            <a:r>
-              <a:rPr sz="1000" b="0">
-                <a:solidFill>
-                  <a:srgbClr val="666666"/>
-                </a:solidFill>
-                <a:latin typeface="Arial"/>
-                <a:cs typeface="Arial"/>
-                <a:ea typeface="Calibri"/>
-              </a:rPr>
-              <a:t>Module 02 — Data &amp; AI Engineering Track  |  الوحدة الثانية</a:t>
-            </a:r>
-          </a:p>
-        </p:txBody>
-      </p:sp>
-      <p:sp>
-        <p:nvSpPr>
-          <p:cNvPr id="8" name="TextBox 7"/>
-          <p:cNvSpPr txBox="1"/>
-          <p:nvPr/>
-        </p:nvSpPr>
-        <p:spPr>
-          <a:xfrm>
-            <a:off x="9601200" y="6400800"/>
-            <a:ext cx="1920240" cy="320040"/>
-          </a:xfrm>
-          <a:prstGeom prst="rect">
-            <a:avLst/>
-          </a:prstGeom>
-          <a:noFill/>
-        </p:spPr>
-        <p:txBody>
-          <a:bodyPr wrap="square">
-            <a:spAutoFit/>
-          </a:bodyPr>
-          <a:lstStyle/>
-          <a:p>
-            <a:pPr algn="l" rtl="0"/>
-            <a:r>
-              <a:rPr sz="1000" b="0">
-                <a:solidFill>
-                  <a:srgbClr val="666666"/>
-                </a:solidFill>
-                <a:latin typeface="Calibri"/>
-                <a:cs typeface="Arial"/>
-                <a:ea typeface="Calibri"/>
-              </a:rPr>
-              <a:t>12_  •  8/12</a:t>
-            </a:r>
-          </a:p>
-        </p:txBody>
-      </p:sp>
-      <p:sp>
-        <p:nvSpPr>
-          <p:cNvPr id="9" name="TextBox 8"/>
-          <p:cNvSpPr txBox="1"/>
-          <p:nvPr/>
-        </p:nvSpPr>
-        <p:spPr>
-          <a:xfrm>
-            <a:off x="640080" y="6400800"/>
-            <a:ext cx="8686800" cy="320040"/>
-          </a:xfrm>
-          <a:prstGeom prst="rect">
-            <a:avLst/>
-          </a:prstGeom>
-          <a:noFill/>
-        </p:spPr>
-        <p:txBody>
-          <a:bodyPr wrap="square">
-            <a:spAutoFit/>
-          </a:bodyPr>
-          <a:lstStyle/>
-          <a:p>
-            <a:pPr algn="r" rtl="1"/>
-            <a:r>
-              <a:rPr sz="1000" b="0">
-                <a:solidFill>
-                  <a:srgbClr val="666666"/>
-                </a:solidFill>
-                <a:latin typeface="Arial"/>
-                <a:cs typeface="Arial"/>
-                <a:ea typeface="Calibri"/>
-              </a:rPr>
-              <a:t>Module 02 — Data &amp; AI Engineering Track  |  الوحدة الثانية</a:t>
-            </a:r>
-          </a:p>
-        </p:txBody>
-      </p:sp>
-      <p:sp>
-        <p:nvSpPr>
-          <p:cNvPr id="10" name="TextBox 9"/>
-          <p:cNvSpPr txBox="1"/>
-          <p:nvPr/>
-        </p:nvSpPr>
-        <p:spPr>
-          <a:xfrm>
-            <a:off x="9601200" y="6400800"/>
-            <a:ext cx="1920240" cy="320040"/>
-          </a:xfrm>
-          <a:prstGeom prst="rect">
-            <a:avLst/>
-          </a:prstGeom>
-          <a:noFill/>
-        </p:spPr>
-        <p:txBody>
-          <a:bodyPr wrap="square">
-            <a:spAutoFit/>
-          </a:bodyPr>
-          <a:lstStyle/>
-          <a:p>
-            <a:pPr algn="l" rtl="0"/>
-            <a:r>
-              <a:rPr sz="1000" b="0">
-                <a:solidFill>
-                  <a:srgbClr val="666666"/>
-                </a:solidFill>
-                <a:latin typeface="Calibri"/>
-                <a:cs typeface="Arial"/>
-                <a:ea typeface="Calibri"/>
-              </a:rPr>
-              <a:t>12_  •  8/12</a:t>
+              </a:rPr>
+              <a:t>V12  •  10/12</a:t>
             </a:r>
           </a:p>
         </p:txBody>
@@ -8599,10 +6810,8 @@
                   <a:srgbClr val="1F3B5C"/>
                 </a:solidFill>
                 <a:latin typeface="Arial"/>
-                <a:cs typeface="Arial"/>
-                <a:ea typeface="Calibri"/>
-              </a:rPr>
-              <a:t>تمهيد للمختبر L03 / Lab Introduction</a:t>
+              </a:rPr>
+              <a:t>إجابات الاختبار / Quiz Answers</a:t>
             </a:r>
           </a:p>
         </p:txBody>
@@ -8643,10 +6852,8 @@
                   <a:srgbClr val="333333"/>
                 </a:solidFill>
                 <a:latin typeface="Arial"/>
-                <a:cs typeface="Arial"/>
-                <a:ea typeface="Calibri"/>
-              </a:rPr>
-              <a:t>• المختبر: خط محلي خفيف — Python venv + SQLite مدمجة (Bronze/Silver) + ChromaDB (Gold) — دون Docker، بنقطة نهاية FastAPI على المسار /query.</a:t>
+              </a:rPr>
+              <a:t>• 1. الوكيل يستجيب ويستدعي أدوات؛ الوكيلي يخطط ذاتيًا وينفذ خطوات متعددة ويتكيف.</a:t>
             </a:r>
           </a:p>
           <a:p>
@@ -8664,10 +6871,84 @@
                   <a:srgbClr val="666666"/>
                 </a:solidFill>
                 <a:latin typeface="Calibri"/>
-                <a:cs typeface="Arial"/>
-                <a:ea typeface="Calibri"/>
-              </a:rPr>
-              <a:t>• The lab: lightweight local pipeline — Python venv + built-in SQLite (Bronze/Silver) + ChromaDB (Gold) — no Docker, ending in a FastAPI /query endpoint.</a:t>
+              </a:rPr>
+              <a:t>• An agent responds and calls tools; agentic AI self-plans multi-step execution.</a:t>
+            </a:r>
+          </a:p>
+          <a:p>
+            <a:pPr algn="r" rtl="1">
+              <a:spcBef>
+                <a:spcPts val="200"/>
+              </a:spcBef>
+              <a:spcAft>
+                <a:spcPts val="1000"/>
+              </a:spcAft>
+            </a:pPr>
+            <a:r>
+              <a:rPr sz="1800">
+                <a:solidFill>
+                  <a:srgbClr val="333333"/>
+                </a:solidFill>
+                <a:latin typeface="Arial"/>
+              </a:rPr>
+              <a:t>• 2. التضمين — أقل بتكلفة مرتبة كاملة.</a:t>
+            </a:r>
+          </a:p>
+          <a:p>
+            <a:pPr algn="l" rtl="0">
+              <a:spcBef>
+                <a:spcPts val="200"/>
+              </a:spcBef>
+              <a:spcAft>
+                <a:spcPts val="1000"/>
+              </a:spcAft>
+            </a:pPr>
+            <a:r>
+              <a:rPr sz="1500">
+                <a:solidFill>
+                  <a:srgbClr val="666666"/>
+                </a:solidFill>
+                <a:latin typeface="Calibri"/>
+              </a:rPr>
+              <a:t>• Embedding — roughly an order of magnitude cheaper.</a:t>
+            </a:r>
+          </a:p>
+          <a:p>
+            <a:pPr algn="r" rtl="1">
+              <a:spcBef>
+                <a:spcPts val="200"/>
+              </a:spcBef>
+              <a:spcAft>
+                <a:spcPts val="1000"/>
+              </a:spcAft>
+            </a:pPr>
+            <a:r>
+              <a:rPr sz="1800">
+                <a:solidFill>
+                  <a:srgbClr val="333333"/>
+                </a:solidFill>
+                <a:latin typeface="Arial"/>
+              </a:rPr>
+              <a:t>• 3. MLflow للتتبع وDVC لإصدارات البيانات.</a:t>
+            </a:r>
+          </a:p>
+          <a:p>
+            <a:pPr algn="l" rtl="0">
+              <a:spcBef>
+                <a:spcPts val="200"/>
+              </a:spcBef>
+              <a:spcAft>
+                <a:spcPts val="1000"/>
+              </a:spcAft>
+            </a:pPr>
+            <a:r>
+              <a:rPr sz="1500">
+                <a:solidFill>
+                  <a:srgbClr val="666666"/>
+                </a:solidFill>
+                <a:latin typeface="Calibri"/>
+              </a:rPr>
+              <a:t>• MLflow for tracking, DVC for data versioning.</a:t>
             </a:r>
           </a:p>
         </p:txBody>
@@ -8701,8 +6982,6 @@
                   <a:srgbClr val="666666"/>
                 </a:solidFill>
                 <a:latin typeface="Arial"/>
-                <a:cs typeface="Arial"/>
-                <a:ea typeface="Calibri"/>
               </a:rPr>
               <a:t>Module 02 — Data &amp; AI Engineering Track  |  الوحدة الثانية</a:t>
             </a:r>
@@ -8738,158 +7017,8 @@
                   <a:srgbClr val="666666"/>
                 </a:solidFill>
                 <a:latin typeface="Calibri"/>
-                <a:cs typeface="Arial"/>
-                <a:ea typeface="Calibri"/>
-              </a:rPr>
-              <a:t>V12  •  7/13</a:t>
-            </a:r>
-          </a:p>
-        </p:txBody>
-      </p:sp>
-      <p:sp>
-        <p:nvSpPr>
-          <p:cNvPr id="7" name="TextBox 6"/>
-          <p:cNvSpPr txBox="1"/>
-          <p:nvPr/>
-        </p:nvSpPr>
-        <p:spPr>
-          <a:xfrm>
-            <a:off x="640080" y="6400800"/>
-            <a:ext cx="8686800" cy="320040"/>
-          </a:xfrm>
-          <a:prstGeom prst="rect">
-            <a:avLst/>
-          </a:prstGeom>
-          <a:noFill/>
-        </p:spPr>
-        <p:txBody>
-          <a:bodyPr wrap="square">
-            <a:spAutoFit/>
-          </a:bodyPr>
-          <a:lstStyle/>
-          <a:p>
-            <a:pPr algn="r" rtl="1"/>
-            <a:r>
-              <a:rPr sz="1000" b="0">
-                <a:solidFill>
-                  <a:srgbClr val="666666"/>
-                </a:solidFill>
-                <a:latin typeface="Arial"/>
-                <a:cs typeface="Arial"/>
-                <a:ea typeface="Calibri"/>
-              </a:rPr>
-              <a:t>Module 02 — Data &amp; AI Engineering Track  |  الوحدة الثانية</a:t>
-            </a:r>
-          </a:p>
-        </p:txBody>
-      </p:sp>
-      <p:sp>
-        <p:nvSpPr>
-          <p:cNvPr id="8" name="TextBox 7"/>
-          <p:cNvSpPr txBox="1"/>
-          <p:nvPr/>
-        </p:nvSpPr>
-        <p:spPr>
-          <a:xfrm>
-            <a:off x="9601200" y="6400800"/>
-            <a:ext cx="1920240" cy="320040"/>
-          </a:xfrm>
-          <a:prstGeom prst="rect">
-            <a:avLst/>
-          </a:prstGeom>
-          <a:noFill/>
-        </p:spPr>
-        <p:txBody>
-          <a:bodyPr wrap="square">
-            <a:spAutoFit/>
-          </a:bodyPr>
-          <a:lstStyle/>
-          <a:p>
-            <a:pPr algn="l" rtl="0"/>
-            <a:r>
-              <a:rPr sz="1000" b="0">
-                <a:solidFill>
-                  <a:srgbClr val="666666"/>
-                </a:solidFill>
-                <a:latin typeface="Calibri"/>
-                <a:cs typeface="Arial"/>
-                <a:ea typeface="Calibri"/>
-              </a:rPr>
-              <a:t>12_  •  9/12</a:t>
-            </a:r>
-          </a:p>
-        </p:txBody>
-      </p:sp>
-      <p:sp>
-        <p:nvSpPr>
-          <p:cNvPr id="9" name="TextBox 8"/>
-          <p:cNvSpPr txBox="1"/>
-          <p:nvPr/>
-        </p:nvSpPr>
-        <p:spPr>
-          <a:xfrm>
-            <a:off x="640080" y="6400800"/>
-            <a:ext cx="8686800" cy="320040"/>
-          </a:xfrm>
-          <a:prstGeom prst="rect">
-            <a:avLst/>
-          </a:prstGeom>
-          <a:noFill/>
-        </p:spPr>
-        <p:txBody>
-          <a:bodyPr wrap="square">
-            <a:spAutoFit/>
-          </a:bodyPr>
-          <a:lstStyle/>
-          <a:p>
-            <a:pPr algn="r" rtl="1"/>
-            <a:r>
-              <a:rPr sz="1000" b="0">
-                <a:solidFill>
-                  <a:srgbClr val="666666"/>
-                </a:solidFill>
-                <a:latin typeface="Arial"/>
-                <a:cs typeface="Arial"/>
-                <a:ea typeface="Calibri"/>
-              </a:rPr>
-              <a:t>Module 02 — Data &amp; AI Engineering Track  |  الوحدة الثانية</a:t>
-            </a:r>
-          </a:p>
-        </p:txBody>
-      </p:sp>
-      <p:sp>
-        <p:nvSpPr>
-          <p:cNvPr id="10" name="TextBox 9"/>
-          <p:cNvSpPr txBox="1"/>
-          <p:nvPr/>
-        </p:nvSpPr>
-        <p:spPr>
-          <a:xfrm>
-            <a:off x="9601200" y="6400800"/>
-            <a:ext cx="1920240" cy="320040"/>
-          </a:xfrm>
-          <a:prstGeom prst="rect">
-            <a:avLst/>
-          </a:prstGeom>
-          <a:noFill/>
-        </p:spPr>
-        <p:txBody>
-          <a:bodyPr wrap="square">
-            <a:spAutoFit/>
-          </a:bodyPr>
-          <a:lstStyle/>
-          <a:p>
-            <a:pPr algn="l" rtl="0"/>
-            <a:r>
-              <a:rPr sz="1000" b="0">
-                <a:solidFill>
-                  <a:srgbClr val="666666"/>
-                </a:solidFill>
-                <a:latin typeface="Calibri"/>
-                <a:cs typeface="Arial"/>
-                <a:ea typeface="Calibri"/>
-              </a:rPr>
-              <a:t>12_  •  9/12</a:t>
+              </a:rPr>
+              <a:t>V12  •  11/12</a:t>
             </a:r>
           </a:p>
         </p:txBody>

--- a/output/Module02_V12_Updated.pptx
+++ b/output/Module02_V12_Updated.pptx
@@ -5,20 +5,22 @@
     <p:sldMasterId id="2147483648" r:id="rId1"/>
   </p:sldMasterIdLst>
   <p:sldIdLst>
-    <p:sldId id="256" r:id="rId7"/>
-    <p:sldId id="257" r:id="rId8"/>
-    <p:sldId id="258" r:id="rId9"/>
-    <p:sldId id="259" r:id="rId10"/>
-    <p:sldId id="266" r:id="rId17"/>
-    <p:sldId id="260" r:id="rId11"/>
-    <p:sldId id="261" r:id="rId12"/>
-    <p:sldId id="267" r:id="rId18"/>
-    <p:sldId id="262" r:id="rId13"/>
-    <p:sldId id="263" r:id="rId14"/>
-    <p:sldId id="264" r:id="rId15"/>
-    <p:sldId id="265" r:id="rId16"/>
+    <p:sldId id="256" r:id="rId2"/>
+    <p:sldId id="257" r:id="rId3"/>
+    <p:sldId id="258" r:id="rId4"/>
+    <p:sldId id="266" r:id="rId5"/>
+    <p:sldId id="259" r:id="rId6"/>
+    <p:sldId id="267" r:id="rId7"/>
+    <p:sldId id="260" r:id="rId8"/>
+    <p:sldId id="261" r:id="rId9"/>
+    <p:sldId id="268" r:id="rId10"/>
+    <p:sldId id="262" r:id="rId11"/>
+    <p:sldId id="269" r:id="rId12"/>
+    <p:sldId id="263" r:id="rId13"/>
+    <p:sldId id="264" r:id="rId14"/>
+    <p:sldId id="265" r:id="rId15"/>
   </p:sldIdLst>
-  <p:sldSz cx="12191695" cy="6858000" type="screen4x3"/>
+  <p:sldSz cx="12192000" cy="6858000"/>
   <p:notesSz cx="6858000" cy="9144000"/>
   <p:defaultTextStyle>
     <a:defPPr>
@@ -115,6 +117,22 @@
       </a:defRPr>
     </a:lvl9pPr>
   </p:defaultTextStyle>
+  <p:extLst>
+    <p:ext uri="{EFAFB233-063F-42B5-8137-9DF3F51BA10A}">
+      <p15:sldGuideLst xmlns:p15="http://schemas.microsoft.com/office/powerpoint/2012/main">
+        <p15:guide id="1" orient="horz" pos="2160">
+          <p15:clr>
+            <a:srgbClr val="A4A3A4"/>
+          </p15:clr>
+        </p15:guide>
+        <p15:guide id="2" pos="2880">
+          <p15:clr>
+            <a:srgbClr val="A4A3A4"/>
+          </p15:clr>
+        </p15:guide>
+      </p15:sldGuideLst>
+    </p:ext>
+  </p:extLst>
 </p:presentation>
 </file>
 
@@ -156,10 +174,9 @@
           <a:lstStyle/>
           <a:p>
             <a:r>
-              <a:rPr lang="en-US" smtClean="0"/>
+              <a:rPr lang="en-US"/>
               <a:t>Click to edit Master title style</a:t>
             </a:r>
-            <a:endParaRPr lang="en-US"/>
           </a:p>
         </p:txBody>
       </p:sp>
@@ -275,10 +292,9 @@
           </a:lstStyle>
           <a:p>
             <a:r>
-              <a:rPr lang="en-US" smtClean="0"/>
+              <a:rPr lang="en-US"/>
               <a:t>Click to edit Master subtitle style</a:t>
             </a:r>
-            <a:endParaRPr lang="en-US"/>
           </a:p>
         </p:txBody>
       </p:sp>
@@ -299,7 +315,7 @@
           <a:p>
             <a:fld id="{5BCAD085-E8A6-8845-BD4E-CB4CCA059FC4}" type="datetimeFigureOut">
               <a:rPr lang="en-US" smtClean="0"/>
-              <a:t>1/27/13</a:t>
+              <a:t>9/9/26</a:t>
             </a:fld>
             <a:endParaRPr lang="en-US"/>
           </a:p>
@@ -393,10 +409,9 @@
           <a:lstStyle/>
           <a:p>
             <a:r>
-              <a:rPr lang="en-US" smtClean="0"/>
+              <a:rPr lang="en-US"/>
               <a:t>Click to edit Master title style</a:t>
             </a:r>
-            <a:endParaRPr lang="en-US"/>
           </a:p>
         </p:txBody>
       </p:sp>
@@ -417,38 +432,37 @@
           <a:p>
             <a:pPr lvl="0"/>
             <a:r>
-              <a:rPr lang="en-US" smtClean="0"/>
+              <a:rPr lang="en-US"/>
               <a:t>Click to edit Master text styles</a:t>
             </a:r>
           </a:p>
           <a:p>
             <a:pPr lvl="1"/>
             <a:r>
-              <a:rPr lang="en-US" smtClean="0"/>
+              <a:rPr lang="en-US"/>
               <a:t>Second level</a:t>
             </a:r>
           </a:p>
           <a:p>
             <a:pPr lvl="2"/>
             <a:r>
-              <a:rPr lang="en-US" smtClean="0"/>
+              <a:rPr lang="en-US"/>
               <a:t>Third level</a:t>
             </a:r>
           </a:p>
           <a:p>
             <a:pPr lvl="3"/>
             <a:r>
-              <a:rPr lang="en-US" smtClean="0"/>
+              <a:rPr lang="en-US"/>
               <a:t>Fourth level</a:t>
             </a:r>
           </a:p>
           <a:p>
             <a:pPr lvl="4"/>
             <a:r>
-              <a:rPr lang="en-US" smtClean="0"/>
+              <a:rPr lang="en-US"/>
               <a:t>Fifth level</a:t>
             </a:r>
-            <a:endParaRPr lang="en-US"/>
           </a:p>
         </p:txBody>
       </p:sp>
@@ -469,7 +483,7 @@
           <a:p>
             <a:fld id="{5BCAD085-E8A6-8845-BD4E-CB4CCA059FC4}" type="datetimeFigureOut">
               <a:rPr lang="en-US" smtClean="0"/>
-              <a:t>1/27/13</a:t>
+              <a:t>9/9/26</a:t>
             </a:fld>
             <a:endParaRPr lang="en-US"/>
           </a:p>
@@ -568,10 +582,9 @@
           <a:lstStyle/>
           <a:p>
             <a:r>
-              <a:rPr lang="en-US" smtClean="0"/>
+              <a:rPr lang="en-US"/>
               <a:t>Click to edit Master title style</a:t>
             </a:r>
-            <a:endParaRPr lang="en-US"/>
           </a:p>
         </p:txBody>
       </p:sp>
@@ -597,38 +610,37 @@
           <a:p>
             <a:pPr lvl="0"/>
             <a:r>
-              <a:rPr lang="en-US" smtClean="0"/>
+              <a:rPr lang="en-US"/>
               <a:t>Click to edit Master text styles</a:t>
             </a:r>
           </a:p>
           <a:p>
             <a:pPr lvl="1"/>
             <a:r>
-              <a:rPr lang="en-US" smtClean="0"/>
+              <a:rPr lang="en-US"/>
               <a:t>Second level</a:t>
             </a:r>
           </a:p>
           <a:p>
             <a:pPr lvl="2"/>
             <a:r>
-              <a:rPr lang="en-US" smtClean="0"/>
+              <a:rPr lang="en-US"/>
               <a:t>Third level</a:t>
             </a:r>
           </a:p>
           <a:p>
             <a:pPr lvl="3"/>
             <a:r>
-              <a:rPr lang="en-US" smtClean="0"/>
+              <a:rPr lang="en-US"/>
               <a:t>Fourth level</a:t>
             </a:r>
           </a:p>
           <a:p>
             <a:pPr lvl="4"/>
             <a:r>
-              <a:rPr lang="en-US" smtClean="0"/>
+              <a:rPr lang="en-US"/>
               <a:t>Fifth level</a:t>
             </a:r>
-            <a:endParaRPr lang="en-US"/>
           </a:p>
         </p:txBody>
       </p:sp>
@@ -649,7 +661,7 @@
           <a:p>
             <a:fld id="{5BCAD085-E8A6-8845-BD4E-CB4CCA059FC4}" type="datetimeFigureOut">
               <a:rPr lang="en-US" smtClean="0"/>
-              <a:t>1/27/13</a:t>
+              <a:t>9/9/26</a:t>
             </a:fld>
             <a:endParaRPr lang="en-US"/>
           </a:p>
@@ -743,10 +755,9 @@
           <a:lstStyle/>
           <a:p>
             <a:r>
-              <a:rPr lang="en-US" smtClean="0"/>
+              <a:rPr lang="en-US"/>
               <a:t>Click to edit Master title style</a:t>
             </a:r>
-            <a:endParaRPr lang="en-US"/>
           </a:p>
         </p:txBody>
       </p:sp>
@@ -767,38 +778,37 @@
           <a:p>
             <a:pPr lvl="0"/>
             <a:r>
-              <a:rPr lang="en-US" smtClean="0"/>
+              <a:rPr lang="en-US"/>
               <a:t>Click to edit Master text styles</a:t>
             </a:r>
           </a:p>
           <a:p>
             <a:pPr lvl="1"/>
             <a:r>
-              <a:rPr lang="en-US" smtClean="0"/>
+              <a:rPr lang="en-US"/>
               <a:t>Second level</a:t>
             </a:r>
           </a:p>
           <a:p>
             <a:pPr lvl="2"/>
             <a:r>
-              <a:rPr lang="en-US" smtClean="0"/>
+              <a:rPr lang="en-US"/>
               <a:t>Third level</a:t>
             </a:r>
           </a:p>
           <a:p>
             <a:pPr lvl="3"/>
             <a:r>
-              <a:rPr lang="en-US" smtClean="0"/>
+              <a:rPr lang="en-US"/>
               <a:t>Fourth level</a:t>
             </a:r>
           </a:p>
           <a:p>
             <a:pPr lvl="4"/>
             <a:r>
-              <a:rPr lang="en-US" smtClean="0"/>
+              <a:rPr lang="en-US"/>
               <a:t>Fifth level</a:t>
             </a:r>
-            <a:endParaRPr lang="en-US"/>
           </a:p>
         </p:txBody>
       </p:sp>
@@ -819,7 +829,7 @@
           <a:p>
             <a:fld id="{5BCAD085-E8A6-8845-BD4E-CB4CCA059FC4}" type="datetimeFigureOut">
               <a:rPr lang="en-US" smtClean="0"/>
-              <a:t>1/27/13</a:t>
+              <a:t>9/9/26</a:t>
             </a:fld>
             <a:endParaRPr lang="en-US"/>
           </a:p>
@@ -922,10 +932,9 @@
           </a:lstStyle>
           <a:p>
             <a:r>
-              <a:rPr lang="en-US" smtClean="0"/>
+              <a:rPr lang="en-US"/>
               <a:t>Click to edit Master title style</a:t>
             </a:r>
-            <a:endParaRPr lang="en-US"/>
           </a:p>
         </p:txBody>
       </p:sp>
@@ -1042,7 +1051,7 @@
           <a:p>
             <a:pPr lvl="0"/>
             <a:r>
-              <a:rPr lang="en-US" smtClean="0"/>
+              <a:rPr lang="en-US"/>
               <a:t>Click to edit Master text styles</a:t>
             </a:r>
           </a:p>
@@ -1065,7 +1074,7 @@
           <a:p>
             <a:fld id="{5BCAD085-E8A6-8845-BD4E-CB4CCA059FC4}" type="datetimeFigureOut">
               <a:rPr lang="en-US" smtClean="0"/>
-              <a:t>1/27/13</a:t>
+              <a:t>9/9/26</a:t>
             </a:fld>
             <a:endParaRPr lang="en-US"/>
           </a:p>
@@ -1159,10 +1168,9 @@
           <a:lstStyle/>
           <a:p>
             <a:r>
-              <a:rPr lang="en-US" smtClean="0"/>
+              <a:rPr lang="en-US"/>
               <a:t>Click to edit Master title style</a:t>
             </a:r>
-            <a:endParaRPr lang="en-US"/>
           </a:p>
         </p:txBody>
       </p:sp>
@@ -1216,38 +1224,37 @@
           <a:p>
             <a:pPr lvl="0"/>
             <a:r>
-              <a:rPr lang="en-US" smtClean="0"/>
+              <a:rPr lang="en-US"/>
               <a:t>Click to edit Master text styles</a:t>
             </a:r>
           </a:p>
           <a:p>
             <a:pPr lvl="1"/>
             <a:r>
-              <a:rPr lang="en-US" smtClean="0"/>
+              <a:rPr lang="en-US"/>
               <a:t>Second level</a:t>
             </a:r>
           </a:p>
           <a:p>
             <a:pPr lvl="2"/>
             <a:r>
-              <a:rPr lang="en-US" smtClean="0"/>
+              <a:rPr lang="en-US"/>
               <a:t>Third level</a:t>
             </a:r>
           </a:p>
           <a:p>
             <a:pPr lvl="3"/>
             <a:r>
-              <a:rPr lang="en-US" smtClean="0"/>
+              <a:rPr lang="en-US"/>
               <a:t>Fourth level</a:t>
             </a:r>
           </a:p>
           <a:p>
             <a:pPr lvl="4"/>
             <a:r>
-              <a:rPr lang="en-US" smtClean="0"/>
+              <a:rPr lang="en-US"/>
               <a:t>Fifth level</a:t>
             </a:r>
-            <a:endParaRPr lang="en-US"/>
           </a:p>
         </p:txBody>
       </p:sp>
@@ -1301,38 +1308,37 @@
           <a:p>
             <a:pPr lvl="0"/>
             <a:r>
-              <a:rPr lang="en-US" smtClean="0"/>
+              <a:rPr lang="en-US"/>
               <a:t>Click to edit Master text styles</a:t>
             </a:r>
           </a:p>
           <a:p>
             <a:pPr lvl="1"/>
             <a:r>
-              <a:rPr lang="en-US" smtClean="0"/>
+              <a:rPr lang="en-US"/>
               <a:t>Second level</a:t>
             </a:r>
           </a:p>
           <a:p>
             <a:pPr lvl="2"/>
             <a:r>
-              <a:rPr lang="en-US" smtClean="0"/>
+              <a:rPr lang="en-US"/>
               <a:t>Third level</a:t>
             </a:r>
           </a:p>
           <a:p>
             <a:pPr lvl="3"/>
             <a:r>
-              <a:rPr lang="en-US" smtClean="0"/>
+              <a:rPr lang="en-US"/>
               <a:t>Fourth level</a:t>
             </a:r>
           </a:p>
           <a:p>
             <a:pPr lvl="4"/>
             <a:r>
-              <a:rPr lang="en-US" smtClean="0"/>
+              <a:rPr lang="en-US"/>
               <a:t>Fifth level</a:t>
             </a:r>
-            <a:endParaRPr lang="en-US"/>
           </a:p>
         </p:txBody>
       </p:sp>
@@ -1353,7 +1359,7 @@
           <a:p>
             <a:fld id="{5BCAD085-E8A6-8845-BD4E-CB4CCA059FC4}" type="datetimeFigureOut">
               <a:rPr lang="en-US" smtClean="0"/>
-              <a:t>1/27/13</a:t>
+              <a:t>9/9/26</a:t>
             </a:fld>
             <a:endParaRPr lang="en-US"/>
           </a:p>
@@ -1451,10 +1457,9 @@
           </a:lstStyle>
           <a:p>
             <a:r>
-              <a:rPr lang="en-US" smtClean="0"/>
+              <a:rPr lang="en-US"/>
               <a:t>Click to edit Master title style</a:t>
             </a:r>
-            <a:endParaRPr lang="en-US"/>
           </a:p>
         </p:txBody>
       </p:sp>
@@ -1517,7 +1522,7 @@
           <a:p>
             <a:pPr lvl="0"/>
             <a:r>
-              <a:rPr lang="en-US" smtClean="0"/>
+              <a:rPr lang="en-US"/>
               <a:t>Click to edit Master text styles</a:t>
             </a:r>
           </a:p>
@@ -1573,38 +1578,37 @@
           <a:p>
             <a:pPr lvl="0"/>
             <a:r>
-              <a:rPr lang="en-US" smtClean="0"/>
+              <a:rPr lang="en-US"/>
               <a:t>Click to edit Master text styles</a:t>
             </a:r>
           </a:p>
           <a:p>
             <a:pPr lvl="1"/>
             <a:r>
-              <a:rPr lang="en-US" smtClean="0"/>
+              <a:rPr lang="en-US"/>
               <a:t>Second level</a:t>
             </a:r>
           </a:p>
           <a:p>
             <a:pPr lvl="2"/>
             <a:r>
-              <a:rPr lang="en-US" smtClean="0"/>
+              <a:rPr lang="en-US"/>
               <a:t>Third level</a:t>
             </a:r>
           </a:p>
           <a:p>
             <a:pPr lvl="3"/>
             <a:r>
-              <a:rPr lang="en-US" smtClean="0"/>
+              <a:rPr lang="en-US"/>
               <a:t>Fourth level</a:t>
             </a:r>
           </a:p>
           <a:p>
             <a:pPr lvl="4"/>
             <a:r>
-              <a:rPr lang="en-US" smtClean="0"/>
+              <a:rPr lang="en-US"/>
               <a:t>Fifth level</a:t>
             </a:r>
-            <a:endParaRPr lang="en-US"/>
           </a:p>
         </p:txBody>
       </p:sp>
@@ -1667,7 +1671,7 @@
           <a:p>
             <a:pPr lvl="0"/>
             <a:r>
-              <a:rPr lang="en-US" smtClean="0"/>
+              <a:rPr lang="en-US"/>
               <a:t>Click to edit Master text styles</a:t>
             </a:r>
           </a:p>
@@ -1723,38 +1727,37 @@
           <a:p>
             <a:pPr lvl="0"/>
             <a:r>
-              <a:rPr lang="en-US" smtClean="0"/>
+              <a:rPr lang="en-US"/>
               <a:t>Click to edit Master text styles</a:t>
             </a:r>
           </a:p>
           <a:p>
             <a:pPr lvl="1"/>
             <a:r>
-              <a:rPr lang="en-US" smtClean="0"/>
+              <a:rPr lang="en-US"/>
               <a:t>Second level</a:t>
             </a:r>
           </a:p>
           <a:p>
             <a:pPr lvl="2"/>
             <a:r>
-              <a:rPr lang="en-US" smtClean="0"/>
+              <a:rPr lang="en-US"/>
               <a:t>Third level</a:t>
             </a:r>
           </a:p>
           <a:p>
             <a:pPr lvl="3"/>
             <a:r>
-              <a:rPr lang="en-US" smtClean="0"/>
+              <a:rPr lang="en-US"/>
               <a:t>Fourth level</a:t>
             </a:r>
           </a:p>
           <a:p>
             <a:pPr lvl="4"/>
             <a:r>
-              <a:rPr lang="en-US" smtClean="0"/>
+              <a:rPr lang="en-US"/>
               <a:t>Fifth level</a:t>
             </a:r>
-            <a:endParaRPr lang="en-US"/>
           </a:p>
         </p:txBody>
       </p:sp>
@@ -1775,7 +1778,7 @@
           <a:p>
             <a:fld id="{5BCAD085-E8A6-8845-BD4E-CB4CCA059FC4}" type="datetimeFigureOut">
               <a:rPr lang="en-US" smtClean="0"/>
-              <a:t>1/27/13</a:t>
+              <a:t>9/9/26</a:t>
             </a:fld>
             <a:endParaRPr lang="en-US"/>
           </a:p>
@@ -1869,10 +1872,9 @@
           <a:lstStyle/>
           <a:p>
             <a:r>
-              <a:rPr lang="en-US" smtClean="0"/>
+              <a:rPr lang="en-US"/>
               <a:t>Click to edit Master title style</a:t>
             </a:r>
-            <a:endParaRPr lang="en-US"/>
           </a:p>
         </p:txBody>
       </p:sp>
@@ -1893,7 +1895,7 @@
           <a:p>
             <a:fld id="{5BCAD085-E8A6-8845-BD4E-CB4CCA059FC4}" type="datetimeFigureOut">
               <a:rPr lang="en-US" smtClean="0"/>
-              <a:t>1/27/13</a:t>
+              <a:t>9/9/26</a:t>
             </a:fld>
             <a:endParaRPr lang="en-US"/>
           </a:p>
@@ -1988,7 +1990,7 @@
           <a:p>
             <a:fld id="{5BCAD085-E8A6-8845-BD4E-CB4CCA059FC4}" type="datetimeFigureOut">
               <a:rPr lang="en-US" smtClean="0"/>
-              <a:t>1/27/13</a:t>
+              <a:t>9/9/26</a:t>
             </a:fld>
             <a:endParaRPr lang="en-US"/>
           </a:p>
@@ -2091,10 +2093,9 @@
           </a:lstStyle>
           <a:p>
             <a:r>
-              <a:rPr lang="en-US" smtClean="0"/>
+              <a:rPr lang="en-US"/>
               <a:t>Click to edit Master title style</a:t>
             </a:r>
-            <a:endParaRPr lang="en-US"/>
           </a:p>
         </p:txBody>
       </p:sp>
@@ -2148,38 +2149,37 @@
           <a:p>
             <a:pPr lvl="0"/>
             <a:r>
-              <a:rPr lang="en-US" smtClean="0"/>
+              <a:rPr lang="en-US"/>
               <a:t>Click to edit Master text styles</a:t>
             </a:r>
           </a:p>
           <a:p>
             <a:pPr lvl="1"/>
             <a:r>
-              <a:rPr lang="en-US" smtClean="0"/>
+              <a:rPr lang="en-US"/>
               <a:t>Second level</a:t>
             </a:r>
           </a:p>
           <a:p>
             <a:pPr lvl="2"/>
             <a:r>
-              <a:rPr lang="en-US" smtClean="0"/>
+              <a:rPr lang="en-US"/>
               <a:t>Third level</a:t>
             </a:r>
           </a:p>
           <a:p>
             <a:pPr lvl="3"/>
             <a:r>
-              <a:rPr lang="en-US" smtClean="0"/>
+              <a:rPr lang="en-US"/>
               <a:t>Fourth level</a:t>
             </a:r>
           </a:p>
           <a:p>
             <a:pPr lvl="4"/>
             <a:r>
-              <a:rPr lang="en-US" smtClean="0"/>
+              <a:rPr lang="en-US"/>
               <a:t>Fifth level</a:t>
             </a:r>
-            <a:endParaRPr lang="en-US"/>
           </a:p>
         </p:txBody>
       </p:sp>
@@ -2242,7 +2242,7 @@
           <a:p>
             <a:pPr lvl="0"/>
             <a:r>
-              <a:rPr lang="en-US" smtClean="0"/>
+              <a:rPr lang="en-US"/>
               <a:t>Click to edit Master text styles</a:t>
             </a:r>
           </a:p>
@@ -2265,7 +2265,7 @@
           <a:p>
             <a:fld id="{5BCAD085-E8A6-8845-BD4E-CB4CCA059FC4}" type="datetimeFigureOut">
               <a:rPr lang="en-US" smtClean="0"/>
-              <a:t>1/27/13</a:t>
+              <a:t>9/9/26</a:t>
             </a:fld>
             <a:endParaRPr lang="en-US"/>
           </a:p>
@@ -2368,10 +2368,9 @@
           </a:lstStyle>
           <a:p>
             <a:r>
-              <a:rPr lang="en-US" smtClean="0"/>
+              <a:rPr lang="en-US"/>
               <a:t>Click to edit Master title style</a:t>
             </a:r>
-            <a:endParaRPr lang="en-US"/>
           </a:p>
         </p:txBody>
       </p:sp>
@@ -2495,7 +2494,7 @@
           <a:p>
             <a:pPr lvl="0"/>
             <a:r>
-              <a:rPr lang="en-US" smtClean="0"/>
+              <a:rPr lang="en-US"/>
               <a:t>Click to edit Master text styles</a:t>
             </a:r>
           </a:p>
@@ -2518,7 +2517,7 @@
           <a:p>
             <a:fld id="{5BCAD085-E8A6-8845-BD4E-CB4CCA059FC4}" type="datetimeFigureOut">
               <a:rPr lang="en-US" smtClean="0"/>
-              <a:t>1/27/13</a:t>
+              <a:t>9/9/26</a:t>
             </a:fld>
             <a:endParaRPr lang="en-US"/>
           </a:p>
@@ -2627,10 +2626,9 @@
           <a:lstStyle/>
           <a:p>
             <a:r>
-              <a:rPr lang="en-US" smtClean="0"/>
+              <a:rPr lang="en-US"/>
               <a:t>Click to edit Master title style</a:t>
             </a:r>
-            <a:endParaRPr lang="en-US"/>
           </a:p>
         </p:txBody>
       </p:sp>
@@ -2661,38 +2659,37 @@
           <a:p>
             <a:pPr lvl="0"/>
             <a:r>
-              <a:rPr lang="en-US" smtClean="0"/>
+              <a:rPr lang="en-US"/>
               <a:t>Click to edit Master text styles</a:t>
             </a:r>
           </a:p>
           <a:p>
             <a:pPr lvl="1"/>
             <a:r>
-              <a:rPr lang="en-US" smtClean="0"/>
+              <a:rPr lang="en-US"/>
               <a:t>Second level</a:t>
             </a:r>
           </a:p>
           <a:p>
             <a:pPr lvl="2"/>
             <a:r>
-              <a:rPr lang="en-US" smtClean="0"/>
+              <a:rPr lang="en-US"/>
               <a:t>Third level</a:t>
             </a:r>
           </a:p>
           <a:p>
             <a:pPr lvl="3"/>
             <a:r>
-              <a:rPr lang="en-US" smtClean="0"/>
+              <a:rPr lang="en-US"/>
               <a:t>Fourth level</a:t>
             </a:r>
           </a:p>
           <a:p>
             <a:pPr lvl="4"/>
             <a:r>
-              <a:rPr lang="en-US" smtClean="0"/>
+              <a:rPr lang="en-US"/>
               <a:t>Fifth level</a:t>
             </a:r>
-            <a:endParaRPr lang="en-US"/>
           </a:p>
         </p:txBody>
       </p:sp>
@@ -2731,7 +2728,7 @@
           <a:p>
             <a:fld id="{5BCAD085-E8A6-8845-BD4E-CB4CCA059FC4}" type="datetimeFigureOut">
               <a:rPr lang="en-US" smtClean="0"/>
-              <a:t>1/27/13</a:t>
+              <a:t>9/9/26</a:t>
             </a:fld>
             <a:endParaRPr lang="en-US"/>
           </a:p>
@@ -3090,7 +3087,7 @@
 </file>
 
 <file path=ppt/slides/slide1.xml><?xml version="1.0" encoding="utf-8"?>
-<p:sld xmlns:a="http://schemas.openxmlformats.org/drawingml/2006/main" xmlns:p="http://schemas.openxmlformats.org/presentationml/2006/main" xmlns:r="http://schemas.openxmlformats.org/officeDocument/2006/relationships">
+<p:sld xmlns:a="http://schemas.openxmlformats.org/drawingml/2006/main" xmlns:r="http://schemas.openxmlformats.org/officeDocument/2006/relationships" xmlns:p="http://schemas.openxmlformats.org/presentationml/2006/main">
   <p:cSld>
     <p:bg>
       <p:bgPr>
@@ -3106,7 +3103,14 @@
         <p:cNvGrpSpPr/>
         <p:nvPr/>
       </p:nvGrpSpPr>
-      <p:grpSpPr/>
+      <p:grpSpPr>
+        <a:xfrm>
+          <a:off x="0" y="0"/>
+          <a:ext cx="0" cy="0"/>
+          <a:chOff x="0" y="0"/>
+          <a:chExt cx="0" cy="0"/>
+        </a:xfrm>
+      </p:grpSpPr>
       <p:sp>
         <p:nvSpPr>
           <p:cNvPr id="2" name="TextBox 1"/>
@@ -3312,7 +3316,7 @@
                 </a:solidFill>
                 <a:latin typeface="Calibri"/>
               </a:rPr>
-              <a:t>V12  •  1/12</a:t>
+              <a:t>V12  •  1/13</a:t>
             </a:r>
           </a:p>
         </p:txBody>
@@ -3326,7 +3330,7 @@
 </file>
 
 <file path=ppt/slides/slide10.xml><?xml version="1.0" encoding="utf-8"?>
-<p:sld xmlns:a="http://schemas.openxmlformats.org/drawingml/2006/main" xmlns:p="http://schemas.openxmlformats.org/presentationml/2006/main" xmlns:r="http://schemas.openxmlformats.org/officeDocument/2006/relationships">
+<p:sld xmlns:a="http://schemas.openxmlformats.org/drawingml/2006/main" xmlns:r="http://schemas.openxmlformats.org/officeDocument/2006/relationships" xmlns:p="http://schemas.openxmlformats.org/presentationml/2006/main">
   <p:cSld>
     <p:bg>
       <p:bgPr>
@@ -3342,7 +3346,14 @@
         <p:cNvGrpSpPr/>
         <p:nvPr/>
       </p:nvGrpSpPr>
-      <p:grpSpPr/>
+      <p:grpSpPr>
+        <a:xfrm>
+          <a:off x="0" y="0"/>
+          <a:ext cx="0" cy="0"/>
+          <a:chOff x="0" y="0"/>
+          <a:chExt cx="0" cy="0"/>
+        </a:xfrm>
+      </p:grpSpPr>
       <p:sp>
         <p:nvSpPr>
           <p:cNvPr id="2" name="Rectangle 1"/>
@@ -3386,6 +3397,7 @@
           <a:lstStyle/>
           <a:p>
             <a:pPr algn="ctr"/>
+            <a:endParaRPr/>
           </a:p>
         </p:txBody>
       </p:sp>
@@ -3419,7 +3431,7 @@
                 </a:solidFill>
                 <a:latin typeface="Arial"/>
               </a:rPr>
-              <a:t>للاستزادة / Further Reading</a:t>
+              <a:t>تمهيد للمختبر L03 / Lab Introduction</a:t>
             </a:r>
           </a:p>
         </p:txBody>
@@ -3455,13 +3467,13 @@
               </a:spcAft>
             </a:pPr>
             <a:r>
-              <a:rPr sz="2000">
+              <a:rPr sz="1800">
                 <a:solidFill>
                   <a:srgbClr val="333333"/>
                 </a:solidFill>
                 <a:latin typeface="Arial"/>
               </a:rPr>
-              <a:t>• توثيق MLflow وDVC.</a:t>
+              <a:t>• المختبر: خط محلي خفيف — Python venv + SQLite مدمجة (Bronze/Silver) + ChromaDB (Gold) — دون Docker، بنقطة نهاية FastAPI على المسار /query.</a:t>
             </a:r>
           </a:p>
           <a:p>
@@ -3474,51 +3486,13 @@
               </a:spcAft>
             </a:pPr>
             <a:r>
-              <a:rPr sz="1700">
+              <a:rPr sz="1500">
                 <a:solidFill>
                   <a:srgbClr val="666666"/>
                 </a:solidFill>
                 <a:latin typeface="Calibri"/>
               </a:rPr>
-              <a:t>• MLflow and DVC docs.</a:t>
-            </a:r>
-          </a:p>
-          <a:p>
-            <a:pPr algn="r" rtl="1">
-              <a:spcBef>
-                <a:spcPts val="200"/>
-              </a:spcBef>
-              <a:spcAft>
-                <a:spcPts val="1000"/>
-              </a:spcAft>
-            </a:pPr>
-            <a:r>
-              <a:rPr sz="2000">
-                <a:solidFill>
-                  <a:srgbClr val="333333"/>
-                </a:solidFill>
-                <a:latin typeface="Arial"/>
-              </a:rPr>
-              <a:t>• دليل تجهيز البيئة للمختبر L03.</a:t>
-            </a:r>
-          </a:p>
-          <a:p>
-            <a:pPr algn="l" rtl="0">
-              <a:spcBef>
-                <a:spcPts val="200"/>
-              </a:spcBef>
-              <a:spcAft>
-                <a:spcPts val="1000"/>
-              </a:spcAft>
-            </a:pPr>
-            <a:r>
-              <a:rPr sz="1700">
-                <a:solidFill>
-                  <a:srgbClr val="666666"/>
-                </a:solidFill>
-                <a:latin typeface="Calibri"/>
-              </a:rPr>
-              <a:t>• L03 Environment Setup Guide.</a:t>
+              <a:t>• The lab: lightweight local pipeline — Python venv + built-in SQLite (Bronze/Silver) + ChromaDB (Gold) — no Docker, ending in a FastAPI /query endpoint.</a:t>
             </a:r>
           </a:p>
         </p:txBody>
@@ -3588,7 +3562,7 @@
                 </a:solidFill>
                 <a:latin typeface="Calibri"/>
               </a:rPr>
-              <a:t>V12  •  12/12</a:t>
+              <a:t>V12  •  10/13</a:t>
             </a:r>
           </a:p>
         </p:txBody>
@@ -3602,7 +3576,376 @@
 </file>
 
 <file path=ppt/slides/slide11.xml><?xml version="1.0" encoding="utf-8"?>
-<p:sld xmlns:a="http://schemas.openxmlformats.org/drawingml/2006/main" xmlns:p="http://schemas.openxmlformats.org/presentationml/2006/main" xmlns:r="http://schemas.openxmlformats.org/officeDocument/2006/relationships">
+<p:sld xmlns:a="http://schemas.openxmlformats.org/drawingml/2006/main" xmlns:r="http://schemas.openxmlformats.org/officeDocument/2006/relationships" xmlns:p="http://schemas.openxmlformats.org/presentationml/2006/main">
+  <p:cSld>
+    <p:spTree>
+      <p:nvGrpSpPr>
+        <p:cNvPr id="1" name=""/>
+        <p:cNvGrpSpPr/>
+        <p:nvPr/>
+      </p:nvGrpSpPr>
+      <p:grpSpPr>
+        <a:xfrm>
+          <a:off x="0" y="0"/>
+          <a:ext cx="0" cy="0"/>
+          <a:chOff x="0" y="0"/>
+          <a:chExt cx="0" cy="0"/>
+        </a:xfrm>
+      </p:grpSpPr>
+      <p:sp>
+        <p:nvSpPr>
+          <p:cNvPr id="2" name="TextBox 1"/>
+          <p:cNvSpPr txBox="1"/>
+          <p:nvPr/>
+        </p:nvSpPr>
+        <p:spPr>
+          <a:xfrm>
+            <a:off x="640080" y="137160"/>
+            <a:ext cx="10972800" cy="640080"/>
+          </a:xfrm>
+          <a:prstGeom prst="rect">
+            <a:avLst/>
+          </a:prstGeom>
+          <a:noFill/>
+        </p:spPr>
+        <p:txBody>
+          <a:bodyPr wrap="none">
+            <a:spAutoFit/>
+          </a:bodyPr>
+          <a:lstStyle/>
+          <a:p>
+            <a:pPr algn="r" rtl="1"/>
+            <a:r>
+              <a:rPr sz="3000" b="1">
+                <a:solidFill>
+                  <a:srgbClr val="1F3B5C"/>
+                </a:solidFill>
+                <a:latin typeface="Arial"/>
+              </a:rPr>
+              <a:t>معمارية مختبر L03 / L03 Lab Architecture</a:t>
+            </a:r>
+          </a:p>
+        </p:txBody>
+      </p:sp>
+      <p:sp>
+        <p:nvSpPr>
+          <p:cNvPr id="3" name="Rounded Rectangle 2"/>
+          <p:cNvSpPr/>
+          <p:nvPr/>
+        </p:nvSpPr>
+        <p:spPr>
+          <a:xfrm>
+            <a:off x="640080" y="1051560"/>
+            <a:ext cx="10972800" cy="1120140"/>
+          </a:xfrm>
+          <a:prstGeom prst="roundRect">
+            <a:avLst/>
+          </a:prstGeom>
+          <a:solidFill>
+            <a:srgbClr val="DCE6F1"/>
+          </a:solidFill>
+          <a:ln w="12700">
+            <a:solidFill>
+              <a:srgbClr val="1F4E79"/>
+            </a:solidFill>
+          </a:ln>
+          <a:effectLst/>
+        </p:spPr>
+        <p:style>
+          <a:lnRef idx="1">
+            <a:schemeClr val="accent1"/>
+          </a:lnRef>
+          <a:fillRef idx="3">
+            <a:schemeClr val="accent1"/>
+          </a:fillRef>
+          <a:effectRef idx="2">
+            <a:schemeClr val="accent1"/>
+          </a:effectRef>
+          <a:fontRef idx="minor">
+            <a:schemeClr val="lt1"/>
+          </a:fontRef>
+        </p:style>
+        <p:txBody>
+          <a:bodyPr wrap="square" rtlCol="0" anchor="ctr"/>
+          <a:lstStyle/>
+          <a:p>
+            <a:pPr algn="ctr" rtl="1"/>
+            <a:r>
+              <a:rPr sz="1500" b="1">
+                <a:solidFill>
+                  <a:srgbClr val="333333"/>
+                </a:solidFill>
+                <a:latin typeface="Arial"/>
+              </a:rPr>
+              <a:t>خط ETL ‏(etl_pipeline.py):‏ Bronze ‏(SQLite خام) ← Silver ‏(تنظيف + تقسيم 500/50) ← Gold ‏(ChromaDB HNSW cosine، دفعات 10)</a:t>
+            </a:r>
+          </a:p>
+          <a:p>
+            <a:pPr algn="ctr" rtl="0"/>
+            <a:r>
+              <a:rPr sz="1200">
+                <a:solidFill>
+                  <a:srgbClr val="666666"/>
+                </a:solidFill>
+                <a:latin typeface="Calibri"/>
+              </a:rPr>
+              <a:t>ETL (etl_pipeline.py): Bronze (raw SQLite) → Silver (clean + 500/50 chunk) → Gold (ChromaDB HNSW cosine, batches of 10)</a:t>
+            </a:r>
+          </a:p>
+        </p:txBody>
+      </p:sp>
+      <p:sp>
+        <p:nvSpPr>
+          <p:cNvPr id="4" name="Rounded Rectangle 3"/>
+          <p:cNvSpPr/>
+          <p:nvPr/>
+        </p:nvSpPr>
+        <p:spPr>
+          <a:xfrm>
+            <a:off x="640080" y="2263140"/>
+            <a:ext cx="10972800" cy="1120140"/>
+          </a:xfrm>
+          <a:prstGeom prst="roundRect">
+            <a:avLst/>
+          </a:prstGeom>
+          <a:solidFill>
+            <a:srgbClr val="E2EFDA"/>
+          </a:solidFill>
+          <a:ln w="12700">
+            <a:solidFill>
+              <a:srgbClr val="1F4E79"/>
+            </a:solidFill>
+          </a:ln>
+          <a:effectLst/>
+        </p:spPr>
+        <p:style>
+          <a:lnRef idx="1">
+            <a:schemeClr val="accent1"/>
+          </a:lnRef>
+          <a:fillRef idx="3">
+            <a:schemeClr val="accent1"/>
+          </a:fillRef>
+          <a:effectRef idx="2">
+            <a:schemeClr val="accent1"/>
+          </a:effectRef>
+          <a:fontRef idx="minor">
+            <a:schemeClr val="lt1"/>
+          </a:fontRef>
+        </p:style>
+        <p:txBody>
+          <a:bodyPr wrap="square" rtlCol="0" anchor="ctr"/>
+          <a:lstStyle/>
+          <a:p>
+            <a:pPr algn="ctr" rtl="1"/>
+            <a:r>
+              <a:rPr sz="1500" b="1">
+                <a:solidFill>
+                  <a:srgbClr val="333333"/>
+                </a:solidFill>
+                <a:latin typeface="Arial"/>
+              </a:rPr>
+              <a:t>الخلفية ‏(rag_api.py:8000):‏ استرجاع كثيف top-k=5 حد 0.2 ← توليد مؤرَّض OpenRouter free ← كاش دلالي 0.92 ← تقييم golden (12 سؤالًا)</a:t>
+            </a:r>
+          </a:p>
+          <a:p>
+            <a:pPr algn="ctr" rtl="0"/>
+            <a:r>
+              <a:rPr sz="1200">
+                <a:solidFill>
+                  <a:srgbClr val="666666"/>
+                </a:solidFill>
+                <a:latin typeface="Calibri"/>
+              </a:rPr>
+              <a:t>Backend (rag_api.py :8000): dense top-k=5 ≥0.2 → grounded OpenRouter free → semantic cache 0.92 → golden eval (12 Q)</a:t>
+            </a:r>
+          </a:p>
+        </p:txBody>
+      </p:sp>
+      <p:sp>
+        <p:nvSpPr>
+          <p:cNvPr id="5" name="Rounded Rectangle 4"/>
+          <p:cNvSpPr/>
+          <p:nvPr/>
+        </p:nvSpPr>
+        <p:spPr>
+          <a:xfrm>
+            <a:off x="640080" y="3474720"/>
+            <a:ext cx="10972800" cy="1120140"/>
+          </a:xfrm>
+          <a:prstGeom prst="roundRect">
+            <a:avLst/>
+          </a:prstGeom>
+          <a:solidFill>
+            <a:srgbClr val="FDE9D9"/>
+          </a:solidFill>
+          <a:ln w="12700">
+            <a:solidFill>
+              <a:srgbClr val="1F4E79"/>
+            </a:solidFill>
+          </a:ln>
+          <a:effectLst/>
+        </p:spPr>
+        <p:style>
+          <a:lnRef idx="1">
+            <a:schemeClr val="accent1"/>
+          </a:lnRef>
+          <a:fillRef idx="3">
+            <a:schemeClr val="accent1"/>
+          </a:fillRef>
+          <a:effectRef idx="2">
+            <a:schemeClr val="accent1"/>
+          </a:effectRef>
+          <a:fontRef idx="minor">
+            <a:schemeClr val="lt1"/>
+          </a:fontRef>
+        </p:style>
+        <p:txBody>
+          <a:bodyPr wrap="square" rtlCol="0" anchor="ctr"/>
+          <a:lstStyle/>
+          <a:p>
+            <a:pPr algn="ctr" rtl="1"/>
+            <a:r>
+              <a:rPr sz="1500" b="1">
+                <a:solidFill>
+                  <a:srgbClr val="333333"/>
+                </a:solidFill>
+                <a:latin typeface="Arial"/>
+              </a:rPr>
+              <a:t>الواجهة ‏(streamlit_ui.py:8501):‏ 5 تبويبات ثنائية — رفع/مستندات/استعلام/تقييم/حول — تُعيد استخدام نفس عميل Chroma مع حذف المجموعة وإعادة إنشائها</a:t>
+            </a:r>
+          </a:p>
+          <a:p>
+            <a:pPr algn="ctr" rtl="0"/>
+            <a:r>
+              <a:rPr sz="1200">
+                <a:solidFill>
+                  <a:srgbClr val="666666"/>
+                </a:solidFill>
+                <a:latin typeface="Calibri"/>
+              </a:rPr>
+              <a:t>Frontend (streamlit_ui.py :8501): 5 bilingual tabs — upload/docs/query/eval/about — same Chroma client, drop &amp; recreate</a:t>
+            </a:r>
+          </a:p>
+        </p:txBody>
+      </p:sp>
+      <p:sp>
+        <p:nvSpPr>
+          <p:cNvPr id="6" name="Rounded Rectangle 5"/>
+          <p:cNvSpPr/>
+          <p:nvPr/>
+        </p:nvSpPr>
+        <p:spPr>
+          <a:xfrm>
+            <a:off x="640080" y="4686300"/>
+            <a:ext cx="10972800" cy="1120140"/>
+          </a:xfrm>
+          <a:prstGeom prst="roundRect">
+            <a:avLst/>
+          </a:prstGeom>
+          <a:solidFill>
+            <a:srgbClr val="EDEDED"/>
+          </a:solidFill>
+          <a:ln w="12700">
+            <a:solidFill>
+              <a:srgbClr val="1F4E79"/>
+            </a:solidFill>
+          </a:ln>
+          <a:effectLst/>
+        </p:spPr>
+        <p:style>
+          <a:lnRef idx="1">
+            <a:schemeClr val="accent1"/>
+          </a:lnRef>
+          <a:fillRef idx="3">
+            <a:schemeClr val="accent1"/>
+          </a:fillRef>
+          <a:effectRef idx="2">
+            <a:schemeClr val="accent1"/>
+          </a:effectRef>
+          <a:fontRef idx="minor">
+            <a:schemeClr val="lt1"/>
+          </a:fontRef>
+        </p:style>
+        <p:txBody>
+          <a:bodyPr wrap="square" rtlCol="0" anchor="ctr"/>
+          <a:lstStyle/>
+          <a:p>
+            <a:pPr algn="ctr" rtl="1"/>
+            <a:r>
+              <a:rPr sz="1500" b="1">
+                <a:solidFill>
+                  <a:srgbClr val="333333"/>
+                </a:solidFill>
+                <a:latin typeface="Arial"/>
+              </a:rPr>
+              <a:t>المخازن: l03_lab.db ‏(bronze_docs/silver_chunks)‏ + chroma_db ‏(gold_chunks بُعد 384)‏ + golden_dataset.json + env.‏ للمفتاح</a:t>
+            </a:r>
+          </a:p>
+          <a:p>
+            <a:pPr algn="ctr" rtl="0"/>
+            <a:r>
+              <a:rPr sz="1200">
+                <a:solidFill>
+                  <a:srgbClr val="666666"/>
+                </a:solidFill>
+                <a:latin typeface="Calibri"/>
+              </a:rPr>
+              <a:t>Stores: l03_lab.db (bronze_docs/silver_chunks) + chroma_db (gold_chunks dim 384) + golden_dataset.json + .env for keys</a:t>
+            </a:r>
+          </a:p>
+        </p:txBody>
+      </p:sp>
+      <p:sp>
+        <p:nvSpPr>
+          <p:cNvPr id="7" name="TextBox 6"/>
+          <p:cNvSpPr txBox="1"/>
+          <p:nvPr/>
+        </p:nvSpPr>
+        <p:spPr>
+          <a:xfrm>
+            <a:off x="640080" y="6126480"/>
+            <a:ext cx="10972800" cy="548640"/>
+          </a:xfrm>
+          <a:prstGeom prst="rect">
+            <a:avLst/>
+          </a:prstGeom>
+          <a:noFill/>
+        </p:spPr>
+        <p:txBody>
+          <a:bodyPr wrap="square">
+            <a:spAutoFit/>
+          </a:bodyPr>
+          <a:lstStyle/>
+          <a:p>
+            <a:pPr algn="r" rtl="1"/>
+            <a:r>
+              <a:rPr sz="1400">
+                <a:solidFill>
+                  <a:srgbClr val="666666"/>
+                </a:solidFill>
+                <a:latin typeface="Arial"/>
+              </a:rPr>
+              <a:t>التفاصيل الكاملة في l03_lab/ARCHITECTURE.md.</a:t>
+            </a:r>
+          </a:p>
+          <a:p>
+            <a:pPr algn="r" rtl="0"/>
+            <a:r>
+              <a:t>Full detail in l03_lab/ARCHITECTURE.md.</a:t>
+            </a:r>
+          </a:p>
+        </p:txBody>
+      </p:sp>
+    </p:spTree>
+  </p:cSld>
+  <p:clrMapOvr>
+    <a:masterClrMapping/>
+  </p:clrMapOvr>
+</p:sld>
+</file>
+
+<file path=ppt/slides/slide12.xml><?xml version="1.0" encoding="utf-8"?>
+<p:sld xmlns:a="http://schemas.openxmlformats.org/drawingml/2006/main" xmlns:r="http://schemas.openxmlformats.org/officeDocument/2006/relationships" xmlns:p="http://schemas.openxmlformats.org/presentationml/2006/main">
   <p:cSld>
     <p:bg>
       <p:bgPr>
@@ -3618,60 +3961,32 @@
         <p:cNvGrpSpPr/>
         <p:nvPr/>
       </p:nvGrpSpPr>
-      <p:grpSpPr/>
-      <p:sp>
-        <p:nvSpPr>
-          <p:cNvPr id="2" name="TextBox 1"/>
-          <p:cNvSpPr txBox="1"/>
-          <p:nvPr/>
-        </p:nvSpPr>
-        <p:spPr>
-          <a:xfrm>
-            <a:off x="640080" y="137160"/>
-            <a:ext cx="10972800" cy="640080"/>
+      <p:grpSpPr>
+        <a:xfrm>
+          <a:off x="0" y="0"/>
+          <a:ext cx="0" cy="0"/>
+          <a:chOff x="0" y="0"/>
+          <a:chExt cx="0" cy="0"/>
+        </a:xfrm>
+      </p:grpSpPr>
+      <p:sp>
+        <p:nvSpPr>
+          <p:cNvPr id="2" name="Rectangle 1"/>
+          <p:cNvSpPr/>
+          <p:nvPr/>
+        </p:nvSpPr>
+        <p:spPr>
+          <a:xfrm>
+            <a:off x="0" y="0"/>
+            <a:ext cx="12191695" cy="1005840"/>
           </a:xfrm>
           <a:prstGeom prst="rect">
             <a:avLst/>
           </a:prstGeom>
-          <a:noFill/>
-        </p:spPr>
-        <p:txBody>
-          <a:bodyPr wrap="none">
-            <a:spAutoFit/>
-          </a:bodyPr>
-          <a:lstStyle/>
-          <a:p>
-            <a:pPr algn="r" rtl="1"/>
-            <a:r>
-              <a:rPr sz="3000" b="1">
-                <a:solidFill>
-                  <a:srgbClr val="1F3B5C"/>
-                </a:solidFill>
-                <a:latin typeface="Arial"/>
-              </a:rPr>
-              <a:t>من LLM إلى الأنظمة الوكيلة / From LLM to Agentic AI</a:t>
-            </a:r>
-          </a:p>
-        </p:txBody>
-      </p:sp>
-      <p:sp>
-        <p:nvSpPr>
-          <p:cNvPr id="3" name="Rounded Rectangle 2"/>
-          <p:cNvSpPr/>
-          <p:nvPr/>
-        </p:nvSpPr>
-        <p:spPr>
-          <a:xfrm>
-            <a:off x="640080" y="1645920"/>
-            <a:ext cx="2377440" cy="914400"/>
-          </a:xfrm>
-          <a:prstGeom prst="roundRect">
-            <a:avLst/>
-          </a:prstGeom>
           <a:solidFill>
-            <a:srgbClr val="EDEDED"/>
+            <a:srgbClr val="FFFFFF"/>
           </a:solidFill>
-          <a:ln w="12700">
+          <a:ln w="25400">
             <a:solidFill>
               <a:srgbClr val="1F4E79"/>
             </a:solidFill>
@@ -3693,597 +4008,24 @@
           </a:fontRef>
         </p:style>
         <p:txBody>
-          <a:bodyPr rtlCol="0" anchor="ctr" wrap="square"/>
-          <a:lstStyle/>
-          <a:p>
-            <a:pPr algn="ctr" rtl="1"/>
-            <a:r>
-              <a:rPr sz="1800" b="1">
-                <a:solidFill>
-                  <a:srgbClr val="333333"/>
-                </a:solidFill>
-                <a:latin typeface="Arial"/>
-              </a:rPr>
-              <a:t>LLM</a:t>
-            </a:r>
-          </a:p>
-        </p:txBody>
-      </p:sp>
-      <p:sp>
-        <p:nvSpPr>
-          <p:cNvPr id="4" name="Rounded Rectangle 3"/>
-          <p:cNvSpPr/>
-          <p:nvPr/>
-        </p:nvSpPr>
-        <p:spPr>
-          <a:xfrm>
-            <a:off x="640080" y="2743200"/>
-            <a:ext cx="2377440" cy="1463040"/>
-          </a:xfrm>
-          <a:prstGeom prst="roundRect">
-            <a:avLst/>
-          </a:prstGeom>
-          <a:solidFill>
-            <a:srgbClr val="EDEDED"/>
-          </a:solidFill>
-          <a:ln w="12700">
-            <a:solidFill>
-              <a:srgbClr val="1F4E79"/>
-            </a:solidFill>
-          </a:ln>
-          <a:effectLst/>
-        </p:spPr>
-        <p:style>
-          <a:lnRef idx="1">
-            <a:schemeClr val="accent1"/>
-          </a:lnRef>
-          <a:fillRef idx="3">
-            <a:schemeClr val="accent1"/>
-          </a:fillRef>
-          <a:effectRef idx="2">
-            <a:schemeClr val="accent1"/>
-          </a:effectRef>
-          <a:fontRef idx="minor">
-            <a:schemeClr val="lt1"/>
-          </a:fontRef>
-        </p:style>
-        <p:txBody>
-          <a:bodyPr rtlCol="0" anchor="ctr" wrap="square"/>
-          <a:lstStyle/>
-          <a:p>
-            <a:pPr algn="ctr" rtl="1"/>
-            <a:r>
-              <a:rPr sz="1300" b="1">
-                <a:solidFill>
-                  <a:srgbClr val="333333"/>
-                </a:solidFill>
-                <a:latin typeface="Arial"/>
-              </a:rPr>
-              <a:t>تنبؤ بالرموز التالية</a:t>
-            </a:r>
-          </a:p>
-          <a:p>
-            <a:pPr algn="ctr" rtl="0"/>
-            <a:r>
-              <a:rPr sz="1100">
-                <a:solidFill>
-                  <a:srgbClr val="666666"/>
-                </a:solidFill>
-                <a:latin typeface="Calibri"/>
-              </a:rPr>
-              <a:t>Predicts next tokens</a:t>
-            </a:r>
-          </a:p>
-        </p:txBody>
-      </p:sp>
-      <p:sp>
-        <p:nvSpPr>
-          <p:cNvPr id="5" name="Left Arrow 4"/>
-          <p:cNvSpPr/>
-          <p:nvPr/>
-        </p:nvSpPr>
-        <p:spPr>
-          <a:xfrm>
-            <a:off x="3072384" y="1965960"/>
-            <a:ext cx="347472" cy="274320"/>
-          </a:xfrm>
-          <a:prstGeom prst="leftArrow">
-            <a:avLst/>
-          </a:prstGeom>
-          <a:solidFill>
-            <a:srgbClr val="1F4E79"/>
-          </a:solidFill>
-          <a:ln>
-            <a:noFill/>
-          </a:ln>
-          <a:effectLst/>
-        </p:spPr>
-        <p:style>
-          <a:lnRef idx="1">
-            <a:schemeClr val="accent1"/>
-          </a:lnRef>
-          <a:fillRef idx="3">
-            <a:schemeClr val="accent1"/>
-          </a:fillRef>
-          <a:effectRef idx="2">
-            <a:schemeClr val="accent1"/>
-          </a:effectRef>
-          <a:fontRef idx="minor">
-            <a:schemeClr val="lt1"/>
-          </a:fontRef>
-        </p:style>
-        <p:txBody>
           <a:bodyPr rtlCol="0" anchor="ctr"/>
           <a:lstStyle/>
           <a:p>
             <a:pPr algn="ctr"/>
-          </a:p>
-        </p:txBody>
-      </p:sp>
-      <p:sp>
-        <p:nvSpPr>
-          <p:cNvPr id="6" name="Rounded Rectangle 5"/>
-          <p:cNvSpPr/>
-          <p:nvPr/>
-        </p:nvSpPr>
-        <p:spPr>
-          <a:xfrm>
-            <a:off x="3474720" y="1645920"/>
-            <a:ext cx="2377440" cy="914400"/>
-          </a:xfrm>
-          <a:prstGeom prst="roundRect">
-            <a:avLst/>
-          </a:prstGeom>
-          <a:solidFill>
-            <a:srgbClr val="DCE6F1"/>
-          </a:solidFill>
-          <a:ln w="12700">
-            <a:solidFill>
-              <a:srgbClr val="1F4E79"/>
-            </a:solidFill>
-          </a:ln>
-          <a:effectLst/>
-        </p:spPr>
-        <p:style>
-          <a:lnRef idx="1">
-            <a:schemeClr val="accent1"/>
-          </a:lnRef>
-          <a:fillRef idx="3">
-            <a:schemeClr val="accent1"/>
-          </a:fillRef>
-          <a:effectRef idx="2">
-            <a:schemeClr val="accent1"/>
-          </a:effectRef>
-          <a:fontRef idx="minor">
-            <a:schemeClr val="lt1"/>
-          </a:fontRef>
-        </p:style>
-        <p:txBody>
-          <a:bodyPr rtlCol="0" anchor="ctr" wrap="square"/>
-          <a:lstStyle/>
-          <a:p>
-            <a:pPr algn="ctr" rtl="1"/>
-            <a:r>
-              <a:rPr sz="1800" b="1">
-                <a:solidFill>
-                  <a:srgbClr val="333333"/>
-                </a:solidFill>
-                <a:latin typeface="Arial"/>
-              </a:rPr>
-              <a:t>الذكاء التوليدي</a:t>
-            </a:r>
-          </a:p>
-        </p:txBody>
-      </p:sp>
-      <p:sp>
-        <p:nvSpPr>
-          <p:cNvPr id="7" name="Rounded Rectangle 6"/>
-          <p:cNvSpPr/>
-          <p:nvPr/>
-        </p:nvSpPr>
-        <p:spPr>
-          <a:xfrm>
-            <a:off x="3474720" y="2743200"/>
-            <a:ext cx="2377440" cy="1463040"/>
-          </a:xfrm>
-          <a:prstGeom prst="roundRect">
-            <a:avLst/>
-          </a:prstGeom>
-          <a:solidFill>
-            <a:srgbClr val="EDEDED"/>
-          </a:solidFill>
-          <a:ln w="12700">
-            <a:solidFill>
-              <a:srgbClr val="1F4E79"/>
-            </a:solidFill>
-          </a:ln>
-          <a:effectLst/>
-        </p:spPr>
-        <p:style>
-          <a:lnRef idx="1">
-            <a:schemeClr val="accent1"/>
-          </a:lnRef>
-          <a:fillRef idx="3">
-            <a:schemeClr val="accent1"/>
-          </a:fillRef>
-          <a:effectRef idx="2">
-            <a:schemeClr val="accent1"/>
-          </a:effectRef>
-          <a:fontRef idx="minor">
-            <a:schemeClr val="lt1"/>
-          </a:fontRef>
-        </p:style>
-        <p:txBody>
-          <a:bodyPr rtlCol="0" anchor="ctr" wrap="square"/>
-          <a:lstStyle/>
-          <a:p>
-            <a:pPr algn="ctr" rtl="1"/>
-            <a:r>
-              <a:rPr sz="1300" b="1">
-                <a:solidFill>
-                  <a:srgbClr val="333333"/>
-                </a:solidFill>
-                <a:latin typeface="Arial"/>
-              </a:rPr>
-              <a:t>يولّد محتوى جديدًا</a:t>
-            </a:r>
-          </a:p>
-          <a:p>
-            <a:pPr algn="ctr" rtl="0"/>
-            <a:r>
-              <a:rPr sz="1100">
-                <a:solidFill>
-                  <a:srgbClr val="666666"/>
-                </a:solidFill>
-                <a:latin typeface="Calibri"/>
-              </a:rPr>
-              <a:t>Generates new content</a:t>
-            </a:r>
-          </a:p>
-        </p:txBody>
-      </p:sp>
-      <p:sp>
-        <p:nvSpPr>
-          <p:cNvPr id="8" name="Left Arrow 7"/>
-          <p:cNvSpPr/>
-          <p:nvPr/>
-        </p:nvSpPr>
-        <p:spPr>
-          <a:xfrm>
-            <a:off x="5907024" y="1965960"/>
-            <a:ext cx="347472" cy="274320"/>
-          </a:xfrm>
-          <a:prstGeom prst="leftArrow">
-            <a:avLst/>
-          </a:prstGeom>
-          <a:solidFill>
-            <a:srgbClr val="1F4E79"/>
-          </a:solidFill>
-          <a:ln>
-            <a:noFill/>
-          </a:ln>
-          <a:effectLst/>
-        </p:spPr>
-        <p:style>
-          <a:lnRef idx="1">
-            <a:schemeClr val="accent1"/>
-          </a:lnRef>
-          <a:fillRef idx="3">
-            <a:schemeClr val="accent1"/>
-          </a:fillRef>
-          <a:effectRef idx="2">
-            <a:schemeClr val="accent1"/>
-          </a:effectRef>
-          <a:fontRef idx="minor">
-            <a:schemeClr val="lt1"/>
-          </a:fontRef>
-        </p:style>
-        <p:txBody>
-          <a:bodyPr rtlCol="0" anchor="ctr"/>
-          <a:lstStyle/>
-          <a:p>
-            <a:pPr algn="ctr"/>
-          </a:p>
-        </p:txBody>
-      </p:sp>
-      <p:sp>
-        <p:nvSpPr>
-          <p:cNvPr id="9" name="Rounded Rectangle 8"/>
-          <p:cNvSpPr/>
-          <p:nvPr/>
-        </p:nvSpPr>
-        <p:spPr>
-          <a:xfrm>
-            <a:off x="6309360" y="1645920"/>
-            <a:ext cx="2377440" cy="914400"/>
-          </a:xfrm>
-          <a:prstGeom prst="roundRect">
-            <a:avLst/>
-          </a:prstGeom>
-          <a:solidFill>
-            <a:srgbClr val="FDE9D9"/>
-          </a:solidFill>
-          <a:ln w="12700">
-            <a:solidFill>
-              <a:srgbClr val="1F4E79"/>
-            </a:solidFill>
-          </a:ln>
-          <a:effectLst/>
-        </p:spPr>
-        <p:style>
-          <a:lnRef idx="1">
-            <a:schemeClr val="accent1"/>
-          </a:lnRef>
-          <a:fillRef idx="3">
-            <a:schemeClr val="accent1"/>
-          </a:fillRef>
-          <a:effectRef idx="2">
-            <a:schemeClr val="accent1"/>
-          </a:effectRef>
-          <a:fontRef idx="minor">
-            <a:schemeClr val="lt1"/>
-          </a:fontRef>
-        </p:style>
-        <p:txBody>
-          <a:bodyPr rtlCol="0" anchor="ctr" wrap="square"/>
-          <a:lstStyle/>
-          <a:p>
-            <a:pPr algn="ctr" rtl="1"/>
-            <a:r>
-              <a:rPr sz="1800" b="1">
-                <a:solidFill>
-                  <a:srgbClr val="333333"/>
-                </a:solidFill>
-                <a:latin typeface="Arial"/>
-              </a:rPr>
-              <a:t>الوكلاء Agents</a:t>
-            </a:r>
-          </a:p>
-        </p:txBody>
-      </p:sp>
-      <p:sp>
-        <p:nvSpPr>
-          <p:cNvPr id="10" name="Rounded Rectangle 9"/>
-          <p:cNvSpPr/>
-          <p:nvPr/>
-        </p:nvSpPr>
-        <p:spPr>
-          <a:xfrm>
-            <a:off x="6309360" y="2743200"/>
-            <a:ext cx="2377440" cy="1463040"/>
-          </a:xfrm>
-          <a:prstGeom prst="roundRect">
-            <a:avLst/>
-          </a:prstGeom>
-          <a:solidFill>
-            <a:srgbClr val="EDEDED"/>
-          </a:solidFill>
-          <a:ln w="12700">
-            <a:solidFill>
-              <a:srgbClr val="1F4E79"/>
-            </a:solidFill>
-          </a:ln>
-          <a:effectLst/>
-        </p:spPr>
-        <p:style>
-          <a:lnRef idx="1">
-            <a:schemeClr val="accent1"/>
-          </a:lnRef>
-          <a:fillRef idx="3">
-            <a:schemeClr val="accent1"/>
-          </a:fillRef>
-          <a:effectRef idx="2">
-            <a:schemeClr val="accent1"/>
-          </a:effectRef>
-          <a:fontRef idx="minor">
-            <a:schemeClr val="lt1"/>
-          </a:fontRef>
-        </p:style>
-        <p:txBody>
-          <a:bodyPr rtlCol="0" anchor="ctr" wrap="square"/>
-          <a:lstStyle/>
-          <a:p>
-            <a:pPr algn="ctr" rtl="1"/>
-            <a:r>
-              <a:rPr sz="1300" b="1">
-                <a:solidFill>
-                  <a:srgbClr val="333333"/>
-                </a:solidFill>
-                <a:latin typeface="Arial"/>
-              </a:rPr>
-              <a:t>نية + استدعاء أدوات</a:t>
-            </a:r>
-          </a:p>
-          <a:p>
-            <a:pPr algn="ctr" rtl="0"/>
-            <a:r>
-              <a:rPr sz="1100">
-                <a:solidFill>
-                  <a:srgbClr val="666666"/>
-                </a:solidFill>
-                <a:latin typeface="Calibri"/>
-              </a:rPr>
-              <a:t>Intent + tool calls</a:t>
-            </a:r>
-          </a:p>
-        </p:txBody>
-      </p:sp>
-      <p:sp>
-        <p:nvSpPr>
-          <p:cNvPr id="11" name="Left Arrow 10"/>
-          <p:cNvSpPr/>
-          <p:nvPr/>
-        </p:nvSpPr>
-        <p:spPr>
-          <a:xfrm>
-            <a:off x="8741664" y="1965960"/>
-            <a:ext cx="347472" cy="274320"/>
-          </a:xfrm>
-          <a:prstGeom prst="leftArrow">
-            <a:avLst/>
-          </a:prstGeom>
-          <a:solidFill>
-            <a:srgbClr val="1F4E79"/>
-          </a:solidFill>
-          <a:ln>
-            <a:noFill/>
-          </a:ln>
-          <a:effectLst/>
-        </p:spPr>
-        <p:style>
-          <a:lnRef idx="1">
-            <a:schemeClr val="accent1"/>
-          </a:lnRef>
-          <a:fillRef idx="3">
-            <a:schemeClr val="accent1"/>
-          </a:fillRef>
-          <a:effectRef idx="2">
-            <a:schemeClr val="accent1"/>
-          </a:effectRef>
-          <a:fontRef idx="minor">
-            <a:schemeClr val="lt1"/>
-          </a:fontRef>
-        </p:style>
-        <p:txBody>
-          <a:bodyPr rtlCol="0" anchor="ctr"/>
-          <a:lstStyle/>
-          <a:p>
-            <a:pPr algn="ctr"/>
-          </a:p>
-        </p:txBody>
-      </p:sp>
-      <p:sp>
-        <p:nvSpPr>
-          <p:cNvPr id="12" name="Rounded Rectangle 11"/>
-          <p:cNvSpPr/>
-          <p:nvPr/>
-        </p:nvSpPr>
-        <p:spPr>
-          <a:xfrm>
-            <a:off x="9144000" y="1645920"/>
-            <a:ext cx="2377440" cy="914400"/>
-          </a:xfrm>
-          <a:prstGeom prst="roundRect">
-            <a:avLst/>
-          </a:prstGeom>
-          <a:solidFill>
-            <a:srgbClr val="E2EFDA"/>
-          </a:solidFill>
-          <a:ln w="12700">
-            <a:solidFill>
-              <a:srgbClr val="1F4E79"/>
-            </a:solidFill>
-          </a:ln>
-          <a:effectLst/>
-        </p:spPr>
-        <p:style>
-          <a:lnRef idx="1">
-            <a:schemeClr val="accent1"/>
-          </a:lnRef>
-          <a:fillRef idx="3">
-            <a:schemeClr val="accent1"/>
-          </a:fillRef>
-          <a:effectRef idx="2">
-            <a:schemeClr val="accent1"/>
-          </a:effectRef>
-          <a:fontRef idx="minor">
-            <a:schemeClr val="lt1"/>
-          </a:fontRef>
-        </p:style>
-        <p:txBody>
-          <a:bodyPr rtlCol="0" anchor="ctr" wrap="square"/>
-          <a:lstStyle/>
-          <a:p>
-            <a:pPr algn="ctr" rtl="1"/>
-            <a:r>
-              <a:rPr sz="1800" b="1">
-                <a:solidFill>
-                  <a:srgbClr val="333333"/>
-                </a:solidFill>
-                <a:latin typeface="Arial"/>
-              </a:rPr>
-              <a:t>الأنظمة الوكيلة</a:t>
-            </a:r>
-          </a:p>
-        </p:txBody>
-      </p:sp>
-      <p:sp>
-        <p:nvSpPr>
-          <p:cNvPr id="13" name="Rounded Rectangle 12"/>
-          <p:cNvSpPr/>
-          <p:nvPr/>
-        </p:nvSpPr>
-        <p:spPr>
-          <a:xfrm>
-            <a:off x="9144000" y="2743200"/>
-            <a:ext cx="2377440" cy="1463040"/>
-          </a:xfrm>
-          <a:prstGeom prst="roundRect">
-            <a:avLst/>
-          </a:prstGeom>
-          <a:solidFill>
-            <a:srgbClr val="EDEDED"/>
-          </a:solidFill>
-          <a:ln w="12700">
-            <a:solidFill>
-              <a:srgbClr val="1F4E79"/>
-            </a:solidFill>
-          </a:ln>
-          <a:effectLst/>
-        </p:spPr>
-        <p:style>
-          <a:lnRef idx="1">
-            <a:schemeClr val="accent1"/>
-          </a:lnRef>
-          <a:fillRef idx="3">
-            <a:schemeClr val="accent1"/>
-          </a:fillRef>
-          <a:effectRef idx="2">
-            <a:schemeClr val="accent1"/>
-          </a:effectRef>
-          <a:fontRef idx="minor">
-            <a:schemeClr val="lt1"/>
-          </a:fontRef>
-        </p:style>
-        <p:txBody>
-          <a:bodyPr rtlCol="0" anchor="ctr" wrap="square"/>
-          <a:lstStyle/>
-          <a:p>
-            <a:pPr algn="ctr" rtl="1"/>
-            <a:r>
-              <a:rPr sz="1300" b="1">
-                <a:solidFill>
-                  <a:srgbClr val="333333"/>
-                </a:solidFill>
-                <a:latin typeface="Arial"/>
-              </a:rPr>
-              <a:t>تخطيط وتنفيذ متعدد الخطوات</a:t>
-            </a:r>
-          </a:p>
-          <a:p>
-            <a:pPr algn="ctr" rtl="0"/>
-            <a:r>
-              <a:rPr sz="1100">
-                <a:solidFill>
-                  <a:srgbClr val="666666"/>
-                </a:solidFill>
-                <a:latin typeface="Calibri"/>
-              </a:rPr>
-              <a:t>Multi-step planning</a:t>
-            </a:r>
-          </a:p>
-        </p:txBody>
-      </p:sp>
-      <p:sp>
-        <p:nvSpPr>
-          <p:cNvPr id="14" name="TextBox 13"/>
+            <a:endParaRPr/>
+          </a:p>
+        </p:txBody>
+      </p:sp>
+      <p:sp>
+        <p:nvSpPr>
+          <p:cNvPr id="3" name="TextBox 2"/>
           <p:cNvSpPr txBox="1"/>
           <p:nvPr/>
         </p:nvSpPr>
         <p:spPr>
           <a:xfrm>
-            <a:off x="640080" y="6126480"/>
-            <a:ext cx="10972800" cy="548640"/>
+            <a:off x="640080" y="182880"/>
+            <a:ext cx="10972800" cy="640080"/>
           </a:xfrm>
           <a:prstGeom prst="rect">
             <a:avLst/>
@@ -4298,33 +4040,27 @@
           <a:p>
             <a:pPr algn="r" rtl="1"/>
             <a:r>
-              <a:rPr sz="1400">
-                <a:solidFill>
-                  <a:srgbClr val="666666"/>
+              <a:rPr sz="3200" b="1">
+                <a:solidFill>
+                  <a:srgbClr val="1F3B5C"/>
                 </a:solidFill>
                 <a:latin typeface="Arial"/>
               </a:rPr>
-              <a:t>Agentic RAG = بحث متجهي + جلب عبر الواجهات بذاكرة متجددة وتحقق قبل التسليم.</a:t>
-            </a:r>
-          </a:p>
-          <a:p>
-            <a:pPr algn="r" rtl="0"/>
-            <a:r>
-              <a:t>Agentic RAG = vector search + API fetching with refreshed memory and verification.</a:t>
-            </a:r>
-          </a:p>
-        </p:txBody>
-      </p:sp>
-      <p:sp>
-        <p:nvSpPr>
-          <p:cNvPr id="15" name="TextBox 14"/>
+              <a:t>اختبار قصير / Quick Quiz</a:t>
+            </a:r>
+          </a:p>
+        </p:txBody>
+      </p:sp>
+      <p:sp>
+        <p:nvSpPr>
+          <p:cNvPr id="4" name="TextBox 3"/>
           <p:cNvSpPr txBox="1"/>
           <p:nvPr/>
         </p:nvSpPr>
         <p:spPr>
           <a:xfrm>
-            <a:off x="640080" y="6400800"/>
-            <a:ext cx="8686800" cy="320040"/>
+            <a:off x="640080" y="1280160"/>
+            <a:ext cx="10972800" cy="5212080"/>
           </a:xfrm>
           <a:prstGeom prst="rect">
             <a:avLst/>
@@ -4337,29 +4073,131 @@
           </a:bodyPr>
           <a:lstStyle/>
           <a:p>
-            <a:pPr algn="r" rtl="1"/>
-            <a:r>
-              <a:rPr sz="1000" b="0">
+            <a:pPr algn="r" rtl="1">
+              <a:spcBef>
+                <a:spcPts val="200"/>
+              </a:spcBef>
+              <a:spcAft>
+                <a:spcPts val="1000"/>
+              </a:spcAft>
+            </a:pPr>
+            <a:r>
+              <a:rPr sz="2000">
+                <a:solidFill>
+                  <a:srgbClr val="333333"/>
+                </a:solidFill>
+                <a:latin typeface="Arial"/>
+              </a:rPr>
+              <a:t>• 1. فرّق بين AI Agent وAgentic AI.</a:t>
+            </a:r>
+          </a:p>
+          <a:p>
+            <a:pPr algn="l" rtl="0">
+              <a:spcBef>
+                <a:spcPts val="200"/>
+              </a:spcBef>
+              <a:spcAft>
+                <a:spcPts val="1000"/>
+              </a:spcAft>
+            </a:pPr>
+            <a:r>
+              <a:rPr sz="1700">
                 <a:solidFill>
                   <a:srgbClr val="666666"/>
                 </a:solidFill>
+                <a:latin typeface="Calibri"/>
+              </a:rPr>
+              <a:t>• Differentiate an AI agent from agentic AI.</a:t>
+            </a:r>
+          </a:p>
+          <a:p>
+            <a:pPr algn="r" rtl="1">
+              <a:spcBef>
+                <a:spcPts val="200"/>
+              </a:spcBef>
+              <a:spcAft>
+                <a:spcPts val="1000"/>
+              </a:spcAft>
+            </a:pPr>
+            <a:r>
+              <a:rPr sz="2000">
+                <a:solidFill>
+                  <a:srgbClr val="333333"/>
+                </a:solidFill>
                 <a:latin typeface="Arial"/>
               </a:rPr>
-              <a:t>Module 02 — Data &amp; AI Engineering Track  |  الوحدة الثانية</a:t>
-            </a:r>
-          </a:p>
-        </p:txBody>
-      </p:sp>
-      <p:sp>
-        <p:nvSpPr>
-          <p:cNvPr id="16" name="TextBox 15"/>
+              <a:t>• 2. ما أرخص: تضمين أم توليد؟</a:t>
+            </a:r>
+          </a:p>
+          <a:p>
+            <a:pPr algn="l" rtl="0">
+              <a:spcBef>
+                <a:spcPts val="200"/>
+              </a:spcBef>
+              <a:spcAft>
+                <a:spcPts val="1000"/>
+              </a:spcAft>
+            </a:pPr>
+            <a:r>
+              <a:rPr sz="1700">
+                <a:solidFill>
+                  <a:srgbClr val="666666"/>
+                </a:solidFill>
+                <a:latin typeface="Calibri"/>
+              </a:rPr>
+              <a:t>• Which is cheaper: embedding or generation?</a:t>
+            </a:r>
+          </a:p>
+          <a:p>
+            <a:pPr algn="r" rtl="1">
+              <a:spcBef>
+                <a:spcPts val="200"/>
+              </a:spcBef>
+              <a:spcAft>
+                <a:spcPts val="1000"/>
+              </a:spcAft>
+            </a:pPr>
+            <a:r>
+              <a:rPr sz="2000">
+                <a:solidFill>
+                  <a:srgbClr val="333333"/>
+                </a:solidFill>
+                <a:latin typeface="Arial"/>
+              </a:rPr>
+              <a:t>• 3. ما أدوات تتبع التجارب وإصدارات البيانات؟</a:t>
+            </a:r>
+          </a:p>
+          <a:p>
+            <a:pPr algn="l" rtl="0">
+              <a:spcBef>
+                <a:spcPts val="200"/>
+              </a:spcBef>
+              <a:spcAft>
+                <a:spcPts val="1000"/>
+              </a:spcAft>
+            </a:pPr>
+            <a:r>
+              <a:rPr sz="1700">
+                <a:solidFill>
+                  <a:srgbClr val="666666"/>
+                </a:solidFill>
+                <a:latin typeface="Calibri"/>
+              </a:rPr>
+              <a:t>• Which tools track experiments and version data?</a:t>
+            </a:r>
+          </a:p>
+        </p:txBody>
+      </p:sp>
+      <p:sp>
+        <p:nvSpPr>
+          <p:cNvPr id="5" name="TextBox 4"/>
           <p:cNvSpPr txBox="1"/>
           <p:nvPr/>
         </p:nvSpPr>
         <p:spPr>
           <a:xfrm>
-            <a:off x="9601200" y="6400800"/>
-            <a:ext cx="1920240" cy="320040"/>
+            <a:off x="640080" y="6400800"/>
+            <a:ext cx="8686800" cy="320040"/>
           </a:xfrm>
           <a:prstGeom prst="rect">
             <a:avLst/>
@@ -4372,6 +4210,41 @@
           </a:bodyPr>
           <a:lstStyle/>
           <a:p>
+            <a:pPr algn="r" rtl="1"/>
+            <a:r>
+              <a:rPr sz="1000" b="0">
+                <a:solidFill>
+                  <a:srgbClr val="666666"/>
+                </a:solidFill>
+                <a:latin typeface="Arial"/>
+              </a:rPr>
+              <a:t>Module 02 — Data &amp; AI Engineering Track  |  الوحدة الثانية</a:t>
+            </a:r>
+          </a:p>
+        </p:txBody>
+      </p:sp>
+      <p:sp>
+        <p:nvSpPr>
+          <p:cNvPr id="6" name="TextBox 5"/>
+          <p:cNvSpPr txBox="1"/>
+          <p:nvPr/>
+        </p:nvSpPr>
+        <p:spPr>
+          <a:xfrm>
+            <a:off x="9601200" y="6400800"/>
+            <a:ext cx="1920240" cy="320040"/>
+          </a:xfrm>
+          <a:prstGeom prst="rect">
+            <a:avLst/>
+          </a:prstGeom>
+          <a:noFill/>
+        </p:spPr>
+        <p:txBody>
+          <a:bodyPr wrap="square">
+            <a:spAutoFit/>
+          </a:bodyPr>
+          <a:lstStyle/>
+          <a:p>
             <a:pPr algn="l" rtl="0"/>
             <a:r>
               <a:rPr sz="1000" b="0">
@@ -4380,7 +4253,7 @@
                 </a:solidFill>
                 <a:latin typeface="Calibri"/>
               </a:rPr>
-              <a:t>V12  •  5/12</a:t>
+              <a:t>V12  •  11/13</a:t>
             </a:r>
           </a:p>
         </p:txBody>
@@ -4393,8 +4266,8 @@
 </p:sld>
 </file>
 
-<file path=ppt/slides/slide12.xml><?xml version="1.0" encoding="utf-8"?>
-<p:sld xmlns:a="http://schemas.openxmlformats.org/drawingml/2006/main" xmlns:p="http://schemas.openxmlformats.org/presentationml/2006/main" xmlns:r="http://schemas.openxmlformats.org/officeDocument/2006/relationships">
+<file path=ppt/slides/slide13.xml><?xml version="1.0" encoding="utf-8"?>
+<p:sld xmlns:a="http://schemas.openxmlformats.org/drawingml/2006/main" xmlns:r="http://schemas.openxmlformats.org/officeDocument/2006/relationships" xmlns:p="http://schemas.openxmlformats.org/presentationml/2006/main">
   <p:cSld>
     <p:bg>
       <p:bgPr>
@@ -4410,60 +4283,32 @@
         <p:cNvGrpSpPr/>
         <p:nvPr/>
       </p:nvGrpSpPr>
-      <p:grpSpPr/>
-      <p:sp>
-        <p:nvSpPr>
-          <p:cNvPr id="2" name="TextBox 1"/>
-          <p:cNvSpPr txBox="1"/>
-          <p:nvPr/>
-        </p:nvSpPr>
-        <p:spPr>
-          <a:xfrm>
-            <a:off x="640080" y="137160"/>
-            <a:ext cx="10972800" cy="640080"/>
+      <p:grpSpPr>
+        <a:xfrm>
+          <a:off x="0" y="0"/>
+          <a:ext cx="0" cy="0"/>
+          <a:chOff x="0" y="0"/>
+          <a:chExt cx="0" cy="0"/>
+        </a:xfrm>
+      </p:grpSpPr>
+      <p:sp>
+        <p:nvSpPr>
+          <p:cNvPr id="2" name="Rectangle 1"/>
+          <p:cNvSpPr/>
+          <p:nvPr/>
+        </p:nvSpPr>
+        <p:spPr>
+          <a:xfrm>
+            <a:off x="0" y="0"/>
+            <a:ext cx="12191695" cy="1005840"/>
           </a:xfrm>
           <a:prstGeom prst="rect">
             <a:avLst/>
           </a:prstGeom>
-          <a:noFill/>
-        </p:spPr>
-        <p:txBody>
-          <a:bodyPr wrap="none">
-            <a:spAutoFit/>
-          </a:bodyPr>
-          <a:lstStyle/>
-          <a:p>
-            <a:pPr algn="r" rtl="1"/>
-            <a:r>
-              <a:rPr sz="3000" b="1">
-                <a:solidFill>
-                  <a:srgbClr val="1F3B5C"/>
-                </a:solidFill>
-                <a:latin typeface="Arial"/>
-              </a:rPr>
-              <a:t>التكلفة عمليًا: التضمين مقابل التوليد / Cost: Embedding vs Generation</a:t>
-            </a:r>
-          </a:p>
-        </p:txBody>
-      </p:sp>
-      <p:sp>
-        <p:nvSpPr>
-          <p:cNvPr id="3" name="Rounded Rectangle 2"/>
-          <p:cNvSpPr/>
-          <p:nvPr/>
-        </p:nvSpPr>
-        <p:spPr>
-          <a:xfrm>
-            <a:off x="1828800" y="3840480"/>
-            <a:ext cx="2194560" cy="1463040"/>
-          </a:xfrm>
-          <a:prstGeom prst="roundRect">
-            <a:avLst/>
-          </a:prstGeom>
           <a:solidFill>
-            <a:srgbClr val="E2EFDA"/>
+            <a:srgbClr val="FFFFFF"/>
           </a:solidFill>
-          <a:ln w="12700">
+          <a:ln w="25400">
             <a:solidFill>
               <a:srgbClr val="1F4E79"/>
             </a:solidFill>
@@ -4485,178 +4330,24 @@
           </a:fontRef>
         </p:style>
         <p:txBody>
-          <a:bodyPr rtlCol="0" anchor="ctr" wrap="square"/>
-          <a:lstStyle/>
-          <a:p>
-            <a:pPr algn="ctr" rtl="1"/>
-            <a:r>
-              <a:rPr sz="1800" b="1">
-                <a:solidFill>
-                  <a:srgbClr val="333333"/>
-                </a:solidFill>
-                <a:latin typeface="Arial"/>
-              </a:rPr>
-              <a:t>التضمين 1x</a:t>
-            </a:r>
-          </a:p>
-          <a:p>
-            <a:pPr algn="ctr" rtl="0"/>
-            <a:r>
-              <a:rPr sz="1200">
-                <a:solidFill>
-                  <a:srgbClr val="666666"/>
-                </a:solidFill>
-                <a:latin typeface="Calibri"/>
-              </a:rPr>
-              <a:t>Embedding — cheap</a:t>
-            </a:r>
-          </a:p>
-        </p:txBody>
-      </p:sp>
-      <p:sp>
-        <p:nvSpPr>
-          <p:cNvPr id="4" name="Rounded Rectangle 3"/>
-          <p:cNvSpPr/>
-          <p:nvPr/>
-        </p:nvSpPr>
-        <p:spPr>
-          <a:xfrm>
-            <a:off x="4754880" y="1554480"/>
-            <a:ext cx="2194560" cy="3749039"/>
-          </a:xfrm>
-          <a:prstGeom prst="roundRect">
-            <a:avLst/>
-          </a:prstGeom>
-          <a:solidFill>
-            <a:srgbClr val="FDE9D9"/>
-          </a:solidFill>
-          <a:ln w="12700">
-            <a:solidFill>
-              <a:srgbClr val="1F4E79"/>
-            </a:solidFill>
-          </a:ln>
-          <a:effectLst/>
-        </p:spPr>
-        <p:style>
-          <a:lnRef idx="1">
-            <a:schemeClr val="accent1"/>
-          </a:lnRef>
-          <a:fillRef idx="3">
-            <a:schemeClr val="accent1"/>
-          </a:fillRef>
-          <a:effectRef idx="2">
-            <a:schemeClr val="accent1"/>
-          </a:effectRef>
-          <a:fontRef idx="minor">
-            <a:schemeClr val="lt1"/>
-          </a:fontRef>
-        </p:style>
-        <p:txBody>
-          <a:bodyPr rtlCol="0" anchor="ctr" wrap="square"/>
-          <a:lstStyle/>
-          <a:p>
-            <a:pPr algn="ctr" rtl="1"/>
-            <a:r>
-              <a:rPr sz="1800" b="1">
-                <a:solidFill>
-                  <a:srgbClr val="333333"/>
-                </a:solidFill>
-                <a:latin typeface="Arial"/>
-              </a:rPr>
-              <a:t>التوليد ~10x</a:t>
-            </a:r>
-          </a:p>
-          <a:p>
-            <a:pPr algn="ctr" rtl="0"/>
-            <a:r>
-              <a:rPr sz="1200">
-                <a:solidFill>
-                  <a:srgbClr val="666666"/>
-                </a:solidFill>
-                <a:latin typeface="Calibri"/>
-              </a:rPr>
-              <a:t>Generation — costly</a:t>
-            </a:r>
-          </a:p>
-        </p:txBody>
-      </p:sp>
-      <p:sp>
-        <p:nvSpPr>
-          <p:cNvPr id="5" name="Rounded Rectangle 4"/>
-          <p:cNvSpPr/>
-          <p:nvPr/>
-        </p:nvSpPr>
-        <p:spPr>
-          <a:xfrm>
-            <a:off x="7863840" y="3108960"/>
-            <a:ext cx="2651760" cy="2194560"/>
-          </a:xfrm>
-          <a:prstGeom prst="roundRect">
-            <a:avLst/>
-          </a:prstGeom>
-          <a:solidFill>
-            <a:srgbClr val="DCE6F1"/>
-          </a:solidFill>
-          <a:ln w="12700">
-            <a:solidFill>
-              <a:srgbClr val="1F4E79"/>
-            </a:solidFill>
-          </a:ln>
-          <a:effectLst/>
-        </p:spPr>
-        <p:style>
-          <a:lnRef idx="1">
-            <a:schemeClr val="accent1"/>
-          </a:lnRef>
-          <a:fillRef idx="3">
-            <a:schemeClr val="accent1"/>
-          </a:fillRef>
-          <a:effectRef idx="2">
-            <a:schemeClr val="accent1"/>
-          </a:effectRef>
-          <a:fontRef idx="minor">
-            <a:schemeClr val="lt1"/>
-          </a:fontRef>
-        </p:style>
-        <p:txBody>
-          <a:bodyPr rtlCol="0" anchor="ctr" wrap="square"/>
-          <a:lstStyle/>
-          <a:p>
-            <a:pPr algn="ctr" rtl="1"/>
-            <a:r>
-              <a:rPr sz="1500" b="1">
-                <a:solidFill>
-                  <a:srgbClr val="333333"/>
-                </a:solidFill>
-                <a:latin typeface="Arial"/>
-              </a:rPr>
-              <a:t>الحل: تخزين مؤقت + توجيه</a:t>
-            </a:r>
-          </a:p>
-          <a:p>
-            <a:pPr algn="ctr" rtl="0"/>
-            <a:r>
-              <a:rPr sz="1200">
-                <a:solidFill>
-                  <a:srgbClr val="666666"/>
-                </a:solidFill>
-                <a:latin typeface="Calibri"/>
-              </a:rPr>
-              <a:t>Fix: caching + routing</a:t>
-            </a:r>
-          </a:p>
-        </p:txBody>
-      </p:sp>
-      <p:sp>
-        <p:nvSpPr>
-          <p:cNvPr id="6" name="TextBox 5"/>
+          <a:bodyPr rtlCol="0" anchor="ctr"/>
+          <a:lstStyle/>
+          <a:p>
+            <a:pPr algn="ctr"/>
+            <a:endParaRPr/>
+          </a:p>
+        </p:txBody>
+      </p:sp>
+      <p:sp>
+        <p:nvSpPr>
+          <p:cNvPr id="3" name="TextBox 2"/>
           <p:cNvSpPr txBox="1"/>
           <p:nvPr/>
         </p:nvSpPr>
         <p:spPr>
           <a:xfrm>
-            <a:off x="640080" y="6126480"/>
-            <a:ext cx="10972800" cy="548640"/>
+            <a:off x="640080" y="182880"/>
+            <a:ext cx="10972800" cy="640080"/>
           </a:xfrm>
           <a:prstGeom prst="rect">
             <a:avLst/>
@@ -4671,33 +4362,27 @@
           <a:p>
             <a:pPr algn="r" rtl="1"/>
             <a:r>
-              <a:rPr sz="1400">
-                <a:solidFill>
-                  <a:srgbClr val="666666"/>
+              <a:rPr sz="3200" b="1">
+                <a:solidFill>
+                  <a:srgbClr val="1F3B5C"/>
                 </a:solidFill>
                 <a:latin typeface="Arial"/>
               </a:rPr>
-              <a:t>قاعدة FinOps: قِس التكلفة لكل طلب قبل التوسع.</a:t>
-            </a:r>
-          </a:p>
-          <a:p>
-            <a:pPr algn="r" rtl="0"/>
-            <a:r>
-              <a:t>FinOps rule: measure per-request cost before scaling.</a:t>
-            </a:r>
-          </a:p>
-        </p:txBody>
-      </p:sp>
-      <p:sp>
-        <p:nvSpPr>
-          <p:cNvPr id="7" name="TextBox 6"/>
+              <a:t>إجابات الاختبار / Quiz Answers</a:t>
+            </a:r>
+          </a:p>
+        </p:txBody>
+      </p:sp>
+      <p:sp>
+        <p:nvSpPr>
+          <p:cNvPr id="4" name="TextBox 3"/>
           <p:cNvSpPr txBox="1"/>
           <p:nvPr/>
         </p:nvSpPr>
         <p:spPr>
           <a:xfrm>
-            <a:off x="640080" y="6400800"/>
-            <a:ext cx="8686800" cy="320040"/>
+            <a:off x="640080" y="1280160"/>
+            <a:ext cx="10972800" cy="5212080"/>
           </a:xfrm>
           <a:prstGeom prst="rect">
             <a:avLst/>
@@ -4710,29 +4395,131 @@
           </a:bodyPr>
           <a:lstStyle/>
           <a:p>
-            <a:pPr algn="r" rtl="1"/>
-            <a:r>
-              <a:rPr sz="1000" b="0">
+            <a:pPr algn="r" rtl="1">
+              <a:spcBef>
+                <a:spcPts val="200"/>
+              </a:spcBef>
+              <a:spcAft>
+                <a:spcPts val="1000"/>
+              </a:spcAft>
+            </a:pPr>
+            <a:r>
+              <a:rPr sz="1800">
+                <a:solidFill>
+                  <a:srgbClr val="333333"/>
+                </a:solidFill>
+                <a:latin typeface="Arial"/>
+              </a:rPr>
+              <a:t>• 1. الوكيل يستجيب ويستدعي أدوات؛ الوكيلي يخطط ذاتيًا وينفذ خطوات متعددة ويتكيف.</a:t>
+            </a:r>
+          </a:p>
+          <a:p>
+            <a:pPr algn="l" rtl="0">
+              <a:spcBef>
+                <a:spcPts val="200"/>
+              </a:spcBef>
+              <a:spcAft>
+                <a:spcPts val="1000"/>
+              </a:spcAft>
+            </a:pPr>
+            <a:r>
+              <a:rPr sz="1500">
                 <a:solidFill>
                   <a:srgbClr val="666666"/>
                 </a:solidFill>
+                <a:latin typeface="Calibri"/>
+              </a:rPr>
+              <a:t>• An agent responds and calls tools; agentic AI self-plans multi-step execution.</a:t>
+            </a:r>
+          </a:p>
+          <a:p>
+            <a:pPr algn="r" rtl="1">
+              <a:spcBef>
+                <a:spcPts val="200"/>
+              </a:spcBef>
+              <a:spcAft>
+                <a:spcPts val="1000"/>
+              </a:spcAft>
+            </a:pPr>
+            <a:r>
+              <a:rPr sz="1800">
+                <a:solidFill>
+                  <a:srgbClr val="333333"/>
+                </a:solidFill>
                 <a:latin typeface="Arial"/>
               </a:rPr>
-              <a:t>Module 02 — Data &amp; AI Engineering Track  |  الوحدة الثانية</a:t>
-            </a:r>
-          </a:p>
-        </p:txBody>
-      </p:sp>
-      <p:sp>
-        <p:nvSpPr>
-          <p:cNvPr id="8" name="TextBox 7"/>
+              <a:t>• 2. التضمين — أقل بتكلفة مرتبة كاملة.</a:t>
+            </a:r>
+          </a:p>
+          <a:p>
+            <a:pPr algn="l" rtl="0">
+              <a:spcBef>
+                <a:spcPts val="200"/>
+              </a:spcBef>
+              <a:spcAft>
+                <a:spcPts val="1000"/>
+              </a:spcAft>
+            </a:pPr>
+            <a:r>
+              <a:rPr sz="1500">
+                <a:solidFill>
+                  <a:srgbClr val="666666"/>
+                </a:solidFill>
+                <a:latin typeface="Calibri"/>
+              </a:rPr>
+              <a:t>• Embedding — roughly an order of magnitude cheaper.</a:t>
+            </a:r>
+          </a:p>
+          <a:p>
+            <a:pPr algn="r" rtl="1">
+              <a:spcBef>
+                <a:spcPts val="200"/>
+              </a:spcBef>
+              <a:spcAft>
+                <a:spcPts val="1000"/>
+              </a:spcAft>
+            </a:pPr>
+            <a:r>
+              <a:rPr sz="1800">
+                <a:solidFill>
+                  <a:srgbClr val="333333"/>
+                </a:solidFill>
+                <a:latin typeface="Arial"/>
+              </a:rPr>
+              <a:t>• 3. MLflow للتتبع وDVC لإصدارات البيانات.</a:t>
+            </a:r>
+          </a:p>
+          <a:p>
+            <a:pPr algn="l" rtl="0">
+              <a:spcBef>
+                <a:spcPts val="200"/>
+              </a:spcBef>
+              <a:spcAft>
+                <a:spcPts val="1000"/>
+              </a:spcAft>
+            </a:pPr>
+            <a:r>
+              <a:rPr sz="1500">
+                <a:solidFill>
+                  <a:srgbClr val="666666"/>
+                </a:solidFill>
+                <a:latin typeface="Calibri"/>
+              </a:rPr>
+              <a:t>• MLflow for tracking, DVC for data versioning.</a:t>
+            </a:r>
+          </a:p>
+        </p:txBody>
+      </p:sp>
+      <p:sp>
+        <p:nvSpPr>
+          <p:cNvPr id="5" name="TextBox 4"/>
           <p:cNvSpPr txBox="1"/>
           <p:nvPr/>
         </p:nvSpPr>
         <p:spPr>
           <a:xfrm>
-            <a:off x="9601200" y="6400800"/>
-            <a:ext cx="1920240" cy="320040"/>
+            <a:off x="640080" y="6400800"/>
+            <a:ext cx="8686800" cy="320040"/>
           </a:xfrm>
           <a:prstGeom prst="rect">
             <a:avLst/>
@@ -4745,6 +4532,41 @@
           </a:bodyPr>
           <a:lstStyle/>
           <a:p>
+            <a:pPr algn="r" rtl="1"/>
+            <a:r>
+              <a:rPr sz="1000" b="0">
+                <a:solidFill>
+                  <a:srgbClr val="666666"/>
+                </a:solidFill>
+                <a:latin typeface="Arial"/>
+              </a:rPr>
+              <a:t>Module 02 — Data &amp; AI Engineering Track  |  الوحدة الثانية</a:t>
+            </a:r>
+          </a:p>
+        </p:txBody>
+      </p:sp>
+      <p:sp>
+        <p:nvSpPr>
+          <p:cNvPr id="6" name="TextBox 5"/>
+          <p:cNvSpPr txBox="1"/>
+          <p:nvPr/>
+        </p:nvSpPr>
+        <p:spPr>
+          <a:xfrm>
+            <a:off x="9601200" y="6400800"/>
+            <a:ext cx="1920240" cy="320040"/>
+          </a:xfrm>
+          <a:prstGeom prst="rect">
+            <a:avLst/>
+          </a:prstGeom>
+          <a:noFill/>
+        </p:spPr>
+        <p:txBody>
+          <a:bodyPr wrap="square">
+            <a:spAutoFit/>
+          </a:bodyPr>
+          <a:lstStyle/>
+          <a:p>
             <a:pPr algn="l" rtl="0"/>
             <a:r>
               <a:rPr sz="1000" b="0">
@@ -4753,7 +4575,7 @@
                 </a:solidFill>
                 <a:latin typeface="Calibri"/>
               </a:rPr>
-              <a:t>V12  •  8/12</a:t>
+              <a:t>V12  •  12/13</a:t>
             </a:r>
           </a:p>
         </p:txBody>
@@ -4766,8 +4588,8 @@
 </p:sld>
 </file>
 
-<file path=ppt/slides/slide2.xml><?xml version="1.0" encoding="utf-8"?>
-<p:sld xmlns:a="http://schemas.openxmlformats.org/drawingml/2006/main" xmlns:p="http://schemas.openxmlformats.org/presentationml/2006/main" xmlns:r="http://schemas.openxmlformats.org/officeDocument/2006/relationships">
+<file path=ppt/slides/slide14.xml><?xml version="1.0" encoding="utf-8"?>
+<p:sld xmlns:a="http://schemas.openxmlformats.org/drawingml/2006/main" xmlns:r="http://schemas.openxmlformats.org/officeDocument/2006/relationships" xmlns:p="http://schemas.openxmlformats.org/presentationml/2006/main">
   <p:cSld>
     <p:bg>
       <p:bgPr>
@@ -4783,7 +4605,14 @@
         <p:cNvGrpSpPr/>
         <p:nvPr/>
       </p:nvGrpSpPr>
-      <p:grpSpPr/>
+      <p:grpSpPr>
+        <a:xfrm>
+          <a:off x="0" y="0"/>
+          <a:ext cx="0" cy="0"/>
+          <a:chOff x="0" y="0"/>
+          <a:chExt cx="0" cy="0"/>
+        </a:xfrm>
+      </p:grpSpPr>
       <p:sp>
         <p:nvSpPr>
           <p:cNvPr id="2" name="Rectangle 1"/>
@@ -4827,6 +4656,7 @@
           <a:lstStyle/>
           <a:p>
             <a:pPr algn="ctr"/>
+            <a:endParaRPr/>
           </a:p>
         </p:txBody>
       </p:sp>
@@ -4860,7 +4690,7 @@
                 </a:solidFill>
                 <a:latin typeface="Arial"/>
               </a:rPr>
-              <a:t>أجندة العرض / Agenda</a:t>
+              <a:t>للاستزادة / Further Reading</a:t>
             </a:r>
           </a:p>
         </p:txBody>
@@ -4896,13 +4726,13 @@
               </a:spcAft>
             </a:pPr>
             <a:r>
-              <a:rPr sz="1600">
+              <a:rPr sz="2000">
                 <a:solidFill>
                   <a:srgbClr val="333333"/>
                 </a:solidFill>
                 <a:latin typeface="Arial"/>
               </a:rPr>
-              <a:t>• V12 — أساسيات MLOps + تمهيد للمختبر</a:t>
+              <a:t>• توثيق MLflow وDVC.</a:t>
             </a:r>
           </a:p>
           <a:p>
@@ -4915,13 +4745,13 @@
               </a:spcAft>
             </a:pPr>
             <a:r>
-              <a:rPr sz="1300">
+              <a:rPr sz="1700">
                 <a:solidFill>
                   <a:srgbClr val="666666"/>
                 </a:solidFill>
                 <a:latin typeface="Calibri"/>
               </a:rPr>
-              <a:t>• V12 — MLOps Fundamentals + Lab Introduction</a:t>
+              <a:t>• MLflow and DVC docs.</a:t>
             </a:r>
           </a:p>
           <a:p>
@@ -4934,17 +4764,17 @@
               </a:spcAft>
             </a:pPr>
             <a:r>
-              <a:rPr sz="1600">
+              <a:rPr sz="2000">
                 <a:solidFill>
                   <a:srgbClr val="333333"/>
                 </a:solidFill>
                 <a:latin typeface="Arial"/>
               </a:rPr>
-              <a:t>• MLOps والأدوات / MLOps &amp; Tools</a:t>
-            </a:r>
-          </a:p>
-          <a:p>
-            <a:pPr algn="r" rtl="1">
+              <a:t>• دليل تجهيز البيئة للمختبر L03.</a:t>
+            </a:r>
+          </a:p>
+          <a:p>
+            <a:pPr algn="l" rtl="0">
               <a:spcBef>
                 <a:spcPts val="200"/>
               </a:spcBef>
@@ -4953,70 +4783,13 @@
               </a:spcAft>
             </a:pPr>
             <a:r>
-              <a:rPr sz="1600">
-                <a:solidFill>
-                  <a:srgbClr val="333333"/>
-                </a:solidFill>
-                <a:latin typeface="Arial"/>
-              </a:rPr>
-              <a:t>• تمييز المفاهيم / Concept Distinctions</a:t>
-            </a:r>
-          </a:p>
-          <a:p>
-            <a:pPr algn="r" rtl="1">
-              <a:spcBef>
-                <a:spcPts val="200"/>
-              </a:spcBef>
-              <a:spcAft>
-                <a:spcPts val="1000"/>
-              </a:spcAft>
-            </a:pPr>
-            <a:r>
-              <a:rPr sz="1600">
-                <a:solidFill>
-                  <a:srgbClr val="333333"/>
-                </a:solidFill>
-                <a:latin typeface="Arial"/>
-              </a:rPr>
-              <a:t>• RAG الوكيلي / Agentic RAG</a:t>
-            </a:r>
-          </a:p>
-          <a:p>
-            <a:pPr algn="r" rtl="1">
-              <a:spcBef>
-                <a:spcPts val="200"/>
-              </a:spcBef>
-              <a:spcAft>
-                <a:spcPts val="1000"/>
-              </a:spcAft>
-            </a:pPr>
-            <a:r>
-              <a:rPr sz="1600">
-                <a:solidFill>
-                  <a:srgbClr val="333333"/>
-                </a:solidFill>
-                <a:latin typeface="Arial"/>
-              </a:rPr>
-              <a:t>• التكلفة والأداء عمليًا / Practical Cost &amp; Performance</a:t>
-            </a:r>
-          </a:p>
-          <a:p>
-            <a:pPr algn="r" rtl="1">
-              <a:spcBef>
-                <a:spcPts val="200"/>
-              </a:spcBef>
-              <a:spcAft>
-                <a:spcPts val="1000"/>
-              </a:spcAft>
-            </a:pPr>
-            <a:r>
-              <a:rPr sz="1600">
-                <a:solidFill>
-                  <a:srgbClr val="333333"/>
-                </a:solidFill>
-                <a:latin typeface="Arial"/>
-              </a:rPr>
-              <a:t>• تمهيد للمختبر L03 / Lab Introduction</a:t>
+              <a:rPr sz="1700">
+                <a:solidFill>
+                  <a:srgbClr val="666666"/>
+                </a:solidFill>
+                <a:latin typeface="Calibri"/>
+              </a:rPr>
+              <a:t>• L03 Environment Setup Guide.</a:t>
             </a:r>
           </a:p>
         </p:txBody>
@@ -5086,7 +4859,7 @@
                 </a:solidFill>
                 <a:latin typeface="Calibri"/>
               </a:rPr>
-              <a:t>V12  •  2/12</a:t>
+              <a:t>V12  •  13/13</a:t>
             </a:r>
           </a:p>
         </p:txBody>
@@ -5099,8 +4872,8 @@
 </p:sld>
 </file>
 
-<file path=ppt/slides/slide3.xml><?xml version="1.0" encoding="utf-8"?>
-<p:sld xmlns:a="http://schemas.openxmlformats.org/drawingml/2006/main" xmlns:p="http://schemas.openxmlformats.org/presentationml/2006/main" xmlns:r="http://schemas.openxmlformats.org/officeDocument/2006/relationships">
+<file path=ppt/slides/slide2.xml><?xml version="1.0" encoding="utf-8"?>
+<p:sld xmlns:a="http://schemas.openxmlformats.org/drawingml/2006/main" xmlns:r="http://schemas.openxmlformats.org/officeDocument/2006/relationships" xmlns:p="http://schemas.openxmlformats.org/presentationml/2006/main">
   <p:cSld>
     <p:bg>
       <p:bgPr>
@@ -5116,7 +4889,14 @@
         <p:cNvGrpSpPr/>
         <p:nvPr/>
       </p:nvGrpSpPr>
-      <p:grpSpPr/>
+      <p:grpSpPr>
+        <a:xfrm>
+          <a:off x="0" y="0"/>
+          <a:ext cx="0" cy="0"/>
+          <a:chOff x="0" y="0"/>
+          <a:chExt cx="0" cy="0"/>
+        </a:xfrm>
+      </p:grpSpPr>
       <p:sp>
         <p:nvSpPr>
           <p:cNvPr id="2" name="Rectangle 1"/>
@@ -5160,6 +4940,7 @@
           <a:lstStyle/>
           <a:p>
             <a:pPr algn="ctr"/>
+            <a:endParaRPr/>
           </a:p>
         </p:txBody>
       </p:sp>
@@ -5193,7 +4974,7 @@
                 </a:solidFill>
                 <a:latin typeface="Arial"/>
               </a:rPr>
-              <a:t>MLOps والأدوات / MLOps &amp; Tools</a:t>
+              <a:t>أجندة العرض / Agenda</a:t>
             </a:r>
           </a:p>
         </p:txBody>
@@ -5229,13 +5010,13 @@
               </a:spcAft>
             </a:pPr>
             <a:r>
-              <a:rPr sz="1900">
+              <a:rPr sz="1600">
                 <a:solidFill>
                   <a:srgbClr val="333333"/>
                 </a:solidFill>
                 <a:latin typeface="Arial"/>
               </a:rPr>
-              <a:t>• MLflow لتتبع التجارب والنماذج، Kubeflow لأتمتة الخطوط، DVC لإصدارات البيانات.</a:t>
+              <a:t>• V12 — أساسيات MLOps + تمهيد للمختبر</a:t>
             </a:r>
           </a:p>
           <a:p>
@@ -5248,13 +5029,108 @@
               </a:spcAft>
             </a:pPr>
             <a:r>
+              <a:rPr sz="1300">
+                <a:solidFill>
+                  <a:srgbClr val="666666"/>
+                </a:solidFill>
+                <a:latin typeface="Calibri"/>
+              </a:rPr>
+              <a:t>• V12 — MLOps Fundamentals + Lab Introduction</a:t>
+            </a:r>
+          </a:p>
+          <a:p>
+            <a:pPr algn="r" rtl="1">
+              <a:spcBef>
+                <a:spcPts val="200"/>
+              </a:spcBef>
+              <a:spcAft>
+                <a:spcPts val="1000"/>
+              </a:spcAft>
+            </a:pPr>
+            <a:r>
               <a:rPr sz="1600">
                 <a:solidFill>
-                  <a:srgbClr val="666666"/>
-                </a:solidFill>
-                <a:latin typeface="Calibri"/>
-              </a:rPr>
-              <a:t>• MLflow for tracking, Kubeflow for pipeline automation, DVC for data versioning.</a:t>
+                  <a:srgbClr val="333333"/>
+                </a:solidFill>
+                <a:latin typeface="Arial"/>
+              </a:rPr>
+              <a:t>• MLOps والأدوات / MLOps &amp; Tools</a:t>
+            </a:r>
+          </a:p>
+          <a:p>
+            <a:pPr algn="r" rtl="1">
+              <a:spcBef>
+                <a:spcPts val="200"/>
+              </a:spcBef>
+              <a:spcAft>
+                <a:spcPts val="1000"/>
+              </a:spcAft>
+            </a:pPr>
+            <a:r>
+              <a:rPr sz="1600">
+                <a:solidFill>
+                  <a:srgbClr val="333333"/>
+                </a:solidFill>
+                <a:latin typeface="Arial"/>
+              </a:rPr>
+              <a:t>• تمييز المفاهيم / Concept Distinctions</a:t>
+            </a:r>
+          </a:p>
+          <a:p>
+            <a:pPr algn="r" rtl="1">
+              <a:spcBef>
+                <a:spcPts val="200"/>
+              </a:spcBef>
+              <a:spcAft>
+                <a:spcPts val="1000"/>
+              </a:spcAft>
+            </a:pPr>
+            <a:r>
+              <a:rPr sz="1600">
+                <a:solidFill>
+                  <a:srgbClr val="333333"/>
+                </a:solidFill>
+                <a:latin typeface="Arial"/>
+              </a:rPr>
+              <a:t>• RAG الوكيلي / Agentic RAG</a:t>
+            </a:r>
+          </a:p>
+          <a:p>
+            <a:pPr algn="r" rtl="1">
+              <a:spcBef>
+                <a:spcPts val="200"/>
+              </a:spcBef>
+              <a:spcAft>
+                <a:spcPts val="1000"/>
+              </a:spcAft>
+            </a:pPr>
+            <a:r>
+              <a:rPr sz="1600">
+                <a:solidFill>
+                  <a:srgbClr val="333333"/>
+                </a:solidFill>
+                <a:latin typeface="Arial"/>
+              </a:rPr>
+              <a:t>• التكلفة والأداء عمليًا / Practical Cost &amp; Performance</a:t>
+            </a:r>
+          </a:p>
+          <a:p>
+            <a:pPr algn="r" rtl="1">
+              <a:spcBef>
+                <a:spcPts val="200"/>
+              </a:spcBef>
+              <a:spcAft>
+                <a:spcPts val="1000"/>
+              </a:spcAft>
+            </a:pPr>
+            <a:r>
+              <a:rPr sz="1600">
+                <a:solidFill>
+                  <a:srgbClr val="333333"/>
+                </a:solidFill>
+                <a:latin typeface="Arial"/>
+              </a:rPr>
+              <a:t>• تمهيد للمختبر L03 / Lab Introduction</a:t>
             </a:r>
           </a:p>
         </p:txBody>
@@ -5324,7 +5200,7 @@
                 </a:solidFill>
                 <a:latin typeface="Calibri"/>
               </a:rPr>
-              <a:t>V12  •  3/12</a:t>
+              <a:t>V12  •  2/13</a:t>
             </a:r>
           </a:p>
         </p:txBody>
@@ -5337,8 +5213,8 @@
 </p:sld>
 </file>
 
-<file path=ppt/slides/slide4.xml><?xml version="1.0" encoding="utf-8"?>
-<p:sld xmlns:a="http://schemas.openxmlformats.org/drawingml/2006/main" xmlns:p="http://schemas.openxmlformats.org/presentationml/2006/main" xmlns:r="http://schemas.openxmlformats.org/officeDocument/2006/relationships">
+<file path=ppt/slides/slide3.xml><?xml version="1.0" encoding="utf-8"?>
+<p:sld xmlns:a="http://schemas.openxmlformats.org/drawingml/2006/main" xmlns:r="http://schemas.openxmlformats.org/officeDocument/2006/relationships" xmlns:p="http://schemas.openxmlformats.org/presentationml/2006/main">
   <p:cSld>
     <p:bg>
       <p:bgPr>
@@ -5354,7 +5230,14 @@
         <p:cNvGrpSpPr/>
         <p:nvPr/>
       </p:nvGrpSpPr>
-      <p:grpSpPr/>
+      <p:grpSpPr>
+        <a:xfrm>
+          <a:off x="0" y="0"/>
+          <a:ext cx="0" cy="0"/>
+          <a:chOff x="0" y="0"/>
+          <a:chExt cx="0" cy="0"/>
+        </a:xfrm>
+      </p:grpSpPr>
       <p:sp>
         <p:nvSpPr>
           <p:cNvPr id="2" name="Rectangle 1"/>
@@ -5398,6 +5281,7 @@
           <a:lstStyle/>
           <a:p>
             <a:pPr algn="ctr"/>
+            <a:endParaRPr/>
           </a:p>
         </p:txBody>
       </p:sp>
@@ -5431,7 +5315,7 @@
                 </a:solidFill>
                 <a:latin typeface="Arial"/>
               </a:rPr>
-              <a:t>تمييز المفاهيم / Concept Distinctions</a:t>
+              <a:t>MLOps والأدوات / MLOps &amp; Tools</a:t>
             </a:r>
           </a:p>
         </p:txBody>
@@ -5473,7 +5357,7 @@
                 </a:solidFill>
                 <a:latin typeface="Arial"/>
               </a:rPr>
-              <a:t>• LLM: يرمّز النص ويتنبأ بالرموز التالية. الذكاء التوليدي: يولّد محتوى جديدًا (نص/صورة/صوت).</a:t>
+              <a:t>• MLflow لتتبع التجارب والنماذج، Kubeflow لأتمتة الخطوط، DVC لإصدارات البيانات.</a:t>
             </a:r>
           </a:p>
           <a:p>
@@ -5492,45 +5376,7 @@
                 </a:solidFill>
                 <a:latin typeface="Calibri"/>
               </a:rPr>
-              <a:t>• LLM: predicts next tokens. Generative AI: generates new content (text/image/audio).</a:t>
-            </a:r>
-          </a:p>
-          <a:p>
-            <a:pPr algn="r" rtl="1">
-              <a:spcBef>
-                <a:spcPts val="200"/>
-              </a:spcBef>
-              <a:spcAft>
-                <a:spcPts val="1000"/>
-              </a:spcAft>
-            </a:pPr>
-            <a:r>
-              <a:rPr sz="1900">
-                <a:solidFill>
-                  <a:srgbClr val="333333"/>
-                </a:solidFill>
-                <a:latin typeface="Arial"/>
-              </a:rPr>
-              <a:t>• الوكلاء: يكشفون النية ويستدعون الأدوات. الأنظمة الوكيلة: تخطيط ذاتي وتنفيذ متعدد الخطوات مع تقييم للنتائج.</a:t>
-            </a:r>
-          </a:p>
-          <a:p>
-            <a:pPr algn="l" rtl="0">
-              <a:spcBef>
-                <a:spcPts val="200"/>
-              </a:spcBef>
-              <a:spcAft>
-                <a:spcPts val="1000"/>
-              </a:spcAft>
-            </a:pPr>
-            <a:r>
-              <a:rPr sz="1600">
-                <a:solidFill>
-                  <a:srgbClr val="666666"/>
-                </a:solidFill>
-                <a:latin typeface="Calibri"/>
-              </a:rPr>
-              <a:t>• Agents: detect intent and call tools. Agentic AI: self-directed multi-step planning with outcome evaluation.</a:t>
+              <a:t>• MLflow for tracking, Kubeflow for pipeline automation, DVC for data versioning.</a:t>
             </a:r>
           </a:p>
         </p:txBody>
@@ -5600,7 +5446,7 @@
                 </a:solidFill>
                 <a:latin typeface="Calibri"/>
               </a:rPr>
-              <a:t>V12  •  4/12</a:t>
+              <a:t>V12  •  3/13</a:t>
             </a:r>
           </a:p>
         </p:txBody>
@@ -5613,8 +5459,8 @@
 </p:sld>
 </file>
 
-<file path=ppt/slides/slide5.xml><?xml version="1.0" encoding="utf-8"?>
-<p:sld xmlns:a="http://schemas.openxmlformats.org/drawingml/2006/main" xmlns:p="http://schemas.openxmlformats.org/presentationml/2006/main" xmlns:r="http://schemas.openxmlformats.org/officeDocument/2006/relationships">
+<file path=ppt/slides/slide4.xml><?xml version="1.0" encoding="utf-8"?>
+<p:sld xmlns:a="http://schemas.openxmlformats.org/drawingml/2006/main" xmlns:r="http://schemas.openxmlformats.org/officeDocument/2006/relationships" xmlns:p="http://schemas.openxmlformats.org/presentationml/2006/main">
   <p:cSld>
     <p:bg>
       <p:bgPr>
@@ -5630,25 +5476,67 @@
         <p:cNvGrpSpPr/>
         <p:nvPr/>
       </p:nvGrpSpPr>
-      <p:grpSpPr/>
-      <p:sp>
-        <p:nvSpPr>
-          <p:cNvPr id="2" name="Rectangle 1"/>
+      <p:grpSpPr>
+        <a:xfrm>
+          <a:off x="0" y="0"/>
+          <a:ext cx="0" cy="0"/>
+          <a:chOff x="0" y="0"/>
+          <a:chExt cx="0" cy="0"/>
+        </a:xfrm>
+      </p:grpSpPr>
+      <p:sp>
+        <p:nvSpPr>
+          <p:cNvPr id="2" name="TextBox 1"/>
+          <p:cNvSpPr txBox="1"/>
+          <p:nvPr/>
+        </p:nvSpPr>
+        <p:spPr>
+          <a:xfrm>
+            <a:off x="640080" y="137160"/>
+            <a:ext cx="10972800" cy="640080"/>
+          </a:xfrm>
+          <a:prstGeom prst="rect">
+            <a:avLst/>
+          </a:prstGeom>
+          <a:noFill/>
+        </p:spPr>
+        <p:txBody>
+          <a:bodyPr wrap="none">
+            <a:spAutoFit/>
+          </a:bodyPr>
+          <a:lstStyle/>
+          <a:p>
+            <a:pPr algn="r" rtl="1"/>
+            <a:r>
+              <a:rPr sz="3000" b="1">
+                <a:solidFill>
+                  <a:srgbClr val="1F3B5C"/>
+                </a:solidFill>
+                <a:latin typeface="Arial"/>
+              </a:rPr>
+              <a:t>دورة حياة MLOps / MLOps Lifecycle</a:t>
+            </a:r>
+          </a:p>
+        </p:txBody>
+      </p:sp>
+      <p:sp>
+        <p:nvSpPr>
+          <p:cNvPr id="3" name="Rounded Rectangle 2"/>
           <p:cNvSpPr/>
           <p:nvPr/>
         </p:nvSpPr>
         <p:spPr>
           <a:xfrm>
-            <a:off x="0" y="0"/>
-            <a:ext cx="12191695" cy="1005840"/>
-          </a:xfrm>
-          <a:prstGeom prst="rect">
+            <a:off x="502920" y="1965960"/>
+            <a:ext cx="2011680" cy="1143000"/>
+          </a:xfrm>
+          <a:prstGeom prst="roundRect">
             <a:avLst/>
           </a:prstGeom>
           <a:solidFill>
-            <a:srgbClr val="FFFFFF"/>
+            <a:srgbClr val="DCE6F1"/>
           </a:solidFill>
-          <a:ln w="25400">
+          <a:ln w="12700">
             <a:solidFill>
               <a:srgbClr val="1F4E79"/>
             </a:solidFill>
@@ -5670,23 +5558,559 @@
           </a:fontRef>
         </p:style>
         <p:txBody>
+          <a:bodyPr wrap="square" rtlCol="0" anchor="ctr"/>
+          <a:lstStyle/>
+          <a:p>
+            <a:pPr algn="ctr" rtl="1"/>
+            <a:r>
+              <a:rPr sz="1500" b="1">
+                <a:solidFill>
+                  <a:srgbClr val="333333"/>
+                </a:solidFill>
+                <a:latin typeface="Arial"/>
+              </a:rPr>
+              <a:t>تجربة</a:t>
+            </a:r>
+          </a:p>
+          <a:p>
+            <a:pPr algn="ctr" rtl="0"/>
+            <a:r>
+              <a:rPr sz="1100">
+                <a:solidFill>
+                  <a:srgbClr val="666666"/>
+                </a:solidFill>
+                <a:latin typeface="Calibri"/>
+              </a:rPr>
+              <a:t>Experiment</a:t>
+            </a:r>
+          </a:p>
+        </p:txBody>
+      </p:sp>
+      <p:sp>
+        <p:nvSpPr>
+          <p:cNvPr id="4" name="Right Arrow 3"/>
+          <p:cNvSpPr/>
+          <p:nvPr/>
+        </p:nvSpPr>
+        <p:spPr>
+          <a:xfrm>
+            <a:off x="2560320" y="2423160"/>
+            <a:ext cx="256032" cy="274320"/>
+          </a:xfrm>
+          <a:prstGeom prst="rightArrow">
+            <a:avLst/>
+          </a:prstGeom>
+          <a:solidFill>
+            <a:srgbClr val="1F4E79"/>
+          </a:solidFill>
+          <a:ln>
+            <a:noFill/>
+          </a:ln>
+          <a:effectLst/>
+        </p:spPr>
+        <p:style>
+          <a:lnRef idx="1">
+            <a:schemeClr val="accent1"/>
+          </a:lnRef>
+          <a:fillRef idx="3">
+            <a:schemeClr val="accent1"/>
+          </a:fillRef>
+          <a:effectRef idx="2">
+            <a:schemeClr val="accent1"/>
+          </a:effectRef>
+          <a:fontRef idx="minor">
+            <a:schemeClr val="lt1"/>
+          </a:fontRef>
+        </p:style>
+        <p:txBody>
           <a:bodyPr rtlCol="0" anchor="ctr"/>
           <a:lstStyle/>
           <a:p>
             <a:pPr algn="ctr"/>
-          </a:p>
-        </p:txBody>
-      </p:sp>
-      <p:sp>
-        <p:nvSpPr>
-          <p:cNvPr id="3" name="TextBox 2"/>
+            <a:endParaRPr/>
+          </a:p>
+        </p:txBody>
+      </p:sp>
+      <p:sp>
+        <p:nvSpPr>
+          <p:cNvPr id="5" name="Rounded Rectangle 4"/>
+          <p:cNvSpPr/>
+          <p:nvPr/>
+        </p:nvSpPr>
+        <p:spPr>
+          <a:xfrm>
+            <a:off x="2834640" y="1965960"/>
+            <a:ext cx="2011680" cy="1143000"/>
+          </a:xfrm>
+          <a:prstGeom prst="roundRect">
+            <a:avLst/>
+          </a:prstGeom>
+          <a:solidFill>
+            <a:srgbClr val="E2EFDA"/>
+          </a:solidFill>
+          <a:ln w="12700">
+            <a:solidFill>
+              <a:srgbClr val="1F4E79"/>
+            </a:solidFill>
+          </a:ln>
+          <a:effectLst/>
+        </p:spPr>
+        <p:style>
+          <a:lnRef idx="1">
+            <a:schemeClr val="accent1"/>
+          </a:lnRef>
+          <a:fillRef idx="3">
+            <a:schemeClr val="accent1"/>
+          </a:fillRef>
+          <a:effectRef idx="2">
+            <a:schemeClr val="accent1"/>
+          </a:effectRef>
+          <a:fontRef idx="minor">
+            <a:schemeClr val="lt1"/>
+          </a:fontRef>
+        </p:style>
+        <p:txBody>
+          <a:bodyPr wrap="square" rtlCol="0" anchor="ctr"/>
+          <a:lstStyle/>
+          <a:p>
+            <a:pPr algn="ctr" rtl="1"/>
+            <a:r>
+              <a:rPr sz="1500" b="1">
+                <a:solidFill>
+                  <a:srgbClr val="333333"/>
+                </a:solidFill>
+                <a:latin typeface="Arial"/>
+              </a:rPr>
+              <a:t>تحقق</a:t>
+            </a:r>
+          </a:p>
+          <a:p>
+            <a:pPr algn="ctr" rtl="0"/>
+            <a:r>
+              <a:rPr sz="1100">
+                <a:solidFill>
+                  <a:srgbClr val="666666"/>
+                </a:solidFill>
+                <a:latin typeface="Calibri"/>
+              </a:rPr>
+              <a:t>Validate</a:t>
+            </a:r>
+          </a:p>
+        </p:txBody>
+      </p:sp>
+      <p:sp>
+        <p:nvSpPr>
+          <p:cNvPr id="6" name="Right Arrow 5"/>
+          <p:cNvSpPr/>
+          <p:nvPr/>
+        </p:nvSpPr>
+        <p:spPr>
+          <a:xfrm>
+            <a:off x="4892040" y="2423160"/>
+            <a:ext cx="256032" cy="274320"/>
+          </a:xfrm>
+          <a:prstGeom prst="rightArrow">
+            <a:avLst/>
+          </a:prstGeom>
+          <a:solidFill>
+            <a:srgbClr val="1F4E79"/>
+          </a:solidFill>
+          <a:ln>
+            <a:noFill/>
+          </a:ln>
+          <a:effectLst/>
+        </p:spPr>
+        <p:style>
+          <a:lnRef idx="1">
+            <a:schemeClr val="accent1"/>
+          </a:lnRef>
+          <a:fillRef idx="3">
+            <a:schemeClr val="accent1"/>
+          </a:fillRef>
+          <a:effectRef idx="2">
+            <a:schemeClr val="accent1"/>
+          </a:effectRef>
+          <a:fontRef idx="minor">
+            <a:schemeClr val="lt1"/>
+          </a:fontRef>
+        </p:style>
+        <p:txBody>
+          <a:bodyPr rtlCol="0" anchor="ctr"/>
+          <a:lstStyle/>
+          <a:p>
+            <a:pPr algn="ctr"/>
+            <a:endParaRPr/>
+          </a:p>
+        </p:txBody>
+      </p:sp>
+      <p:sp>
+        <p:nvSpPr>
+          <p:cNvPr id="7" name="Rounded Rectangle 6"/>
+          <p:cNvSpPr/>
+          <p:nvPr/>
+        </p:nvSpPr>
+        <p:spPr>
+          <a:xfrm>
+            <a:off x="5166360" y="1965960"/>
+            <a:ext cx="2011680" cy="1143000"/>
+          </a:xfrm>
+          <a:prstGeom prst="roundRect">
+            <a:avLst/>
+          </a:prstGeom>
+          <a:solidFill>
+            <a:srgbClr val="FDE9D9"/>
+          </a:solidFill>
+          <a:ln w="12700">
+            <a:solidFill>
+              <a:srgbClr val="1F4E79"/>
+            </a:solidFill>
+          </a:ln>
+          <a:effectLst/>
+        </p:spPr>
+        <p:style>
+          <a:lnRef idx="1">
+            <a:schemeClr val="accent1"/>
+          </a:lnRef>
+          <a:fillRef idx="3">
+            <a:schemeClr val="accent1"/>
+          </a:fillRef>
+          <a:effectRef idx="2">
+            <a:schemeClr val="accent1"/>
+          </a:effectRef>
+          <a:fontRef idx="minor">
+            <a:schemeClr val="lt1"/>
+          </a:fontRef>
+        </p:style>
+        <p:txBody>
+          <a:bodyPr wrap="square" rtlCol="0" anchor="ctr"/>
+          <a:lstStyle/>
+          <a:p>
+            <a:pPr algn="ctr" rtl="1"/>
+            <a:r>
+              <a:rPr sz="1500" b="1">
+                <a:solidFill>
+                  <a:srgbClr val="333333"/>
+                </a:solidFill>
+                <a:latin typeface="Arial"/>
+              </a:rPr>
+              <a:t>نشر</a:t>
+            </a:r>
+          </a:p>
+          <a:p>
+            <a:pPr algn="ctr" rtl="0"/>
+            <a:r>
+              <a:rPr sz="1100">
+                <a:solidFill>
+                  <a:srgbClr val="666666"/>
+                </a:solidFill>
+                <a:latin typeface="Calibri"/>
+              </a:rPr>
+              <a:t>Deploy</a:t>
+            </a:r>
+          </a:p>
+        </p:txBody>
+      </p:sp>
+      <p:sp>
+        <p:nvSpPr>
+          <p:cNvPr id="8" name="Right Arrow 7"/>
+          <p:cNvSpPr/>
+          <p:nvPr/>
+        </p:nvSpPr>
+        <p:spPr>
+          <a:xfrm>
+            <a:off x="7223760" y="2423160"/>
+            <a:ext cx="256032" cy="274320"/>
+          </a:xfrm>
+          <a:prstGeom prst="rightArrow">
+            <a:avLst/>
+          </a:prstGeom>
+          <a:solidFill>
+            <a:srgbClr val="1F4E79"/>
+          </a:solidFill>
+          <a:ln>
+            <a:noFill/>
+          </a:ln>
+          <a:effectLst/>
+        </p:spPr>
+        <p:style>
+          <a:lnRef idx="1">
+            <a:schemeClr val="accent1"/>
+          </a:lnRef>
+          <a:fillRef idx="3">
+            <a:schemeClr val="accent1"/>
+          </a:fillRef>
+          <a:effectRef idx="2">
+            <a:schemeClr val="accent1"/>
+          </a:effectRef>
+          <a:fontRef idx="minor">
+            <a:schemeClr val="lt1"/>
+          </a:fontRef>
+        </p:style>
+        <p:txBody>
+          <a:bodyPr rtlCol="0" anchor="ctr"/>
+          <a:lstStyle/>
+          <a:p>
+            <a:pPr algn="ctr"/>
+            <a:endParaRPr/>
+          </a:p>
+        </p:txBody>
+      </p:sp>
+      <p:sp>
+        <p:nvSpPr>
+          <p:cNvPr id="9" name="Rounded Rectangle 8"/>
+          <p:cNvSpPr/>
+          <p:nvPr/>
+        </p:nvSpPr>
+        <p:spPr>
+          <a:xfrm>
+            <a:off x="7498080" y="1965960"/>
+            <a:ext cx="2011680" cy="1143000"/>
+          </a:xfrm>
+          <a:prstGeom prst="roundRect">
+            <a:avLst/>
+          </a:prstGeom>
+          <a:solidFill>
+            <a:srgbClr val="EDEDED"/>
+          </a:solidFill>
+          <a:ln w="12700">
+            <a:solidFill>
+              <a:srgbClr val="1F4E79"/>
+            </a:solidFill>
+          </a:ln>
+          <a:effectLst/>
+        </p:spPr>
+        <p:style>
+          <a:lnRef idx="1">
+            <a:schemeClr val="accent1"/>
+          </a:lnRef>
+          <a:fillRef idx="3">
+            <a:schemeClr val="accent1"/>
+          </a:fillRef>
+          <a:effectRef idx="2">
+            <a:schemeClr val="accent1"/>
+          </a:effectRef>
+          <a:fontRef idx="minor">
+            <a:schemeClr val="lt1"/>
+          </a:fontRef>
+        </p:style>
+        <p:txBody>
+          <a:bodyPr wrap="square" rtlCol="0" anchor="ctr"/>
+          <a:lstStyle/>
+          <a:p>
+            <a:pPr algn="ctr" rtl="1"/>
+            <a:r>
+              <a:rPr sz="1500" b="1">
+                <a:solidFill>
+                  <a:srgbClr val="333333"/>
+                </a:solidFill>
+                <a:latin typeface="Arial"/>
+              </a:rPr>
+              <a:t>مراقبة</a:t>
+            </a:r>
+          </a:p>
+          <a:p>
+            <a:pPr algn="ctr" rtl="0"/>
+            <a:r>
+              <a:rPr sz="1100">
+                <a:solidFill>
+                  <a:srgbClr val="666666"/>
+                </a:solidFill>
+                <a:latin typeface="Calibri"/>
+              </a:rPr>
+              <a:t>Monitor</a:t>
+            </a:r>
+          </a:p>
+        </p:txBody>
+      </p:sp>
+      <p:sp>
+        <p:nvSpPr>
+          <p:cNvPr id="10" name="Right Arrow 9"/>
+          <p:cNvSpPr/>
+          <p:nvPr/>
+        </p:nvSpPr>
+        <p:spPr>
+          <a:xfrm>
+            <a:off x="9555480" y="2423160"/>
+            <a:ext cx="256032" cy="274320"/>
+          </a:xfrm>
+          <a:prstGeom prst="rightArrow">
+            <a:avLst/>
+          </a:prstGeom>
+          <a:solidFill>
+            <a:srgbClr val="1F4E79"/>
+          </a:solidFill>
+          <a:ln>
+            <a:noFill/>
+          </a:ln>
+          <a:effectLst/>
+        </p:spPr>
+        <p:style>
+          <a:lnRef idx="1">
+            <a:schemeClr val="accent1"/>
+          </a:lnRef>
+          <a:fillRef idx="3">
+            <a:schemeClr val="accent1"/>
+          </a:fillRef>
+          <a:effectRef idx="2">
+            <a:schemeClr val="accent1"/>
+          </a:effectRef>
+          <a:fontRef idx="minor">
+            <a:schemeClr val="lt1"/>
+          </a:fontRef>
+        </p:style>
+        <p:txBody>
+          <a:bodyPr rtlCol="0" anchor="ctr"/>
+          <a:lstStyle/>
+          <a:p>
+            <a:pPr algn="ctr"/>
+            <a:endParaRPr/>
+          </a:p>
+        </p:txBody>
+      </p:sp>
+      <p:sp>
+        <p:nvSpPr>
+          <p:cNvPr id="11" name="Rounded Rectangle 10"/>
+          <p:cNvSpPr/>
+          <p:nvPr/>
+        </p:nvSpPr>
+        <p:spPr>
+          <a:xfrm>
+            <a:off x="9829800" y="1965960"/>
+            <a:ext cx="2011680" cy="1143000"/>
+          </a:xfrm>
+          <a:prstGeom prst="roundRect">
+            <a:avLst/>
+          </a:prstGeom>
+          <a:solidFill>
+            <a:srgbClr val="DCE6F1"/>
+          </a:solidFill>
+          <a:ln w="12700">
+            <a:solidFill>
+              <a:srgbClr val="1F4E79"/>
+            </a:solidFill>
+          </a:ln>
+          <a:effectLst/>
+        </p:spPr>
+        <p:style>
+          <a:lnRef idx="1">
+            <a:schemeClr val="accent1"/>
+          </a:lnRef>
+          <a:fillRef idx="3">
+            <a:schemeClr val="accent1"/>
+          </a:fillRef>
+          <a:effectRef idx="2">
+            <a:schemeClr val="accent1"/>
+          </a:effectRef>
+          <a:fontRef idx="minor">
+            <a:schemeClr val="lt1"/>
+          </a:fontRef>
+        </p:style>
+        <p:txBody>
+          <a:bodyPr wrap="square" rtlCol="0" anchor="ctr"/>
+          <a:lstStyle/>
+          <a:p>
+            <a:pPr algn="ctr" rtl="1"/>
+            <a:r>
+              <a:rPr sz="1500" b="1">
+                <a:solidFill>
+                  <a:srgbClr val="333333"/>
+                </a:solidFill>
+                <a:latin typeface="Arial"/>
+              </a:rPr>
+              <a:t>إعادة تدريب</a:t>
+            </a:r>
+          </a:p>
+          <a:p>
+            <a:pPr algn="ctr" rtl="0"/>
+            <a:r>
+              <a:rPr sz="1100">
+                <a:solidFill>
+                  <a:srgbClr val="666666"/>
+                </a:solidFill>
+                <a:latin typeface="Calibri"/>
+              </a:rPr>
+              <a:t>Retrain</a:t>
+            </a:r>
+          </a:p>
+        </p:txBody>
+      </p:sp>
+      <p:sp>
+        <p:nvSpPr>
+          <p:cNvPr id="12" name="Rounded Rectangle 11"/>
+          <p:cNvSpPr/>
+          <p:nvPr/>
+        </p:nvSpPr>
+        <p:spPr>
+          <a:xfrm>
+            <a:off x="1920240" y="4023360"/>
+            <a:ext cx="8321040" cy="868680"/>
+          </a:xfrm>
+          <a:prstGeom prst="roundRect">
+            <a:avLst/>
+          </a:prstGeom>
+          <a:solidFill>
+            <a:srgbClr val="E2EFDA"/>
+          </a:solidFill>
+          <a:ln w="12700">
+            <a:solidFill>
+              <a:srgbClr val="1F4E79"/>
+            </a:solidFill>
+          </a:ln>
+          <a:effectLst/>
+        </p:spPr>
+        <p:style>
+          <a:lnRef idx="1">
+            <a:schemeClr val="accent1"/>
+          </a:lnRef>
+          <a:fillRef idx="3">
+            <a:schemeClr val="accent1"/>
+          </a:fillRef>
+          <a:effectRef idx="2">
+            <a:schemeClr val="accent1"/>
+          </a:effectRef>
+          <a:fontRef idx="minor">
+            <a:schemeClr val="lt1"/>
+          </a:fontRef>
+        </p:style>
+        <p:txBody>
+          <a:bodyPr wrap="square" rtlCol="0" anchor="ctr"/>
+          <a:lstStyle/>
+          <a:p>
+            <a:pPr algn="ctr" rtl="1"/>
+            <a:r>
+              <a:rPr sz="1500" b="1">
+                <a:solidFill>
+                  <a:srgbClr val="333333"/>
+                </a:solidFill>
+                <a:latin typeface="Arial"/>
+              </a:rPr>
+              <a:t>سجّل الإصدارات والقياسات في كل مرحلة — ثم أعد التعلم من الإنتاج</a:t>
+            </a:r>
+          </a:p>
+          <a:p>
+            <a:pPr algn="ctr" rtl="0"/>
+            <a:r>
+              <a:rPr sz="1200">
+                <a:solidFill>
+                  <a:srgbClr val="666666"/>
+                </a:solidFill>
+                <a:latin typeface="Calibri"/>
+              </a:rPr>
+              <a:t>Record versions and metrics at every stage — then learn again from production</a:t>
+            </a:r>
+          </a:p>
+        </p:txBody>
+      </p:sp>
+      <p:sp>
+        <p:nvSpPr>
+          <p:cNvPr id="13" name="TextBox 12"/>
           <p:cNvSpPr txBox="1"/>
           <p:nvPr/>
         </p:nvSpPr>
         <p:spPr>
           <a:xfrm>
-            <a:off x="640080" y="182880"/>
-            <a:ext cx="10972800" cy="640080"/>
+            <a:off x="640080" y="6126480"/>
+            <a:ext cx="10972800" cy="548640"/>
           </a:xfrm>
           <a:prstGeom prst="rect">
             <a:avLst/>
@@ -5701,27 +6125,33 @@
           <a:p>
             <a:pPr algn="r" rtl="1"/>
             <a:r>
-              <a:rPr sz="3200" b="1">
-                <a:solidFill>
-                  <a:srgbClr val="1F3B5C"/>
+              <a:rPr sz="1400">
+                <a:solidFill>
+                  <a:srgbClr val="666666"/>
                 </a:solidFill>
                 <a:latin typeface="Arial"/>
               </a:rPr>
-              <a:t>RAG الوكيلي / Agentic RAG</a:t>
-            </a:r>
-          </a:p>
-        </p:txBody>
-      </p:sp>
-      <p:sp>
-        <p:nvSpPr>
-          <p:cNvPr id="4" name="TextBox 3"/>
+              <a:t>MLOps ليس «نشرًا مرة واحدة»؛ إنه حلقة قابلة للقياس والتحسين.</a:t>
+            </a:r>
+          </a:p>
+          <a:p>
+            <a:pPr algn="r" rtl="0"/>
+            <a:r>
+              <a:t>MLOps is not “deploy once”; it is a measurable improvement loop.</a:t>
+            </a:r>
+          </a:p>
+        </p:txBody>
+      </p:sp>
+      <p:sp>
+        <p:nvSpPr>
+          <p:cNvPr id="14" name="TextBox 13"/>
           <p:cNvSpPr txBox="1"/>
           <p:nvPr/>
         </p:nvSpPr>
         <p:spPr>
           <a:xfrm>
-            <a:off x="640080" y="1280160"/>
-            <a:ext cx="10972800" cy="5212080"/>
+            <a:off x="640080" y="6400800"/>
+            <a:ext cx="8686800" cy="320040"/>
           </a:xfrm>
           <a:prstGeom prst="rect">
             <a:avLst/>
@@ -5734,55 +6164,29 @@
           </a:bodyPr>
           <a:lstStyle/>
           <a:p>
-            <a:pPr algn="r" rtl="1">
-              <a:spcBef>
-                <a:spcPts val="200"/>
-              </a:spcBef>
-              <a:spcAft>
-                <a:spcPts val="1000"/>
-              </a:spcAft>
-            </a:pPr>
-            <a:r>
-              <a:rPr sz="1800">
-                <a:solidFill>
-                  <a:srgbClr val="333333"/>
+            <a:pPr algn="r" rtl="1"/>
+            <a:r>
+              <a:rPr sz="1000" b="0">
+                <a:solidFill>
+                  <a:srgbClr val="666666"/>
                 </a:solidFill>
                 <a:latin typeface="Arial"/>
               </a:rPr>
-              <a:t>• يجمع البحث المتجهي وجلب البيانات عبر الواجهات في عملية متعددة الخطوات، بذاكرة محدَّثة وتحقق من النتائج قبل التسليم.</a:t>
-            </a:r>
-          </a:p>
-          <a:p>
-            <a:pPr algn="l" rtl="0">
-              <a:spcBef>
-                <a:spcPts val="200"/>
-              </a:spcBef>
-              <a:spcAft>
-                <a:spcPts val="1000"/>
-              </a:spcAft>
-            </a:pPr>
-            <a:r>
-              <a:rPr sz="1500">
-                <a:solidFill>
-                  <a:srgbClr val="666666"/>
-                </a:solidFill>
-                <a:latin typeface="Calibri"/>
-              </a:rPr>
-              <a:t>• Combines vector search and API fetching in multi-step flows, with refreshed memory and verification before delivery.</a:t>
-            </a:r>
-          </a:p>
-        </p:txBody>
-      </p:sp>
-      <p:sp>
-        <p:nvSpPr>
-          <p:cNvPr id="5" name="TextBox 4"/>
+              <a:t>Module 02 — Data &amp; AI Engineering Track  |  الوحدة الثانية</a:t>
+            </a:r>
+          </a:p>
+        </p:txBody>
+      </p:sp>
+      <p:sp>
+        <p:nvSpPr>
+          <p:cNvPr id="15" name="TextBox 14"/>
           <p:cNvSpPr txBox="1"/>
           <p:nvPr/>
         </p:nvSpPr>
         <p:spPr>
           <a:xfrm>
-            <a:off x="640080" y="6400800"/>
-            <a:ext cx="8686800" cy="320040"/>
+            <a:off x="9601200" y="6400800"/>
+            <a:ext cx="1920240" cy="320040"/>
           </a:xfrm>
           <a:prstGeom prst="rect">
             <a:avLst/>
@@ -5795,50 +6199,15 @@
           </a:bodyPr>
           <a:lstStyle/>
           <a:p>
-            <a:pPr algn="r" rtl="1"/>
+            <a:pPr algn="l" rtl="0"/>
             <a:r>
               <a:rPr sz="1000" b="0">
                 <a:solidFill>
                   <a:srgbClr val="666666"/>
                 </a:solidFill>
-                <a:latin typeface="Arial"/>
-              </a:rPr>
-              <a:t>Module 02 — Data &amp; AI Engineering Track  |  الوحدة الثانية</a:t>
-            </a:r>
-          </a:p>
-        </p:txBody>
-      </p:sp>
-      <p:sp>
-        <p:nvSpPr>
-          <p:cNvPr id="6" name="TextBox 5"/>
-          <p:cNvSpPr txBox="1"/>
-          <p:nvPr/>
-        </p:nvSpPr>
-        <p:spPr>
-          <a:xfrm>
-            <a:off x="9601200" y="6400800"/>
-            <a:ext cx="1920240" cy="320040"/>
-          </a:xfrm>
-          <a:prstGeom prst="rect">
-            <a:avLst/>
-          </a:prstGeom>
-          <a:noFill/>
-        </p:spPr>
-        <p:txBody>
-          <a:bodyPr wrap="square">
-            <a:spAutoFit/>
-          </a:bodyPr>
-          <a:lstStyle/>
-          <a:p>
-            <a:pPr algn="l" rtl="0"/>
-            <a:r>
-              <a:rPr sz="1000" b="0">
-                <a:solidFill>
-                  <a:srgbClr val="666666"/>
-                </a:solidFill>
                 <a:latin typeface="Calibri"/>
               </a:rPr>
-              <a:t>V12  •  6/12</a:t>
+              <a:t>V12  •  4/13</a:t>
             </a:r>
           </a:p>
         </p:txBody>
@@ -5851,8 +6220,8 @@
 </p:sld>
 </file>
 
-<file path=ppt/slides/slide6.xml><?xml version="1.0" encoding="utf-8"?>
-<p:sld xmlns:a="http://schemas.openxmlformats.org/drawingml/2006/main" xmlns:p="http://schemas.openxmlformats.org/presentationml/2006/main" xmlns:r="http://schemas.openxmlformats.org/officeDocument/2006/relationships">
+<file path=ppt/slides/slide5.xml><?xml version="1.0" encoding="utf-8"?>
+<p:sld xmlns:a="http://schemas.openxmlformats.org/drawingml/2006/main" xmlns:r="http://schemas.openxmlformats.org/officeDocument/2006/relationships" xmlns:p="http://schemas.openxmlformats.org/presentationml/2006/main">
   <p:cSld>
     <p:bg>
       <p:bgPr>
@@ -5868,7 +6237,14 @@
         <p:cNvGrpSpPr/>
         <p:nvPr/>
       </p:nvGrpSpPr>
-      <p:grpSpPr/>
+      <p:grpSpPr>
+        <a:xfrm>
+          <a:off x="0" y="0"/>
+          <a:ext cx="0" cy="0"/>
+          <a:chOff x="0" y="0"/>
+          <a:chExt cx="0" cy="0"/>
+        </a:xfrm>
+      </p:grpSpPr>
       <p:sp>
         <p:nvSpPr>
           <p:cNvPr id="2" name="Rectangle 1"/>
@@ -5912,6 +6288,7 @@
           <a:lstStyle/>
           <a:p>
             <a:pPr algn="ctr"/>
+            <a:endParaRPr/>
           </a:p>
         </p:txBody>
       </p:sp>
@@ -5945,7 +6322,7 @@
                 </a:solidFill>
                 <a:latin typeface="Arial"/>
               </a:rPr>
-              <a:t>التكلفة والأداء عمليًا / Practical Cost &amp; Performance</a:t>
+              <a:t>تمييز المفاهيم / Concept Distinctions</a:t>
             </a:r>
           </a:p>
         </p:txBody>
@@ -5987,7 +6364,7 @@
                 </a:solidFill>
                 <a:latin typeface="Arial"/>
               </a:rPr>
-              <a:t>• التضمين (Embedding) أقل تكلفة بمرتبة كاملة من التوليد (Generation) — الاسترجاع أرخص من التوليد.</a:t>
+              <a:t>• LLM: يرمّز النص ويتنبأ بالرموز التالية. الذكاء التوليدي: يولّد محتوى جديدًا (نص/صورة/صوت).</a:t>
             </a:r>
           </a:p>
           <a:p>
@@ -6006,7 +6383,7 @@
                 </a:solidFill>
                 <a:latin typeface="Calibri"/>
               </a:rPr>
-              <a:t>• Embedding costs an order of magnitude less than generation — retrieval is cheaper than generation.</a:t>
+              <a:t>• LLM: predicts next tokens. Generative AI: generates new content (text/image/audio).</a:t>
             </a:r>
           </a:p>
           <a:p>
@@ -6025,7 +6402,7 @@
                 </a:solidFill>
                 <a:latin typeface="Arial"/>
               </a:rPr>
-              <a:t>• التخزين الدلالي المؤقت يخفض الكمون والتكلفة؛ توجيه الطلبات يرسل المهام البسيطة لنماذج أصغر أرخص.</a:t>
+              <a:t>• الوكلاء: يكشفون النية ويستدعون الأدوات. الأنظمة الوكيلة: تخطيط ذاتي وتنفيذ متعدد الخطوات مع تقييم للنتائج.</a:t>
             </a:r>
           </a:p>
           <a:p>
@@ -6044,45 +6421,7 @@
                 </a:solidFill>
                 <a:latin typeface="Calibri"/>
               </a:rPr>
-              <a:t>• Semantic caching cuts latency and cost; routing sends easy tasks to smaller, cheaper models.</a:t>
-            </a:r>
-          </a:p>
-          <a:p>
-            <a:pPr algn="r" rtl="1">
-              <a:spcBef>
-                <a:spcPts val="200"/>
-              </a:spcBef>
-              <a:spcAft>
-                <a:spcPts val="1000"/>
-              </a:spcAft>
-            </a:pPr>
-            <a:r>
-              <a:rPr sz="1900">
-                <a:solidFill>
-                  <a:srgbClr val="333333"/>
-                </a:solidFill>
-                <a:latin typeface="Arial"/>
-              </a:rPr>
-              <a:t>• قاعدة FinOps: قِس التكلفة لكل طلب (per-request) قبل التوسع.</a:t>
-            </a:r>
-          </a:p>
-          <a:p>
-            <a:pPr algn="l" rtl="0">
-              <a:spcBef>
-                <a:spcPts val="200"/>
-              </a:spcBef>
-              <a:spcAft>
-                <a:spcPts val="1000"/>
-              </a:spcAft>
-            </a:pPr>
-            <a:r>
-              <a:rPr sz="1600">
-                <a:solidFill>
-                  <a:srgbClr val="666666"/>
-                </a:solidFill>
-                <a:latin typeface="Calibri"/>
-              </a:rPr>
-              <a:t>• FinOps rule: measure per-request cost before scaling.</a:t>
+              <a:t>• Agents: detect intent and call tools. Agentic AI: self-directed multi-step planning with outcome evaluation.</a:t>
             </a:r>
           </a:p>
         </p:txBody>
@@ -6152,7 +6491,7 @@
                 </a:solidFill>
                 <a:latin typeface="Calibri"/>
               </a:rPr>
-              <a:t>V12  •  7/12</a:t>
+              <a:t>V12  •  5/13</a:t>
             </a:r>
           </a:p>
         </p:txBody>
@@ -6165,8 +6504,8 @@
 </p:sld>
 </file>
 
-<file path=ppt/slides/slide7.xml><?xml version="1.0" encoding="utf-8"?>
-<p:sld xmlns:a="http://schemas.openxmlformats.org/drawingml/2006/main" xmlns:p="http://schemas.openxmlformats.org/presentationml/2006/main" xmlns:r="http://schemas.openxmlformats.org/officeDocument/2006/relationships">
+<file path=ppt/slides/slide6.xml><?xml version="1.0" encoding="utf-8"?>
+<p:sld xmlns:a="http://schemas.openxmlformats.org/drawingml/2006/main" xmlns:r="http://schemas.openxmlformats.org/officeDocument/2006/relationships" xmlns:p="http://schemas.openxmlformats.org/presentationml/2006/main">
   <p:cSld>
     <p:bg>
       <p:bgPr>
@@ -6182,25 +6521,67 @@
         <p:cNvGrpSpPr/>
         <p:nvPr/>
       </p:nvGrpSpPr>
-      <p:grpSpPr/>
-      <p:sp>
-        <p:nvSpPr>
-          <p:cNvPr id="2" name="Rectangle 1"/>
+      <p:grpSpPr>
+        <a:xfrm>
+          <a:off x="0" y="0"/>
+          <a:ext cx="0" cy="0"/>
+          <a:chOff x="0" y="0"/>
+          <a:chExt cx="0" cy="0"/>
+        </a:xfrm>
+      </p:grpSpPr>
+      <p:sp>
+        <p:nvSpPr>
+          <p:cNvPr id="2" name="TextBox 1"/>
+          <p:cNvSpPr txBox="1"/>
+          <p:nvPr/>
+        </p:nvSpPr>
+        <p:spPr>
+          <a:xfrm>
+            <a:off x="640080" y="137160"/>
+            <a:ext cx="10972800" cy="640080"/>
+          </a:xfrm>
+          <a:prstGeom prst="rect">
+            <a:avLst/>
+          </a:prstGeom>
+          <a:noFill/>
+        </p:spPr>
+        <p:txBody>
+          <a:bodyPr wrap="none">
+            <a:spAutoFit/>
+          </a:bodyPr>
+          <a:lstStyle/>
+          <a:p>
+            <a:pPr algn="r" rtl="1"/>
+            <a:r>
+              <a:rPr sz="3000" b="1">
+                <a:solidFill>
+                  <a:srgbClr val="1F3B5C"/>
+                </a:solidFill>
+                <a:latin typeface="Arial"/>
+              </a:rPr>
+              <a:t>من LLM إلى الأنظمة الوكيلة / From LLM to Agentic AI</a:t>
+            </a:r>
+          </a:p>
+        </p:txBody>
+      </p:sp>
+      <p:sp>
+        <p:nvSpPr>
+          <p:cNvPr id="3" name="Rounded Rectangle 2"/>
           <p:cNvSpPr/>
           <p:nvPr/>
         </p:nvSpPr>
         <p:spPr>
           <a:xfrm>
-            <a:off x="0" y="0"/>
-            <a:ext cx="12191695" cy="1005840"/>
-          </a:xfrm>
-          <a:prstGeom prst="rect">
+            <a:off x="640080" y="1645920"/>
+            <a:ext cx="2377440" cy="914400"/>
+          </a:xfrm>
+          <a:prstGeom prst="roundRect">
             <a:avLst/>
           </a:prstGeom>
           <a:solidFill>
-            <a:srgbClr val="FFFFFF"/>
+            <a:srgbClr val="EDEDED"/>
           </a:solidFill>
-          <a:ln w="25400">
+          <a:ln w="12700">
             <a:solidFill>
               <a:srgbClr val="1F4E79"/>
             </a:solidFill>
@@ -6222,23 +6603,600 @@
           </a:fontRef>
         </p:style>
         <p:txBody>
+          <a:bodyPr wrap="square" rtlCol="0" anchor="ctr"/>
+          <a:lstStyle/>
+          <a:p>
+            <a:pPr algn="ctr" rtl="1"/>
+            <a:r>
+              <a:rPr sz="1800" b="1">
+                <a:solidFill>
+                  <a:srgbClr val="333333"/>
+                </a:solidFill>
+                <a:latin typeface="Arial"/>
+              </a:rPr>
+              <a:t>LLM</a:t>
+            </a:r>
+          </a:p>
+        </p:txBody>
+      </p:sp>
+      <p:sp>
+        <p:nvSpPr>
+          <p:cNvPr id="4" name="Rounded Rectangle 3"/>
+          <p:cNvSpPr/>
+          <p:nvPr/>
+        </p:nvSpPr>
+        <p:spPr>
+          <a:xfrm>
+            <a:off x="640080" y="2743200"/>
+            <a:ext cx="2377440" cy="1463040"/>
+          </a:xfrm>
+          <a:prstGeom prst="roundRect">
+            <a:avLst/>
+          </a:prstGeom>
+          <a:solidFill>
+            <a:srgbClr val="EDEDED"/>
+          </a:solidFill>
+          <a:ln w="12700">
+            <a:solidFill>
+              <a:srgbClr val="1F4E79"/>
+            </a:solidFill>
+          </a:ln>
+          <a:effectLst/>
+        </p:spPr>
+        <p:style>
+          <a:lnRef idx="1">
+            <a:schemeClr val="accent1"/>
+          </a:lnRef>
+          <a:fillRef idx="3">
+            <a:schemeClr val="accent1"/>
+          </a:fillRef>
+          <a:effectRef idx="2">
+            <a:schemeClr val="accent1"/>
+          </a:effectRef>
+          <a:fontRef idx="minor">
+            <a:schemeClr val="lt1"/>
+          </a:fontRef>
+        </p:style>
+        <p:txBody>
+          <a:bodyPr wrap="square" rtlCol="0" anchor="ctr"/>
+          <a:lstStyle/>
+          <a:p>
+            <a:pPr algn="ctr" rtl="1"/>
+            <a:r>
+              <a:rPr sz="1300" b="1">
+                <a:solidFill>
+                  <a:srgbClr val="333333"/>
+                </a:solidFill>
+                <a:latin typeface="Arial"/>
+              </a:rPr>
+              <a:t>تنبؤ بالرموز التالية</a:t>
+            </a:r>
+          </a:p>
+          <a:p>
+            <a:pPr algn="ctr" rtl="0"/>
+            <a:r>
+              <a:rPr sz="1100">
+                <a:solidFill>
+                  <a:srgbClr val="666666"/>
+                </a:solidFill>
+                <a:latin typeface="Calibri"/>
+              </a:rPr>
+              <a:t>Predicts next tokens</a:t>
+            </a:r>
+          </a:p>
+        </p:txBody>
+      </p:sp>
+      <p:sp>
+        <p:nvSpPr>
+          <p:cNvPr id="5" name="Left Arrow 4"/>
+          <p:cNvSpPr/>
+          <p:nvPr/>
+        </p:nvSpPr>
+        <p:spPr>
+          <a:xfrm>
+            <a:off x="3072384" y="1965960"/>
+            <a:ext cx="347472" cy="274320"/>
+          </a:xfrm>
+          <a:prstGeom prst="leftArrow">
+            <a:avLst/>
+          </a:prstGeom>
+          <a:solidFill>
+            <a:srgbClr val="1F4E79"/>
+          </a:solidFill>
+          <a:ln>
+            <a:noFill/>
+          </a:ln>
+          <a:effectLst/>
+        </p:spPr>
+        <p:style>
+          <a:lnRef idx="1">
+            <a:schemeClr val="accent1"/>
+          </a:lnRef>
+          <a:fillRef idx="3">
+            <a:schemeClr val="accent1"/>
+          </a:fillRef>
+          <a:effectRef idx="2">
+            <a:schemeClr val="accent1"/>
+          </a:effectRef>
+          <a:fontRef idx="minor">
+            <a:schemeClr val="lt1"/>
+          </a:fontRef>
+        </p:style>
+        <p:txBody>
           <a:bodyPr rtlCol="0" anchor="ctr"/>
           <a:lstStyle/>
           <a:p>
             <a:pPr algn="ctr"/>
-          </a:p>
-        </p:txBody>
-      </p:sp>
-      <p:sp>
-        <p:nvSpPr>
-          <p:cNvPr id="3" name="TextBox 2"/>
+            <a:endParaRPr/>
+          </a:p>
+        </p:txBody>
+      </p:sp>
+      <p:sp>
+        <p:nvSpPr>
+          <p:cNvPr id="6" name="Rounded Rectangle 5"/>
+          <p:cNvSpPr/>
+          <p:nvPr/>
+        </p:nvSpPr>
+        <p:spPr>
+          <a:xfrm>
+            <a:off x="3474720" y="1645920"/>
+            <a:ext cx="2377440" cy="914400"/>
+          </a:xfrm>
+          <a:prstGeom prst="roundRect">
+            <a:avLst/>
+          </a:prstGeom>
+          <a:solidFill>
+            <a:srgbClr val="DCE6F1"/>
+          </a:solidFill>
+          <a:ln w="12700">
+            <a:solidFill>
+              <a:srgbClr val="1F4E79"/>
+            </a:solidFill>
+          </a:ln>
+          <a:effectLst/>
+        </p:spPr>
+        <p:style>
+          <a:lnRef idx="1">
+            <a:schemeClr val="accent1"/>
+          </a:lnRef>
+          <a:fillRef idx="3">
+            <a:schemeClr val="accent1"/>
+          </a:fillRef>
+          <a:effectRef idx="2">
+            <a:schemeClr val="accent1"/>
+          </a:effectRef>
+          <a:fontRef idx="minor">
+            <a:schemeClr val="lt1"/>
+          </a:fontRef>
+        </p:style>
+        <p:txBody>
+          <a:bodyPr wrap="square" rtlCol="0" anchor="ctr"/>
+          <a:lstStyle/>
+          <a:p>
+            <a:pPr algn="ctr" rtl="1"/>
+            <a:r>
+              <a:rPr sz="1800" b="1">
+                <a:solidFill>
+                  <a:srgbClr val="333333"/>
+                </a:solidFill>
+                <a:latin typeface="Arial"/>
+              </a:rPr>
+              <a:t>الذكاء التوليدي</a:t>
+            </a:r>
+          </a:p>
+        </p:txBody>
+      </p:sp>
+      <p:sp>
+        <p:nvSpPr>
+          <p:cNvPr id="7" name="Rounded Rectangle 6"/>
+          <p:cNvSpPr/>
+          <p:nvPr/>
+        </p:nvSpPr>
+        <p:spPr>
+          <a:xfrm>
+            <a:off x="3474720" y="2743200"/>
+            <a:ext cx="2377440" cy="1463040"/>
+          </a:xfrm>
+          <a:prstGeom prst="roundRect">
+            <a:avLst/>
+          </a:prstGeom>
+          <a:solidFill>
+            <a:srgbClr val="EDEDED"/>
+          </a:solidFill>
+          <a:ln w="12700">
+            <a:solidFill>
+              <a:srgbClr val="1F4E79"/>
+            </a:solidFill>
+          </a:ln>
+          <a:effectLst/>
+        </p:spPr>
+        <p:style>
+          <a:lnRef idx="1">
+            <a:schemeClr val="accent1"/>
+          </a:lnRef>
+          <a:fillRef idx="3">
+            <a:schemeClr val="accent1"/>
+          </a:fillRef>
+          <a:effectRef idx="2">
+            <a:schemeClr val="accent1"/>
+          </a:effectRef>
+          <a:fontRef idx="minor">
+            <a:schemeClr val="lt1"/>
+          </a:fontRef>
+        </p:style>
+        <p:txBody>
+          <a:bodyPr wrap="square" rtlCol="0" anchor="ctr"/>
+          <a:lstStyle/>
+          <a:p>
+            <a:pPr algn="ctr" rtl="1"/>
+            <a:r>
+              <a:rPr sz="1300" b="1">
+                <a:solidFill>
+                  <a:srgbClr val="333333"/>
+                </a:solidFill>
+                <a:latin typeface="Arial"/>
+              </a:rPr>
+              <a:t>يولّد محتوى جديدًا</a:t>
+            </a:r>
+          </a:p>
+          <a:p>
+            <a:pPr algn="ctr" rtl="0"/>
+            <a:r>
+              <a:rPr sz="1100">
+                <a:solidFill>
+                  <a:srgbClr val="666666"/>
+                </a:solidFill>
+                <a:latin typeface="Calibri"/>
+              </a:rPr>
+              <a:t>Generates new content</a:t>
+            </a:r>
+          </a:p>
+        </p:txBody>
+      </p:sp>
+      <p:sp>
+        <p:nvSpPr>
+          <p:cNvPr id="8" name="Left Arrow 7"/>
+          <p:cNvSpPr/>
+          <p:nvPr/>
+        </p:nvSpPr>
+        <p:spPr>
+          <a:xfrm>
+            <a:off x="5907024" y="1965960"/>
+            <a:ext cx="347472" cy="274320"/>
+          </a:xfrm>
+          <a:prstGeom prst="leftArrow">
+            <a:avLst/>
+          </a:prstGeom>
+          <a:solidFill>
+            <a:srgbClr val="1F4E79"/>
+          </a:solidFill>
+          <a:ln>
+            <a:noFill/>
+          </a:ln>
+          <a:effectLst/>
+        </p:spPr>
+        <p:style>
+          <a:lnRef idx="1">
+            <a:schemeClr val="accent1"/>
+          </a:lnRef>
+          <a:fillRef idx="3">
+            <a:schemeClr val="accent1"/>
+          </a:fillRef>
+          <a:effectRef idx="2">
+            <a:schemeClr val="accent1"/>
+          </a:effectRef>
+          <a:fontRef idx="minor">
+            <a:schemeClr val="lt1"/>
+          </a:fontRef>
+        </p:style>
+        <p:txBody>
+          <a:bodyPr rtlCol="0" anchor="ctr"/>
+          <a:lstStyle/>
+          <a:p>
+            <a:pPr algn="ctr"/>
+            <a:endParaRPr/>
+          </a:p>
+        </p:txBody>
+      </p:sp>
+      <p:sp>
+        <p:nvSpPr>
+          <p:cNvPr id="9" name="Rounded Rectangle 8"/>
+          <p:cNvSpPr/>
+          <p:nvPr/>
+        </p:nvSpPr>
+        <p:spPr>
+          <a:xfrm>
+            <a:off x="6309360" y="1645920"/>
+            <a:ext cx="2377440" cy="914400"/>
+          </a:xfrm>
+          <a:prstGeom prst="roundRect">
+            <a:avLst/>
+          </a:prstGeom>
+          <a:solidFill>
+            <a:srgbClr val="FDE9D9"/>
+          </a:solidFill>
+          <a:ln w="12700">
+            <a:solidFill>
+              <a:srgbClr val="1F4E79"/>
+            </a:solidFill>
+          </a:ln>
+          <a:effectLst/>
+        </p:spPr>
+        <p:style>
+          <a:lnRef idx="1">
+            <a:schemeClr val="accent1"/>
+          </a:lnRef>
+          <a:fillRef idx="3">
+            <a:schemeClr val="accent1"/>
+          </a:fillRef>
+          <a:effectRef idx="2">
+            <a:schemeClr val="accent1"/>
+          </a:effectRef>
+          <a:fontRef idx="minor">
+            <a:schemeClr val="lt1"/>
+          </a:fontRef>
+        </p:style>
+        <p:txBody>
+          <a:bodyPr wrap="square" rtlCol="0" anchor="ctr"/>
+          <a:lstStyle/>
+          <a:p>
+            <a:pPr algn="ctr" rtl="1"/>
+            <a:r>
+              <a:rPr sz="1800" b="1">
+                <a:solidFill>
+                  <a:srgbClr val="333333"/>
+                </a:solidFill>
+                <a:latin typeface="Arial"/>
+              </a:rPr>
+              <a:t>الوكلاء Agents</a:t>
+            </a:r>
+          </a:p>
+        </p:txBody>
+      </p:sp>
+      <p:sp>
+        <p:nvSpPr>
+          <p:cNvPr id="10" name="Rounded Rectangle 9"/>
+          <p:cNvSpPr/>
+          <p:nvPr/>
+        </p:nvSpPr>
+        <p:spPr>
+          <a:xfrm>
+            <a:off x="6309360" y="2743200"/>
+            <a:ext cx="2377440" cy="1463040"/>
+          </a:xfrm>
+          <a:prstGeom prst="roundRect">
+            <a:avLst/>
+          </a:prstGeom>
+          <a:solidFill>
+            <a:srgbClr val="EDEDED"/>
+          </a:solidFill>
+          <a:ln w="12700">
+            <a:solidFill>
+              <a:srgbClr val="1F4E79"/>
+            </a:solidFill>
+          </a:ln>
+          <a:effectLst/>
+        </p:spPr>
+        <p:style>
+          <a:lnRef idx="1">
+            <a:schemeClr val="accent1"/>
+          </a:lnRef>
+          <a:fillRef idx="3">
+            <a:schemeClr val="accent1"/>
+          </a:fillRef>
+          <a:effectRef idx="2">
+            <a:schemeClr val="accent1"/>
+          </a:effectRef>
+          <a:fontRef idx="minor">
+            <a:schemeClr val="lt1"/>
+          </a:fontRef>
+        </p:style>
+        <p:txBody>
+          <a:bodyPr wrap="square" rtlCol="0" anchor="ctr"/>
+          <a:lstStyle/>
+          <a:p>
+            <a:pPr algn="ctr" rtl="1"/>
+            <a:r>
+              <a:rPr sz="1300" b="1">
+                <a:solidFill>
+                  <a:srgbClr val="333333"/>
+                </a:solidFill>
+                <a:latin typeface="Arial"/>
+              </a:rPr>
+              <a:t>نية + استدعاء أدوات</a:t>
+            </a:r>
+          </a:p>
+          <a:p>
+            <a:pPr algn="ctr" rtl="0"/>
+            <a:r>
+              <a:rPr sz="1100">
+                <a:solidFill>
+                  <a:srgbClr val="666666"/>
+                </a:solidFill>
+                <a:latin typeface="Calibri"/>
+              </a:rPr>
+              <a:t>Intent + tool calls</a:t>
+            </a:r>
+          </a:p>
+        </p:txBody>
+      </p:sp>
+      <p:sp>
+        <p:nvSpPr>
+          <p:cNvPr id="11" name="Left Arrow 10"/>
+          <p:cNvSpPr/>
+          <p:nvPr/>
+        </p:nvSpPr>
+        <p:spPr>
+          <a:xfrm>
+            <a:off x="8741664" y="1965960"/>
+            <a:ext cx="347472" cy="274320"/>
+          </a:xfrm>
+          <a:prstGeom prst="leftArrow">
+            <a:avLst/>
+          </a:prstGeom>
+          <a:solidFill>
+            <a:srgbClr val="1F4E79"/>
+          </a:solidFill>
+          <a:ln>
+            <a:noFill/>
+          </a:ln>
+          <a:effectLst/>
+        </p:spPr>
+        <p:style>
+          <a:lnRef idx="1">
+            <a:schemeClr val="accent1"/>
+          </a:lnRef>
+          <a:fillRef idx="3">
+            <a:schemeClr val="accent1"/>
+          </a:fillRef>
+          <a:effectRef idx="2">
+            <a:schemeClr val="accent1"/>
+          </a:effectRef>
+          <a:fontRef idx="minor">
+            <a:schemeClr val="lt1"/>
+          </a:fontRef>
+        </p:style>
+        <p:txBody>
+          <a:bodyPr rtlCol="0" anchor="ctr"/>
+          <a:lstStyle/>
+          <a:p>
+            <a:pPr algn="ctr"/>
+            <a:endParaRPr/>
+          </a:p>
+        </p:txBody>
+      </p:sp>
+      <p:sp>
+        <p:nvSpPr>
+          <p:cNvPr id="12" name="Rounded Rectangle 11"/>
+          <p:cNvSpPr/>
+          <p:nvPr/>
+        </p:nvSpPr>
+        <p:spPr>
+          <a:xfrm>
+            <a:off x="9144000" y="1645920"/>
+            <a:ext cx="2377440" cy="914400"/>
+          </a:xfrm>
+          <a:prstGeom prst="roundRect">
+            <a:avLst/>
+          </a:prstGeom>
+          <a:solidFill>
+            <a:srgbClr val="E2EFDA"/>
+          </a:solidFill>
+          <a:ln w="12700">
+            <a:solidFill>
+              <a:srgbClr val="1F4E79"/>
+            </a:solidFill>
+          </a:ln>
+          <a:effectLst/>
+        </p:spPr>
+        <p:style>
+          <a:lnRef idx="1">
+            <a:schemeClr val="accent1"/>
+          </a:lnRef>
+          <a:fillRef idx="3">
+            <a:schemeClr val="accent1"/>
+          </a:fillRef>
+          <a:effectRef idx="2">
+            <a:schemeClr val="accent1"/>
+          </a:effectRef>
+          <a:fontRef idx="minor">
+            <a:schemeClr val="lt1"/>
+          </a:fontRef>
+        </p:style>
+        <p:txBody>
+          <a:bodyPr wrap="square" rtlCol="0" anchor="ctr"/>
+          <a:lstStyle/>
+          <a:p>
+            <a:pPr algn="ctr" rtl="1"/>
+            <a:r>
+              <a:rPr sz="1800" b="1">
+                <a:solidFill>
+                  <a:srgbClr val="333333"/>
+                </a:solidFill>
+                <a:latin typeface="Arial"/>
+              </a:rPr>
+              <a:t>الأنظمة الوكيلة</a:t>
+            </a:r>
+          </a:p>
+        </p:txBody>
+      </p:sp>
+      <p:sp>
+        <p:nvSpPr>
+          <p:cNvPr id="13" name="Rounded Rectangle 12"/>
+          <p:cNvSpPr/>
+          <p:nvPr/>
+        </p:nvSpPr>
+        <p:spPr>
+          <a:xfrm>
+            <a:off x="9144000" y="2743200"/>
+            <a:ext cx="2377440" cy="1463040"/>
+          </a:xfrm>
+          <a:prstGeom prst="roundRect">
+            <a:avLst/>
+          </a:prstGeom>
+          <a:solidFill>
+            <a:srgbClr val="EDEDED"/>
+          </a:solidFill>
+          <a:ln w="12700">
+            <a:solidFill>
+              <a:srgbClr val="1F4E79"/>
+            </a:solidFill>
+          </a:ln>
+          <a:effectLst/>
+        </p:spPr>
+        <p:style>
+          <a:lnRef idx="1">
+            <a:schemeClr val="accent1"/>
+          </a:lnRef>
+          <a:fillRef idx="3">
+            <a:schemeClr val="accent1"/>
+          </a:fillRef>
+          <a:effectRef idx="2">
+            <a:schemeClr val="accent1"/>
+          </a:effectRef>
+          <a:fontRef idx="minor">
+            <a:schemeClr val="lt1"/>
+          </a:fontRef>
+        </p:style>
+        <p:txBody>
+          <a:bodyPr wrap="square" rtlCol="0" anchor="ctr"/>
+          <a:lstStyle/>
+          <a:p>
+            <a:pPr algn="ctr" rtl="1"/>
+            <a:r>
+              <a:rPr sz="1300" b="1">
+                <a:solidFill>
+                  <a:srgbClr val="333333"/>
+                </a:solidFill>
+                <a:latin typeface="Arial"/>
+              </a:rPr>
+              <a:t>تخطيط وتنفيذ متعدد الخطوات</a:t>
+            </a:r>
+          </a:p>
+          <a:p>
+            <a:pPr algn="ctr" rtl="0"/>
+            <a:r>
+              <a:rPr sz="1100">
+                <a:solidFill>
+                  <a:srgbClr val="666666"/>
+                </a:solidFill>
+                <a:latin typeface="Calibri"/>
+              </a:rPr>
+              <a:t>Multi-step planning</a:t>
+            </a:r>
+          </a:p>
+        </p:txBody>
+      </p:sp>
+      <p:sp>
+        <p:nvSpPr>
+          <p:cNvPr id="14" name="TextBox 13"/>
           <p:cNvSpPr txBox="1"/>
           <p:nvPr/>
         </p:nvSpPr>
         <p:spPr>
           <a:xfrm>
-            <a:off x="640080" y="182880"/>
-            <a:ext cx="10972800" cy="640080"/>
+            <a:off x="640080" y="6126480"/>
+            <a:ext cx="10972800" cy="548640"/>
           </a:xfrm>
           <a:prstGeom prst="rect">
             <a:avLst/>
@@ -6253,27 +7211,33 @@
           <a:p>
             <a:pPr algn="r" rtl="1"/>
             <a:r>
-              <a:rPr sz="3200" b="1">
-                <a:solidFill>
-                  <a:srgbClr val="1F3B5C"/>
+              <a:rPr sz="1400">
+                <a:solidFill>
+                  <a:srgbClr val="666666"/>
                 </a:solidFill>
                 <a:latin typeface="Arial"/>
               </a:rPr>
-              <a:t>تمهيد للمختبر L03 / Lab Introduction</a:t>
-            </a:r>
-          </a:p>
-        </p:txBody>
-      </p:sp>
-      <p:sp>
-        <p:nvSpPr>
-          <p:cNvPr id="4" name="TextBox 3"/>
+              <a:t>Agentic RAG = بحث متجهي + جلب عبر الواجهات بذاكرة متجددة وتحقق قبل التسليم.</a:t>
+            </a:r>
+          </a:p>
+          <a:p>
+            <a:pPr algn="r" rtl="0"/>
+            <a:r>
+              <a:t>Agentic RAG = vector search + API fetching with refreshed memory and verification.</a:t>
+            </a:r>
+          </a:p>
+        </p:txBody>
+      </p:sp>
+      <p:sp>
+        <p:nvSpPr>
+          <p:cNvPr id="15" name="TextBox 14"/>
           <p:cNvSpPr txBox="1"/>
           <p:nvPr/>
         </p:nvSpPr>
         <p:spPr>
           <a:xfrm>
-            <a:off x="640080" y="1280160"/>
-            <a:ext cx="10972800" cy="5212080"/>
+            <a:off x="640080" y="6400800"/>
+            <a:ext cx="8686800" cy="320040"/>
           </a:xfrm>
           <a:prstGeom prst="rect">
             <a:avLst/>
@@ -6286,55 +7250,29 @@
           </a:bodyPr>
           <a:lstStyle/>
           <a:p>
-            <a:pPr algn="r" rtl="1">
-              <a:spcBef>
-                <a:spcPts val="200"/>
-              </a:spcBef>
-              <a:spcAft>
-                <a:spcPts val="1000"/>
-              </a:spcAft>
-            </a:pPr>
-            <a:r>
-              <a:rPr sz="1800">
-                <a:solidFill>
-                  <a:srgbClr val="333333"/>
+            <a:pPr algn="r" rtl="1"/>
+            <a:r>
+              <a:rPr sz="1000" b="0">
+                <a:solidFill>
+                  <a:srgbClr val="666666"/>
                 </a:solidFill>
                 <a:latin typeface="Arial"/>
               </a:rPr>
-              <a:t>• المختبر: خط محلي خفيف — Python venv + SQLite مدمجة (Bronze/Silver) + ChromaDB (Gold) — دون Docker، بنقطة نهاية FastAPI على المسار /query.</a:t>
-            </a:r>
-          </a:p>
-          <a:p>
-            <a:pPr algn="l" rtl="0">
-              <a:spcBef>
-                <a:spcPts val="200"/>
-              </a:spcBef>
-              <a:spcAft>
-                <a:spcPts val="1000"/>
-              </a:spcAft>
-            </a:pPr>
-            <a:r>
-              <a:rPr sz="1500">
-                <a:solidFill>
-                  <a:srgbClr val="666666"/>
-                </a:solidFill>
-                <a:latin typeface="Calibri"/>
-              </a:rPr>
-              <a:t>• The lab: lightweight local pipeline — Python venv + built-in SQLite (Bronze/Silver) + ChromaDB (Gold) — no Docker, ending in a FastAPI /query endpoint.</a:t>
-            </a:r>
-          </a:p>
-        </p:txBody>
-      </p:sp>
-      <p:sp>
-        <p:nvSpPr>
-          <p:cNvPr id="5" name="TextBox 4"/>
+              <a:t>Module 02 — Data &amp; AI Engineering Track  |  الوحدة الثانية</a:t>
+            </a:r>
+          </a:p>
+        </p:txBody>
+      </p:sp>
+      <p:sp>
+        <p:nvSpPr>
+          <p:cNvPr id="16" name="TextBox 15"/>
           <p:cNvSpPr txBox="1"/>
           <p:nvPr/>
         </p:nvSpPr>
         <p:spPr>
           <a:xfrm>
-            <a:off x="640080" y="6400800"/>
-            <a:ext cx="8686800" cy="320040"/>
+            <a:off x="9601200" y="6400800"/>
+            <a:ext cx="1920240" cy="320040"/>
           </a:xfrm>
           <a:prstGeom prst="rect">
             <a:avLst/>
@@ -6347,50 +7285,15 @@
           </a:bodyPr>
           <a:lstStyle/>
           <a:p>
-            <a:pPr algn="r" rtl="1"/>
+            <a:pPr algn="l" rtl="0"/>
             <a:r>
               <a:rPr sz="1000" b="0">
                 <a:solidFill>
                   <a:srgbClr val="666666"/>
                 </a:solidFill>
-                <a:latin typeface="Arial"/>
-              </a:rPr>
-              <a:t>Module 02 — Data &amp; AI Engineering Track  |  الوحدة الثانية</a:t>
-            </a:r>
-          </a:p>
-        </p:txBody>
-      </p:sp>
-      <p:sp>
-        <p:nvSpPr>
-          <p:cNvPr id="6" name="TextBox 5"/>
-          <p:cNvSpPr txBox="1"/>
-          <p:nvPr/>
-        </p:nvSpPr>
-        <p:spPr>
-          <a:xfrm>
-            <a:off x="9601200" y="6400800"/>
-            <a:ext cx="1920240" cy="320040"/>
-          </a:xfrm>
-          <a:prstGeom prst="rect">
-            <a:avLst/>
-          </a:prstGeom>
-          <a:noFill/>
-        </p:spPr>
-        <p:txBody>
-          <a:bodyPr wrap="square">
-            <a:spAutoFit/>
-          </a:bodyPr>
-          <a:lstStyle/>
-          <a:p>
-            <a:pPr algn="l" rtl="0"/>
-            <a:r>
-              <a:rPr sz="1000" b="0">
-                <a:solidFill>
-                  <a:srgbClr val="666666"/>
-                </a:solidFill>
                 <a:latin typeface="Calibri"/>
               </a:rPr>
-              <a:t>V12  •  9/12</a:t>
+              <a:t>V12  •  6/13</a:t>
             </a:r>
           </a:p>
         </p:txBody>
@@ -6403,8 +7306,8 @@
 </p:sld>
 </file>
 
-<file path=ppt/slides/slide8.xml><?xml version="1.0" encoding="utf-8"?>
-<p:sld xmlns:a="http://schemas.openxmlformats.org/drawingml/2006/main" xmlns:p="http://schemas.openxmlformats.org/presentationml/2006/main" xmlns:r="http://schemas.openxmlformats.org/officeDocument/2006/relationships">
+<file path=ppt/slides/slide7.xml><?xml version="1.0" encoding="utf-8"?>
+<p:sld xmlns:a="http://schemas.openxmlformats.org/drawingml/2006/main" xmlns:r="http://schemas.openxmlformats.org/officeDocument/2006/relationships" xmlns:p="http://schemas.openxmlformats.org/presentationml/2006/main">
   <p:cSld>
     <p:bg>
       <p:bgPr>
@@ -6420,7 +7323,14 @@
         <p:cNvGrpSpPr/>
         <p:nvPr/>
       </p:nvGrpSpPr>
-      <p:grpSpPr/>
+      <p:grpSpPr>
+        <a:xfrm>
+          <a:off x="0" y="0"/>
+          <a:ext cx="0" cy="0"/>
+          <a:chOff x="0" y="0"/>
+          <a:chExt cx="0" cy="0"/>
+        </a:xfrm>
+      </p:grpSpPr>
       <p:sp>
         <p:nvSpPr>
           <p:cNvPr id="2" name="Rectangle 1"/>
@@ -6464,6 +7374,7 @@
           <a:lstStyle/>
           <a:p>
             <a:pPr algn="ctr"/>
+            <a:endParaRPr/>
           </a:p>
         </p:txBody>
       </p:sp>
@@ -6497,7 +7408,7 @@
                 </a:solidFill>
                 <a:latin typeface="Arial"/>
               </a:rPr>
-              <a:t>اختبار قصير / Quick Quiz</a:t>
+              <a:t>RAG الوكيلي / Agentic RAG</a:t>
             </a:r>
           </a:p>
         </p:txBody>
@@ -6533,13 +7444,13 @@
               </a:spcAft>
             </a:pPr>
             <a:r>
-              <a:rPr sz="2000">
+              <a:rPr sz="1800">
                 <a:solidFill>
                   <a:srgbClr val="333333"/>
                 </a:solidFill>
                 <a:latin typeface="Arial"/>
               </a:rPr>
-              <a:t>• 1. فرّق بين AI Agent وAgentic AI.</a:t>
+              <a:t>• يجمع البحث المتجهي وجلب البيانات عبر الواجهات في عملية متعددة الخطوات، بذاكرة محدَّثة وتحقق من النتائج قبل التسليم.</a:t>
             </a:r>
           </a:p>
           <a:p>
@@ -6552,89 +7463,13 @@
               </a:spcAft>
             </a:pPr>
             <a:r>
-              <a:rPr sz="1700">
+              <a:rPr sz="1500">
                 <a:solidFill>
                   <a:srgbClr val="666666"/>
                 </a:solidFill>
                 <a:latin typeface="Calibri"/>
               </a:rPr>
-              <a:t>• Differentiate an AI agent from agentic AI.</a:t>
-            </a:r>
-          </a:p>
-          <a:p>
-            <a:pPr algn="r" rtl="1">
-              <a:spcBef>
-                <a:spcPts val="200"/>
-              </a:spcBef>
-              <a:spcAft>
-                <a:spcPts val="1000"/>
-              </a:spcAft>
-            </a:pPr>
-            <a:r>
-              <a:rPr sz="2000">
-                <a:solidFill>
-                  <a:srgbClr val="333333"/>
-                </a:solidFill>
-                <a:latin typeface="Arial"/>
-              </a:rPr>
-              <a:t>• 2. ما أرخص: تضمين أم توليد؟</a:t>
-            </a:r>
-          </a:p>
-          <a:p>
-            <a:pPr algn="l" rtl="0">
-              <a:spcBef>
-                <a:spcPts val="200"/>
-              </a:spcBef>
-              <a:spcAft>
-                <a:spcPts val="1000"/>
-              </a:spcAft>
-            </a:pPr>
-            <a:r>
-              <a:rPr sz="1700">
-                <a:solidFill>
-                  <a:srgbClr val="666666"/>
-                </a:solidFill>
-                <a:latin typeface="Calibri"/>
-              </a:rPr>
-              <a:t>• Which is cheaper: embedding or generation?</a:t>
-            </a:r>
-          </a:p>
-          <a:p>
-            <a:pPr algn="r" rtl="1">
-              <a:spcBef>
-                <a:spcPts val="200"/>
-              </a:spcBef>
-              <a:spcAft>
-                <a:spcPts val="1000"/>
-              </a:spcAft>
-            </a:pPr>
-            <a:r>
-              <a:rPr sz="2000">
-                <a:solidFill>
-                  <a:srgbClr val="333333"/>
-                </a:solidFill>
-                <a:latin typeface="Arial"/>
-              </a:rPr>
-              <a:t>• 3. ما أدوات تتبع التجارب وإصدارات البيانات؟</a:t>
-            </a:r>
-          </a:p>
-          <a:p>
-            <a:pPr algn="l" rtl="0">
-              <a:spcBef>
-                <a:spcPts val="200"/>
-              </a:spcBef>
-              <a:spcAft>
-                <a:spcPts val="1000"/>
-              </a:spcAft>
-            </a:pPr>
-            <a:r>
-              <a:rPr sz="1700">
-                <a:solidFill>
-                  <a:srgbClr val="666666"/>
-                </a:solidFill>
-                <a:latin typeface="Calibri"/>
-              </a:rPr>
-              <a:t>• Which tools track experiments and version data?</a:t>
+              <a:t>• Combines vector search and API fetching in multi-step flows, with refreshed memory and verification before delivery.</a:t>
             </a:r>
           </a:p>
         </p:txBody>
@@ -6704,7 +7539,7 @@
                 </a:solidFill>
                 <a:latin typeface="Calibri"/>
               </a:rPr>
-              <a:t>V12  •  10/12</a:t>
+              <a:t>V12  •  7/13</a:t>
             </a:r>
           </a:p>
         </p:txBody>
@@ -6717,8 +7552,8 @@
 </p:sld>
 </file>
 
-<file path=ppt/slides/slide9.xml><?xml version="1.0" encoding="utf-8"?>
-<p:sld xmlns:a="http://schemas.openxmlformats.org/drawingml/2006/main" xmlns:p="http://schemas.openxmlformats.org/presentationml/2006/main" xmlns:r="http://schemas.openxmlformats.org/officeDocument/2006/relationships">
+<file path=ppt/slides/slide8.xml><?xml version="1.0" encoding="utf-8"?>
+<p:sld xmlns:a="http://schemas.openxmlformats.org/drawingml/2006/main" xmlns:r="http://schemas.openxmlformats.org/officeDocument/2006/relationships" xmlns:p="http://schemas.openxmlformats.org/presentationml/2006/main">
   <p:cSld>
     <p:bg>
       <p:bgPr>
@@ -6734,7 +7569,14 @@
         <p:cNvGrpSpPr/>
         <p:nvPr/>
       </p:nvGrpSpPr>
-      <p:grpSpPr/>
+      <p:grpSpPr>
+        <a:xfrm>
+          <a:off x="0" y="0"/>
+          <a:ext cx="0" cy="0"/>
+          <a:chOff x="0" y="0"/>
+          <a:chExt cx="0" cy="0"/>
+        </a:xfrm>
+      </p:grpSpPr>
       <p:sp>
         <p:nvSpPr>
           <p:cNvPr id="2" name="Rectangle 1"/>
@@ -6778,6 +7620,7 @@
           <a:lstStyle/>
           <a:p>
             <a:pPr algn="ctr"/>
+            <a:endParaRPr/>
           </a:p>
         </p:txBody>
       </p:sp>
@@ -6811,7 +7654,7 @@
                 </a:solidFill>
                 <a:latin typeface="Arial"/>
               </a:rPr>
-              <a:t>إجابات الاختبار / Quiz Answers</a:t>
+              <a:t>التكلفة والأداء عمليًا / Practical Cost &amp; Performance</a:t>
             </a:r>
           </a:p>
         </p:txBody>
@@ -6847,13 +7690,13 @@
               </a:spcAft>
             </a:pPr>
             <a:r>
-              <a:rPr sz="1800">
+              <a:rPr sz="1900">
                 <a:solidFill>
                   <a:srgbClr val="333333"/>
                 </a:solidFill>
                 <a:latin typeface="Arial"/>
               </a:rPr>
-              <a:t>• 1. الوكيل يستجيب ويستدعي أدوات؛ الوكيلي يخطط ذاتيًا وينفذ خطوات متعددة ويتكيف.</a:t>
+              <a:t>• التضمين (Embedding) أقل تكلفة بمرتبة كاملة من التوليد (Generation) — الاسترجاع أرخص من التوليد.</a:t>
             </a:r>
           </a:p>
           <a:p>
@@ -6866,13 +7709,13 @@
               </a:spcAft>
             </a:pPr>
             <a:r>
-              <a:rPr sz="1500">
+              <a:rPr sz="1600">
                 <a:solidFill>
                   <a:srgbClr val="666666"/>
                 </a:solidFill>
                 <a:latin typeface="Calibri"/>
               </a:rPr>
-              <a:t>• An agent responds and calls tools; agentic AI self-plans multi-step execution.</a:t>
+              <a:t>• Embedding costs an order of magnitude less than generation — retrieval is cheaper than generation.</a:t>
             </a:r>
           </a:p>
           <a:p>
@@ -6885,13 +7728,13 @@
               </a:spcAft>
             </a:pPr>
             <a:r>
-              <a:rPr sz="1800">
+              <a:rPr sz="1900">
                 <a:solidFill>
                   <a:srgbClr val="333333"/>
                 </a:solidFill>
                 <a:latin typeface="Arial"/>
               </a:rPr>
-              <a:t>• 2. التضمين — أقل بتكلفة مرتبة كاملة.</a:t>
+              <a:t>• التخزين الدلالي المؤقت يخفض الكمون والتكلفة؛ توجيه الطلبات يرسل المهام البسيطة لنماذج أصغر أرخص.</a:t>
             </a:r>
           </a:p>
           <a:p>
@@ -6904,13 +7747,13 @@
               </a:spcAft>
             </a:pPr>
             <a:r>
-              <a:rPr sz="1500">
+              <a:rPr sz="1600">
                 <a:solidFill>
                   <a:srgbClr val="666666"/>
                 </a:solidFill>
                 <a:latin typeface="Calibri"/>
               </a:rPr>
-              <a:t>• Embedding — roughly an order of magnitude cheaper.</a:t>
+              <a:t>• Semantic caching cuts latency and cost; routing sends easy tasks to smaller, cheaper models.</a:t>
             </a:r>
           </a:p>
           <a:p>
@@ -6923,13 +7766,13 @@
               </a:spcAft>
             </a:pPr>
             <a:r>
-              <a:rPr sz="1800">
+              <a:rPr sz="1900">
                 <a:solidFill>
                   <a:srgbClr val="333333"/>
                 </a:solidFill>
                 <a:latin typeface="Arial"/>
               </a:rPr>
-              <a:t>• 3. MLflow للتتبع وDVC لإصدارات البيانات.</a:t>
+              <a:t>• قاعدة FinOps: قِس التكلفة لكل طلب (per-request) قبل التوسع.</a:t>
             </a:r>
           </a:p>
           <a:p>
@@ -6942,13 +7785,13 @@
               </a:spcAft>
             </a:pPr>
             <a:r>
-              <a:rPr sz="1500">
+              <a:rPr sz="1600">
                 <a:solidFill>
                   <a:srgbClr val="666666"/>
                 </a:solidFill>
                 <a:latin typeface="Calibri"/>
               </a:rPr>
-              <a:t>• MLflow for tracking, DVC for data versioning.</a:t>
+              <a:t>• FinOps rule: measure per-request cost before scaling.</a:t>
             </a:r>
           </a:p>
         </p:txBody>
@@ -7018,7 +7861,387 @@
                 </a:solidFill>
                 <a:latin typeface="Calibri"/>
               </a:rPr>
-              <a:t>V12  •  11/12</a:t>
+              <a:t>V12  •  8/13</a:t>
+            </a:r>
+          </a:p>
+        </p:txBody>
+      </p:sp>
+    </p:spTree>
+  </p:cSld>
+  <p:clrMapOvr>
+    <a:masterClrMapping/>
+  </p:clrMapOvr>
+</p:sld>
+</file>
+
+<file path=ppt/slides/slide9.xml><?xml version="1.0" encoding="utf-8"?>
+<p:sld xmlns:a="http://schemas.openxmlformats.org/drawingml/2006/main" xmlns:r="http://schemas.openxmlformats.org/officeDocument/2006/relationships" xmlns:p="http://schemas.openxmlformats.org/presentationml/2006/main">
+  <p:cSld>
+    <p:bg>
+      <p:bgPr>
+        <a:solidFill>
+          <a:srgbClr val="FFFFFF"/>
+        </a:solidFill>
+        <a:effectLst/>
+      </p:bgPr>
+    </p:bg>
+    <p:spTree>
+      <p:nvGrpSpPr>
+        <p:cNvPr id="1" name=""/>
+        <p:cNvGrpSpPr/>
+        <p:nvPr/>
+      </p:nvGrpSpPr>
+      <p:grpSpPr>
+        <a:xfrm>
+          <a:off x="0" y="0"/>
+          <a:ext cx="0" cy="0"/>
+          <a:chOff x="0" y="0"/>
+          <a:chExt cx="0" cy="0"/>
+        </a:xfrm>
+      </p:grpSpPr>
+      <p:sp>
+        <p:nvSpPr>
+          <p:cNvPr id="2" name="TextBox 1"/>
+          <p:cNvSpPr txBox="1"/>
+          <p:nvPr/>
+        </p:nvSpPr>
+        <p:spPr>
+          <a:xfrm>
+            <a:off x="640080" y="137160"/>
+            <a:ext cx="10972800" cy="640080"/>
+          </a:xfrm>
+          <a:prstGeom prst="rect">
+            <a:avLst/>
+          </a:prstGeom>
+          <a:noFill/>
+        </p:spPr>
+        <p:txBody>
+          <a:bodyPr wrap="none">
+            <a:spAutoFit/>
+          </a:bodyPr>
+          <a:lstStyle/>
+          <a:p>
+            <a:pPr algn="r" rtl="1"/>
+            <a:r>
+              <a:rPr sz="3000" b="1">
+                <a:solidFill>
+                  <a:srgbClr val="1F3B5C"/>
+                </a:solidFill>
+                <a:latin typeface="Arial"/>
+              </a:rPr>
+              <a:t>التكلفة عمليًا: التضمين مقابل التوليد / Cost: Embedding vs Generation</a:t>
+            </a:r>
+          </a:p>
+        </p:txBody>
+      </p:sp>
+      <p:sp>
+        <p:nvSpPr>
+          <p:cNvPr id="3" name="Rounded Rectangle 2"/>
+          <p:cNvSpPr/>
+          <p:nvPr/>
+        </p:nvSpPr>
+        <p:spPr>
+          <a:xfrm>
+            <a:off x="1828800" y="3840480"/>
+            <a:ext cx="2194560" cy="1463040"/>
+          </a:xfrm>
+          <a:prstGeom prst="roundRect">
+            <a:avLst/>
+          </a:prstGeom>
+          <a:solidFill>
+            <a:srgbClr val="E2EFDA"/>
+          </a:solidFill>
+          <a:ln w="12700">
+            <a:solidFill>
+              <a:srgbClr val="1F4E79"/>
+            </a:solidFill>
+          </a:ln>
+          <a:effectLst/>
+        </p:spPr>
+        <p:style>
+          <a:lnRef idx="1">
+            <a:schemeClr val="accent1"/>
+          </a:lnRef>
+          <a:fillRef idx="3">
+            <a:schemeClr val="accent1"/>
+          </a:fillRef>
+          <a:effectRef idx="2">
+            <a:schemeClr val="accent1"/>
+          </a:effectRef>
+          <a:fontRef idx="minor">
+            <a:schemeClr val="lt1"/>
+          </a:fontRef>
+        </p:style>
+        <p:txBody>
+          <a:bodyPr wrap="square" rtlCol="0" anchor="ctr"/>
+          <a:lstStyle/>
+          <a:p>
+            <a:pPr algn="ctr" rtl="1"/>
+            <a:r>
+              <a:rPr sz="1800" b="1">
+                <a:solidFill>
+                  <a:srgbClr val="333333"/>
+                </a:solidFill>
+                <a:latin typeface="Arial"/>
+              </a:rPr>
+              <a:t>التضمين 1x</a:t>
+            </a:r>
+          </a:p>
+          <a:p>
+            <a:pPr algn="ctr" rtl="0"/>
+            <a:r>
+              <a:rPr sz="1200">
+                <a:solidFill>
+                  <a:srgbClr val="666666"/>
+                </a:solidFill>
+                <a:latin typeface="Calibri"/>
+              </a:rPr>
+              <a:t>Embedding — cheap</a:t>
+            </a:r>
+          </a:p>
+        </p:txBody>
+      </p:sp>
+      <p:sp>
+        <p:nvSpPr>
+          <p:cNvPr id="4" name="Rounded Rectangle 3"/>
+          <p:cNvSpPr/>
+          <p:nvPr/>
+        </p:nvSpPr>
+        <p:spPr>
+          <a:xfrm>
+            <a:off x="4754880" y="1554480"/>
+            <a:ext cx="2194560" cy="3749039"/>
+          </a:xfrm>
+          <a:prstGeom prst="roundRect">
+            <a:avLst/>
+          </a:prstGeom>
+          <a:solidFill>
+            <a:srgbClr val="FDE9D9"/>
+          </a:solidFill>
+          <a:ln w="12700">
+            <a:solidFill>
+              <a:srgbClr val="1F4E79"/>
+            </a:solidFill>
+          </a:ln>
+          <a:effectLst/>
+        </p:spPr>
+        <p:style>
+          <a:lnRef idx="1">
+            <a:schemeClr val="accent1"/>
+          </a:lnRef>
+          <a:fillRef idx="3">
+            <a:schemeClr val="accent1"/>
+          </a:fillRef>
+          <a:effectRef idx="2">
+            <a:schemeClr val="accent1"/>
+          </a:effectRef>
+          <a:fontRef idx="minor">
+            <a:schemeClr val="lt1"/>
+          </a:fontRef>
+        </p:style>
+        <p:txBody>
+          <a:bodyPr wrap="square" rtlCol="0" anchor="ctr"/>
+          <a:lstStyle/>
+          <a:p>
+            <a:pPr algn="ctr" rtl="1"/>
+            <a:r>
+              <a:rPr sz="1800" b="1">
+                <a:solidFill>
+                  <a:srgbClr val="333333"/>
+                </a:solidFill>
+                <a:latin typeface="Arial"/>
+              </a:rPr>
+              <a:t>التوليد ~10x</a:t>
+            </a:r>
+          </a:p>
+          <a:p>
+            <a:pPr algn="ctr" rtl="0"/>
+            <a:r>
+              <a:rPr sz="1200">
+                <a:solidFill>
+                  <a:srgbClr val="666666"/>
+                </a:solidFill>
+                <a:latin typeface="Calibri"/>
+              </a:rPr>
+              <a:t>Generation — costly</a:t>
+            </a:r>
+          </a:p>
+        </p:txBody>
+      </p:sp>
+      <p:sp>
+        <p:nvSpPr>
+          <p:cNvPr id="5" name="Rounded Rectangle 4"/>
+          <p:cNvSpPr/>
+          <p:nvPr/>
+        </p:nvSpPr>
+        <p:spPr>
+          <a:xfrm>
+            <a:off x="7863840" y="3108960"/>
+            <a:ext cx="2651760" cy="2194560"/>
+          </a:xfrm>
+          <a:prstGeom prst="roundRect">
+            <a:avLst/>
+          </a:prstGeom>
+          <a:solidFill>
+            <a:srgbClr val="DCE6F1"/>
+          </a:solidFill>
+          <a:ln w="12700">
+            <a:solidFill>
+              <a:srgbClr val="1F4E79"/>
+            </a:solidFill>
+          </a:ln>
+          <a:effectLst/>
+        </p:spPr>
+        <p:style>
+          <a:lnRef idx="1">
+            <a:schemeClr val="accent1"/>
+          </a:lnRef>
+          <a:fillRef idx="3">
+            <a:schemeClr val="accent1"/>
+          </a:fillRef>
+          <a:effectRef idx="2">
+            <a:schemeClr val="accent1"/>
+          </a:effectRef>
+          <a:fontRef idx="minor">
+            <a:schemeClr val="lt1"/>
+          </a:fontRef>
+        </p:style>
+        <p:txBody>
+          <a:bodyPr wrap="square" rtlCol="0" anchor="ctr"/>
+          <a:lstStyle/>
+          <a:p>
+            <a:pPr algn="ctr" rtl="1"/>
+            <a:r>
+              <a:rPr sz="1500" b="1">
+                <a:solidFill>
+                  <a:srgbClr val="333333"/>
+                </a:solidFill>
+                <a:latin typeface="Arial"/>
+              </a:rPr>
+              <a:t>الحل: تخزين مؤقت + توجيه</a:t>
+            </a:r>
+          </a:p>
+          <a:p>
+            <a:pPr algn="ctr" rtl="0"/>
+            <a:r>
+              <a:rPr sz="1200">
+                <a:solidFill>
+                  <a:srgbClr val="666666"/>
+                </a:solidFill>
+                <a:latin typeface="Calibri"/>
+              </a:rPr>
+              <a:t>Fix: caching + routing</a:t>
+            </a:r>
+          </a:p>
+        </p:txBody>
+      </p:sp>
+      <p:sp>
+        <p:nvSpPr>
+          <p:cNvPr id="6" name="TextBox 5"/>
+          <p:cNvSpPr txBox="1"/>
+          <p:nvPr/>
+        </p:nvSpPr>
+        <p:spPr>
+          <a:xfrm>
+            <a:off x="640080" y="6126480"/>
+            <a:ext cx="10972800" cy="548640"/>
+          </a:xfrm>
+          <a:prstGeom prst="rect">
+            <a:avLst/>
+          </a:prstGeom>
+          <a:noFill/>
+        </p:spPr>
+        <p:txBody>
+          <a:bodyPr wrap="square">
+            <a:spAutoFit/>
+          </a:bodyPr>
+          <a:lstStyle/>
+          <a:p>
+            <a:pPr algn="r" rtl="1"/>
+            <a:r>
+              <a:rPr sz="1400">
+                <a:solidFill>
+                  <a:srgbClr val="666666"/>
+                </a:solidFill>
+                <a:latin typeface="Arial"/>
+              </a:rPr>
+              <a:t>قاعدة FinOps: قِس التكلفة لكل طلب قبل التوسع.</a:t>
+            </a:r>
+          </a:p>
+          <a:p>
+            <a:pPr algn="r" rtl="0"/>
+            <a:r>
+              <a:t>FinOps rule: measure per-request cost before scaling.</a:t>
+            </a:r>
+          </a:p>
+        </p:txBody>
+      </p:sp>
+      <p:sp>
+        <p:nvSpPr>
+          <p:cNvPr id="7" name="TextBox 6"/>
+          <p:cNvSpPr txBox="1"/>
+          <p:nvPr/>
+        </p:nvSpPr>
+        <p:spPr>
+          <a:xfrm>
+            <a:off x="640080" y="6400800"/>
+            <a:ext cx="8686800" cy="320040"/>
+          </a:xfrm>
+          <a:prstGeom prst="rect">
+            <a:avLst/>
+          </a:prstGeom>
+          <a:noFill/>
+        </p:spPr>
+        <p:txBody>
+          <a:bodyPr wrap="square">
+            <a:spAutoFit/>
+          </a:bodyPr>
+          <a:lstStyle/>
+          <a:p>
+            <a:pPr algn="r" rtl="1"/>
+            <a:r>
+              <a:rPr sz="1000" b="0">
+                <a:solidFill>
+                  <a:srgbClr val="666666"/>
+                </a:solidFill>
+                <a:latin typeface="Arial"/>
+              </a:rPr>
+              <a:t>Module 02 — Data &amp; AI Engineering Track  |  الوحدة الثانية</a:t>
+            </a:r>
+          </a:p>
+        </p:txBody>
+      </p:sp>
+      <p:sp>
+        <p:nvSpPr>
+          <p:cNvPr id="8" name="TextBox 7"/>
+          <p:cNvSpPr txBox="1"/>
+          <p:nvPr/>
+        </p:nvSpPr>
+        <p:spPr>
+          <a:xfrm>
+            <a:off x="9601200" y="6400800"/>
+            <a:ext cx="1920240" cy="320040"/>
+          </a:xfrm>
+          <a:prstGeom prst="rect">
+            <a:avLst/>
+          </a:prstGeom>
+          <a:noFill/>
+        </p:spPr>
+        <p:txBody>
+          <a:bodyPr wrap="square">
+            <a:spAutoFit/>
+          </a:bodyPr>
+          <a:lstStyle/>
+          <a:p>
+            <a:pPr algn="l" rtl="0"/>
+            <a:r>
+              <a:rPr sz="1000" b="0">
+                <a:solidFill>
+                  <a:srgbClr val="666666"/>
+                </a:solidFill>
+                <a:latin typeface="Calibri"/>
+              </a:rPr>
+              <a:t>V12  •  9/13</a:t>
             </a:r>
           </a:p>
         </p:txBody>
